--- a/courses/ai-native/sessions/s08.pptx
+++ b/courses/ai-native/sessions/s08.pptx
@@ -6800,7 +6800,7 @@
         <p:spPr>
           <a:xfrm>
             <a:off x="365760" y="960120"/>
-            <a:ext cx="8412480" cy="2499360"/>
+            <a:ext cx="8412480" cy="2788920"/>
           </a:xfrm>
         </p:spPr>
         <p:txBody>
@@ -6889,7 +6889,27 @@
                 <a:latin typeface="맑은 고딕"/>
                 <a:ea typeface="맑은 고딕"/>
               </a:rPr>
-              <a:t> 결제 시스템이 공개한 연동 규격을 에이전트가 직접 가져오지 않는다. 사람이 받아 저장소에 넣어 둔 규격 문서만 읽는다.</a:t>
+              <a:t> 연동 규격을 에이전트가 직접 가져오지 않고, </a:t>
+            </a:r>
+            <a:r>
+              <a:rPr sz="1600" b="1">
+                <a:solidFill>
+                  <a:srgbClr val="000000"/>
+                </a:solidFill>
+                <a:latin typeface="맑은 고딕"/>
+                <a:ea typeface="맑은 고딕"/>
+              </a:rPr>
+              <a:t>사람이 저장소에 넣어 둔 문서</a:t>
+            </a:r>
+            <a:r>
+              <a:rPr sz="1600" b="0">
+                <a:solidFill>
+                  <a:srgbClr val="000000"/>
+                </a:solidFill>
+                <a:latin typeface="맑은 고딕"/>
+                <a:ea typeface="맑은 고딕"/>
+              </a:rPr>
+              <a:t>만 읽는다.</a:t>
             </a:r>
           </a:p>
           <a:p>
@@ -6995,7 +7015,27 @@
                 <a:latin typeface="맑은 고딕"/>
                 <a:ea typeface="맑은 고딕"/>
               </a:rPr>
-              <a:t> 네트워크가 닫혀 있고 원격 반영의 자격이 없다. 검사를 지나친 호출도 연결되지 않는다.</a:t>
+              <a:t> 네트워크가 닫히고 자격이 없어, 검사를 </a:t>
+            </a:r>
+            <a:r>
+              <a:rPr sz="1600" b="1">
+                <a:solidFill>
+                  <a:srgbClr val="000000"/>
+                </a:solidFill>
+                <a:latin typeface="맑은 고딕"/>
+                <a:ea typeface="맑은 고딕"/>
+              </a:rPr>
+              <a:t>지나친 호출도 연결되지 않는다</a:t>
+            </a:r>
+            <a:r>
+              <a:rPr sz="1600" b="0">
+                <a:solidFill>
+                  <a:srgbClr val="000000"/>
+                </a:solidFill>
+                <a:latin typeface="맑은 고딕"/>
+                <a:ea typeface="맑은 고딕"/>
+              </a:rPr>
+              <a:t>.</a:t>
             </a:r>
           </a:p>
         </p:txBody>
@@ -7058,8 +7098,8 @@
         </p:blipFill>
         <p:spPr>
           <a:xfrm>
-            <a:off x="1460500" y="3998976"/>
-            <a:ext cx="6223000" cy="2055813"/>
+            <a:off x="1523008" y="3998976"/>
+            <a:ext cx="6097984" cy="1547830"/>
           </a:xfrm>
           <a:prstGeom prst="rect">
             <a:avLst/>
@@ -12197,7 +12237,7 @@
                 <a:latin typeface="맑은 고딕"/>
                 <a:ea typeface="맑은 고딕"/>
               </a:rPr>
-              <a:t> 입력·도구 호출·출력에 검사를 두고, 환경이 그 셋을 감싼다</a:t>
+              <a:t> 입력·도구 호출·출력에 검사를 두고 환경이 감싼다</a:t>
             </a:r>
           </a:p>
           <a:p>
@@ -12283,7 +12323,7 @@
                 <a:latin typeface="맑은 고딕"/>
                 <a:ea typeface="맑은 고딕"/>
               </a:rPr>
-              <a:t> 확률적 방어에는 틈이 있다. 가드레일은 센서와 겹쳐 둔다</a:t>
+              <a:t> 확률적 방어에는 틈이 있어 센서와 겹쳐 둔다</a:t>
             </a:r>
           </a:p>
           <a:p>
@@ -24678,8 +24718,8 @@
         </p:blipFill>
         <p:spPr>
           <a:xfrm>
-            <a:off x="1460500" y="4749892"/>
-            <a:ext cx="6223000" cy="1238250"/>
+            <a:off x="1428750" y="4749892"/>
+            <a:ext cx="6286500" cy="1611717"/>
           </a:xfrm>
           <a:prstGeom prst="rect">
             <a:avLst/>

--- a/courses/ai-native/sessions/s08.pptx
+++ b/courses/ai-native/sessions/s08.pptx
@@ -5032,7 +5032,27 @@
                 <a:latin typeface="맑은 고딕"/>
                 <a:ea typeface="맑은 고딕"/>
               </a:rPr>
-              <a:t>"공학의 질문은 피해 범위를 어떻게 제한하는가가 된다"</a:t>
+              <a:t>공학의 질문은 </a:t>
+            </a:r>
+            <a:r>
+              <a:rPr sz="1800" b="1">
+                <a:solidFill>
+                  <a:srgbClr val="000000"/>
+                </a:solidFill>
+                <a:latin typeface="맑은 고딕"/>
+                <a:ea typeface="맑은 고딕"/>
+              </a:rPr>
+              <a:t>피해 범위를 어떻게 제한하는가</a:t>
+            </a:r>
+            <a:r>
+              <a:rPr sz="1800" b="0">
+                <a:solidFill>
+                  <a:srgbClr val="000000"/>
+                </a:solidFill>
+                <a:latin typeface="맑은 고딕"/>
+                <a:ea typeface="맑은 고딕"/>
+              </a:rPr>
+              <a:t>가 된다</a:t>
             </a:r>
             <a:r>
               <a:rPr sz="1000" b="0">
@@ -5052,27 +5072,7 @@
                 <a:latin typeface="맑은 고딕"/>
                 <a:ea typeface="맑은 고딕"/>
               </a:rPr>
-              <a:t>"The engineering question becomes how to cap the blast radius"</a:t>
-            </a:r>
-            <a:r>
-              <a:rPr sz="1000" b="0">
-                <a:solidFill>
-                  <a:srgbClr val="000000"/>
-                </a:solidFill>
-                <a:latin typeface="맑은 고딕"/>
-                <a:ea typeface="맑은 고딕"/>
-              </a:rPr>
-              <a:t>, </a:t>
-            </a:r>
-            <a:r>
-              <a:rPr sz="1000" b="0">
-                <a:solidFill>
-                  <a:srgbClr val="000000"/>
-                </a:solidFill>
-                <a:latin typeface="맑은 고딕"/>
-                <a:ea typeface="맑은 고딕"/>
-              </a:rPr>
-              <a:t>[Anthropic 2026c]</a:t>
+              <a:t>"The engineering question becomes how to cap the blast radius", [Anthropic 2026c]</a:t>
             </a:r>
           </a:p>
           <a:p>
@@ -5095,7 +5095,7 @@
                 <a:latin typeface="맑은 고딕"/>
                 <a:ea typeface="맑은 고딕"/>
               </a:rPr>
-              <a:t>프로세스 샌드박스, 가상 머신, 파일 시스템 경계, 외부 전송 통제로 에이전트가 </a:t>
+              <a:t>프로세스 샌드박스·가상 머신·파일 시스템 경계·외부 전송 통제로 에이전트가 </a:t>
             </a:r>
             <a:r>
               <a:rPr sz="1600" b="1">
@@ -6302,7 +6302,27 @@
                 <a:latin typeface="맑은 고딕"/>
                 <a:ea typeface="맑은 고딕"/>
               </a:rPr>
-              <a:t>"샌드박스는 선택적인 추가 장치가 아니라 합리적인 기본값으로 본다"</a:t>
+              <a:t>샌드박스는 선택적인 추가 장치가 아니라 </a:t>
+            </a:r>
+            <a:r>
+              <a:rPr sz="1800" b="1">
+                <a:solidFill>
+                  <a:srgbClr val="000000"/>
+                </a:solidFill>
+                <a:latin typeface="맑은 고딕"/>
+                <a:ea typeface="맑은 고딕"/>
+              </a:rPr>
+              <a:t>합리적인 기본값</a:t>
+            </a:r>
+            <a:r>
+              <a:rPr sz="1800" b="0">
+                <a:solidFill>
+                  <a:srgbClr val="000000"/>
+                </a:solidFill>
+                <a:latin typeface="맑은 고딕"/>
+                <a:ea typeface="맑은 고딕"/>
+              </a:rPr>
+              <a:t>으로 본다</a:t>
             </a:r>
             <a:r>
               <a:rPr sz="1000" b="0">
@@ -6322,27 +6342,7 @@
                 <a:latin typeface="맑은 고딕"/>
                 <a:ea typeface="맑은 고딕"/>
               </a:rPr>
-              <a:t>"We see sandboxing as a sensible default rather than an optional enhancement"</a:t>
-            </a:r>
-            <a:r>
-              <a:rPr sz="1000" b="0">
-                <a:solidFill>
-                  <a:srgbClr val="000000"/>
-                </a:solidFill>
-                <a:latin typeface="맑은 고딕"/>
-                <a:ea typeface="맑은 고딕"/>
-              </a:rPr>
-              <a:t>, </a:t>
-            </a:r>
-            <a:r>
-              <a:rPr sz="1000" b="0">
-                <a:solidFill>
-                  <a:srgbClr val="000000"/>
-                </a:solidFill>
-                <a:latin typeface="맑은 고딕"/>
-                <a:ea typeface="맑은 고딕"/>
-              </a:rPr>
-              <a:t>[Thoughtworks 2026]</a:t>
+              <a:t>"We see sandboxing as a sensible default rather than an optional enhancement", [Thoughtworks 2026]</a:t>
             </a:r>
           </a:p>
         </p:txBody>
@@ -10686,6 +10686,16 @@
               <a:buChar char=""/>
             </a:pPr>
             <a:r>
+              <a:rPr sz="1800" b="1">
+                <a:solidFill>
+                  <a:srgbClr val="000000"/>
+                </a:solidFill>
+                <a:latin typeface="맑은 고딕"/>
+                <a:ea typeface="맑은 고딕"/>
+              </a:rPr>
+              <a:t>확률적인 방어</a:t>
+            </a:r>
+            <a:r>
               <a:rPr sz="1800" b="0">
                 <a:solidFill>
                   <a:srgbClr val="000000"/>
@@ -10693,7 +10703,7 @@
                 <a:latin typeface="맑은 고딕"/>
                 <a:ea typeface="맑은 고딕"/>
               </a:rPr>
-              <a:t>"확률적인 방어에는 놓치는 비율이 0이 아니다"</a:t>
+              <a:t>에는 놓치는 비율이 0이 아니다</a:t>
             </a:r>
             <a:r>
               <a:rPr sz="1000" b="0">
@@ -10713,27 +10723,7 @@
                 <a:latin typeface="맑은 고딕"/>
                 <a:ea typeface="맑은 고딕"/>
               </a:rPr>
-              <a:t>"Any probabilistic defense has a non-zero miss rate"</a:t>
-            </a:r>
-            <a:r>
-              <a:rPr sz="1000" b="0">
-                <a:solidFill>
-                  <a:srgbClr val="000000"/>
-                </a:solidFill>
-                <a:latin typeface="맑은 고딕"/>
-                <a:ea typeface="맑은 고딕"/>
-              </a:rPr>
-              <a:t>, </a:t>
-            </a:r>
-            <a:r>
-              <a:rPr sz="1000" b="0">
-                <a:solidFill>
-                  <a:srgbClr val="000000"/>
-                </a:solidFill>
-                <a:latin typeface="맑은 고딕"/>
-                <a:ea typeface="맑은 고딕"/>
-              </a:rPr>
-              <a:t>[Anthropic 2026c]</a:t>
+              <a:t>"Any probabilistic defense has a non-zero miss rate", [Anthropic 2026c]</a:t>
             </a:r>
           </a:p>
           <a:p>
@@ -16991,7 +16981,27 @@
                 <a:latin typeface="맑은 고딕"/>
                 <a:ea typeface="맑은 고딕"/>
               </a:rPr>
-              <a:t>"계산적 가이드는 결정적인 도구로 좋은 결과의 확률을 높인다"</a:t>
+              <a:t>계산적 가이드는 </a:t>
+            </a:r>
+            <a:r>
+              <a:rPr sz="1800" b="1">
+                <a:solidFill>
+                  <a:srgbClr val="000000"/>
+                </a:solidFill>
+                <a:latin typeface="맑은 고딕"/>
+                <a:ea typeface="맑은 고딕"/>
+              </a:rPr>
+              <a:t>결정적인 도구</a:t>
+            </a:r>
+            <a:r>
+              <a:rPr sz="1800" b="0">
+                <a:solidFill>
+                  <a:srgbClr val="000000"/>
+                </a:solidFill>
+                <a:latin typeface="맑은 고딕"/>
+                <a:ea typeface="맑은 고딕"/>
+              </a:rPr>
+              <a:t>로 좋은 결과의 확률을 높인다</a:t>
             </a:r>
             <a:r>
               <a:rPr sz="1000" b="0">
@@ -17011,27 +17021,7 @@
                 <a:latin typeface="맑은 고딕"/>
                 <a:ea typeface="맑은 고딕"/>
               </a:rPr>
-              <a:t>"Computational guides increase the probability of good results with deterministic tooling"</a:t>
-            </a:r>
-            <a:r>
-              <a:rPr sz="1000" b="0">
-                <a:solidFill>
-                  <a:srgbClr val="000000"/>
-                </a:solidFill>
-                <a:latin typeface="맑은 고딕"/>
-                <a:ea typeface="맑은 고딕"/>
-              </a:rPr>
-              <a:t>, </a:t>
-            </a:r>
-            <a:r>
-              <a:rPr sz="1000" b="0">
-                <a:solidFill>
-                  <a:srgbClr val="000000"/>
-                </a:solidFill>
-                <a:latin typeface="맑은 고딕"/>
-                <a:ea typeface="맑은 고딕"/>
-              </a:rPr>
-              <a:t>[Böckeler 2026a]</a:t>
+              <a:t>"Computational guides increase the probability of good results with deterministic tooling", [Böckeler 2026a]</a:t>
             </a:r>
           </a:p>
         </p:txBody>
@@ -17603,7 +17593,47 @@
                 <a:latin typeface="맑은 고딕"/>
                 <a:ea typeface="맑은 고딕"/>
               </a:rPr>
-              <a:t>"위험은 사건이 일어날 확률과 그 결과의 크기나 정도를 합친 척도를 뜻한다"</a:t>
+              <a:t>위험은 사건이 </a:t>
+            </a:r>
+            <a:r>
+              <a:rPr sz="1800" b="1">
+                <a:solidFill>
+                  <a:srgbClr val="000000"/>
+                </a:solidFill>
+                <a:latin typeface="맑은 고딕"/>
+                <a:ea typeface="맑은 고딕"/>
+              </a:rPr>
+              <a:t>일어날 확률</a:t>
+            </a:r>
+            <a:r>
+              <a:rPr sz="1800" b="0">
+                <a:solidFill>
+                  <a:srgbClr val="000000"/>
+                </a:solidFill>
+                <a:latin typeface="맑은 고딕"/>
+                <a:ea typeface="맑은 고딕"/>
+              </a:rPr>
+              <a:t>과 그 결과의 </a:t>
+            </a:r>
+            <a:r>
+              <a:rPr sz="1800" b="1">
+                <a:solidFill>
+                  <a:srgbClr val="000000"/>
+                </a:solidFill>
+                <a:latin typeface="맑은 고딕"/>
+                <a:ea typeface="맑은 고딕"/>
+              </a:rPr>
+              <a:t>크기나 정도</a:t>
+            </a:r>
+            <a:r>
+              <a:rPr sz="1800" b="0">
+                <a:solidFill>
+                  <a:srgbClr val="000000"/>
+                </a:solidFill>
+                <a:latin typeface="맑은 고딕"/>
+                <a:ea typeface="맑은 고딕"/>
+              </a:rPr>
+              <a:t>를 합친 척도를 뜻한다</a:t>
             </a:r>
             <a:r>
               <a:rPr sz="1000" b="0">
@@ -17623,27 +17653,7 @@
                 <a:latin typeface="맑은 고딕"/>
                 <a:ea typeface="맑은 고딕"/>
               </a:rPr>
-              <a:t>"Risk refers to the composite measure of an event's probability of occurring and the magnitude or degree of the consequences of the corresponding event"</a:t>
-            </a:r>
-            <a:r>
-              <a:rPr sz="1000" b="0">
-                <a:solidFill>
-                  <a:srgbClr val="000000"/>
-                </a:solidFill>
-                <a:latin typeface="맑은 고딕"/>
-                <a:ea typeface="맑은 고딕"/>
-              </a:rPr>
-              <a:t>, </a:t>
-            </a:r>
-            <a:r>
-              <a:rPr sz="1000" b="0">
-                <a:solidFill>
-                  <a:srgbClr val="000000"/>
-                </a:solidFill>
-                <a:latin typeface="맑은 고딕"/>
-                <a:ea typeface="맑은 고딕"/>
-              </a:rPr>
-              <a:t>[NIST 2023]</a:t>
+              <a:t>"Risk refers to the composite measure of an event's probability of occurring and the magnitude or degree of the consequences of the corresponding event", [NIST 2023]</a:t>
             </a:r>
           </a:p>
           <a:p>
@@ -22406,7 +22416,27 @@
                 <a:latin typeface="맑은 고딕"/>
                 <a:ea typeface="맑은 고딕"/>
               </a:rPr>
-              <a:t>"에이전트가 이 세 가지 기능을 함께 가지면 공격자는 에이전트를 손쉽게 속여 비공개 데이터에 접근하게 하고 그것을 자기에게 보내게 만들 수 있다"</a:t>
+              <a:t>에이전트가 이 </a:t>
+            </a:r>
+            <a:r>
+              <a:rPr sz="1800" b="1">
+                <a:solidFill>
+                  <a:srgbClr val="000000"/>
+                </a:solidFill>
+                <a:latin typeface="맑은 고딕"/>
+                <a:ea typeface="맑은 고딕"/>
+              </a:rPr>
+              <a:t>세 가지 기능</a:t>
+            </a:r>
+            <a:r>
+              <a:rPr sz="1800" b="0">
+                <a:solidFill>
+                  <a:srgbClr val="000000"/>
+                </a:solidFill>
+                <a:latin typeface="맑은 고딕"/>
+                <a:ea typeface="맑은 고딕"/>
+              </a:rPr>
+              <a:t>을 함께 가지면 공격자는 에이전트를 손쉽게 속여 비공개 데이터에 접근하게 하고 그것을 자기에게 보내게 만들 수 있다</a:t>
             </a:r>
             <a:r>
               <a:rPr sz="1000" b="0">
@@ -22426,27 +22456,7 @@
                 <a:latin typeface="맑은 고딕"/>
                 <a:ea typeface="맑은 고딕"/>
               </a:rPr>
-              <a:t>"If your agent combines these three features, an attacker can easily trick it into accessing your private data and sending it to that attacker"</a:t>
-            </a:r>
-            <a:r>
-              <a:rPr sz="1000" b="0">
-                <a:solidFill>
-                  <a:srgbClr val="000000"/>
-                </a:solidFill>
-                <a:latin typeface="맑은 고딕"/>
-                <a:ea typeface="맑은 고딕"/>
-              </a:rPr>
-              <a:t>, </a:t>
-            </a:r>
-            <a:r>
-              <a:rPr sz="1000" b="0">
-                <a:solidFill>
-                  <a:srgbClr val="000000"/>
-                </a:solidFill>
-                <a:latin typeface="맑은 고딕"/>
-                <a:ea typeface="맑은 고딕"/>
-              </a:rPr>
-              <a:t>[Willison 2025a]</a:t>
+              <a:t>"If your agent combines these three features, an attacker can easily trick it into accessing your private data and sending it to that attacker", [Willison 2025a]</a:t>
             </a:r>
           </a:p>
           <a:p>
@@ -22635,7 +22645,27 @@
                 <a:latin typeface="맑은 고딕"/>
                 <a:ea typeface="맑은 고딕"/>
               </a:rPr>
-              <a:t>"데이터를 빼내는 데 쓰일 수 있는 외부 전송 능력"</a:t>
+              <a:t>데이터를 빼내는 데 쓰일 수 있는 </a:t>
+            </a:r>
+            <a:r>
+              <a:rPr sz="1600" b="1">
+                <a:solidFill>
+                  <a:srgbClr val="000000"/>
+                </a:solidFill>
+                <a:latin typeface="맑은 고딕"/>
+                <a:ea typeface="맑은 고딕"/>
+              </a:rPr>
+              <a:t>외부 전송 능력</a:t>
+            </a:r>
+            <a:r>
+              <a:rPr sz="1600" b="0">
+                <a:solidFill>
+                  <a:srgbClr val="000000"/>
+                </a:solidFill>
+                <a:latin typeface="맑은 고딕"/>
+                <a:ea typeface="맑은 고딕"/>
+              </a:rPr>
+              <a:t>이다</a:t>
             </a:r>
             <a:r>
               <a:rPr sz="1000" b="0">
@@ -23816,7 +23846,27 @@
                 <a:latin typeface="맑은 고딕"/>
                 <a:ea typeface="맑은 고딕"/>
               </a:rPr>
-              <a:t>"이것이 일어나는 것을 100% 확실하게 막는 방법은 아직 알지 못한다"</a:t>
+              <a:t>이것이 일어나는 것을 </a:t>
+            </a:r>
+            <a:r>
+              <a:rPr sz="1800" b="1">
+                <a:solidFill>
+                  <a:srgbClr val="000000"/>
+                </a:solidFill>
+                <a:latin typeface="맑은 고딕"/>
+                <a:ea typeface="맑은 고딕"/>
+              </a:rPr>
+              <a:t>100% 확실하게 막는 방법</a:t>
+            </a:r>
+            <a:r>
+              <a:rPr sz="1800" b="0">
+                <a:solidFill>
+                  <a:srgbClr val="000000"/>
+                </a:solidFill>
+                <a:latin typeface="맑은 고딕"/>
+                <a:ea typeface="맑은 고딕"/>
+              </a:rPr>
+              <a:t>은 아직 알지 못한다</a:t>
             </a:r>
             <a:r>
               <a:rPr sz="1000" b="0">
@@ -23836,27 +23886,7 @@
                 <a:latin typeface="맑은 고딕"/>
                 <a:ea typeface="맑은 고딕"/>
               </a:rPr>
-              <a:t>"we still don't know how to 100% reliably prevent this from happening"</a:t>
-            </a:r>
-            <a:r>
-              <a:rPr sz="1000" b="0">
-                <a:solidFill>
-                  <a:srgbClr val="000000"/>
-                </a:solidFill>
-                <a:latin typeface="맑은 고딕"/>
-                <a:ea typeface="맑은 고딕"/>
-              </a:rPr>
-              <a:t>, </a:t>
-            </a:r>
-            <a:r>
-              <a:rPr sz="1000" b="0">
-                <a:solidFill>
-                  <a:srgbClr val="000000"/>
-                </a:solidFill>
-                <a:latin typeface="맑은 고딕"/>
-                <a:ea typeface="맑은 고딕"/>
-              </a:rPr>
-              <a:t>[Willison 2025a]</a:t>
+              <a:t>"we still don't know how to 100% reliably prevent this from happening", [Willison 2025a]</a:t>
             </a:r>
           </a:p>
           <a:p>
@@ -23879,7 +23909,27 @@
                 <a:latin typeface="맑은 고딕"/>
                 <a:ea typeface="맑은 고딕"/>
               </a:rPr>
-              <a:t>"웹 애플리케이션 보안에서 95%는 분명히 낙제 점수다"</a:t>
+              <a:t>웹 애플리케이션 보안에서 </a:t>
+            </a:r>
+            <a:r>
+              <a:rPr sz="1600" b="1">
+                <a:solidFill>
+                  <a:srgbClr val="000000"/>
+                </a:solidFill>
+                <a:latin typeface="맑은 고딕"/>
+                <a:ea typeface="맑은 고딕"/>
+              </a:rPr>
+              <a:t>95%는 분명히 낙제 점수</a:t>
+            </a:r>
+            <a:r>
+              <a:rPr sz="1600" b="0">
+                <a:solidFill>
+                  <a:srgbClr val="000000"/>
+                </a:solidFill>
+                <a:latin typeface="맑은 고딕"/>
+                <a:ea typeface="맑은 고딕"/>
+              </a:rPr>
+              <a:t>다</a:t>
             </a:r>
             <a:r>
               <a:rPr sz="1000" b="0">

--- a/courses/ai-native/sessions/s08.pptx
+++ b/courses/ai-native/sessions/s08.pptx
@@ -28,6 +28,7 @@
     <p:sldId id="273" r:id="javaLecture18"/>
     <p:sldId id="274" r:id="javaLecture19"/>
     <p:sldId id="275" r:id="javaLecture20"/>
+    <p:sldId id="276" r:id="javaLecture21"/>
   </p:sldIdLst>
   <p:sldSz cx="9144000" cy="6858000" type="screen4x3"/>
   <p:notesSz cx="6858000" cy="9144000"/>
@@ -550,21 +551,21 @@
             <a:pPr lvl="0"/>
             <a:r>
               <a:rPr lang="ko-KR" sz="1200"/>
-              <a:t>계산적·추론적의 구분은 [Böckeler 2026a]의 것이며, 가이드·센서의 전체 구조는 "세션 09. 검증 하네스·결과 점검·피드백"에서 다룬다. 여기서는 가드레일이 계산적 가이드라는 점만 쓴다.</a:t>
+              <a:t>인용 근거: OpenAI, "A practical guide to building agents"(2025) 원문 확인(받은 PDF). 겹으로 쌓는 방어라는 표현이 원문의 것이다.</a:t>
             </a:r>
           </a:p>
           <a:p>
             <a:pPr lvl="0"/>
             <a:r>
               <a:rPr lang="ko-KR" sz="1200"/>
-              <a:t>맥락이 길어지면 앞의 지시가 묻힌다. 그 이유는 "세션 05. 도메인·설계 지식과 맥락 구성"의 「03. 주의 예산과 맥락 부패」의 「맥락 부패」에 있다.</a:t>
+              <a:t>원문은 입력·출력의 가드레일 종류(관련성, 안전, 개인정보, 도구 위험 등급 등)를 든다. 과정은 코딩 에이전트에 해당하는 네 자리로 정리해 쓴다.</a:t>
             </a:r>
           </a:p>
           <a:p>
             <a:pPr lvl="0"/>
             <a:r>
               <a:rPr lang="ko-KR" sz="1200"/>
-              <a:t>수강생에게 묻는다 — "기대값을 바꾸지 마"를 강제로 옮기면 어디에 두는가? 테스트 파일의 쓰기 금지다.</a:t>
+              <a:t>네 자리가 모두 필요한 것은 아니다. "주문한다"는 입력·도구 호출·환경을 쓰고 출력은 커밋 전 검사 하나만 둔다(「07. 주문한다의 가드레일」).</a:t>
             </a:r>
           </a:p>
         </p:txBody>
@@ -625,21 +626,21 @@
             <a:pPr lvl="0"/>
             <a:r>
               <a:rPr lang="ko-KR" sz="1200"/>
-              <a:t>인용 근거: Anthropic, "How we contain Claude across products"(2026) 원문 확인. 피해 범위와 네 가지 제약 수단이 원문의 표현이다.</a:t>
+              <a:t>계산적·추론적의 구분은 [Böckeler 2026a]의 것이며, 가이드·센서의 전체 구조는 "세션 09. 검증 하네스·결과 점검·피드백"에서 다룬다. 여기서는 가드레일이 계산적 가이드라는 점만 쓴다.</a:t>
             </a:r>
           </a:p>
           <a:p>
             <a:pPr lvl="0"/>
             <a:r>
               <a:rPr lang="ko-KR" sz="1200"/>
-              <a:t>작업 공간(worktree·작업 브랜치)은 "세션 06. 작업 위임과 도구·권한·상태의 경계"의 「06. 상태와 되돌림」의 「변경마다 작업 공간」에서 정했다. 여기서는 그것이 피해 범위를 끊는 수단이라는 점을 더한다.</a:t>
+              <a:t>맥락이 길어지면 앞의 지시가 묻힌다. 그 이유는 "세션 05. 도메인·설계 지식과 맥락 구성"의 「03. 주의 예산과 맥락 부패」의 「맥락 부패」에 있다.</a:t>
             </a:r>
           </a:p>
           <a:p>
             <a:pPr lvl="0"/>
             <a:r>
               <a:rPr lang="ko-KR" sz="1200"/>
-              <a:t>자격을 주지 않는 것이 가장 단순한 가드레일이다. 원격 반영은 사람이 실행한다.</a:t>
+              <a:t>수강생에게 묻는다 — "기대값을 바꾸지 마"를 강제로 옮기면 어디에 두는가? 테스트 파일의 쓰기 금지다.</a:t>
             </a:r>
           </a:p>
         </p:txBody>
@@ -700,28 +701,21 @@
             <a:pPr lvl="0"/>
             <a:r>
               <a:rPr lang="ko-KR" sz="1200"/>
-              <a:t>인용 근거: Thoughtworks Technology Radar Vol. 34(2026-04)의 sandboxed execution for coding agents(Trial) 항목 원문 확인. 표의 세 기본값은 [Anthropic 2026c]가 적은 것과 같다 — "Reads are allowed, writes are allowed inside the workspace, but network is denied by default"(원문 확인).</a:t>
+              <a:t>인용 근거: Anthropic, "How we contain Claude across products"(2026) 원문 확인. 피해 범위와 네 가지 제약 수단이 원문의 표현이다.</a:t>
             </a:r>
           </a:p>
           <a:p>
             <a:pPr lvl="0"/>
             <a:r>
               <a:rPr lang="ko-KR" sz="1200"/>
-              <a:t>84%도 [Anthropic 2026c]의 보고값이며, 비교 대상은 환경 제약을 도입하기 전의 권한 요청 수다. 일반 수치가 아니다.</a:t>
+              <a:t>작업 공간(worktree·작업 브랜치)은 "세션 06. 작업 위임과 도구·권한·상태의 경계"의 「06. 상태와 되돌림」의 「변경마다 작업 공간」에서 정했다. 여기서는 그것이 피해 범위를 끊는 수단이라는 점을 더한다.</a:t>
             </a:r>
           </a:p>
           <a:p>
             <a:pPr lvl="0"/>
             <a:r>
               <a:rPr lang="ko-KR" sz="1200"/>
-              <a:t>승인 피로는 "세션 07. 워크플로·에이전트와 사람의 개입"의 「08. 잘못된 관행」의 「모든 단계의 형식적 승인」에서 다뤘다. 샌드박스는 그 문제의 처방이다.</a:t>
-            </a:r>
-          </a:p>
-          <a:p>
-            <a:pPr lvl="0"/>
-            <a:r>
-              <a:rPr lang="ko-KR" sz="1200"/>
-              <a:t>샌드박스의 구현(컨테이너·가상 머신·OS 수준 격리)은 도구의 일이며 과정은 무엇을 기본값으로 둘지만 결정한다.</a:t>
+              <a:t>자격을 주지 않는 것이 가장 단순한 가드레일이다. 원격 반영은 사람이 실행한다.</a:t>
             </a:r>
           </a:p>
         </p:txBody>
@@ -782,28 +776,28 @@
             <a:pPr lvl="0"/>
             <a:r>
               <a:rPr lang="ko-KR" sz="1200"/>
-              <a:t>본문이 가리키는 네 자리는 「05. 가드레일의 자리」의 「겹으로 쌓는다」의 것이다. 같은 그림을 두 번 보이지 않고 값만 채웠다.</a:t>
+              <a:t>인용 근거: Thoughtworks Technology Radar Vol. 34(2026-04)의 sandboxed execution for coding agents(Trial) 항목 원문 확인. 표의 세 기본값은 [Anthropic 2026c]가 적은 것과 같다 — "Reads are allowed, writes are allowed inside the workspace, but network is denied by default"(원문 확인).</a:t>
             </a:r>
           </a:p>
           <a:p>
             <a:pPr lvl="0"/>
             <a:r>
               <a:rPr lang="ko-KR" sz="1200"/>
-              <a:t>규격 문서를 넣어 두는 곳은 "세션 05. 도메인·설계 지식과 맥락 구성"의 「06. 맥락 파일」의 「주문한다의 맥락 파일」이 가리키는 저장소의 문서 폴더이며, 예를 들면 docs/다. 결제 연동 규격은 거기에 docs/external/payment-api.md로 들어 있다. 폴더 이름은 저장소마다 정하는 것이며 에이전트가 미리 아는 이름이 아니다.</a:t>
+              <a:t>84%도 [Anthropic 2026c]의 보고값이며, 비교 대상은 환경 제약을 도입하기 전의 권한 요청 수다. 일반 수치가 아니다.</a:t>
             </a:r>
           </a:p>
           <a:p>
             <a:pPr lvl="0"/>
             <a:r>
               <a:rPr lang="ko-KR" sz="1200"/>
-              <a:t>출력 검사를 커밋 전 하나만 둔 이유를 짚는다 — 산출이 코드와 커밋뿐이고, 그 밖의 결과는 센서가 본다.</a:t>
+              <a:t>승인 피로는 "세션 07. 워크플로·에이전트와 사람의 개입"의 「08. 잘못된 관행」의 「모든 단계의 형식적 승인」에서 다뤘다. 샌드박스는 그 문제의 처방이다.</a:t>
             </a:r>
           </a:p>
           <a:p>
             <a:pPr lvl="0"/>
             <a:r>
               <a:rPr lang="ko-KR" sz="1200"/>
-              <a:t>이 그림이 실습 8의 결과물 형식이다. 수강생은 같은 네 자리에 정기배송의 값을 채운다.</a:t>
+              <a:t>샌드박스의 구현(컨테이너·가상 머신·OS 수준 격리)은 도구의 일이며 과정은 무엇을 기본값으로 둘지만 결정한다.</a:t>
             </a:r>
           </a:p>
         </p:txBody>
@@ -864,21 +858,28 @@
             <a:pPr lvl="0"/>
             <a:r>
               <a:rPr lang="ko-KR" sz="1200"/>
-              <a:t>확인 지점 셋은 "세션 07. 워크플로·에이전트와 사람의 개입"의 「07. 주문한다의 실행 흐름」의 「활동 다이어그램」에서 정했다. 가드레일을 세운 덕분에 그 셋만으로 충분하다는 관계를 짚는다.</a:t>
+              <a:t>본문이 가리키는 네 자리는 「05. 가드레일의 자리」의 「겹으로 쌓는다」의 것이다. 같은 그림을 두 번 보이지 않고 값만 채웠다.</a:t>
             </a:r>
           </a:p>
           <a:p>
             <a:pPr lvl="0"/>
             <a:r>
               <a:rPr lang="ko-KR" sz="1200"/>
-              <a:t>표의 여섯 줄은 「03. 위험의 식별」의 「주문한다의 위험」의 여섯과 순서까지 같다. 위험을 고르는 일과 가드레일을 세우는 일이 한 줄씩 이어지는 것을 보인다.</a:t>
+              <a:t>규격 문서를 넣어 두는 곳은 "세션 05. 도메인·설계 지식과 맥락 구성"의 「06. 맥락 파일」의 「주문한다의 맥락 파일」이 가리키는 저장소의 문서 폴더이며, 예를 들면 docs/다. 결제 연동 규격은 거기에 docs/external/payment-api.md로 들어 있다. 폴더 이름은 저장소마다 정하는 것이며 에이전트가 미리 아는 이름이 아니다.</a:t>
             </a:r>
           </a:p>
           <a:p>
             <a:pPr lvl="0"/>
             <a:r>
               <a:rPr lang="ko-KR" sz="1200"/>
-              <a:t>배치표는 저장소에 두고 맥락 파일이 가리킨다. 사람과 에이전트가 같은 표를 본다.</a:t>
+              <a:t>출력 검사를 커밋 전 하나만 둔 이유를 짚는다 — 산출이 코드와 커밋뿐이고, 그 밖의 결과는 센서가 본다.</a:t>
+            </a:r>
+          </a:p>
+          <a:p>
+            <a:pPr lvl="0"/>
+            <a:r>
+              <a:rPr lang="ko-KR" sz="1200"/>
+              <a:t>이 그림이 실습 8의 결과물 형식이다. 수강생은 같은 네 자리에 정기배송의 값을 채운다.</a:t>
             </a:r>
           </a:p>
         </p:txBody>
@@ -939,21 +940,21 @@
             <a:pPr lvl="0"/>
             <a:r>
               <a:rPr lang="ko-KR" sz="1200"/>
-              <a:t>지시 비대는 "세션 05. 도메인·설계 지식과 맥락 구성"의 「11. 잘못된 관행」의 「지시 비대」에서 다룬 문제다. 같은 현상이 가드레일의 자리를 잘못 고를 때 생긴다.</a:t>
+              <a:t>확인 지점 셋은 "세션 07. 워크플로·에이전트와 사람의 개입"의 「07. 주문한다의 실행 흐름」의 「활동 다이어그램」에서 정했다. 가드레일을 세운 덕분에 그 셋만으로 충분하다는 관계를 짚는다.</a:t>
             </a:r>
           </a:p>
           <a:p>
             <a:pPr lvl="0"/>
             <a:r>
               <a:rPr lang="ko-KR" sz="1200"/>
-              <a:t>수강생의 저장소 맥락 파일에서 금지문을 찾아보게 한다. 대부분 한두 줄은 환경으로 옮길 수 있다.</a:t>
+              <a:t>표의 여섯 줄은 「03. 위험의 식별」의 「주문한다의 위험」의 여섯과 순서까지 같다. 위험을 고르는 일과 가드레일을 세우는 일이 한 줄씩 이어지는 것을 보인다.</a:t>
             </a:r>
           </a:p>
           <a:p>
             <a:pPr lvl="0"/>
             <a:r>
               <a:rPr lang="ko-KR" sz="1200"/>
-              <a:t>프롬프트의 금지가 쓸모없다는 말이 아니다. 강제가 불가능한 자리에서는 그것이 유일한 수단이다.</a:t>
+              <a:t>배치표는 저장소에 두고 맥락 파일이 가리킨다. 사람과 에이전트가 같은 표를 본다.</a:t>
             </a:r>
           </a:p>
         </p:txBody>
@@ -1014,21 +1015,21 @@
             <a:pPr lvl="0"/>
             <a:r>
               <a:rPr lang="ko-KR" sz="1200"/>
-              <a:t>인용 근거: [Anthropic 2026c] 원문 확인. 같은 글은 확률적 방어를 결정적인 환경 제약과 함께 쓰는 이유로 이 문장을 든다.</a:t>
+              <a:t>지시 비대는 "세션 05. 도메인·설계 지식과 맥락 구성"의 「11. 잘못된 관행」의 「지시 비대」에서 다룬 문제다. 같은 현상이 가드레일의 자리를 잘못 고를 때 생긴다.</a:t>
             </a:r>
           </a:p>
           <a:p>
             <a:pPr lvl="0"/>
             <a:r>
               <a:rPr lang="ko-KR" sz="1200"/>
-              <a:t>예방과 탐지를 겹치는 구성이 "세션 09. 검증 하네스·결과 점검·피드백"의 하네스다. 가드레일만으로 완료를 받아들이지 않는다.</a:t>
+              <a:t>수강생의 저장소 맥락 파일에서 금지문을 찾아보게 한다. 대부분 한두 줄은 환경으로 옮길 수 있다.</a:t>
             </a:r>
           </a:p>
           <a:p>
             <a:pPr lvl="0"/>
             <a:r>
               <a:rPr lang="ko-KR" sz="1200"/>
-              <a:t>수강생에게 묻는다 — 가드레일이 모두 작동했는데 결과가 틀렸다. 무엇을 보고 알 수 있는가? 센서의 증거뿐이다. 예로 주문 금액을 2,000원이 아니라 결제 직전 판매가인 2,400원으로 계산한 경우를 든다.</a:t>
+              <a:t>프롬프트의 금지가 쓸모없다는 말이 아니다. 강제가 불가능한 자리에서는 그것이 유일한 수단이다.</a:t>
             </a:r>
           </a:p>
         </p:txBody>
@@ -1089,21 +1090,21 @@
             <a:pPr lvl="0"/>
             <a:r>
               <a:rPr lang="ko-KR" sz="1200"/>
-              <a:t>정기배송의 위험은 회차 금액·만료일의 기대값과 결제 승인 호출에서 나온다. 모델 패키지는 code/s01/subscription/docs/에 있다.</a:t>
+              <a:t>인용 근거: [Anthropic 2026c] 원문 확인. 같은 글은 확률적 방어를 결정적인 환경 제약과 함께 쓰는 이유로 이 문장을 든다.</a:t>
             </a:r>
           </a:p>
           <a:p>
             <a:pPr lvl="0"/>
             <a:r>
               <a:rPr lang="ko-KR" sz="1200"/>
-              <a:t>LLM은 위험을 "환각"·"품질 저하"처럼 모델의 능력 문제로 적고, 가드레일을 프롬프트 문장으로 제안한다. 점검 1·3으로 되돌린다.</a:t>
+              <a:t>예방과 탐지를 겹치는 구성이 "세션 09. 검증 하네스·결과 점검·피드백"의 하네스다. 가드레일만으로 완료를 받아들이지 않는다.</a:t>
             </a:r>
           </a:p>
           <a:p>
             <a:pPr lvl="0"/>
             <a:r>
               <a:rPr lang="ko-KR" sz="1200"/>
-              <a:t>평가는 표의 완성도보다 자리를 고른 근거를 본다. 같은 위험을 다른 자리에서 막아도 판정 가능성으로 설명되면 맞는 답이다.</a:t>
+              <a:t>수강생에게 묻는다 — 가드레일이 모두 작동했는데 결과가 틀렸다. 무엇을 보고 알 수 있는가? 센서의 증거뿐이다. 예로 주문 금액을 2,000원이 아니라 결제 직전 판매가인 2,400원으로 계산한 경우를 든다.</a:t>
             </a:r>
           </a:p>
         </p:txBody>
@@ -1164,14 +1165,21 @@
             <a:pPr lvl="0"/>
             <a:r>
               <a:rPr lang="ko-KR" sz="1200"/>
-              <a:t>실습 8의 가드레일 배치가 실습 9의 하네스 배치의 입력이 된다. 가이드와 센서의 짝에서 가드레일이 가이드 쪽이다.</a:t>
+              <a:t>정기배송의 위험은 회차 금액·만료일의 기대값과 결제 승인 호출에서 나온다. 모델 패키지는 code/s01/subscription/docs/에 있다.</a:t>
             </a:r>
           </a:p>
           <a:p>
             <a:pPr lvl="0"/>
             <a:r>
               <a:rPr lang="ko-KR" sz="1200"/>
-              <a:t>이 세션까지가 예방이다. 다음 세션은 같은 하네스의 탐지 쪽을 다룬다.</a:t>
+              <a:t>LLM은 위험을 "환각"·"품질 저하"처럼 모델의 능력 문제로 적고, 가드레일을 프롬프트 문장으로 제안한다. 점검 1·3으로 되돌린다.</a:t>
+            </a:r>
+          </a:p>
+          <a:p>
+            <a:pPr lvl="0"/>
+            <a:r>
+              <a:rPr lang="ko-KR" sz="1200"/>
+              <a:t>평가는 표의 완성도보다 자리를 고른 근거를 본다. 같은 위험을 다른 자리에서 막아도 판정 가능성으로 설명되면 맞는 답이다.</a:t>
             </a:r>
           </a:p>
         </p:txBody>
@@ -1232,21 +1240,14 @@
             <a:pPr lvl="0"/>
             <a:r>
               <a:rPr lang="ko-KR" sz="1200"/>
-              <a:t>입력 자리의 한 행은 실습 7까지의 산출물에 없던 위험이다. 삼박자를 점검하면서 드러난다.</a:t>
+              <a:t>실습 8의 가드레일 배치가 실습 9의 하네스 배치의 입력이 된다. 가이드와 센서의 짝에서 가드레일이 가이드 쪽이다.</a:t>
             </a:r>
           </a:p>
           <a:p>
             <a:pPr lvl="0"/>
             <a:r>
               <a:rPr lang="ko-KR" sz="1200"/>
-              <a:t>회차 7개와 만료일 2월 2일은 "세션 03. 요구의 구체화와 명세"의 실습 답에서 정한 값이다. 기대값을 지키는 것이 수용 기준을 지키는 것이다.</a:t>
-            </a:r>
-          </a:p>
-          <a:p>
-            <a:pPr lvl="0"/>
-            <a:r>
-              <a:rPr lang="ko-KR" sz="1200"/>
-              <a:t>쓰기 금지와 "테스트를 고치지 마"라는 지시의 차이를 묻는다. 전자는 거절되고 후자는 막혔을 때 깨진다.</a:t>
+              <a:t>이 세션까지가 예방이다. 다음 세션은 같은 하네스의 탐지 쪽을 다룬다.</a:t>
             </a:r>
           </a:p>
         </p:txBody>
@@ -1382,6 +1383,81 @@
             <a:pPr lvl="0"/>
             <a:r>
               <a:rPr lang="ko-KR" sz="1200"/>
+              <a:t>입력 자리의 한 행은 실습 7까지의 산출물에 없던 위험이다. 삼박자를 점검하면서 드러난다.</a:t>
+            </a:r>
+          </a:p>
+          <a:p>
+            <a:pPr lvl="0"/>
+            <a:r>
+              <a:rPr lang="ko-KR" sz="1200"/>
+              <a:t>회차 7개와 만료일 2월 2일은 "세션 03. 요구의 구체화와 명세"의 실습 답에서 정한 값이다. 기대값을 지키는 것이 수용 기준을 지키는 것이다.</a:t>
+            </a:r>
+          </a:p>
+          <a:p>
+            <a:pPr lvl="0"/>
+            <a:r>
+              <a:rPr lang="ko-KR" sz="1200"/>
+              <a:t>쓰기 금지와 "테스트를 고치지 마"라는 지시의 차이를 묻는다. 전자는 거절되고 후자는 막혔을 때 깨진다.</a:t>
+            </a:r>
+          </a:p>
+        </p:txBody>
+      </p:sp>
+    </p:spTree>
+  </p:cSld>
+  <p:clrMapOvr>
+    <a:masterClrMapping/>
+  </p:clrMapOvr>
+</p:notes>
+</file>
+
+<file path=ppt/notesSlides/notesSlide21.xml><?xml version="1.0" encoding="utf-8"?>
+<p:notes xmlns:a="http://schemas.openxmlformats.org/drawingml/2006/main" xmlns:r="http://schemas.openxmlformats.org/officeDocument/2006/relationships" xmlns:p="http://schemas.openxmlformats.org/presentationml/2006/main">
+  <p:cSld>
+    <p:spTree>
+      <p:nvGrpSpPr>
+        <p:cNvPr id="1" name=""/>
+        <p:cNvGrpSpPr/>
+        <p:nvPr/>
+      </p:nvGrpSpPr>
+      <p:grpSpPr>
+        <a:xfrm>
+          <a:off x="0" y="0"/>
+          <a:ext cx="0" cy="0"/>
+          <a:chOff x="0" y="0"/>
+          <a:chExt cx="0" cy="0"/>
+        </a:xfrm>
+      </p:grpSpPr>
+      <p:sp>
+        <p:nvSpPr>
+          <p:cNvPr id="2" name="슬라이드 이미지 개체 틀"/>
+          <p:cNvSpPr/>
+          <p:nvPr>
+            <p:ph type="sldImg" idx="2"/>
+          </p:nvPr>
+        </p:nvSpPr>
+        <p:spPr/>
+        <p:txBody>
+          <a:bodyPr/>
+          <a:lstStyle/>
+          <a:p/>
+        </p:txBody>
+      </p:sp>
+      <p:sp>
+        <p:nvSpPr>
+          <p:cNvPr id="3" name="슬라이드 노트 개체 틀"/>
+          <p:cNvSpPr/>
+          <p:nvPr>
+            <p:ph type="body" idx="3"/>
+          </p:nvPr>
+        </p:nvSpPr>
+        <p:spPr/>
+        <p:txBody>
+          <a:bodyPr/>
+          <a:lstStyle/>
+          <a:p>
+            <a:pPr lvl="0"/>
+            <a:r>
+              <a:rPr lang="ko-KR" sz="1200"/>
               <a:t>보완의 핵심은 같은 규칙을 두 곳에 적지 않는 것이다. 계약의 글과 환경의 설정이 어긋나면 어느 쪽도 신뢰할 수 없다.</a:t>
             </a:r>
           </a:p>
@@ -1477,81 +1553,6 @@
 </p:notes>
 </file>
 
-<file path=ppt/notesSlides/notesSlide4.xml><?xml version="1.0" encoding="utf-8"?>
-<p:notes xmlns:a="http://schemas.openxmlformats.org/drawingml/2006/main" xmlns:r="http://schemas.openxmlformats.org/officeDocument/2006/relationships" xmlns:p="http://schemas.openxmlformats.org/presentationml/2006/main">
-  <p:cSld>
-    <p:spTree>
-      <p:nvGrpSpPr>
-        <p:cNvPr id="1" name=""/>
-        <p:cNvGrpSpPr/>
-        <p:nvPr/>
-      </p:nvGrpSpPr>
-      <p:grpSpPr>
-        <a:xfrm>
-          <a:off x="0" y="0"/>
-          <a:ext cx="0" cy="0"/>
-          <a:chOff x="0" y="0"/>
-          <a:chExt cx="0" cy="0"/>
-        </a:xfrm>
-      </p:grpSpPr>
-      <p:sp>
-        <p:nvSpPr>
-          <p:cNvPr id="2" name="슬라이드 이미지 개체 틀"/>
-          <p:cNvSpPr/>
-          <p:nvPr>
-            <p:ph type="sldImg" idx="2"/>
-          </p:nvPr>
-        </p:nvSpPr>
-        <p:spPr/>
-        <p:txBody>
-          <a:bodyPr/>
-          <a:lstStyle/>
-          <a:p/>
-        </p:txBody>
-      </p:sp>
-      <p:sp>
-        <p:nvSpPr>
-          <p:cNvPr id="3" name="슬라이드 노트 개체 틀"/>
-          <p:cNvSpPr/>
-          <p:nvPr>
-            <p:ph type="body" idx="3"/>
-          </p:nvPr>
-        </p:nvSpPr>
-        <p:spPr/>
-        <p:txBody>
-          <a:bodyPr/>
-          <a:lstStyle/>
-          <a:p>
-            <a:pPr lvl="0"/>
-            <a:r>
-              <a:rPr lang="ko-KR" sz="1200"/>
-              <a:t>인용 근거: NIST AI RMF 1.0(2023) 원문(PDF) 확인. 위험 허용 수준 문장은 조직의 법·규제 맥락을 든 부분을 생략하고 정의만 인용했다.</a:t>
-            </a:r>
-          </a:p>
-          <a:p>
-            <a:pPr lvl="0"/>
-            <a:r>
-              <a:rPr lang="ko-KR" sz="1200"/>
-              <a:t>NIST는 위험을 식별·측정·관리하는 어휘로만 쓴다. 조직 거버넌스의 상세는 과정의 범위가 아니다.</a:t>
-            </a:r>
-          </a:p>
-          <a:p>
-            <a:pPr lvl="0"/>
-            <a:r>
-              <a:rPr lang="ko-KR" sz="1200"/>
-              <a:t>확률·크기의 판정은 과제와 조직에 따라 달라진다. 수업에서는 값보다 등급을 정한 근거를 묻는다.</a:t>
-            </a:r>
-          </a:p>
-        </p:txBody>
-      </p:sp>
-    </p:spTree>
-  </p:cSld>
-  <p:clrMapOvr>
-    <a:masterClrMapping/>
-  </p:clrMapOvr>
-</p:notes>
-</file>
-
 <file path=ppt/notesSlides/notesSlide5.xml><?xml version="1.0" encoding="utf-8"?>
 <p:notes xmlns:a="http://schemas.openxmlformats.org/drawingml/2006/main" xmlns:r="http://schemas.openxmlformats.org/officeDocument/2006/relationships" xmlns:p="http://schemas.openxmlformats.org/presentationml/2006/main">
   <p:cSld>
@@ -1600,21 +1601,21 @@
             <a:pPr lvl="0"/>
             <a:r>
               <a:rPr lang="ko-KR" sz="1200"/>
-              <a:t>인용 근거: OWASP Gen AI Security Project, "OWASP Top 10 for Agentic Applications for 2026"(2025) 원문과 공개 발표 글에서 열 항목의 식별자와 이름을 확인했다 — Agent Goal Hijack, Tool Misuse, Identity &amp; Privilege Abuse, Agentic Supply Chain Vulnerabilities, Unexpected Code Execution, Memory &amp; Context Poisoning, Insecure Inter-Agent Communication, Cascading Failures, Human-Agent Trust Exploitation, Rogue Agents.</a:t>
+              <a:t>인용 근거: NIST AI RMF 1.0(2023) 원문(PDF) 확인. 위험 허용 수준 문장은 조직의 법·규제 맥락을 든 부분을 생략하고 정의만 인용했다.</a:t>
             </a:r>
           </a:p>
           <a:p>
             <a:pPr lvl="0"/>
             <a:r>
               <a:rPr lang="ko-KR" sz="1200"/>
-              <a:t>한글 이름은 과정의 번역이고, ASI01~ASI10은 OWASP가 붙인 식별자다. 오른쪽 열은 과정의 적용이며 원문의 예가 아니다.</a:t>
+              <a:t>NIST는 위험을 식별·측정·관리하는 어휘로만 쓴다. 조직 거버넌스의 상세는 과정의 범위가 아니다.</a:t>
             </a:r>
           </a:p>
           <a:p>
             <a:pPr lvl="0"/>
             <a:r>
               <a:rPr lang="ko-KR" sz="1200"/>
-              <a:t>ASI04의 도구 서버는 "세션 06. 작업 위임과 도구·권한·상태의 경계"의 「04. 도구 연결의 표준」에서 다룬 MCP 서버를 가리킨다. 닿지 않는 ASI07도 왜 닿지 않는지를 말해야 목록이 암기가 되지 않는다.</a:t>
+              <a:t>확률·크기의 판정은 과제와 조직에 따라 달라진다. 수업에서는 값보다 등급을 정한 근거를 묻는다.</a:t>
             </a:r>
           </a:p>
         </p:txBody>
@@ -1675,21 +1676,21 @@
             <a:pPr lvl="0"/>
             <a:r>
               <a:rPr lang="ko-KR" sz="1200"/>
-              <a:t>확률의 값은 교육용 가정이다. 테스트 비활성화를 높게 본 근거는 막힌 에이전트가 가장 쉽게 손대는 곳이 기대값이라는 점이며, 그 관행은 "세션 09. 검증 하네스·결과 점검·피드백"에서 다시 다룬다.</a:t>
+              <a:t>인용 근거: OWASP Gen AI Security Project, "OWASP Top 10 for Agentic Applications for 2026"(2025) 원문과 공개 발표 글에서 열 항목의 식별자와 이름을 확인했다 — Agent Goal Hijack, Tool Misuse, Identity &amp; Privilege Abuse, Agentic Supply Chain Vulnerabilities, Unexpected Code Execution, Memory &amp; Context Poisoning, Insecure Inter-Agent Communication, Cascading Failures, Human-Agent Trust Exploitation, Rogue Agents.</a:t>
             </a:r>
           </a:p>
           <a:p>
             <a:pPr lvl="0"/>
             <a:r>
               <a:rPr lang="ko-KR" sz="1200"/>
-              <a:t>여섯 중 다섯은 "세션 06. 작업 위임과 도구·권한·상태의 경계"의 「07. 위임 계약」의 「주문한다의 위임 계약」이 금지로 적은 항목이다. 계약의 글을 실행의 제약으로 옮기는 것이 이 세션의 일이다. 숨은 지시만 새로 더해졌다.</a:t>
+              <a:t>한글 이름은 과정의 번역이고, ASI01~ASI10은 OWASP가 붙인 식별자다. 오른쪽 열은 과정의 적용이며 원문의 예가 아니다.</a:t>
             </a:r>
           </a:p>
           <a:p>
             <a:pPr lvl="0"/>
             <a:r>
               <a:rPr lang="ko-KR" sz="1200"/>
-              <a:t>등급을 바꿔 보게 한다 — 사내 테스트 결제 계정만 쓴다면 두 번째 위험의 크기가 달라진다.</a:t>
+              <a:t>ASI04의 도구 서버는 "세션 06. 작업 위임과 도구·권한·상태의 경계"의 「04. 도구 연결의 표준」에서 다룬 MCP 서버를 가리킨다. 닿지 않는 ASI07도 왜 닿지 않는지를 말해야 목록이 암기가 되지 않는다.</a:t>
             </a:r>
           </a:p>
         </p:txBody>
@@ -1750,21 +1751,21 @@
             <a:pPr lvl="0"/>
             <a:r>
               <a:rPr lang="ko-KR" sz="1200"/>
-              <a:t>인용 근거: Simon Willison, "The lethal trifecta for AI agents"(2025) 원문 확인. 세 능력의 이름과 정의가 원문의 것이다.</a:t>
+              <a:t>확률의 값은 교육용 가정이다. 테스트 비활성화를 높게 본 근거는 막힌 에이전트가 가장 쉽게 손대는 곳이 기대값이라는 점이며, 그 관행은 "세션 09. 검증 하네스·결과 점검·피드백"에서 다시 다룬다.</a:t>
             </a:r>
           </a:p>
           <a:p>
             <a:pPr lvl="0"/>
             <a:r>
               <a:rPr lang="ko-KR" sz="1200"/>
-              <a:t>삼박자는 공격이 아니라 조건이다. 코딩 에이전트는 저장소를 읽고 외부 문서를 읽고 네트워크를 쓸 수 있으므로 기본 상태가 이미 셋을 갖춘 것임을 짚는다.</a:t>
+              <a:t>여섯 중 다섯은 "세션 06. 작업 위임과 도구·권한·상태의 경계"의 「07. 위임 계약」의 「주문한다의 위임 계약」이 금지로 적은 항목이다. 계약의 글을 실행의 제약으로 옮기는 것이 이 세션의 일이다. 숨은 지시만 새로 더해졌다.</a:t>
             </a:r>
           </a:p>
           <a:p>
             <a:pPr lvl="0"/>
             <a:r>
               <a:rPr lang="ko-KR" sz="1200"/>
-              <a:t>프롬프트 주입의 기법을 가르치지 않는다. 과정이 다루는 것은 셋 중 하나를 환경으로 끊는 결정이다.</a:t>
+              <a:t>등급을 바꿔 보게 한다 — 사내 테스트 결제 계정만 쓴다면 두 번째 위험의 크기가 달라진다.</a:t>
             </a:r>
           </a:p>
         </p:txBody>
@@ -1825,21 +1826,21 @@
             <a:pPr lvl="0"/>
             <a:r>
               <a:rPr lang="ko-KR" sz="1200"/>
-              <a:t>인용 근거: [Willison 2025a] 원문 확인. 95%는 확률로 막는 방어의 한계를 말하는 비유이며 특정 제품의 측정값이 아니다.</a:t>
+              <a:t>인용 근거: Simon Willison, "The lethal trifecta for AI agents"(2025) 원문 확인. 세 능력의 이름과 정의가 원문의 것이다.</a:t>
             </a:r>
           </a:p>
           <a:p>
             <a:pPr lvl="0"/>
             <a:r>
               <a:rPr lang="ko-KR" sz="1200"/>
-              <a:t>읽을 범위를 좁히는 결정은 "세션 06. 작업 위임과 도구·권한·상태의 경계"의 「05. 최소 권한」의 「네 가지 권한」에서 이미 정했다. 여기서는 그것이 삼박자의 어느 고리인지 보인다.</a:t>
+              <a:t>삼박자는 공격이 아니라 조건이다. 코딩 에이전트는 저장소를 읽고 외부 문서를 읽고 네트워크를 쓸 수 있으므로 기본 상태가 이미 셋을 갖춘 것임을 짚는다.</a:t>
             </a:r>
           </a:p>
           <a:p>
             <a:pPr lvl="0"/>
             <a:r>
               <a:rPr lang="ko-KR" sz="1200"/>
-              <a:t>수강생에게 묻는다 — 네트워크를 닫으면 못 하게 되는 일은 무엇인가? 의존성 받기와 규격 조회이며, 그래서 사람이 미리 받아 둔다.</a:t>
+              <a:t>프롬프트 주입의 기법을 가르치지 않는다. 과정이 다루는 것은 셋 중 하나를 환경으로 끊는 결정이다.</a:t>
             </a:r>
           </a:p>
         </p:txBody>
@@ -1900,21 +1901,21 @@
             <a:pPr lvl="0"/>
             <a:r>
               <a:rPr lang="ko-KR" sz="1200"/>
-              <a:t>인용 근거: OpenAI, "A practical guide to building agents"(2025) 원문 확인(받은 PDF). 겹으로 쌓는 방어라는 표현이 원문의 것이다.</a:t>
+              <a:t>인용 근거: [Willison 2025a] 원문 확인. 95%는 확률로 막는 방어의 한계를 말하는 비유이며 특정 제품의 측정값이 아니다.</a:t>
             </a:r>
           </a:p>
           <a:p>
             <a:pPr lvl="0"/>
             <a:r>
               <a:rPr lang="ko-KR" sz="1200"/>
-              <a:t>원문은 입력·출력의 가드레일 종류(관련성, 안전, 개인정보, 도구 위험 등급 등)를 든다. 과정은 코딩 에이전트에 해당하는 네 자리로 정리해 쓴다.</a:t>
+              <a:t>읽을 범위를 좁히는 결정은 "세션 06. 작업 위임과 도구·권한·상태의 경계"의 「05. 최소 권한」의 「네 가지 권한」에서 이미 정했다. 여기서는 그것이 삼박자의 어느 고리인지 보인다.</a:t>
             </a:r>
           </a:p>
           <a:p>
             <a:pPr lvl="0"/>
             <a:r>
               <a:rPr lang="ko-KR" sz="1200"/>
-              <a:t>네 자리가 모두 필요한 것은 아니다. "주문한다"는 입력·도구 호출·환경을 쓰고 출력은 커밋 전 검사 하나만 둔다(「07. 주문한다의 가드레일」).</a:t>
+              <a:t>수강생에게 묻는다 — 네트워크를 닫으면 못 하게 되는 일은 무엇인가? 의존성 받기와 규격 조회이며, 그래서 사람이 미리 받아 둔다.</a:t>
             </a:r>
           </a:p>
         </p:txBody>
@@ -3508,6 +3509,612 @@
         <p:cNvPr id="1" name="">
           <a:extLst>
             <a:ext uri="{FF2B5EF4-FFF2-40B4-BE49-F238E27FC236}">
+              <a16:creationId xmlns:a16="http://schemas.microsoft.com/office/drawing/2014/main" id="{8E4F1F13-426B-086B-7D8C-9A58A0F879DB}"/>
+            </a:ext>
+          </a:extLst>
+        </p:cNvPr>
+        <p:cNvGrpSpPr/>
+        <p:nvPr/>
+      </p:nvGrpSpPr>
+      <p:grpSpPr>
+        <a:xfrm>
+          <a:off x="0" y="0"/>
+          <a:ext cx="0" cy="0"/>
+          <a:chOff x="0" y="0"/>
+          <a:chExt cx="0" cy="0"/>
+        </a:xfrm>
+      </p:grpSpPr>
+      <p:sp>
+        <p:nvSpPr>
+          <p:cNvPr id="2" name="제목 1">
+            <a:extLst>
+              <a:ext uri="{FF2B5EF4-FFF2-40B4-BE49-F238E27FC236}">
+                <a16:creationId xmlns:a16="http://schemas.microsoft.com/office/drawing/2014/main" id="{AA26A92D-924E-0575-9551-F8FD7BFD3FAD}"/>
+              </a:ext>
+            </a:extLst>
+          </p:cNvPr>
+          <p:cNvSpPr>
+            <a:spLocks noGrp="1"/>
+          </p:cNvSpPr>
+          <p:nvPr>
+            <p:ph type="title"/>
+          </p:nvPr>
+        </p:nvSpPr>
+        <p:spPr/>
+        <p:txBody>
+          <a:bodyPr/>
+          <a:lstStyle/>
+          <a:p>
+            <a:r>
+              <a:rPr sz="2400" b="1">
+                <a:solidFill>
+                  <a:srgbClr val="000000"/>
+                </a:solidFill>
+                <a:latin typeface="맑은 고딕"/>
+                <a:ea typeface="맑은 고딕"/>
+              </a:rPr>
+              <a:t>겹으로 쌓는다</a:t>
+            </a:r>
+          </a:p>
+          <a:p>
+            <a:r>
+              <a:rPr sz="1100" b="1">
+                <a:solidFill>
+                  <a:srgbClr val="000000"/>
+                </a:solidFill>
+                <a:latin typeface="맑은 고딕"/>
+                <a:ea typeface="맑은 고딕"/>
+              </a:rPr>
+              <a:t>05. 가드레일의 자리</a:t>
+            </a:r>
+          </a:p>
+        </p:txBody>
+      </p:sp>
+      <p:sp>
+        <p:nvSpPr>
+          <p:cNvPr id="3" name="슬라이드 번호 개체 틀 2">
+            <a:extLst>
+              <a:ext uri="{FF2B5EF4-FFF2-40B4-BE49-F238E27FC236}">
+                <a16:creationId xmlns:a16="http://schemas.microsoft.com/office/drawing/2014/main" id="{12CF30EE-4DFD-8063-56B8-B8689E76DFCA}"/>
+              </a:ext>
+            </a:extLst>
+          </p:cNvPr>
+          <p:cNvSpPr>
+            <a:spLocks noGrp="1"/>
+          </p:cNvSpPr>
+          <p:nvPr>
+            <p:ph type="sldNum" sz="quarter" idx="10"/>
+          </p:nvPr>
+        </p:nvSpPr>
+        <p:spPr/>
+        <p:txBody>
+          <a:bodyPr/>
+          <a:lstStyle/>
+          <a:p>
+            <a:pPr>
+              <a:defRPr/>
+            </a:pPr>
+            <a:r>
+              <a:rPr lang="en-US" altLang="ko-KR">
+                <a:solidFill>
+                  <a:prstClr val="black"/>
+                </a:solidFill>
+              </a:rPr>
+              <a:t>- 10 -</a:t>
+            </a:r>
+          </a:p>
+        </p:txBody>
+      </p:sp>
+      <p:sp>
+        <p:nvSpPr>
+          <p:cNvPr id="5" name="텍스트 개체 틀 4">
+            <a:extLst>
+              <a:ext uri="{FF2B5EF4-FFF2-40B4-BE49-F238E27FC236}">
+                <a16:creationId xmlns:a16="http://schemas.microsoft.com/office/drawing/2014/main" id="{D66274C8-E16F-5AEB-614B-D8D32DA3E8C6}"/>
+              </a:ext>
+            </a:extLst>
+          </p:cNvPr>
+          <p:cNvSpPr>
+            <a:spLocks noGrp="1"/>
+          </p:cNvSpPr>
+          <p:nvPr>
+            <p:ph type="body" sz="quarter" idx="11"/>
+          </p:nvPr>
+        </p:nvSpPr>
+        <p:spPr/>
+        <p:txBody>
+          <a:bodyPr/>
+          <a:lstStyle/>
+          <a:p>
+            <a:r>
+              <a:rPr kumimoji="1" lang="en-US" altLang="ko-KR" sz="1400" dirty="0" err="1"/>
+              <a:t>08. 실행 제약과 가드레일의 역할</a:t>
+            </a:r>
+          </a:p>
+        </p:txBody>
+      </p:sp>
+      <p:sp>
+        <p:nvSpPr>
+          <p:cNvPr id="6" name="텍스트 개체 틀 5">
+            <a:extLst>
+              <a:ext uri="{FF2B5EF4-FFF2-40B4-BE49-F238E27FC236}">
+                <a16:creationId xmlns:a16="http://schemas.microsoft.com/office/drawing/2014/main" id="{A24E58E1-194B-A320-AEEE-24D08685BB67}"/>
+              </a:ext>
+            </a:extLst>
+          </p:cNvPr>
+          <p:cNvSpPr>
+            <a:spLocks noGrp="1"/>
+          </p:cNvSpPr>
+          <p:nvPr>
+            <p:ph type="body" sz="quarter" idx="12"/>
+          </p:nvPr>
+        </p:nvSpPr>
+        <p:spPr/>
+        <p:txBody>
+          <a:bodyPr/>
+          <a:lstStyle/>
+          <a:p>
+            <a:endParaRPr kumimoji="1" lang="ko-KR" altLang="en-US" dirty="0"/>
+          </a:p>
+        </p:txBody>
+      </p:sp>
+      <p:sp>
+        <p:nvSpPr>
+          <p:cNvPr id="7" name="텍스트 개체 틀 6">
+            <a:extLst>
+              <a:ext uri="{FF2B5EF4-FFF2-40B4-BE49-F238E27FC236}">
+                <a16:creationId xmlns:a16="http://schemas.microsoft.com/office/drawing/2014/main" id="{A219F420-613B-6234-45F6-0955A9A4505F}"/>
+              </a:ext>
+            </a:extLst>
+          </p:cNvPr>
+          <p:cNvSpPr>
+            <a:spLocks noGrp="1"/>
+          </p:cNvSpPr>
+          <p:nvPr>
+            <p:ph type="body" sz="quarter" idx="13"/>
+          </p:nvPr>
+        </p:nvSpPr>
+        <p:spPr/>
+        <p:txBody>
+          <a:bodyPr/>
+          <a:lstStyle/>
+          <a:p>
+            <a:endParaRPr kumimoji="1" lang="en-US" altLang="ko-KR" dirty="0"/>
+          </a:p>
+        </p:txBody>
+      </p:sp>
+      <p:sp>
+        <p:nvSpPr>
+          <p:cNvPr id="8" name="내용 개체 틀 7">
+            <a:extLst>
+              <a:ext uri="{FF2B5EF4-FFF2-40B4-BE49-F238E27FC236}">
+                <a16:creationId xmlns:a16="http://schemas.microsoft.com/office/drawing/2014/main" id="{BEBA2C4A-B0BF-F2E4-EA6E-614C99CBA184}"/>
+              </a:ext>
+            </a:extLst>
+          </p:cNvPr>
+          <p:cNvSpPr>
+            <a:spLocks noGrp="1"/>
+          </p:cNvSpPr>
+          <p:nvPr>
+            <p:ph idx="1"/>
+          </p:nvPr>
+        </p:nvSpPr>
+        <p:spPr>
+          <a:xfrm>
+            <a:off x="365760" y="960120"/>
+            <a:ext cx="8412480" cy="2788920"/>
+          </a:xfrm>
+        </p:spPr>
+        <p:txBody>
+          <a:bodyPr>
+            <a:normAutofit/>
+          </a:bodyPr>
+          <a:lstStyle/>
+          <a:p>
+            <a:pPr marL="0" indent="0">
+              <a:spcBef>
+                <a:spcPts val="600"/>
+              </a:spcBef>
+              <a:spcAft>
+                <a:spcPts val="600"/>
+              </a:spcAft>
+              <a:buNone/>
+            </a:pPr>
+            <a:r>
+              <a:rPr sz="1800" b="0">
+                <a:solidFill>
+                  <a:srgbClr val="000000"/>
+                </a:solidFill>
+                <a:latin typeface="맑은 고딕"/>
+                <a:ea typeface="맑은 고딕"/>
+              </a:rPr>
+              <a:t>가드레일 하나로는 모든 경로를 막지 못한다. 과제가 들어와 커밋으로 나가기까지의 </a:t>
+            </a:r>
+            <a:r>
+              <a:rPr sz="1800" b="1">
+                <a:solidFill>
+                  <a:srgbClr val="000000"/>
+                </a:solidFill>
+                <a:latin typeface="맑은 고딕"/>
+                <a:ea typeface="맑은 고딕"/>
+              </a:rPr>
+              <a:t>경로 위 네 지점</a:t>
+            </a:r>
+            <a:r>
+              <a:rPr sz="1800" b="0">
+                <a:solidFill>
+                  <a:srgbClr val="000000"/>
+                </a:solidFill>
+                <a:latin typeface="맑은 고딕"/>
+                <a:ea typeface="맑은 고딕"/>
+              </a:rPr>
+              <a:t>에 나누어 두고 서로 겹치게 한다.</a:t>
+            </a:r>
+          </a:p>
+          <a:p>
+            <a:pPr lvl="2" marL="723900" indent="-368300">
+              <a:spcBef>
+                <a:spcPts val="600"/>
+              </a:spcBef>
+              <a:spcAft>
+                <a:spcPts val="600"/>
+              </a:spcAft>
+              <a:buSzPct val="90000"/>
+              <a:buFont typeface="Wingdings" pitchFamily="2" charset="2"/>
+              <a:buChar char=""/>
+            </a:pPr>
+            <a:r>
+              <a:rPr sz="1800" b="0">
+                <a:solidFill>
+                  <a:srgbClr val="000000"/>
+                </a:solidFill>
+                <a:latin typeface="맑은 고딕"/>
+                <a:ea typeface="맑은 고딕"/>
+              </a:rPr>
+              <a:t>가드레일 </a:t>
+            </a:r>
+            <a:r>
+              <a:rPr sz="1800" b="1">
+                <a:solidFill>
+                  <a:srgbClr val="000000"/>
+                </a:solidFill>
+                <a:latin typeface="맑은 고딕"/>
+                <a:ea typeface="맑은 고딕"/>
+              </a:rPr>
+              <a:t>하나로는 충분한 보호가 되기 어려우므로</a:t>
+            </a:r>
+            <a:r>
+              <a:rPr sz="1800" b="0">
+                <a:solidFill>
+                  <a:srgbClr val="000000"/>
+                </a:solidFill>
+                <a:latin typeface="맑은 고딕"/>
+                <a:ea typeface="맑은 고딕"/>
+              </a:rPr>
+              <a:t> 여러 전문화된 가드레일을 </a:t>
+            </a:r>
+            <a:r>
+              <a:rPr sz="1800" b="1">
+                <a:solidFill>
+                  <a:srgbClr val="000000"/>
+                </a:solidFill>
+                <a:latin typeface="맑은 고딕"/>
+                <a:ea typeface="맑은 고딕"/>
+              </a:rPr>
+              <a:t>겹으로 쌓아</a:t>
+            </a:r>
+            <a:r>
+              <a:rPr sz="1800" b="0">
+                <a:solidFill>
+                  <a:srgbClr val="000000"/>
+                </a:solidFill>
+                <a:latin typeface="맑은 고딕"/>
+                <a:ea typeface="맑은 고딕"/>
+              </a:rPr>
+              <a:t> 더 견고한 에이전트를 만든다</a:t>
+            </a:r>
+            <a:r>
+              <a:rPr sz="1000" b="0">
+                <a:solidFill>
+                  <a:srgbClr val="000000"/>
+                </a:solidFill>
+                <a:latin typeface="맑은 고딕"/>
+                <a:ea typeface="맑은 고딕"/>
+              </a:rPr>
+              <a:t>, </a:t>
+            </a:r>
+            <a:r>
+              <a:rPr sz="1000" b="0">
+                <a:solidFill>
+                  <a:srgbClr val="000000"/>
+                </a:solidFill>
+                <a:latin typeface="맑은 고딕"/>
+                <a:ea typeface="맑은 고딕"/>
+              </a:rPr>
+              <a:t>"Think of guardrails as a layered defense mechanism. While a single one is unlikely to provide sufficient protection, using multiple, specialized guardrails together creates more resilient agents."</a:t>
+            </a:r>
+            <a:r>
+              <a:rPr sz="1000" b="0">
+                <a:solidFill>
+                  <a:srgbClr val="000000"/>
+                </a:solidFill>
+                <a:latin typeface="맑은 고딕"/>
+                <a:ea typeface="맑은 고딕"/>
+              </a:rPr>
+              <a:t>, </a:t>
+            </a:r>
+            <a:r>
+              <a:rPr sz="1000" b="0">
+                <a:solidFill>
+                  <a:srgbClr val="000000"/>
+                </a:solidFill>
+                <a:latin typeface="맑은 고딕"/>
+                <a:ea typeface="맑은 고딕"/>
+              </a:rPr>
+              <a:t>[OpenAI 2025]</a:t>
+            </a:r>
+          </a:p>
+          <a:p>
+            <a:pPr lvl="2" marL="723900" indent="-368300">
+              <a:spcBef>
+                <a:spcPts val="600"/>
+              </a:spcBef>
+              <a:spcAft>
+                <a:spcPts val="600"/>
+              </a:spcAft>
+              <a:buSzPct val="90000"/>
+              <a:buFont typeface="Wingdings" pitchFamily="2" charset="2"/>
+              <a:buChar char=""/>
+            </a:pPr>
+            <a:r>
+              <a:rPr sz="1800" b="1">
+                <a:solidFill>
+                  <a:srgbClr val="000000"/>
+                </a:solidFill>
+                <a:latin typeface="맑은 고딕"/>
+                <a:ea typeface="맑은 고딕"/>
+              </a:rPr>
+              <a:t>입력</a:t>
+            </a:r>
+            <a:r>
+              <a:rPr sz="1800" b="0">
+                <a:solidFill>
+                  <a:srgbClr val="000000"/>
+                </a:solidFill>
+                <a:latin typeface="맑은 고딕"/>
+                <a:ea typeface="맑은 고딕"/>
+              </a:rPr>
+              <a:t> —</a:t>
+            </a:r>
+            <a:r>
+              <a:rPr sz="1600" b="0">
+                <a:solidFill>
+                  <a:srgbClr val="000000"/>
+                </a:solidFill>
+                <a:latin typeface="맑은 고딕"/>
+                <a:ea typeface="맑은 고딕"/>
+              </a:rPr>
+              <a:t> 함께 읽는 문서에서 지시처럼 보이는 문장을 걸러낸다.</a:t>
+            </a:r>
+          </a:p>
+          <a:p>
+            <a:pPr lvl="2" marL="723900" indent="-368300">
+              <a:spcBef>
+                <a:spcPts val="600"/>
+              </a:spcBef>
+              <a:spcAft>
+                <a:spcPts val="600"/>
+              </a:spcAft>
+              <a:buSzPct val="90000"/>
+              <a:buFont typeface="Wingdings" pitchFamily="2" charset="2"/>
+              <a:buChar char=""/>
+            </a:pPr>
+            <a:r>
+              <a:rPr sz="1800" b="1">
+                <a:solidFill>
+                  <a:srgbClr val="000000"/>
+                </a:solidFill>
+                <a:latin typeface="맑은 고딕"/>
+                <a:ea typeface="맑은 고딕"/>
+              </a:rPr>
+              <a:t>도구 호출</a:t>
+            </a:r>
+            <a:r>
+              <a:rPr sz="1800" b="0">
+                <a:solidFill>
+                  <a:srgbClr val="000000"/>
+                </a:solidFill>
+                <a:latin typeface="맑은 고딕"/>
+                <a:ea typeface="맑은 고딕"/>
+              </a:rPr>
+              <a:t> —</a:t>
+            </a:r>
+            <a:r>
+              <a:rPr sz="1600" b="0">
+                <a:solidFill>
+                  <a:srgbClr val="000000"/>
+                </a:solidFill>
+                <a:latin typeface="맑은 고딕"/>
+                <a:ea typeface="맑은 고딕"/>
+              </a:rPr>
+              <a:t> 위험 등급으로 가른다. 읽기는 통과, 쓰기는 범위 안, 외부 호출은 거절이다.</a:t>
+            </a:r>
+          </a:p>
+          <a:p>
+            <a:pPr lvl="2" marL="723900" indent="-368300">
+              <a:spcBef>
+                <a:spcPts val="600"/>
+              </a:spcBef>
+              <a:spcAft>
+                <a:spcPts val="600"/>
+              </a:spcAft>
+              <a:buSzPct val="90000"/>
+              <a:buFont typeface="Wingdings" pitchFamily="2" charset="2"/>
+              <a:buChar char=""/>
+            </a:pPr>
+            <a:r>
+              <a:rPr sz="1800" b="1">
+                <a:solidFill>
+                  <a:srgbClr val="000000"/>
+                </a:solidFill>
+                <a:latin typeface="맑은 고딕"/>
+                <a:ea typeface="맑은 고딕"/>
+              </a:rPr>
+              <a:t>출력</a:t>
+            </a:r>
+            <a:r>
+              <a:rPr sz="1800" b="0">
+                <a:solidFill>
+                  <a:srgbClr val="000000"/>
+                </a:solidFill>
+                <a:latin typeface="맑은 고딕"/>
+                <a:ea typeface="맑은 고딕"/>
+              </a:rPr>
+              <a:t> —</a:t>
+            </a:r>
+            <a:r>
+              <a:rPr sz="1600" b="0">
+                <a:solidFill>
+                  <a:srgbClr val="000000"/>
+                </a:solidFill>
+                <a:latin typeface="맑은 고딕"/>
+                <a:ea typeface="맑은 고딕"/>
+              </a:rPr>
+              <a:t> 커밋 전에 비밀 키나 기대값 변경이 섞였는지 본다.</a:t>
+            </a:r>
+          </a:p>
+          <a:p>
+            <a:pPr lvl="2" marL="723900" indent="-368300">
+              <a:spcBef>
+                <a:spcPts val="600"/>
+              </a:spcBef>
+              <a:spcAft>
+                <a:spcPts val="600"/>
+              </a:spcAft>
+              <a:buSzPct val="90000"/>
+              <a:buFont typeface="Wingdings" pitchFamily="2" charset="2"/>
+              <a:buChar char=""/>
+            </a:pPr>
+            <a:r>
+              <a:rPr sz="1800" b="1">
+                <a:solidFill>
+                  <a:srgbClr val="000000"/>
+                </a:solidFill>
+                <a:latin typeface="맑은 고딕"/>
+                <a:ea typeface="맑은 고딕"/>
+              </a:rPr>
+              <a:t>환경</a:t>
+            </a:r>
+            <a:r>
+              <a:rPr sz="1800" b="0">
+                <a:solidFill>
+                  <a:srgbClr val="000000"/>
+                </a:solidFill>
+                <a:latin typeface="맑은 고딕"/>
+                <a:ea typeface="맑은 고딕"/>
+              </a:rPr>
+              <a:t> —</a:t>
+            </a:r>
+            <a:r>
+              <a:rPr sz="1600" b="0">
+                <a:solidFill>
+                  <a:srgbClr val="000000"/>
+                </a:solidFill>
+                <a:latin typeface="맑은 고딕"/>
+                <a:ea typeface="맑은 고딕"/>
+              </a:rPr>
+              <a:t> 앞의 세 검사를 감싼다. 검사를 빠져나간 행동도 환경에서 막힌다.</a:t>
+            </a:r>
+          </a:p>
+        </p:txBody>
+      </p:sp>
+      <p:sp>
+        <p:nvSpPr>
+          <p:cNvPr id="9" name="TextBox 12">
+            <a:extLst>
+              <a:ext uri="{FF2B5EF4-FFF2-40B4-BE49-F238E27FC236}">
+                <a16:creationId xmlns:a16="http://schemas.microsoft.com/office/drawing/2014/main" id="{654EDDB4-901F-3D48-A715-17D163E8A7AC}"/>
+              </a:ext>
+            </a:extLst>
+          </p:cNvPr>
+          <p:cNvSpPr txBox="1"/>
+          <p:nvPr/>
+        </p:nvSpPr>
+        <p:spPr>
+          <a:xfrm>
+            <a:off x="365760" y="4786468"/>
+            <a:ext cx="8412480" cy="201168"/>
+          </a:xfrm>
+          <a:prstGeom prst="rect">
+            <a:avLst/>
+          </a:prstGeom>
+          <a:noFill/>
+        </p:spPr>
+        <p:txBody>
+          <a:bodyPr wrap="square">
+            <a:spAutoFit/>
+          </a:bodyPr>
+          <a:lstStyle/>
+          <a:p>
+            <a:pPr algn="ctr"/>
+            <a:r>
+              <a:rPr sz="1400" b="1">
+                <a:solidFill>
+                  <a:srgbClr val="000000"/>
+                </a:solidFill>
+                <a:latin typeface="맑은 고딕"/>
+                <a:ea typeface="맑은 고딕"/>
+              </a:rPr>
+              <a:t>가드레일의 네 자리</a:t>
+            </a:r>
+          </a:p>
+        </p:txBody>
+      </p:sp>
+      <p:pic>
+        <p:nvPicPr>
+          <p:cNvPr id="10" name="mermaid Diagram 1"/>
+          <p:cNvPicPr>
+            <a:picLocks noChangeAspect="1"/>
+          </p:cNvPicPr>
+          <p:nvPr/>
+        </p:nvPicPr>
+        <p:blipFill>
+          <a:blip r:embed="mermaidImage1"/>
+          <a:stretch>
+            <a:fillRect/>
+          </a:stretch>
+        </p:blipFill>
+        <p:spPr>
+          <a:xfrm>
+            <a:off x="1934755" y="5024212"/>
+            <a:ext cx="5274489" cy="1352261"/>
+          </a:xfrm>
+          <a:prstGeom prst="rect">
+            <a:avLst/>
+          </a:prstGeom>
+        </p:spPr>
+      </p:pic>
+    </p:spTree>
+    <p:extLst>
+      <p:ext uri="{BB962C8B-B14F-4D97-AF65-F5344CB8AC3E}">
+        <p14:creationId xmlns:p14="http://schemas.microsoft.com/office/powerpoint/2010/main" val="3555436673"/>
+      </p:ext>
+    </p:extLst>
+  </p:cSld>
+  <p:clrMapOvr>
+    <a:masterClrMapping/>
+  </p:clrMapOvr>
+</p:sld>
+</file>
+
+<file path=ppt/slides/slide11.xml><?xml version="1.0" encoding="utf-8"?>
+<p:sld xmlns:a="http://schemas.openxmlformats.org/drawingml/2006/main" xmlns:r="http://schemas.openxmlformats.org/officeDocument/2006/relationships" xmlns:p="http://schemas.openxmlformats.org/presentationml/2006/main">
+  <p:cSld>
+    <p:spTree>
+      <p:nvGrpSpPr>
+        <p:cNvPr id="1" name="">
+          <a:extLst>
+            <a:ext uri="{FF2B5EF4-FFF2-40B4-BE49-F238E27FC236}">
               <a16:creationId xmlns:a16="http://schemas.microsoft.com/office/drawing/2014/main" id="{60B87152-D004-1569-E429-90A42420A65C}"/>
             </a:ext>
           </a:extLst>
@@ -3668,7 +4275,7 @@
           </p:nvPr>
         </p:nvGraphicFramePr>
         <p:xfrm>
-          <a:off x="992696" y="2112010"/>
+          <a:off x="992696" y="2386330"/>
           <a:ext cx="7145020" cy="3873500"/>
         </p:xfrm>
         <a:graphic>
@@ -4407,7 +5014,7 @@
         <p:spPr>
           <a:xfrm>
             <a:off x="365760" y="960120"/>
-            <a:ext cx="8412480" cy="781278"/>
+            <a:ext cx="8412480" cy="1038316"/>
           </a:xfrm>
           <a:prstGeom prst="rect">
             <a:avLst/>
@@ -4437,7 +5044,7 @@
                 <a:latin typeface="맑은 고딕"/>
                 <a:ea typeface="맑은 고딕"/>
               </a:rPr>
-              <a:t>위임 계약이 금지로 적은 세 규칙은 </a:t>
+              <a:t>위임 계약에 금지로 적은 세 규칙은 </a:t>
             </a:r>
             <a:r>
               <a:rPr sz="1800" b="1">
@@ -4447,7 +5054,7 @@
                 <a:latin typeface="맑은 고딕"/>
                 <a:ea typeface="맑은 고딕"/>
               </a:rPr>
-              <a:t>프롬프트에만 있으면 어겨진다</a:t>
+              <a:t>프롬프트에만 적혀 있으면 지켜지지 않는다</a:t>
             </a:r>
             <a:r>
               <a:rPr sz="1800" b="0">
@@ -4457,7 +5064,7 @@
                 <a:latin typeface="맑은 고딕"/>
                 <a:ea typeface="맑은 고딕"/>
               </a:rPr>
-              <a:t>. 같은 규칙을 환경·도구에 걸면 어길 경로가 사라진다.</a:t>
+              <a:t>. 같은 규칙을 환경과 도구에 걸면 어길 방법 자체가 없어진다.</a:t>
             </a:r>
           </a:p>
         </p:txBody>
@@ -4522,7 +5129,7 @@
                 <a:ea typeface="맑은 고딕" panose="020B0503020000020004" pitchFamily="34" charset="-127"/>
                 <a:cs typeface="+mn-cs"/>
               </a:rPr>
-              <a:t>- 10 -</a:t>
+              <a:t>- 11 -</a:t>
             </a:r>
           </a:p>
         </p:txBody>
@@ -4541,7 +5148,7 @@
         </p:nvSpPr>
         <p:spPr>
           <a:xfrm>
-            <a:off x="365760" y="1813560"/>
+            <a:off x="365760" y="2087880"/>
             <a:ext cx="8412480" cy="222250"/>
           </a:xfrm>
           <a:prstGeom prst="rect">
@@ -4590,7 +5197,7 @@
         </p:nvSpPr>
         <p:spPr>
           <a:xfrm>
-            <a:off x="365760" y="3492610"/>
+            <a:off x="365760" y="3766930"/>
             <a:ext cx="8412480" cy="2089833"/>
           </a:xfrm>
           <a:prstGeom prst="rect">
@@ -4747,7 +5354,7 @@
 </p:sld>
 </file>
 
-<file path=ppt/slides/slide11.xml><?xml version="1.0" encoding="utf-8"?>
+<file path=ppt/slides/slide12.xml><?xml version="1.0" encoding="utf-8"?>
 <p:sld xmlns:a="http://schemas.openxmlformats.org/drawingml/2006/main" xmlns:r="http://schemas.openxmlformats.org/officeDocument/2006/relationships" xmlns:p="http://schemas.openxmlformats.org/presentationml/2006/main">
   <p:cSld>
     <p:spTree>
@@ -4846,7 +5453,7 @@
                   <a:prstClr val="black"/>
                 </a:solidFill>
               </a:rPr>
-              <a:t>- 11 -</a:t>
+              <a:t>- 12 -</a:t>
             </a:r>
           </a:p>
         </p:txBody>
@@ -5072,7 +5679,27 @@
                 <a:latin typeface="맑은 고딕"/>
                 <a:ea typeface="맑은 고딕"/>
               </a:rPr>
-              <a:t>"The engineering question becomes how to cap the blast radius", [Anthropic 2026c]</a:t>
+              <a:t>"The engineering question becomes how to cap the blast radius"</a:t>
+            </a:r>
+            <a:r>
+              <a:rPr sz="1000" b="0">
+                <a:solidFill>
+                  <a:srgbClr val="000000"/>
+                </a:solidFill>
+                <a:latin typeface="맑은 고딕"/>
+                <a:ea typeface="맑은 고딕"/>
+              </a:rPr>
+              <a:t>, </a:t>
+            </a:r>
+            <a:r>
+              <a:rPr sz="1000" b="0">
+                <a:solidFill>
+                  <a:srgbClr val="000000"/>
+                </a:solidFill>
+                <a:latin typeface="맑은 고딕"/>
+                <a:ea typeface="맑은 고딕"/>
+              </a:rPr>
+              <a:t>[Anthropic 2026c]</a:t>
             </a:r>
           </a:p>
           <a:p>
@@ -5178,7 +5805,7 @@
                 <a:latin typeface="맑은 고딕"/>
                 <a:ea typeface="맑은 고딕"/>
               </a:rPr>
-              <a:t>끊는 자리는 프로세스·파일 시스템·네트워크·자격 넷이다. "주문한다"는 가상 머신까지 가지 않고 </a:t>
+              <a:t>범위를 끊을 수 있는 곳은 프로세스·파일 시스템·네트워크·자격이다. "주문한다"는 가상 머신까지 쓰지 않고 </a:t>
             </a:r>
             <a:r>
               <a:rPr sz="1800" b="1">
@@ -5302,7 +5929,7 @@
 </p:sld>
 </file>
 
-<file path=ppt/slides/slide12.xml><?xml version="1.0" encoding="utf-8"?>
+<file path=ppt/slides/slide13.xml><?xml version="1.0" encoding="utf-8"?>
 <p:sld xmlns:a="http://schemas.openxmlformats.org/drawingml/2006/main" xmlns:r="http://schemas.openxmlformats.org/officeDocument/2006/relationships" xmlns:p="http://schemas.openxmlformats.org/presentationml/2006/main">
   <p:cSld>
     <p:spTree>
@@ -6342,7 +6969,27 @@
                 <a:latin typeface="맑은 고딕"/>
                 <a:ea typeface="맑은 고딕"/>
               </a:rPr>
-              <a:t>"We see sandboxing as a sensible default rather than an optional enhancement", [Thoughtworks 2026]</a:t>
+              <a:t>"We see sandboxing as a sensible default rather than an optional enhancement"</a:t>
+            </a:r>
+            <a:r>
+              <a:rPr sz="1000" b="0">
+                <a:solidFill>
+                  <a:srgbClr val="000000"/>
+                </a:solidFill>
+                <a:latin typeface="맑은 고딕"/>
+                <a:ea typeface="맑은 고딕"/>
+              </a:rPr>
+              <a:t>, </a:t>
+            </a:r>
+            <a:r>
+              <a:rPr sz="1000" b="0">
+                <a:solidFill>
+                  <a:srgbClr val="000000"/>
+                </a:solidFill>
+                <a:latin typeface="맑은 고딕"/>
+                <a:ea typeface="맑은 고딕"/>
+              </a:rPr>
+              <a:t>[Thoughtworks 2026]</a:t>
             </a:r>
           </a:p>
         </p:txBody>
@@ -6407,7 +7054,7 @@
                 <a:ea typeface="맑은 고딕" panose="020B0503020000020004" pitchFamily="34" charset="-127"/>
                 <a:cs typeface="+mn-cs"/>
               </a:rPr>
-              <a:t>- 12 -</a:t>
+              <a:t>- 13 -</a:t>
             </a:r>
           </a:p>
         </p:txBody>
@@ -6508,7 +7155,7 @@
                 <a:latin typeface="맑은 고딕"/>
                 <a:ea typeface="맑은 고딕"/>
               </a:rPr>
-              <a:t>기본값이 거절이면 사람에게 물을 일도 준다. 환경 제약으로 바꾼 뒤 권한 요청이 </a:t>
+              <a:t>기본값을 거절로 두면 사람에게 물어야 할 일도 줄어든다. 환경 제약으로 바꾼 뒤 권한 요청이 </a:t>
             </a:r>
             <a:r>
               <a:rPr sz="1800" b="1">
@@ -6599,7 +7246,7 @@
 </p:sld>
 </file>
 
-<file path=ppt/slides/slide13.xml><?xml version="1.0" encoding="utf-8"?>
+<file path=ppt/slides/slide14.xml><?xml version="1.0" encoding="utf-8"?>
 <p:sld xmlns:a="http://schemas.openxmlformats.org/drawingml/2006/main" xmlns:r="http://schemas.openxmlformats.org/officeDocument/2006/relationships" xmlns:p="http://schemas.openxmlformats.org/presentationml/2006/main">
   <p:cSld>
     <p:spTree>
@@ -6698,7 +7345,7 @@
                   <a:prstClr val="black"/>
                 </a:solidFill>
               </a:rPr>
-              <a:t>- 13 -</a:t>
+              <a:t>- 14 -</a:t>
             </a:r>
           </a:p>
         </p:txBody>
@@ -7119,7 +7766,7 @@
 </p:sld>
 </file>
 
-<file path=ppt/slides/slide14.xml><?xml version="1.0" encoding="utf-8"?>
+<file path=ppt/slides/slide15.xml><?xml version="1.0" encoding="utf-8"?>
 <p:sld xmlns:a="http://schemas.openxmlformats.org/drawingml/2006/main" xmlns:r="http://schemas.openxmlformats.org/officeDocument/2006/relationships" xmlns:p="http://schemas.openxmlformats.org/presentationml/2006/main">
   <p:cSld>
     <p:spTree>
@@ -9052,7 +9699,7 @@
                 <a:ea typeface="맑은 고딕" panose="020B0503020000020004" pitchFamily="34" charset="-127"/>
                 <a:cs typeface="+mn-cs"/>
               </a:rPr>
-              <a:t>- 14 -</a:t>
+              <a:t>- 15 -</a:t>
             </a:r>
           </a:p>
         </p:txBody>
@@ -9153,7 +9800,7 @@
                 <a:latin typeface="맑은 고딕"/>
                 <a:ea typeface="맑은 고딕"/>
               </a:rPr>
-              <a:t>표에 못 들어간 것도 있다. "명세에 없는 업무 규칙을 정해야 할 때"는 기계가 판정할 수 없어 </a:t>
+              <a:t>표에 넣지 못한 것도 있다. 명세에 없는 업무 규칙을 정해야 하는 상황은 기계가 판정할 수 없어 </a:t>
             </a:r>
             <a:r>
               <a:rPr sz="1800" b="1">
@@ -9173,7 +9820,7 @@
                 <a:latin typeface="맑은 고딕"/>
                 <a:ea typeface="맑은 고딕"/>
               </a:rPr>
-              <a:t>으로 남고, 에이전트가 멈추고 사람에게 묻는다.</a:t>
+              <a:t>으로 남기고, 에이전트가 멈춰 사람에게 묻게 한다.</a:t>
             </a:r>
           </a:p>
           <a:p>
@@ -9196,7 +9843,7 @@
                 <a:latin typeface="맑은 고딕"/>
                 <a:ea typeface="맑은 고딕"/>
               </a:rPr>
-              <a:t>여섯을 환경과 도구가 거절해 주는 덕분에, 사람이 보는 자리는 </a:t>
+              <a:t>여섯 위험을 환경과 도구가 거절해 주므로, 사람이 직접 확인하는 자리는 </a:t>
             </a:r>
             <a:r>
               <a:rPr sz="1800" b="1">
@@ -9234,7 +9881,7 @@
 </p:sld>
 </file>
 
-<file path=ppt/slides/slide15.xml><?xml version="1.0" encoding="utf-8"?>
+<file path=ppt/slides/slide16.xml><?xml version="1.0" encoding="utf-8"?>
 <p:sld xmlns:a="http://schemas.openxmlformats.org/drawingml/2006/main" xmlns:r="http://schemas.openxmlformats.org/officeDocument/2006/relationships" xmlns:p="http://schemas.openxmlformats.org/presentationml/2006/main">
   <p:cSld>
     <p:spTree>
@@ -10256,7 +10903,7 @@
                 <a:ea typeface="맑은 고딕" panose="020B0503020000020004" pitchFamily="34" charset="-127"/>
                 <a:cs typeface="+mn-cs"/>
               </a:rPr>
-              <a:t>- 15 -</a:t>
+              <a:t>- 16 -</a:t>
             </a:r>
           </a:p>
         </p:txBody>
@@ -10429,458 +11076,6 @@
     <p:extLst>
       <p:ext uri="{BB962C8B-B14F-4D97-AF65-F5344CB8AC3E}">
         <p14:creationId xmlns:p14="http://schemas.microsoft.com/office/powerpoint/2010/main" val="2789569477"/>
-      </p:ext>
-    </p:extLst>
-  </p:cSld>
-  <p:clrMapOvr>
-    <a:masterClrMapping/>
-  </p:clrMapOvr>
-</p:sld>
-</file>
-
-<file path=ppt/slides/slide16.xml><?xml version="1.0" encoding="utf-8"?>
-<p:sld xmlns:a="http://schemas.openxmlformats.org/drawingml/2006/main" xmlns:r="http://schemas.openxmlformats.org/officeDocument/2006/relationships" xmlns:p="http://schemas.openxmlformats.org/presentationml/2006/main">
-  <p:cSld>
-    <p:spTree>
-      <p:nvGrpSpPr>
-        <p:cNvPr id="1" name="">
-          <a:extLst>
-            <a:ext uri="{FF2B5EF4-FFF2-40B4-BE49-F238E27FC236}">
-              <a16:creationId xmlns:a16="http://schemas.microsoft.com/office/drawing/2014/main" id="{8E4F1F13-426B-086B-7D8C-9A58A0F879DB}"/>
-            </a:ext>
-          </a:extLst>
-        </p:cNvPr>
-        <p:cNvGrpSpPr/>
-        <p:nvPr/>
-      </p:nvGrpSpPr>
-      <p:grpSpPr>
-        <a:xfrm>
-          <a:off x="0" y="0"/>
-          <a:ext cx="0" cy="0"/>
-          <a:chOff x="0" y="0"/>
-          <a:chExt cx="0" cy="0"/>
-        </a:xfrm>
-      </p:grpSpPr>
-      <p:sp>
-        <p:nvSpPr>
-          <p:cNvPr id="2" name="제목 1">
-            <a:extLst>
-              <a:ext uri="{FF2B5EF4-FFF2-40B4-BE49-F238E27FC236}">
-                <a16:creationId xmlns:a16="http://schemas.microsoft.com/office/drawing/2014/main" id="{AA26A92D-924E-0575-9551-F8FD7BFD3FAD}"/>
-              </a:ext>
-            </a:extLst>
-          </p:cNvPr>
-          <p:cNvSpPr>
-            <a:spLocks noGrp="1"/>
-          </p:cNvSpPr>
-          <p:nvPr>
-            <p:ph type="title"/>
-          </p:nvPr>
-        </p:nvSpPr>
-        <p:spPr/>
-        <p:txBody>
-          <a:bodyPr/>
-          <a:lstStyle/>
-          <a:p>
-            <a:r>
-              <a:rPr sz="2400" b="1">
-                <a:solidFill>
-                  <a:srgbClr val="000000"/>
-                </a:solidFill>
-                <a:latin typeface="맑은 고딕"/>
-                <a:ea typeface="맑은 고딕"/>
-              </a:rPr>
-              <a:t>가드레일 과신</a:t>
-            </a:r>
-          </a:p>
-          <a:p>
-            <a:r>
-              <a:rPr sz="1100" b="1">
-                <a:solidFill>
-                  <a:srgbClr val="000000"/>
-                </a:solidFill>
-                <a:latin typeface="맑은 고딕"/>
-                <a:ea typeface="맑은 고딕"/>
-              </a:rPr>
-              <a:t>08. 잘못된 관행</a:t>
-            </a:r>
-          </a:p>
-        </p:txBody>
-      </p:sp>
-      <p:sp>
-        <p:nvSpPr>
-          <p:cNvPr id="3" name="슬라이드 번호 개체 틀 2">
-            <a:extLst>
-              <a:ext uri="{FF2B5EF4-FFF2-40B4-BE49-F238E27FC236}">
-                <a16:creationId xmlns:a16="http://schemas.microsoft.com/office/drawing/2014/main" id="{12CF30EE-4DFD-8063-56B8-B8689E76DFCA}"/>
-              </a:ext>
-            </a:extLst>
-          </p:cNvPr>
-          <p:cNvSpPr>
-            <a:spLocks noGrp="1"/>
-          </p:cNvSpPr>
-          <p:nvPr>
-            <p:ph type="sldNum" sz="quarter" idx="10"/>
-          </p:nvPr>
-        </p:nvSpPr>
-        <p:spPr/>
-        <p:txBody>
-          <a:bodyPr/>
-          <a:lstStyle/>
-          <a:p>
-            <a:pPr>
-              <a:defRPr/>
-            </a:pPr>
-            <a:r>
-              <a:rPr lang="en-US" altLang="ko-KR">
-                <a:solidFill>
-                  <a:prstClr val="black"/>
-                </a:solidFill>
-              </a:rPr>
-              <a:t>- 16 -</a:t>
-            </a:r>
-          </a:p>
-        </p:txBody>
-      </p:sp>
-      <p:sp>
-        <p:nvSpPr>
-          <p:cNvPr id="5" name="텍스트 개체 틀 4">
-            <a:extLst>
-              <a:ext uri="{FF2B5EF4-FFF2-40B4-BE49-F238E27FC236}">
-                <a16:creationId xmlns:a16="http://schemas.microsoft.com/office/drawing/2014/main" id="{D66274C8-E16F-5AEB-614B-D8D32DA3E8C6}"/>
-              </a:ext>
-            </a:extLst>
-          </p:cNvPr>
-          <p:cNvSpPr>
-            <a:spLocks noGrp="1"/>
-          </p:cNvSpPr>
-          <p:nvPr>
-            <p:ph type="body" sz="quarter" idx="11"/>
-          </p:nvPr>
-        </p:nvSpPr>
-        <p:spPr/>
-        <p:txBody>
-          <a:bodyPr/>
-          <a:lstStyle/>
-          <a:p>
-            <a:r>
-              <a:rPr kumimoji="1" lang="en-US" altLang="ko-KR" sz="1400" dirty="0" err="1"/>
-              <a:t>08. 실행 제약과 가드레일의 역할</a:t>
-            </a:r>
-          </a:p>
-        </p:txBody>
-      </p:sp>
-      <p:sp>
-        <p:nvSpPr>
-          <p:cNvPr id="6" name="텍스트 개체 틀 5">
-            <a:extLst>
-              <a:ext uri="{FF2B5EF4-FFF2-40B4-BE49-F238E27FC236}">
-                <a16:creationId xmlns:a16="http://schemas.microsoft.com/office/drawing/2014/main" id="{A24E58E1-194B-A320-AEEE-24D08685BB67}"/>
-              </a:ext>
-            </a:extLst>
-          </p:cNvPr>
-          <p:cNvSpPr>
-            <a:spLocks noGrp="1"/>
-          </p:cNvSpPr>
-          <p:nvPr>
-            <p:ph type="body" sz="quarter" idx="12"/>
-          </p:nvPr>
-        </p:nvSpPr>
-        <p:spPr/>
-        <p:txBody>
-          <a:bodyPr/>
-          <a:lstStyle/>
-          <a:p>
-            <a:endParaRPr kumimoji="1" lang="ko-KR" altLang="en-US" dirty="0"/>
-          </a:p>
-        </p:txBody>
-      </p:sp>
-      <p:sp>
-        <p:nvSpPr>
-          <p:cNvPr id="7" name="텍스트 개체 틀 6">
-            <a:extLst>
-              <a:ext uri="{FF2B5EF4-FFF2-40B4-BE49-F238E27FC236}">
-                <a16:creationId xmlns:a16="http://schemas.microsoft.com/office/drawing/2014/main" id="{A219F420-613B-6234-45F6-0955A9A4505F}"/>
-              </a:ext>
-            </a:extLst>
-          </p:cNvPr>
-          <p:cNvSpPr>
-            <a:spLocks noGrp="1"/>
-          </p:cNvSpPr>
-          <p:nvPr>
-            <p:ph type="body" sz="quarter" idx="13"/>
-          </p:nvPr>
-        </p:nvSpPr>
-        <p:spPr/>
-        <p:txBody>
-          <a:bodyPr/>
-          <a:lstStyle/>
-          <a:p>
-            <a:endParaRPr kumimoji="1" lang="en-US" altLang="ko-KR" dirty="0"/>
-          </a:p>
-        </p:txBody>
-      </p:sp>
-      <p:sp>
-        <p:nvSpPr>
-          <p:cNvPr id="8" name="내용 개체 틀 7">
-            <a:extLst>
-              <a:ext uri="{FF2B5EF4-FFF2-40B4-BE49-F238E27FC236}">
-                <a16:creationId xmlns:a16="http://schemas.microsoft.com/office/drawing/2014/main" id="{BEBA2C4A-B0BF-F2E4-EA6E-614C99CBA184}"/>
-              </a:ext>
-            </a:extLst>
-          </p:cNvPr>
-          <p:cNvSpPr>
-            <a:spLocks noGrp="1"/>
-          </p:cNvSpPr>
-          <p:nvPr>
-            <p:ph idx="1"/>
-          </p:nvPr>
-        </p:nvSpPr>
-        <p:spPr/>
-        <p:txBody>
-          <a:bodyPr>
-            <a:normAutofit/>
-          </a:bodyPr>
-          <a:lstStyle/>
-          <a:p>
-            <a:pPr marL="0" indent="0">
-              <a:spcBef>
-                <a:spcPts val="600"/>
-              </a:spcBef>
-              <a:spcAft>
-                <a:spcPts val="600"/>
-              </a:spcAft>
-              <a:buNone/>
-            </a:pPr>
-            <a:r>
-              <a:rPr sz="1800" b="0">
-                <a:solidFill>
-                  <a:srgbClr val="000000"/>
-                </a:solidFill>
-                <a:latin typeface="맑은 고딕"/>
-                <a:ea typeface="맑은 고딕"/>
-              </a:rPr>
-              <a:t>가드레일을 세우고 나면 결과도 안전하다고 여기기 쉽다. </a:t>
-            </a:r>
-            <a:r>
-              <a:rPr sz="1800" b="1">
-                <a:solidFill>
-                  <a:srgbClr val="000000"/>
-                </a:solidFill>
-                <a:latin typeface="맑은 고딕"/>
-                <a:ea typeface="맑은 고딕"/>
-              </a:rPr>
-              <a:t>막는 것과 보는 것은 다르다.</a:t>
-            </a:r>
-          </a:p>
-          <a:p>
-            <a:pPr lvl="2" marL="723900" indent="-368300">
-              <a:spcBef>
-                <a:spcPts val="600"/>
-              </a:spcBef>
-              <a:spcAft>
-                <a:spcPts val="600"/>
-              </a:spcAft>
-              <a:buSzPct val="90000"/>
-              <a:buFont typeface="Wingdings" pitchFamily="2" charset="2"/>
-              <a:buChar char=""/>
-            </a:pPr>
-            <a:r>
-              <a:rPr sz="1800" b="1">
-                <a:solidFill>
-                  <a:srgbClr val="000000"/>
-                </a:solidFill>
-                <a:latin typeface="맑은 고딕"/>
-                <a:ea typeface="맑은 고딕"/>
-              </a:rPr>
-              <a:t>확률적인 방어</a:t>
-            </a:r>
-            <a:r>
-              <a:rPr sz="1800" b="0">
-                <a:solidFill>
-                  <a:srgbClr val="000000"/>
-                </a:solidFill>
-                <a:latin typeface="맑은 고딕"/>
-                <a:ea typeface="맑은 고딕"/>
-              </a:rPr>
-              <a:t>에는 놓치는 비율이 0이 아니다</a:t>
-            </a:r>
-            <a:r>
-              <a:rPr sz="1000" b="0">
-                <a:solidFill>
-                  <a:srgbClr val="000000"/>
-                </a:solidFill>
-                <a:latin typeface="맑은 고딕"/>
-                <a:ea typeface="맑은 고딕"/>
-              </a:rPr>
-              <a:t>, </a:t>
-            </a:r>
-            <a:r>
-              <a:rPr sz="1000" b="0">
-                <a:solidFill>
-                  <a:srgbClr val="000000"/>
-                </a:solidFill>
-                <a:latin typeface="맑은 고딕"/>
-                <a:ea typeface="맑은 고딕"/>
-              </a:rPr>
-              <a:t>"Any probabilistic defense has a non-zero miss rate", [Anthropic 2026c]</a:t>
-            </a:r>
-          </a:p>
-          <a:p>
-            <a:pPr lvl="2" marL="723900" indent="-368300">
-              <a:spcBef>
-                <a:spcPts val="600"/>
-              </a:spcBef>
-              <a:spcAft>
-                <a:spcPts val="600"/>
-              </a:spcAft>
-              <a:buSzPct val="90000"/>
-              <a:buFont typeface="Wingdings" pitchFamily="2" charset="2"/>
-              <a:buChar char=""/>
-            </a:pPr>
-            <a:r>
-              <a:rPr sz="1800" b="0">
-                <a:solidFill>
-                  <a:srgbClr val="000000"/>
-                </a:solidFill>
-                <a:latin typeface="맑은 고딕"/>
-                <a:ea typeface="맑은 고딕"/>
-              </a:rPr>
-              <a:t>가드레일은 </a:t>
-            </a:r>
-            <a:r>
-              <a:rPr sz="1800" b="1">
-                <a:solidFill>
-                  <a:srgbClr val="000000"/>
-                </a:solidFill>
-                <a:latin typeface="맑은 고딕"/>
-                <a:ea typeface="맑은 고딕"/>
-              </a:rPr>
-              <a:t>금지한 행동</a:t>
-            </a:r>
-            <a:r>
-              <a:rPr sz="1800" b="0">
-                <a:solidFill>
-                  <a:srgbClr val="000000"/>
-                </a:solidFill>
-                <a:latin typeface="맑은 고딕"/>
-                <a:ea typeface="맑은 고딕"/>
-              </a:rPr>
-              <a:t>만 막는다. 결과가 틀려도 금지된 행동이 아니어서 그대로 통과하고, </a:t>
-            </a:r>
-            <a:r>
-              <a:rPr sz="1800" b="1">
-                <a:solidFill>
-                  <a:srgbClr val="000000"/>
-                </a:solidFill>
-                <a:latin typeface="맑은 고딕"/>
-                <a:ea typeface="맑은 고딕"/>
-              </a:rPr>
-              <a:t>수용 테스트가 실패해야</a:t>
-            </a:r>
-            <a:r>
-              <a:rPr sz="1800" b="0">
-                <a:solidFill>
-                  <a:srgbClr val="000000"/>
-                </a:solidFill>
-                <a:latin typeface="맑은 고딕"/>
-                <a:ea typeface="맑은 고딕"/>
-              </a:rPr>
-              <a:t> 드러난다.</a:t>
-            </a:r>
-          </a:p>
-          <a:p>
-            <a:pPr lvl="2" marL="723900" indent="-368300">
-              <a:spcBef>
-                <a:spcPts val="600"/>
-              </a:spcBef>
-              <a:spcAft>
-                <a:spcPts val="600"/>
-              </a:spcAft>
-              <a:buSzPct val="90000"/>
-              <a:buFont typeface="Wingdings" pitchFamily="2" charset="2"/>
-              <a:buChar char=""/>
-            </a:pPr>
-            <a:r>
-              <a:rPr sz="1800" b="0">
-                <a:solidFill>
-                  <a:srgbClr val="000000"/>
-                </a:solidFill>
-                <a:latin typeface="맑은 고딕"/>
-                <a:ea typeface="맑은 고딕"/>
-              </a:rPr>
-              <a:t>업무 규칙의 해석이나 설계의 적절성은 가드레일이 판정하지 못한다. 그 자리는 </a:t>
-            </a:r>
-            <a:r>
-              <a:rPr sz="1800" b="1">
-                <a:solidFill>
-                  <a:srgbClr val="000000"/>
-                </a:solidFill>
-                <a:latin typeface="맑은 고딕"/>
-                <a:ea typeface="맑은 고딕"/>
-              </a:rPr>
-              <a:t>사람의 판단</a:t>
-            </a:r>
-            <a:r>
-              <a:rPr sz="1800" b="0">
-                <a:solidFill>
-                  <a:srgbClr val="000000"/>
-                </a:solidFill>
-                <a:latin typeface="맑은 고딕"/>
-                <a:ea typeface="맑은 고딕"/>
-              </a:rPr>
-              <a:t>으로 남는다.</a:t>
-            </a:r>
-          </a:p>
-          <a:p>
-            <a:pPr lvl="2" marL="723900" indent="-368300">
-              <a:spcBef>
-                <a:spcPts val="600"/>
-              </a:spcBef>
-              <a:spcAft>
-                <a:spcPts val="600"/>
-              </a:spcAft>
-              <a:buSzPct val="90000"/>
-              <a:buFont typeface="Wingdings" pitchFamily="2" charset="2"/>
-              <a:buChar char=""/>
-            </a:pPr>
-            <a:r>
-              <a:rPr sz="1800" b="0">
-                <a:solidFill>
-                  <a:srgbClr val="000000"/>
-                </a:solidFill>
-                <a:latin typeface="맑은 고딕"/>
-                <a:ea typeface="맑은 고딕"/>
-              </a:rPr>
-              <a:t>거절이 늘어 에이전트가 더 나아가지 못하면 막은 범위를 다시 본다. 다 막는 것은 </a:t>
-            </a:r>
-            <a:r>
-              <a:rPr sz="1800" b="1">
-                <a:solidFill>
-                  <a:srgbClr val="000000"/>
-                </a:solidFill>
-                <a:latin typeface="맑은 고딕"/>
-                <a:ea typeface="맑은 고딕"/>
-              </a:rPr>
-              <a:t>아무것도 맡기지 않는 것</a:t>
-            </a:r>
-            <a:r>
-              <a:rPr sz="1800" b="0">
-                <a:solidFill>
-                  <a:srgbClr val="000000"/>
-                </a:solidFill>
-                <a:latin typeface="맑은 고딕"/>
-                <a:ea typeface="맑은 고딕"/>
-              </a:rPr>
-              <a:t>과 같다.</a:t>
-            </a:r>
-          </a:p>
-        </p:txBody>
-      </p:sp>
-    </p:spTree>
-    <p:extLst>
-      <p:ext uri="{BB962C8B-B14F-4D97-AF65-F5344CB8AC3E}">
-        <p14:creationId xmlns:p14="http://schemas.microsoft.com/office/powerpoint/2010/main" val="3555436673"/>
       </p:ext>
     </p:extLst>
   </p:cSld>
@@ -10942,7 +11137,19 @@
                 <a:latin typeface="맑은 고딕"/>
                 <a:ea typeface="맑은 고딕"/>
               </a:rPr>
-              <a:t>09. 실습 — 가드레일 배치</a:t>
+              <a:t>가드레일 과신</a:t>
+            </a:r>
+          </a:p>
+          <a:p>
+            <a:r>
+              <a:rPr sz="1100" b="1">
+                <a:solidFill>
+                  <a:srgbClr val="000000"/>
+                </a:solidFill>
+                <a:latin typeface="맑은 고딕"/>
+                <a:ea typeface="맑은 고딕"/>
+              </a:rPr>
+              <a:t>08. 잘못된 관행</a:t>
             </a:r>
           </a:p>
         </p:txBody>
@@ -11076,12 +11283,7 @@
             <p:ph idx="1"/>
           </p:nvPr>
         </p:nvSpPr>
-        <p:spPr>
-          <a:xfrm>
-            <a:off x="365760" y="960120"/>
-            <a:ext cx="8622792" cy="5352345"/>
-          </a:xfrm>
-        </p:spPr>
+        <p:spPr/>
         <p:txBody>
           <a:bodyPr>
             <a:normAutofit/>
@@ -11090,51 +11292,41 @@
           <a:p>
             <a:pPr marL="0" indent="0">
               <a:spcBef>
-                <a:spcPts val="300"/>
+                <a:spcPts val="600"/>
               </a:spcBef>
               <a:spcAft>
-                <a:spcPts val="300"/>
+                <a:spcPts val="600"/>
               </a:spcAft>
               <a:buNone/>
             </a:pPr>
             <a:r>
-              <a:rPr sz="1600" b="0">
-                <a:solidFill>
-                  <a:srgbClr val="000000"/>
-                </a:solidFill>
-                <a:latin typeface="맑은 고딕"/>
-                <a:ea typeface="맑은 고딕"/>
-              </a:rPr>
-              <a:t>실습 6의 위임 계약과 실습 7의 실행 흐름을 LLM에 제공하여 </a:t>
-            </a:r>
-            <a:r>
-              <a:rPr sz="1600" b="1">
-                <a:solidFill>
-                  <a:srgbClr val="000000"/>
-                </a:solidFill>
-                <a:latin typeface="맑은 고딕"/>
-                <a:ea typeface="맑은 고딕"/>
-              </a:rPr>
-              <a:t>"신청한다"의 가드레일 배치</a:t>
-            </a:r>
-            <a:r>
-              <a:rPr sz="1600" b="0">
-                <a:solidFill>
-                  <a:srgbClr val="000000"/>
-                </a:solidFill>
-                <a:latin typeface="맑은 고딕"/>
-                <a:ea typeface="맑은 고딕"/>
-              </a:rPr>
-              <a:t>를 만들고, 점검 항목으로 피드백하여 완성하십시오.</a:t>
+              <a:rPr sz="1800" b="0">
+                <a:solidFill>
+                  <a:srgbClr val="000000"/>
+                </a:solidFill>
+                <a:latin typeface="맑은 고딕"/>
+                <a:ea typeface="맑은 고딕"/>
+              </a:rPr>
+              <a:t>가드레일을 세우고 나면 결과도 안전하다고 여기기 쉽다. </a:t>
+            </a:r>
+            <a:r>
+              <a:rPr sz="1800" b="1">
+                <a:solidFill>
+                  <a:srgbClr val="000000"/>
+                </a:solidFill>
+                <a:latin typeface="맑은 고딕"/>
+                <a:ea typeface="맑은 고딕"/>
+              </a:rPr>
+              <a:t>막는 것과 보는 것은 다르다.</a:t>
             </a:r>
           </a:p>
           <a:p>
             <a:pPr lvl="2" marL="723900" indent="-368300">
               <a:spcBef>
-                <a:spcPts val="300"/>
+                <a:spcPts val="600"/>
               </a:spcBef>
               <a:spcAft>
-                <a:spcPts val="300"/>
+                <a:spcPts val="600"/>
               </a:spcAft>
               <a:buSzPct val="90000"/>
               <a:buFont typeface="Wingdings" pitchFamily="2" charset="2"/>
@@ -11148,73 +11340,82 @@
                 <a:latin typeface="맑은 고딕"/>
                 <a:ea typeface="맑은 고딕"/>
               </a:rPr>
-              <a:t>투입물</a:t>
-            </a:r>
-          </a:p>
-          <a:p>
-            <a:pPr lvl="3" marL="723900" indent="0">
+              <a:t>확률적인 방어</a:t>
+            </a:r>
+            <a:r>
+              <a:rPr sz="1800" b="0">
+                <a:solidFill>
+                  <a:srgbClr val="000000"/>
+                </a:solidFill>
+                <a:latin typeface="맑은 고딕"/>
+                <a:ea typeface="맑은 고딕"/>
+              </a:rPr>
+              <a:t>에는 놓치는 비율이 0이 아니다</a:t>
+            </a:r>
+            <a:r>
+              <a:rPr sz="1000" b="0">
+                <a:solidFill>
+                  <a:srgbClr val="000000"/>
+                </a:solidFill>
+                <a:latin typeface="맑은 고딕"/>
+                <a:ea typeface="맑은 고딕"/>
+              </a:rPr>
+              <a:t>, </a:t>
+            </a:r>
+            <a:r>
+              <a:rPr sz="1000" b="0">
+                <a:solidFill>
+                  <a:srgbClr val="000000"/>
+                </a:solidFill>
+                <a:latin typeface="맑은 고딕"/>
+                <a:ea typeface="맑은 고딕"/>
+              </a:rPr>
+              <a:t>"Any probabilistic defense has a non-zero miss rate"</a:t>
+            </a:r>
+            <a:r>
+              <a:rPr sz="1000" b="0">
+                <a:solidFill>
+                  <a:srgbClr val="000000"/>
+                </a:solidFill>
+                <a:latin typeface="맑은 고딕"/>
+                <a:ea typeface="맑은 고딕"/>
+              </a:rPr>
+              <a:t>, </a:t>
+            </a:r>
+            <a:r>
+              <a:rPr sz="1000" b="0">
+                <a:solidFill>
+                  <a:srgbClr val="000000"/>
+                </a:solidFill>
+                <a:latin typeface="맑은 고딕"/>
+                <a:ea typeface="맑은 고딕"/>
+              </a:rPr>
+              <a:t>[Anthropic 2026c]</a:t>
+            </a:r>
+          </a:p>
+          <a:p>
+            <a:pPr lvl="2" marL="723900" indent="-368300">
               <a:spcBef>
-                <a:spcPts val="300"/>
+                <a:spcPts val="600"/>
               </a:spcBef>
               <a:spcAft>
-                <a:spcPts val="300"/>
-              </a:spcAft>
-              <a:buNone/>
-            </a:pPr>
-            <a:r>
-              <a:rPr sz="1600" b="0">
-                <a:solidFill>
-                  <a:srgbClr val="000000"/>
-                </a:solidFill>
-                <a:latin typeface="맑은 고딕"/>
-                <a:ea typeface="맑은 고딕"/>
-              </a:rPr>
-              <a:t>실습 6의 </a:t>
-            </a:r>
-            <a:r>
-              <a:rPr sz="1600" b="1">
-                <a:solidFill>
-                  <a:srgbClr val="000000"/>
-                </a:solidFill>
-                <a:latin typeface="맑은 고딕"/>
-                <a:ea typeface="맑은 고딕"/>
-              </a:rPr>
-              <a:t>위임 계약</a:t>
-            </a:r>
-            <a:r>
-              <a:rPr sz="1600" b="0">
-                <a:solidFill>
-                  <a:srgbClr val="000000"/>
-                </a:solidFill>
-                <a:latin typeface="맑은 고딕"/>
-                <a:ea typeface="맑은 고딕"/>
-              </a:rPr>
-              <a:t>, 실습 7의 </a:t>
-            </a:r>
-            <a:r>
-              <a:rPr sz="1600" b="1">
-                <a:solidFill>
-                  <a:srgbClr val="000000"/>
-                </a:solidFill>
-                <a:latin typeface="맑은 고딕"/>
-                <a:ea typeface="맑은 고딕"/>
-              </a:rPr>
-              <a:t>실행 흐름과 확인 지점</a:t>
-            </a:r>
-          </a:p>
-          <a:p>
-            <a:pPr lvl="2" marL="723900" indent="-368300">
-              <a:spcBef>
-                <a:spcPts val="300"/>
-              </a:spcBef>
-              <a:spcAft>
-                <a:spcPts val="300"/>
+                <a:spcPts val="600"/>
               </a:spcAft>
               <a:buSzPct val="90000"/>
               <a:buFont typeface="Wingdings" pitchFamily="2" charset="2"/>
               <a:buChar char=""/>
             </a:pPr>
             <a:r>
+              <a:rPr sz="1800" b="0">
+                <a:solidFill>
+                  <a:srgbClr val="000000"/>
+                </a:solidFill>
+                <a:latin typeface="맑은 고딕"/>
+                <a:ea typeface="맑은 고딕"/>
+              </a:rPr>
+              <a:t>가드레일은 </a:t>
+            </a:r>
+            <a:r>
               <a:rPr sz="1800" b="1">
                 <a:solidFill>
                   <a:srgbClr val="000000"/>
@@ -11222,124 +11423,62 @@
                 <a:latin typeface="맑은 고딕"/>
                 <a:ea typeface="맑은 고딕"/>
               </a:rPr>
-              <a:t>프롬프트</a:t>
-            </a:r>
-          </a:p>
-          <a:p>
-            <a:pPr lvl="3" marL="723900" indent="0">
+              <a:t>금지한 행동</a:t>
+            </a:r>
+            <a:r>
+              <a:rPr sz="1800" b="0">
+                <a:solidFill>
+                  <a:srgbClr val="000000"/>
+                </a:solidFill>
+                <a:latin typeface="맑은 고딕"/>
+                <a:ea typeface="맑은 고딕"/>
+              </a:rPr>
+              <a:t>만 막는다. 결과가 틀려도 금지된 행동이 아니어서 그대로 통과하고, </a:t>
+            </a:r>
+            <a:r>
+              <a:rPr sz="1800" b="1">
+                <a:solidFill>
+                  <a:srgbClr val="000000"/>
+                </a:solidFill>
+                <a:latin typeface="맑은 고딕"/>
+                <a:ea typeface="맑은 고딕"/>
+              </a:rPr>
+              <a:t>수용 테스트가 실패해야</a:t>
+            </a:r>
+            <a:r>
+              <a:rPr sz="1800" b="0">
+                <a:solidFill>
+                  <a:srgbClr val="000000"/>
+                </a:solidFill>
+                <a:latin typeface="맑은 고딕"/>
+                <a:ea typeface="맑은 고딕"/>
+              </a:rPr>
+              <a:t> 드러난다.</a:t>
+            </a:r>
+          </a:p>
+          <a:p>
+            <a:pPr lvl="2" marL="723900" indent="-368300">
               <a:spcBef>
-                <a:spcPts val="300"/>
+                <a:spcPts val="600"/>
               </a:spcBef>
               <a:spcAft>
-                <a:spcPts val="300"/>
-              </a:spcAft>
-              <a:buNone/>
-            </a:pPr>
-            <a:r>
-              <a:rPr sz="1600" b="0">
-                <a:solidFill>
-                  <a:srgbClr val="000000"/>
-                </a:solidFill>
-                <a:latin typeface="맑은 고딕"/>
-                <a:ea typeface="맑은 고딕"/>
-              </a:rPr>
-              <a:t>① "신청한다 과제의 </a:t>
-            </a:r>
-            <a:r>
-              <a:rPr sz="1600" b="1">
-                <a:solidFill>
-                  <a:srgbClr val="000000"/>
-                </a:solidFill>
-                <a:latin typeface="맑은 고딕"/>
-                <a:ea typeface="맑은 고딕"/>
-              </a:rPr>
-              <a:t>위험을 확률과 크기</a:t>
-            </a:r>
-            <a:r>
-              <a:rPr sz="1600" b="0">
-                <a:solidFill>
-                  <a:srgbClr val="000000"/>
-                </a:solidFill>
-                <a:latin typeface="맑은 고딕"/>
-                <a:ea typeface="맑은 고딕"/>
-              </a:rPr>
-              <a:t>로 적고, 위험마다 가드레일을 </a:t>
-            </a:r>
-            <a:r>
-              <a:rPr sz="1600" b="1">
-                <a:solidFill>
-                  <a:srgbClr val="000000"/>
-                </a:solidFill>
-                <a:latin typeface="맑은 고딕"/>
-                <a:ea typeface="맑은 고딕"/>
-              </a:rPr>
-              <a:t>입력·도구 호출·출력·환경</a:t>
-            </a:r>
-            <a:r>
-              <a:rPr sz="1600" b="0">
-                <a:solidFill>
-                  <a:srgbClr val="000000"/>
-                </a:solidFill>
-                <a:latin typeface="맑은 고딕"/>
-                <a:ea typeface="맑은 고딕"/>
-              </a:rPr>
-              <a:t> 중 어디에 어떤 방식으로 둘지 표로 만들어줘."</a:t>
-            </a:r>
-          </a:p>
-          <a:p>
-            <a:pPr lvl="3" marL="723900" indent="0">
-              <a:spcBef>
-                <a:spcPts val="300"/>
-              </a:spcBef>
-              <a:spcAft>
-                <a:spcPts val="300"/>
-              </a:spcAft>
-              <a:buNone/>
-            </a:pPr>
-            <a:r>
-              <a:rPr sz="1600" b="0">
-                <a:solidFill>
-                  <a:srgbClr val="000000"/>
-                </a:solidFill>
-                <a:latin typeface="맑은 고딕"/>
-                <a:ea typeface="맑은 고딕"/>
-              </a:rPr>
-              <a:t>② "가드레일마다 </a:t>
-            </a:r>
-            <a:r>
-              <a:rPr sz="1600" b="1">
-                <a:solidFill>
-                  <a:srgbClr val="000000"/>
-                </a:solidFill>
-                <a:latin typeface="맑은 고딕"/>
-                <a:ea typeface="맑은 고딕"/>
-              </a:rPr>
-              <a:t>어긋나면 무엇이 일어나는지</a:t>
-            </a:r>
-            <a:r>
-              <a:rPr sz="1600" b="0">
-                <a:solidFill>
-                  <a:srgbClr val="000000"/>
-                </a:solidFill>
-                <a:latin typeface="맑은 고딕"/>
-                <a:ea typeface="맑은 고딕"/>
-              </a:rPr>
-              <a:t> 적고, 강제할 수 없어 지시나 멈출 조건으로 남기는 것을 구분해줘."</a:t>
-            </a:r>
-          </a:p>
-          <a:p>
-            <a:pPr lvl="2" marL="723900" indent="-368300">
-              <a:spcBef>
-                <a:spcPts val="300"/>
-              </a:spcBef>
-              <a:spcAft>
-                <a:spcPts val="300"/>
+                <a:spcPts val="600"/>
               </a:spcAft>
               <a:buSzPct val="90000"/>
               <a:buFont typeface="Wingdings" pitchFamily="2" charset="2"/>
               <a:buChar char=""/>
             </a:pPr>
             <a:r>
+              <a:rPr sz="1800" b="0">
+                <a:solidFill>
+                  <a:srgbClr val="000000"/>
+                </a:solidFill>
+                <a:latin typeface="맑은 고딕"/>
+                <a:ea typeface="맑은 고딕"/>
+              </a:rPr>
+              <a:t>업무 규칙의 해석이나 설계의 적절성은 가드레일이 판정하지 못한다. 그 자리는 </a:t>
+            </a:r>
+            <a:r>
               <a:rPr sz="1800" b="1">
                 <a:solidFill>
                   <a:srgbClr val="000000"/>
@@ -11347,398 +11486,42 @@
                 <a:latin typeface="맑은 고딕"/>
                 <a:ea typeface="맑은 고딕"/>
               </a:rPr>
-              <a:t>점검 항목</a:t>
-            </a:r>
-          </a:p>
-          <a:p>
-            <a:pPr lvl="3" marL="947420" indent="-223520">
+              <a:t>사람의 판단</a:t>
+            </a:r>
+            <a:r>
+              <a:rPr sz="1800" b="0">
+                <a:solidFill>
+                  <a:srgbClr val="000000"/>
+                </a:solidFill>
+                <a:latin typeface="맑은 고딕"/>
+                <a:ea typeface="맑은 고딕"/>
+              </a:rPr>
+              <a:t>으로 남는다.</a:t>
+            </a:r>
+          </a:p>
+          <a:p>
+            <a:pPr lvl="2" marL="723900" indent="-368300">
               <a:spcBef>
-                <a:spcPts val="300"/>
+                <a:spcPts val="600"/>
               </a:spcBef>
               <a:spcAft>
-                <a:spcPts val="300"/>
-              </a:spcAft>
-              <a:buNone/>
-            </a:pPr>
-            <a:r>
-              <a:rPr sz="1600" b="0">
-                <a:solidFill>
-                  <a:srgbClr val="000000"/>
-                </a:solidFill>
-                <a:latin typeface="맑은 고딕"/>
-                <a:ea typeface="맑은 고딕"/>
-              </a:rPr>
-              <a:t>1. </a:t>
-            </a:r>
-            <a:r>
-              <a:rPr sz="1600" b="1">
-                <a:solidFill>
-                  <a:srgbClr val="000000"/>
-                </a:solidFill>
-                <a:latin typeface="맑은 고딕"/>
-                <a:ea typeface="맑은 고딕"/>
-              </a:rPr>
-              <a:t>위험의 범위</a:t>
-            </a:r>
-            <a:r>
-              <a:rPr sz="1600" b="0">
-                <a:solidFill>
-                  <a:srgbClr val="000000"/>
-                </a:solidFill>
-                <a:latin typeface="맑은 고딕"/>
-                <a:ea typeface="맑은 고딕"/>
-              </a:rPr>
-              <a:t> —</a:t>
-            </a:r>
-            <a:r>
-              <a:rPr sz="1400" b="0">
-                <a:solidFill>
-                  <a:srgbClr val="000000"/>
-                </a:solidFill>
-                <a:latin typeface="맑은 고딕"/>
-                <a:ea typeface="맑은 고딕"/>
-              </a:rPr>
-              <a:t> 모델의 오답이 아니라 </a:t>
-            </a:r>
-            <a:r>
-              <a:rPr sz="1400" b="1">
-                <a:solidFill>
-                  <a:srgbClr val="000000"/>
-                </a:solidFill>
-                <a:latin typeface="맑은 고딕"/>
-                <a:ea typeface="맑은 고딕"/>
-              </a:rPr>
-              <a:t>행동</a:t>
-            </a:r>
-            <a:r>
-              <a:rPr sz="1200" b="0">
-                <a:solidFill>
-                  <a:srgbClr val="000000"/>
-                </a:solidFill>
-                <a:latin typeface="맑은 고딕"/>
-                <a:ea typeface="맑은 고딕"/>
-              </a:rPr>
-              <a:t>(쓰기·외부 호출·자격)</a:t>
-            </a:r>
-            <a:r>
-              <a:rPr sz="1400" b="0">
-                <a:solidFill>
-                  <a:srgbClr val="000000"/>
-                </a:solidFill>
-                <a:latin typeface="맑은 고딕"/>
-                <a:ea typeface="맑은 고딕"/>
-              </a:rPr>
-              <a:t>이 만드는 위험을 적었는가?</a:t>
-            </a:r>
-          </a:p>
-          <a:p>
-            <a:pPr lvl="3" marL="947420" indent="-223520">
-              <a:spcBef>
-                <a:spcPts val="300"/>
-              </a:spcBef>
-              <a:spcAft>
-                <a:spcPts val="300"/>
-              </a:spcAft>
-              <a:buNone/>
-            </a:pPr>
-            <a:r>
-              <a:rPr sz="1600" b="0">
-                <a:solidFill>
-                  <a:srgbClr val="000000"/>
-                </a:solidFill>
-                <a:latin typeface="맑은 고딕"/>
-                <a:ea typeface="맑은 고딕"/>
-              </a:rPr>
-              <a:t>2. </a:t>
-            </a:r>
-            <a:r>
-              <a:rPr sz="1600" b="1">
-                <a:solidFill>
-                  <a:srgbClr val="000000"/>
-                </a:solidFill>
-                <a:latin typeface="맑은 고딕"/>
-                <a:ea typeface="맑은 고딕"/>
-              </a:rPr>
-              <a:t>자리의 명시</a:t>
-            </a:r>
-            <a:r>
-              <a:rPr sz="1600" b="0">
-                <a:solidFill>
-                  <a:srgbClr val="000000"/>
-                </a:solidFill>
-                <a:latin typeface="맑은 고딕"/>
-                <a:ea typeface="맑은 고딕"/>
-              </a:rPr>
-              <a:t> —</a:t>
-            </a:r>
-            <a:r>
-              <a:rPr sz="1400" b="0">
-                <a:solidFill>
-                  <a:srgbClr val="000000"/>
-                </a:solidFill>
-                <a:latin typeface="맑은 고딕"/>
-                <a:ea typeface="맑은 고딕"/>
-              </a:rPr>
-              <a:t> 가드레일마다 입력·도구 호출·출력·환경 중 어디인지 적었는가?</a:t>
-            </a:r>
-          </a:p>
-          <a:p>
-            <a:pPr lvl="3" marL="947420" indent="-223520">
-              <a:spcBef>
-                <a:spcPts val="300"/>
-              </a:spcBef>
-              <a:spcAft>
-                <a:spcPts val="300"/>
-              </a:spcAft>
-              <a:buNone/>
-            </a:pPr>
-            <a:r>
-              <a:rPr sz="1600" b="0">
-                <a:solidFill>
-                  <a:srgbClr val="000000"/>
-                </a:solidFill>
-                <a:latin typeface="맑은 고딕"/>
-                <a:ea typeface="맑은 고딕"/>
-              </a:rPr>
-              <a:t>3. </a:t>
-            </a:r>
-            <a:r>
-              <a:rPr sz="1600" b="1">
-                <a:solidFill>
-                  <a:srgbClr val="000000"/>
-                </a:solidFill>
-                <a:latin typeface="맑은 고딕"/>
-                <a:ea typeface="맑은 고딕"/>
-              </a:rPr>
-              <a:t>강제와 지시</a:t>
-            </a:r>
-            <a:r>
-              <a:rPr sz="1600" b="0">
-                <a:solidFill>
-                  <a:srgbClr val="000000"/>
-                </a:solidFill>
-                <a:latin typeface="맑은 고딕"/>
-                <a:ea typeface="맑은 고딕"/>
-              </a:rPr>
-              <a:t> —</a:t>
-            </a:r>
-            <a:r>
-              <a:rPr sz="1400" b="0">
-                <a:solidFill>
-                  <a:srgbClr val="000000"/>
-                </a:solidFill>
-                <a:latin typeface="맑은 고딕"/>
-                <a:ea typeface="맑은 고딕"/>
-              </a:rPr>
-              <a:t> 기계가 판정할 수 있는 규칙을 프롬프트의 금지문으로 남기지 않았는가?</a:t>
-            </a:r>
-          </a:p>
-          <a:p>
-            <a:pPr lvl="3" marL="947420" indent="-223520">
-              <a:spcBef>
-                <a:spcPts val="300"/>
-              </a:spcBef>
-              <a:spcAft>
-                <a:spcPts val="300"/>
-              </a:spcAft>
-              <a:buNone/>
-            </a:pPr>
-            <a:r>
-              <a:rPr sz="1600" b="0">
-                <a:solidFill>
-                  <a:srgbClr val="000000"/>
-                </a:solidFill>
-                <a:latin typeface="맑은 고딕"/>
-                <a:ea typeface="맑은 고딕"/>
-              </a:rPr>
-              <a:t>4. </a:t>
-            </a:r>
-            <a:r>
-              <a:rPr sz="1600" b="1">
-                <a:solidFill>
-                  <a:srgbClr val="000000"/>
-                </a:solidFill>
-                <a:latin typeface="맑은 고딕"/>
-                <a:ea typeface="맑은 고딕"/>
-              </a:rPr>
-              <a:t>삼박자</a:t>
-            </a:r>
-            <a:r>
-              <a:rPr sz="1600" b="0">
-                <a:solidFill>
-                  <a:srgbClr val="000000"/>
-                </a:solidFill>
-                <a:latin typeface="맑은 고딕"/>
-                <a:ea typeface="맑은 고딕"/>
-              </a:rPr>
-              <a:t> —</a:t>
-            </a:r>
-            <a:r>
-              <a:rPr sz="1400" b="0">
-                <a:solidFill>
-                  <a:srgbClr val="000000"/>
-                </a:solidFill>
-                <a:latin typeface="맑은 고딕"/>
-                <a:ea typeface="맑은 고딕"/>
-              </a:rPr>
-              <a:t> 비공개 데이터·신뢰할 수 없는 내용·외부 전송 중 </a:t>
-            </a:r>
-            <a:r>
-              <a:rPr sz="1400" b="1">
-                <a:solidFill>
-                  <a:srgbClr val="000000"/>
-                </a:solidFill>
-                <a:latin typeface="맑은 고딕"/>
-                <a:ea typeface="맑은 고딕"/>
-              </a:rPr>
-              <a:t>끊은 고리</a:t>
-            </a:r>
-            <a:r>
-              <a:rPr sz="1400" b="0">
-                <a:solidFill>
-                  <a:srgbClr val="000000"/>
-                </a:solidFill>
-                <a:latin typeface="맑은 고딕"/>
-                <a:ea typeface="맑은 고딕"/>
-              </a:rPr>
-              <a:t>가 있는가?</a:t>
-            </a:r>
-          </a:p>
-          <a:p>
-            <a:pPr lvl="3" marL="947420" indent="-223520">
-              <a:spcBef>
-                <a:spcPts val="300"/>
-              </a:spcBef>
-              <a:spcAft>
-                <a:spcPts val="300"/>
-              </a:spcAft>
-              <a:buNone/>
-            </a:pPr>
-            <a:r>
-              <a:rPr sz="1600" b="0">
-                <a:solidFill>
-                  <a:srgbClr val="000000"/>
-                </a:solidFill>
-                <a:latin typeface="맑은 고딕"/>
-                <a:ea typeface="맑은 고딕"/>
-              </a:rPr>
-              <a:t>5. </a:t>
-            </a:r>
-            <a:r>
-              <a:rPr sz="1600" b="1">
-                <a:solidFill>
-                  <a:srgbClr val="000000"/>
-                </a:solidFill>
-                <a:latin typeface="맑은 고딕"/>
-                <a:ea typeface="맑은 고딕"/>
-              </a:rPr>
-              <a:t>예방과 탐지</a:t>
-            </a:r>
-            <a:r>
-              <a:rPr sz="1600" b="0">
-                <a:solidFill>
-                  <a:srgbClr val="000000"/>
-                </a:solidFill>
-                <a:latin typeface="맑은 고딕"/>
-                <a:ea typeface="맑은 고딕"/>
-              </a:rPr>
-              <a:t> —</a:t>
-            </a:r>
-            <a:r>
-              <a:rPr sz="1400" b="0">
-                <a:solidFill>
-                  <a:srgbClr val="000000"/>
-                </a:solidFill>
-                <a:latin typeface="맑은 고딕"/>
-                <a:ea typeface="맑은 고딕"/>
-              </a:rPr>
-              <a:t> 센서가 할 일</a:t>
-            </a:r>
-            <a:r>
-              <a:rPr sz="1200" b="0">
-                <a:solidFill>
-                  <a:srgbClr val="000000"/>
-                </a:solidFill>
-                <a:latin typeface="맑은 고딕"/>
-                <a:ea typeface="맑은 고딕"/>
-              </a:rPr>
-              <a:t>(테스트·의존 규칙 검사)</a:t>
-            </a:r>
-            <a:r>
-              <a:rPr sz="1400" b="0">
-                <a:solidFill>
-                  <a:srgbClr val="000000"/>
-                </a:solidFill>
-                <a:latin typeface="맑은 고딕"/>
-                <a:ea typeface="맑은 고딕"/>
-              </a:rPr>
-              <a:t>을 가드레일로 적지 않았는가?</a:t>
-            </a:r>
-          </a:p>
-          <a:p>
-            <a:pPr lvl="3" marL="947420" indent="-223520">
-              <a:spcBef>
-                <a:spcPts val="300"/>
-              </a:spcBef>
-              <a:spcAft>
-                <a:spcPts val="300"/>
-              </a:spcAft>
-              <a:buNone/>
-            </a:pPr>
-            <a:r>
-              <a:rPr sz="1600" b="0">
-                <a:solidFill>
-                  <a:srgbClr val="000000"/>
-                </a:solidFill>
-                <a:latin typeface="맑은 고딕"/>
-                <a:ea typeface="맑은 고딕"/>
-              </a:rPr>
-              <a:t>6. </a:t>
-            </a:r>
-            <a:r>
-              <a:rPr sz="1600" b="1">
-                <a:solidFill>
-                  <a:srgbClr val="000000"/>
-                </a:solidFill>
-                <a:latin typeface="맑은 고딕"/>
-                <a:ea typeface="맑은 고딕"/>
-              </a:rPr>
-              <a:t>일이 되는가</a:t>
-            </a:r>
-            <a:r>
-              <a:rPr sz="1600" b="0">
-                <a:solidFill>
-                  <a:srgbClr val="000000"/>
-                </a:solidFill>
-                <a:latin typeface="맑은 고딕"/>
-                <a:ea typeface="맑은 고딕"/>
-              </a:rPr>
-              <a:t> —</a:t>
-            </a:r>
-            <a:r>
-              <a:rPr sz="1400" b="0">
-                <a:solidFill>
-                  <a:srgbClr val="000000"/>
-                </a:solidFill>
-                <a:latin typeface="맑은 고딕"/>
-                <a:ea typeface="맑은 고딕"/>
-              </a:rPr>
-              <a:t> 모두 막아서 "신청한다" 개발이 진행되지 못하는 항목은 없는가?</a:t>
-            </a:r>
-          </a:p>
-          <a:p>
-            <a:pPr lvl="2" marL="723900" indent="-368300">
-              <a:spcBef>
-                <a:spcPts val="300"/>
-              </a:spcBef>
-              <a:spcAft>
-                <a:spcPts val="300"/>
+                <a:spcPts val="600"/>
               </a:spcAft>
               <a:buSzPct val="90000"/>
               <a:buFont typeface="Wingdings" pitchFamily="2" charset="2"/>
               <a:buChar char=""/>
             </a:pPr>
             <a:r>
+              <a:rPr sz="1800" b="0">
+                <a:solidFill>
+                  <a:srgbClr val="000000"/>
+                </a:solidFill>
+                <a:latin typeface="맑은 고딕"/>
+                <a:ea typeface="맑은 고딕"/>
+              </a:rPr>
+              <a:t>거절이 늘어 에이전트가 더 나아가지 못하면 막은 범위를 다시 본다. 다 막는 것은 </a:t>
+            </a:r>
+            <a:r>
               <a:rPr sz="1800" b="1">
                 <a:solidFill>
                   <a:srgbClr val="000000"/>
@@ -11746,7 +11529,7 @@
                 <a:latin typeface="맑은 고딕"/>
                 <a:ea typeface="맑은 고딕"/>
               </a:rPr>
-              <a:t>결과물</a:t>
+              <a:t>아무것도 맡기지 않는 것</a:t>
             </a:r>
             <a:r>
               <a:rPr sz="1800" b="0">
@@ -11756,37 +11539,7 @@
                 <a:latin typeface="맑은 고딕"/>
                 <a:ea typeface="맑은 고딕"/>
               </a:rPr>
-              <a:t> —</a:t>
-            </a:r>
-            <a:r>
-              <a:rPr sz="1600" b="0">
-                <a:solidFill>
-                  <a:srgbClr val="000000"/>
-                </a:solidFill>
-                <a:latin typeface="맑은 고딕"/>
-                <a:ea typeface="맑은 고딕"/>
-              </a:rPr>
-              <a:t> "신청한다"의 가드레일 배치</a:t>
-            </a:r>
-            <a:r>
-              <a:rPr sz="1400" b="0">
-                <a:solidFill>
-                  <a:srgbClr val="000000"/>
-                </a:solidFill>
-                <a:latin typeface="맑은 고딕"/>
-                <a:ea typeface="맑은 고딕"/>
-              </a:rPr>
-              <a:t>(위험·자리·방식·어긋나면)</a:t>
-            </a:r>
-            <a:r>
-              <a:rPr sz="1600" b="0">
-                <a:solidFill>
-                  <a:srgbClr val="000000"/>
-                </a:solidFill>
-                <a:latin typeface="맑은 고딕"/>
-                <a:ea typeface="맑은 고딕"/>
-              </a:rPr>
-              <a:t>. 실습 9의 입력이 됩니다.</a:t>
+              <a:t>과 같다.</a:t>
             </a:r>
           </a:p>
         </p:txBody>
@@ -11856,7 +11609,7 @@
                 <a:latin typeface="맑은 고딕"/>
                 <a:ea typeface="맑은 고딕"/>
               </a:rPr>
-              <a:t>10. 요약</a:t>
+              <a:t>09. 실습 — 가드레일 배치</a:t>
             </a:r>
           </a:p>
         </p:txBody>
@@ -11892,6 +11645,920 @@
                 </a:solidFill>
               </a:rPr>
               <a:t>- 18 -</a:t>
+            </a:r>
+          </a:p>
+        </p:txBody>
+      </p:sp>
+      <p:sp>
+        <p:nvSpPr>
+          <p:cNvPr id="5" name="텍스트 개체 틀 4">
+            <a:extLst>
+              <a:ext uri="{FF2B5EF4-FFF2-40B4-BE49-F238E27FC236}">
+                <a16:creationId xmlns:a16="http://schemas.microsoft.com/office/drawing/2014/main" id="{D66274C8-E16F-5AEB-614B-D8D32DA3E8C6}"/>
+              </a:ext>
+            </a:extLst>
+          </p:cNvPr>
+          <p:cNvSpPr>
+            <a:spLocks noGrp="1"/>
+          </p:cNvSpPr>
+          <p:nvPr>
+            <p:ph type="body" sz="quarter" idx="11"/>
+          </p:nvPr>
+        </p:nvSpPr>
+        <p:spPr/>
+        <p:txBody>
+          <a:bodyPr/>
+          <a:lstStyle/>
+          <a:p>
+            <a:r>
+              <a:rPr kumimoji="1" lang="en-US" altLang="ko-KR" sz="1400" dirty="0" err="1"/>
+              <a:t>08. 실행 제약과 가드레일의 역할</a:t>
+            </a:r>
+          </a:p>
+        </p:txBody>
+      </p:sp>
+      <p:sp>
+        <p:nvSpPr>
+          <p:cNvPr id="6" name="텍스트 개체 틀 5">
+            <a:extLst>
+              <a:ext uri="{FF2B5EF4-FFF2-40B4-BE49-F238E27FC236}">
+                <a16:creationId xmlns:a16="http://schemas.microsoft.com/office/drawing/2014/main" id="{A24E58E1-194B-A320-AEEE-24D08685BB67}"/>
+              </a:ext>
+            </a:extLst>
+          </p:cNvPr>
+          <p:cNvSpPr>
+            <a:spLocks noGrp="1"/>
+          </p:cNvSpPr>
+          <p:nvPr>
+            <p:ph type="body" sz="quarter" idx="12"/>
+          </p:nvPr>
+        </p:nvSpPr>
+        <p:spPr/>
+        <p:txBody>
+          <a:bodyPr/>
+          <a:lstStyle/>
+          <a:p>
+            <a:endParaRPr kumimoji="1" lang="ko-KR" altLang="en-US" dirty="0"/>
+          </a:p>
+        </p:txBody>
+      </p:sp>
+      <p:sp>
+        <p:nvSpPr>
+          <p:cNvPr id="7" name="텍스트 개체 틀 6">
+            <a:extLst>
+              <a:ext uri="{FF2B5EF4-FFF2-40B4-BE49-F238E27FC236}">
+                <a16:creationId xmlns:a16="http://schemas.microsoft.com/office/drawing/2014/main" id="{A219F420-613B-6234-45F6-0955A9A4505F}"/>
+              </a:ext>
+            </a:extLst>
+          </p:cNvPr>
+          <p:cNvSpPr>
+            <a:spLocks noGrp="1"/>
+          </p:cNvSpPr>
+          <p:nvPr>
+            <p:ph type="body" sz="quarter" idx="13"/>
+          </p:nvPr>
+        </p:nvSpPr>
+        <p:spPr/>
+        <p:txBody>
+          <a:bodyPr/>
+          <a:lstStyle/>
+          <a:p>
+            <a:endParaRPr kumimoji="1" lang="en-US" altLang="ko-KR" dirty="0"/>
+          </a:p>
+        </p:txBody>
+      </p:sp>
+      <p:sp>
+        <p:nvSpPr>
+          <p:cNvPr id="8" name="내용 개체 틀 7">
+            <a:extLst>
+              <a:ext uri="{FF2B5EF4-FFF2-40B4-BE49-F238E27FC236}">
+                <a16:creationId xmlns:a16="http://schemas.microsoft.com/office/drawing/2014/main" id="{BEBA2C4A-B0BF-F2E4-EA6E-614C99CBA184}"/>
+              </a:ext>
+            </a:extLst>
+          </p:cNvPr>
+          <p:cNvSpPr>
+            <a:spLocks noGrp="1"/>
+          </p:cNvSpPr>
+          <p:nvPr>
+            <p:ph idx="1"/>
+          </p:nvPr>
+        </p:nvSpPr>
+        <p:spPr>
+          <a:xfrm>
+            <a:off x="365760" y="960120"/>
+            <a:ext cx="8622792" cy="5352345"/>
+          </a:xfrm>
+        </p:spPr>
+        <p:txBody>
+          <a:bodyPr>
+            <a:normAutofit/>
+          </a:bodyPr>
+          <a:lstStyle/>
+          <a:p>
+            <a:pPr marL="0" indent="0">
+              <a:spcBef>
+                <a:spcPts val="300"/>
+              </a:spcBef>
+              <a:spcAft>
+                <a:spcPts val="300"/>
+              </a:spcAft>
+              <a:buNone/>
+            </a:pPr>
+            <a:r>
+              <a:rPr sz="1600" b="0">
+                <a:solidFill>
+                  <a:srgbClr val="000000"/>
+                </a:solidFill>
+                <a:latin typeface="맑은 고딕"/>
+                <a:ea typeface="맑은 고딕"/>
+              </a:rPr>
+              <a:t>실습 6의 위임 계약과 실습 7의 실행 흐름을 LLM에 제공하여 </a:t>
+            </a:r>
+            <a:r>
+              <a:rPr sz="1600" b="1">
+                <a:solidFill>
+                  <a:srgbClr val="000000"/>
+                </a:solidFill>
+                <a:latin typeface="맑은 고딕"/>
+                <a:ea typeface="맑은 고딕"/>
+              </a:rPr>
+              <a:t>"신청한다"의 가드레일 배치</a:t>
+            </a:r>
+            <a:r>
+              <a:rPr sz="1600" b="0">
+                <a:solidFill>
+                  <a:srgbClr val="000000"/>
+                </a:solidFill>
+                <a:latin typeface="맑은 고딕"/>
+                <a:ea typeface="맑은 고딕"/>
+              </a:rPr>
+              <a:t>를 만들고, 점검 항목으로 피드백하여 완성하십시오.</a:t>
+            </a:r>
+          </a:p>
+          <a:p>
+            <a:pPr lvl="2" marL="723900" indent="-368300">
+              <a:spcBef>
+                <a:spcPts val="300"/>
+              </a:spcBef>
+              <a:spcAft>
+                <a:spcPts val="300"/>
+              </a:spcAft>
+              <a:buSzPct val="90000"/>
+              <a:buFont typeface="Wingdings" pitchFamily="2" charset="2"/>
+              <a:buChar char=""/>
+            </a:pPr>
+            <a:r>
+              <a:rPr sz="1800" b="1">
+                <a:solidFill>
+                  <a:srgbClr val="000000"/>
+                </a:solidFill>
+                <a:latin typeface="맑은 고딕"/>
+                <a:ea typeface="맑은 고딕"/>
+              </a:rPr>
+              <a:t>투입물</a:t>
+            </a:r>
+          </a:p>
+          <a:p>
+            <a:pPr lvl="3" marL="723900" indent="0">
+              <a:spcBef>
+                <a:spcPts val="300"/>
+              </a:spcBef>
+              <a:spcAft>
+                <a:spcPts val="300"/>
+              </a:spcAft>
+              <a:buNone/>
+            </a:pPr>
+            <a:r>
+              <a:rPr sz="1600" b="0">
+                <a:solidFill>
+                  <a:srgbClr val="000000"/>
+                </a:solidFill>
+                <a:latin typeface="맑은 고딕"/>
+                <a:ea typeface="맑은 고딕"/>
+              </a:rPr>
+              <a:t>실습 6의 </a:t>
+            </a:r>
+            <a:r>
+              <a:rPr sz="1600" b="1">
+                <a:solidFill>
+                  <a:srgbClr val="000000"/>
+                </a:solidFill>
+                <a:latin typeface="맑은 고딕"/>
+                <a:ea typeface="맑은 고딕"/>
+              </a:rPr>
+              <a:t>위임 계약</a:t>
+            </a:r>
+            <a:r>
+              <a:rPr sz="1600" b="0">
+                <a:solidFill>
+                  <a:srgbClr val="000000"/>
+                </a:solidFill>
+                <a:latin typeface="맑은 고딕"/>
+                <a:ea typeface="맑은 고딕"/>
+              </a:rPr>
+              <a:t>, 실습 7의 </a:t>
+            </a:r>
+            <a:r>
+              <a:rPr sz="1600" b="1">
+                <a:solidFill>
+                  <a:srgbClr val="000000"/>
+                </a:solidFill>
+                <a:latin typeface="맑은 고딕"/>
+                <a:ea typeface="맑은 고딕"/>
+              </a:rPr>
+              <a:t>실행 흐름과 확인 지점</a:t>
+            </a:r>
+          </a:p>
+          <a:p>
+            <a:pPr lvl="2" marL="723900" indent="-368300">
+              <a:spcBef>
+                <a:spcPts val="300"/>
+              </a:spcBef>
+              <a:spcAft>
+                <a:spcPts val="300"/>
+              </a:spcAft>
+              <a:buSzPct val="90000"/>
+              <a:buFont typeface="Wingdings" pitchFamily="2" charset="2"/>
+              <a:buChar char=""/>
+            </a:pPr>
+            <a:r>
+              <a:rPr sz="1800" b="1">
+                <a:solidFill>
+                  <a:srgbClr val="000000"/>
+                </a:solidFill>
+                <a:latin typeface="맑은 고딕"/>
+                <a:ea typeface="맑은 고딕"/>
+              </a:rPr>
+              <a:t>프롬프트</a:t>
+            </a:r>
+          </a:p>
+          <a:p>
+            <a:pPr lvl="3" marL="723900" indent="0">
+              <a:spcBef>
+                <a:spcPts val="300"/>
+              </a:spcBef>
+              <a:spcAft>
+                <a:spcPts val="300"/>
+              </a:spcAft>
+              <a:buNone/>
+            </a:pPr>
+            <a:r>
+              <a:rPr sz="1600" b="0">
+                <a:solidFill>
+                  <a:srgbClr val="000000"/>
+                </a:solidFill>
+                <a:latin typeface="맑은 고딕"/>
+                <a:ea typeface="맑은 고딕"/>
+              </a:rPr>
+              <a:t>① "신청한다 과제의 </a:t>
+            </a:r>
+            <a:r>
+              <a:rPr sz="1600" b="1">
+                <a:solidFill>
+                  <a:srgbClr val="000000"/>
+                </a:solidFill>
+                <a:latin typeface="맑은 고딕"/>
+                <a:ea typeface="맑은 고딕"/>
+              </a:rPr>
+              <a:t>위험을 확률과 크기</a:t>
+            </a:r>
+            <a:r>
+              <a:rPr sz="1600" b="0">
+                <a:solidFill>
+                  <a:srgbClr val="000000"/>
+                </a:solidFill>
+                <a:latin typeface="맑은 고딕"/>
+                <a:ea typeface="맑은 고딕"/>
+              </a:rPr>
+              <a:t>로 적고, 위험마다 가드레일을 </a:t>
+            </a:r>
+            <a:r>
+              <a:rPr sz="1600" b="1">
+                <a:solidFill>
+                  <a:srgbClr val="000000"/>
+                </a:solidFill>
+                <a:latin typeface="맑은 고딕"/>
+                <a:ea typeface="맑은 고딕"/>
+              </a:rPr>
+              <a:t>입력·도구 호출·출력·환경</a:t>
+            </a:r>
+            <a:r>
+              <a:rPr sz="1600" b="0">
+                <a:solidFill>
+                  <a:srgbClr val="000000"/>
+                </a:solidFill>
+                <a:latin typeface="맑은 고딕"/>
+                <a:ea typeface="맑은 고딕"/>
+              </a:rPr>
+              <a:t> 중 어디에 어떤 방식으로 둘지 표로 만들어줘."</a:t>
+            </a:r>
+          </a:p>
+          <a:p>
+            <a:pPr lvl="3" marL="723900" indent="0">
+              <a:spcBef>
+                <a:spcPts val="300"/>
+              </a:spcBef>
+              <a:spcAft>
+                <a:spcPts val="300"/>
+              </a:spcAft>
+              <a:buNone/>
+            </a:pPr>
+            <a:r>
+              <a:rPr sz="1600" b="0">
+                <a:solidFill>
+                  <a:srgbClr val="000000"/>
+                </a:solidFill>
+                <a:latin typeface="맑은 고딕"/>
+                <a:ea typeface="맑은 고딕"/>
+              </a:rPr>
+              <a:t>② "가드레일마다 </a:t>
+            </a:r>
+            <a:r>
+              <a:rPr sz="1600" b="1">
+                <a:solidFill>
+                  <a:srgbClr val="000000"/>
+                </a:solidFill>
+                <a:latin typeface="맑은 고딕"/>
+                <a:ea typeface="맑은 고딕"/>
+              </a:rPr>
+              <a:t>어긋나면 무엇이 일어나는지</a:t>
+            </a:r>
+            <a:r>
+              <a:rPr sz="1600" b="0">
+                <a:solidFill>
+                  <a:srgbClr val="000000"/>
+                </a:solidFill>
+                <a:latin typeface="맑은 고딕"/>
+                <a:ea typeface="맑은 고딕"/>
+              </a:rPr>
+              <a:t> 적고, 강제할 수 없어 지시나 멈출 조건으로 남기는 것을 구분해줘."</a:t>
+            </a:r>
+          </a:p>
+          <a:p>
+            <a:pPr lvl="2" marL="723900" indent="-368300">
+              <a:spcBef>
+                <a:spcPts val="300"/>
+              </a:spcBef>
+              <a:spcAft>
+                <a:spcPts val="300"/>
+              </a:spcAft>
+              <a:buSzPct val="90000"/>
+              <a:buFont typeface="Wingdings" pitchFamily="2" charset="2"/>
+              <a:buChar char=""/>
+            </a:pPr>
+            <a:r>
+              <a:rPr sz="1800" b="1">
+                <a:solidFill>
+                  <a:srgbClr val="000000"/>
+                </a:solidFill>
+                <a:latin typeface="맑은 고딕"/>
+                <a:ea typeface="맑은 고딕"/>
+              </a:rPr>
+              <a:t>점검 항목</a:t>
+            </a:r>
+          </a:p>
+          <a:p>
+            <a:pPr lvl="3" marL="947420" indent="-223520">
+              <a:spcBef>
+                <a:spcPts val="300"/>
+              </a:spcBef>
+              <a:spcAft>
+                <a:spcPts val="300"/>
+              </a:spcAft>
+              <a:buNone/>
+            </a:pPr>
+            <a:r>
+              <a:rPr sz="1600" b="0">
+                <a:solidFill>
+                  <a:srgbClr val="000000"/>
+                </a:solidFill>
+                <a:latin typeface="맑은 고딕"/>
+                <a:ea typeface="맑은 고딕"/>
+              </a:rPr>
+              <a:t>1. </a:t>
+            </a:r>
+            <a:r>
+              <a:rPr sz="1600" b="1">
+                <a:solidFill>
+                  <a:srgbClr val="000000"/>
+                </a:solidFill>
+                <a:latin typeface="맑은 고딕"/>
+                <a:ea typeface="맑은 고딕"/>
+              </a:rPr>
+              <a:t>위험의 범위</a:t>
+            </a:r>
+            <a:r>
+              <a:rPr sz="1600" b="0">
+                <a:solidFill>
+                  <a:srgbClr val="000000"/>
+                </a:solidFill>
+                <a:latin typeface="맑은 고딕"/>
+                <a:ea typeface="맑은 고딕"/>
+              </a:rPr>
+              <a:t> —</a:t>
+            </a:r>
+            <a:r>
+              <a:rPr sz="1400" b="0">
+                <a:solidFill>
+                  <a:srgbClr val="000000"/>
+                </a:solidFill>
+                <a:latin typeface="맑은 고딕"/>
+                <a:ea typeface="맑은 고딕"/>
+              </a:rPr>
+              <a:t> 모델의 오답이 아니라 </a:t>
+            </a:r>
+            <a:r>
+              <a:rPr sz="1400" b="1">
+                <a:solidFill>
+                  <a:srgbClr val="000000"/>
+                </a:solidFill>
+                <a:latin typeface="맑은 고딕"/>
+                <a:ea typeface="맑은 고딕"/>
+              </a:rPr>
+              <a:t>행동</a:t>
+            </a:r>
+            <a:r>
+              <a:rPr sz="1200" b="0">
+                <a:solidFill>
+                  <a:srgbClr val="000000"/>
+                </a:solidFill>
+                <a:latin typeface="맑은 고딕"/>
+                <a:ea typeface="맑은 고딕"/>
+              </a:rPr>
+              <a:t>(쓰기·외부 호출·자격)</a:t>
+            </a:r>
+            <a:r>
+              <a:rPr sz="1400" b="0">
+                <a:solidFill>
+                  <a:srgbClr val="000000"/>
+                </a:solidFill>
+                <a:latin typeface="맑은 고딕"/>
+                <a:ea typeface="맑은 고딕"/>
+              </a:rPr>
+              <a:t>이 만드는 위험을 적었는가?</a:t>
+            </a:r>
+          </a:p>
+          <a:p>
+            <a:pPr lvl="3" marL="947420" indent="-223520">
+              <a:spcBef>
+                <a:spcPts val="300"/>
+              </a:spcBef>
+              <a:spcAft>
+                <a:spcPts val="300"/>
+              </a:spcAft>
+              <a:buNone/>
+            </a:pPr>
+            <a:r>
+              <a:rPr sz="1600" b="0">
+                <a:solidFill>
+                  <a:srgbClr val="000000"/>
+                </a:solidFill>
+                <a:latin typeface="맑은 고딕"/>
+                <a:ea typeface="맑은 고딕"/>
+              </a:rPr>
+              <a:t>2. </a:t>
+            </a:r>
+            <a:r>
+              <a:rPr sz="1600" b="1">
+                <a:solidFill>
+                  <a:srgbClr val="000000"/>
+                </a:solidFill>
+                <a:latin typeface="맑은 고딕"/>
+                <a:ea typeface="맑은 고딕"/>
+              </a:rPr>
+              <a:t>자리의 명시</a:t>
+            </a:r>
+            <a:r>
+              <a:rPr sz="1600" b="0">
+                <a:solidFill>
+                  <a:srgbClr val="000000"/>
+                </a:solidFill>
+                <a:latin typeface="맑은 고딕"/>
+                <a:ea typeface="맑은 고딕"/>
+              </a:rPr>
+              <a:t> —</a:t>
+            </a:r>
+            <a:r>
+              <a:rPr sz="1400" b="0">
+                <a:solidFill>
+                  <a:srgbClr val="000000"/>
+                </a:solidFill>
+                <a:latin typeface="맑은 고딕"/>
+                <a:ea typeface="맑은 고딕"/>
+              </a:rPr>
+              <a:t> 가드레일마다 입력·도구 호출·출력·환경 중 어디인지 적었는가?</a:t>
+            </a:r>
+          </a:p>
+          <a:p>
+            <a:pPr lvl="3" marL="947420" indent="-223520">
+              <a:spcBef>
+                <a:spcPts val="300"/>
+              </a:spcBef>
+              <a:spcAft>
+                <a:spcPts val="300"/>
+              </a:spcAft>
+              <a:buNone/>
+            </a:pPr>
+            <a:r>
+              <a:rPr sz="1600" b="0">
+                <a:solidFill>
+                  <a:srgbClr val="000000"/>
+                </a:solidFill>
+                <a:latin typeface="맑은 고딕"/>
+                <a:ea typeface="맑은 고딕"/>
+              </a:rPr>
+              <a:t>3. </a:t>
+            </a:r>
+            <a:r>
+              <a:rPr sz="1600" b="1">
+                <a:solidFill>
+                  <a:srgbClr val="000000"/>
+                </a:solidFill>
+                <a:latin typeface="맑은 고딕"/>
+                <a:ea typeface="맑은 고딕"/>
+              </a:rPr>
+              <a:t>강제와 지시</a:t>
+            </a:r>
+            <a:r>
+              <a:rPr sz="1600" b="0">
+                <a:solidFill>
+                  <a:srgbClr val="000000"/>
+                </a:solidFill>
+                <a:latin typeface="맑은 고딕"/>
+                <a:ea typeface="맑은 고딕"/>
+              </a:rPr>
+              <a:t> —</a:t>
+            </a:r>
+            <a:r>
+              <a:rPr sz="1400" b="0">
+                <a:solidFill>
+                  <a:srgbClr val="000000"/>
+                </a:solidFill>
+                <a:latin typeface="맑은 고딕"/>
+                <a:ea typeface="맑은 고딕"/>
+              </a:rPr>
+              <a:t> 기계가 판정할 수 있는 규칙을 프롬프트의 금지문으로 남기지 않았는가?</a:t>
+            </a:r>
+          </a:p>
+          <a:p>
+            <a:pPr lvl="3" marL="947420" indent="-223520">
+              <a:spcBef>
+                <a:spcPts val="300"/>
+              </a:spcBef>
+              <a:spcAft>
+                <a:spcPts val="300"/>
+              </a:spcAft>
+              <a:buNone/>
+            </a:pPr>
+            <a:r>
+              <a:rPr sz="1600" b="0">
+                <a:solidFill>
+                  <a:srgbClr val="000000"/>
+                </a:solidFill>
+                <a:latin typeface="맑은 고딕"/>
+                <a:ea typeface="맑은 고딕"/>
+              </a:rPr>
+              <a:t>4. </a:t>
+            </a:r>
+            <a:r>
+              <a:rPr sz="1600" b="1">
+                <a:solidFill>
+                  <a:srgbClr val="000000"/>
+                </a:solidFill>
+                <a:latin typeface="맑은 고딕"/>
+                <a:ea typeface="맑은 고딕"/>
+              </a:rPr>
+              <a:t>삼박자</a:t>
+            </a:r>
+            <a:r>
+              <a:rPr sz="1600" b="0">
+                <a:solidFill>
+                  <a:srgbClr val="000000"/>
+                </a:solidFill>
+                <a:latin typeface="맑은 고딕"/>
+                <a:ea typeface="맑은 고딕"/>
+              </a:rPr>
+              <a:t> —</a:t>
+            </a:r>
+            <a:r>
+              <a:rPr sz="1400" b="0">
+                <a:solidFill>
+                  <a:srgbClr val="000000"/>
+                </a:solidFill>
+                <a:latin typeface="맑은 고딕"/>
+                <a:ea typeface="맑은 고딕"/>
+              </a:rPr>
+              <a:t> 비공개 데이터·신뢰할 수 없는 내용·외부 전송 중 </a:t>
+            </a:r>
+            <a:r>
+              <a:rPr sz="1400" b="1">
+                <a:solidFill>
+                  <a:srgbClr val="000000"/>
+                </a:solidFill>
+                <a:latin typeface="맑은 고딕"/>
+                <a:ea typeface="맑은 고딕"/>
+              </a:rPr>
+              <a:t>끊은 고리</a:t>
+            </a:r>
+            <a:r>
+              <a:rPr sz="1400" b="0">
+                <a:solidFill>
+                  <a:srgbClr val="000000"/>
+                </a:solidFill>
+                <a:latin typeface="맑은 고딕"/>
+                <a:ea typeface="맑은 고딕"/>
+              </a:rPr>
+              <a:t>가 있는가?</a:t>
+            </a:r>
+          </a:p>
+          <a:p>
+            <a:pPr lvl="3" marL="947420" indent="-223520">
+              <a:spcBef>
+                <a:spcPts val="300"/>
+              </a:spcBef>
+              <a:spcAft>
+                <a:spcPts val="300"/>
+              </a:spcAft>
+              <a:buNone/>
+            </a:pPr>
+            <a:r>
+              <a:rPr sz="1600" b="0">
+                <a:solidFill>
+                  <a:srgbClr val="000000"/>
+                </a:solidFill>
+                <a:latin typeface="맑은 고딕"/>
+                <a:ea typeface="맑은 고딕"/>
+              </a:rPr>
+              <a:t>5. </a:t>
+            </a:r>
+            <a:r>
+              <a:rPr sz="1600" b="1">
+                <a:solidFill>
+                  <a:srgbClr val="000000"/>
+                </a:solidFill>
+                <a:latin typeface="맑은 고딕"/>
+                <a:ea typeface="맑은 고딕"/>
+              </a:rPr>
+              <a:t>예방과 탐지</a:t>
+            </a:r>
+            <a:r>
+              <a:rPr sz="1600" b="0">
+                <a:solidFill>
+                  <a:srgbClr val="000000"/>
+                </a:solidFill>
+                <a:latin typeface="맑은 고딕"/>
+                <a:ea typeface="맑은 고딕"/>
+              </a:rPr>
+              <a:t> —</a:t>
+            </a:r>
+            <a:r>
+              <a:rPr sz="1400" b="0">
+                <a:solidFill>
+                  <a:srgbClr val="000000"/>
+                </a:solidFill>
+                <a:latin typeface="맑은 고딕"/>
+                <a:ea typeface="맑은 고딕"/>
+              </a:rPr>
+              <a:t> 센서가 할 일</a:t>
+            </a:r>
+            <a:r>
+              <a:rPr sz="1200" b="0">
+                <a:solidFill>
+                  <a:srgbClr val="000000"/>
+                </a:solidFill>
+                <a:latin typeface="맑은 고딕"/>
+                <a:ea typeface="맑은 고딕"/>
+              </a:rPr>
+              <a:t>(테스트·의존 규칙 검사)</a:t>
+            </a:r>
+            <a:r>
+              <a:rPr sz="1400" b="0">
+                <a:solidFill>
+                  <a:srgbClr val="000000"/>
+                </a:solidFill>
+                <a:latin typeface="맑은 고딕"/>
+                <a:ea typeface="맑은 고딕"/>
+              </a:rPr>
+              <a:t>을 가드레일로 적지 않았는가?</a:t>
+            </a:r>
+          </a:p>
+          <a:p>
+            <a:pPr lvl="3" marL="947420" indent="-223520">
+              <a:spcBef>
+                <a:spcPts val="300"/>
+              </a:spcBef>
+              <a:spcAft>
+                <a:spcPts val="300"/>
+              </a:spcAft>
+              <a:buNone/>
+            </a:pPr>
+            <a:r>
+              <a:rPr sz="1600" b="0">
+                <a:solidFill>
+                  <a:srgbClr val="000000"/>
+                </a:solidFill>
+                <a:latin typeface="맑은 고딕"/>
+                <a:ea typeface="맑은 고딕"/>
+              </a:rPr>
+              <a:t>6. </a:t>
+            </a:r>
+            <a:r>
+              <a:rPr sz="1600" b="1">
+                <a:solidFill>
+                  <a:srgbClr val="000000"/>
+                </a:solidFill>
+                <a:latin typeface="맑은 고딕"/>
+                <a:ea typeface="맑은 고딕"/>
+              </a:rPr>
+              <a:t>일이 되는가</a:t>
+            </a:r>
+            <a:r>
+              <a:rPr sz="1600" b="0">
+                <a:solidFill>
+                  <a:srgbClr val="000000"/>
+                </a:solidFill>
+                <a:latin typeface="맑은 고딕"/>
+                <a:ea typeface="맑은 고딕"/>
+              </a:rPr>
+              <a:t> —</a:t>
+            </a:r>
+            <a:r>
+              <a:rPr sz="1400" b="0">
+                <a:solidFill>
+                  <a:srgbClr val="000000"/>
+                </a:solidFill>
+                <a:latin typeface="맑은 고딕"/>
+                <a:ea typeface="맑은 고딕"/>
+              </a:rPr>
+              <a:t> 모두 막아서 "신청한다" 개발이 진행되지 못하는 항목은 없는가?</a:t>
+            </a:r>
+          </a:p>
+          <a:p>
+            <a:pPr lvl="2" marL="723900" indent="-368300">
+              <a:spcBef>
+                <a:spcPts val="300"/>
+              </a:spcBef>
+              <a:spcAft>
+                <a:spcPts val="300"/>
+              </a:spcAft>
+              <a:buSzPct val="90000"/>
+              <a:buFont typeface="Wingdings" pitchFamily="2" charset="2"/>
+              <a:buChar char=""/>
+            </a:pPr>
+            <a:r>
+              <a:rPr sz="1800" b="1">
+                <a:solidFill>
+                  <a:srgbClr val="000000"/>
+                </a:solidFill>
+                <a:latin typeface="맑은 고딕"/>
+                <a:ea typeface="맑은 고딕"/>
+              </a:rPr>
+              <a:t>결과물</a:t>
+            </a:r>
+            <a:r>
+              <a:rPr sz="1800" b="0">
+                <a:solidFill>
+                  <a:srgbClr val="000000"/>
+                </a:solidFill>
+                <a:latin typeface="맑은 고딕"/>
+                <a:ea typeface="맑은 고딕"/>
+              </a:rPr>
+              <a:t> —</a:t>
+            </a:r>
+            <a:r>
+              <a:rPr sz="1600" b="0">
+                <a:solidFill>
+                  <a:srgbClr val="000000"/>
+                </a:solidFill>
+                <a:latin typeface="맑은 고딕"/>
+                <a:ea typeface="맑은 고딕"/>
+              </a:rPr>
+              <a:t> "신청한다"의 가드레일 배치</a:t>
+            </a:r>
+            <a:r>
+              <a:rPr sz="1400" b="0">
+                <a:solidFill>
+                  <a:srgbClr val="000000"/>
+                </a:solidFill>
+                <a:latin typeface="맑은 고딕"/>
+                <a:ea typeface="맑은 고딕"/>
+              </a:rPr>
+              <a:t>(위험·자리·방식·어긋나면)</a:t>
+            </a:r>
+            <a:r>
+              <a:rPr sz="1600" b="0">
+                <a:solidFill>
+                  <a:srgbClr val="000000"/>
+                </a:solidFill>
+                <a:latin typeface="맑은 고딕"/>
+                <a:ea typeface="맑은 고딕"/>
+              </a:rPr>
+              <a:t>. 실습 9의 입력이 됩니다.</a:t>
+            </a:r>
+          </a:p>
+        </p:txBody>
+      </p:sp>
+    </p:spTree>
+    <p:extLst>
+      <p:ext uri="{BB962C8B-B14F-4D97-AF65-F5344CB8AC3E}">
+        <p14:creationId xmlns:p14="http://schemas.microsoft.com/office/powerpoint/2010/main" val="3555436673"/>
+      </p:ext>
+    </p:extLst>
+  </p:cSld>
+  <p:clrMapOvr>
+    <a:masterClrMapping/>
+  </p:clrMapOvr>
+</p:sld>
+</file>
+
+<file path=ppt/slides/slide19.xml><?xml version="1.0" encoding="utf-8"?>
+<p:sld xmlns:a="http://schemas.openxmlformats.org/drawingml/2006/main" xmlns:r="http://schemas.openxmlformats.org/officeDocument/2006/relationships" xmlns:p="http://schemas.openxmlformats.org/presentationml/2006/main">
+  <p:cSld>
+    <p:spTree>
+      <p:nvGrpSpPr>
+        <p:cNvPr id="1" name="">
+          <a:extLst>
+            <a:ext uri="{FF2B5EF4-FFF2-40B4-BE49-F238E27FC236}">
+              <a16:creationId xmlns:a16="http://schemas.microsoft.com/office/drawing/2014/main" id="{8E4F1F13-426B-086B-7D8C-9A58A0F879DB}"/>
+            </a:ext>
+          </a:extLst>
+        </p:cNvPr>
+        <p:cNvGrpSpPr/>
+        <p:nvPr/>
+      </p:nvGrpSpPr>
+      <p:grpSpPr>
+        <a:xfrm>
+          <a:off x="0" y="0"/>
+          <a:ext cx="0" cy="0"/>
+          <a:chOff x="0" y="0"/>
+          <a:chExt cx="0" cy="0"/>
+        </a:xfrm>
+      </p:grpSpPr>
+      <p:sp>
+        <p:nvSpPr>
+          <p:cNvPr id="2" name="제목 1">
+            <a:extLst>
+              <a:ext uri="{FF2B5EF4-FFF2-40B4-BE49-F238E27FC236}">
+                <a16:creationId xmlns:a16="http://schemas.microsoft.com/office/drawing/2014/main" id="{AA26A92D-924E-0575-9551-F8FD7BFD3FAD}"/>
+              </a:ext>
+            </a:extLst>
+          </p:cNvPr>
+          <p:cNvSpPr>
+            <a:spLocks noGrp="1"/>
+          </p:cNvSpPr>
+          <p:nvPr>
+            <p:ph type="title"/>
+          </p:nvPr>
+        </p:nvSpPr>
+        <p:spPr/>
+        <p:txBody>
+          <a:bodyPr/>
+          <a:lstStyle/>
+          <a:p>
+            <a:r>
+              <a:rPr sz="2400" b="1">
+                <a:solidFill>
+                  <a:srgbClr val="000000"/>
+                </a:solidFill>
+                <a:latin typeface="맑은 고딕"/>
+                <a:ea typeface="맑은 고딕"/>
+              </a:rPr>
+              <a:t>10. 요약</a:t>
+            </a:r>
+          </a:p>
+        </p:txBody>
+      </p:sp>
+      <p:sp>
+        <p:nvSpPr>
+          <p:cNvPr id="3" name="슬라이드 번호 개체 틀 2">
+            <a:extLst>
+              <a:ext uri="{FF2B5EF4-FFF2-40B4-BE49-F238E27FC236}">
+                <a16:creationId xmlns:a16="http://schemas.microsoft.com/office/drawing/2014/main" id="{12CF30EE-4DFD-8063-56B8-B8689E76DFCA}"/>
+              </a:ext>
+            </a:extLst>
+          </p:cNvPr>
+          <p:cNvSpPr>
+            <a:spLocks noGrp="1"/>
+          </p:cNvSpPr>
+          <p:nvPr>
+            <p:ph type="sldNum" sz="quarter" idx="10"/>
+          </p:nvPr>
+        </p:nvSpPr>
+        <p:spPr/>
+        <p:txBody>
+          <a:bodyPr/>
+          <a:lstStyle/>
+          <a:p>
+            <a:pPr>
+              <a:defRPr/>
+            </a:pPr>
+            <a:r>
+              <a:rPr lang="en-US" altLang="ko-KR">
+                <a:solidFill>
+                  <a:prstClr val="black"/>
+                </a:solidFill>
+              </a:rPr>
+              <a:t>- 19 -</a:t>
             </a:r>
           </a:p>
         </p:txBody>
@@ -12405,7 +13072,566 @@
 </p:sld>
 </file>
 
-<file path=ppt/slides/slide19.xml><?xml version="1.0" encoding="utf-8"?>
+<file path=ppt/slides/slide2.xml><?xml version="1.0" encoding="utf-8"?>
+<p:sld xmlns:a="http://schemas.openxmlformats.org/drawingml/2006/main" xmlns:r="http://schemas.openxmlformats.org/officeDocument/2006/relationships" xmlns:p="http://schemas.openxmlformats.org/presentationml/2006/main">
+  <p:cSld>
+    <p:spTree>
+      <p:nvGrpSpPr>
+        <p:cNvPr id="1" name="">
+          <a:extLst>
+            <a:ext uri="{FF2B5EF4-FFF2-40B4-BE49-F238E27FC236}">
+              <a16:creationId xmlns:a16="http://schemas.microsoft.com/office/drawing/2014/main" id="{8E4F1F13-426B-086B-7D8C-9A58A0F879DB}"/>
+            </a:ext>
+          </a:extLst>
+        </p:cNvPr>
+        <p:cNvGrpSpPr/>
+        <p:nvPr/>
+      </p:nvGrpSpPr>
+      <p:grpSpPr>
+        <a:xfrm>
+          <a:off x="0" y="0"/>
+          <a:ext cx="0" cy="0"/>
+          <a:chOff x="0" y="0"/>
+          <a:chExt cx="0" cy="0"/>
+        </a:xfrm>
+      </p:grpSpPr>
+      <p:sp>
+        <p:nvSpPr>
+          <p:cNvPr id="2" name="제목 1">
+            <a:extLst>
+              <a:ext uri="{FF2B5EF4-FFF2-40B4-BE49-F238E27FC236}">
+                <a16:creationId xmlns:a16="http://schemas.microsoft.com/office/drawing/2014/main" id="{AA26A92D-924E-0575-9551-F8FD7BFD3FAD}"/>
+              </a:ext>
+            </a:extLst>
+          </p:cNvPr>
+          <p:cNvSpPr>
+            <a:spLocks noGrp="1"/>
+          </p:cNvSpPr>
+          <p:nvPr>
+            <p:ph type="title"/>
+          </p:nvPr>
+        </p:nvSpPr>
+        <p:spPr/>
+        <p:txBody>
+          <a:bodyPr/>
+          <a:lstStyle/>
+          <a:p>
+            <a:r>
+              <a:rPr sz="2400" b="1">
+                <a:solidFill>
+                  <a:srgbClr val="000000"/>
+                </a:solidFill>
+                <a:latin typeface="맑은 고딕"/>
+                <a:ea typeface="맑은 고딕"/>
+              </a:rPr>
+              <a:t>01. 세션 목표</a:t>
+            </a:r>
+          </a:p>
+        </p:txBody>
+      </p:sp>
+      <p:sp>
+        <p:nvSpPr>
+          <p:cNvPr id="3" name="슬라이드 번호 개체 틀 2">
+            <a:extLst>
+              <a:ext uri="{FF2B5EF4-FFF2-40B4-BE49-F238E27FC236}">
+                <a16:creationId xmlns:a16="http://schemas.microsoft.com/office/drawing/2014/main" id="{12CF30EE-4DFD-8063-56B8-B8689E76DFCA}"/>
+              </a:ext>
+            </a:extLst>
+          </p:cNvPr>
+          <p:cNvSpPr>
+            <a:spLocks noGrp="1"/>
+          </p:cNvSpPr>
+          <p:nvPr>
+            <p:ph type="sldNum" sz="quarter" idx="10"/>
+          </p:nvPr>
+        </p:nvSpPr>
+        <p:spPr/>
+        <p:txBody>
+          <a:bodyPr/>
+          <a:lstStyle/>
+          <a:p>
+            <a:pPr>
+              <a:defRPr/>
+            </a:pPr>
+            <a:r>
+              <a:rPr lang="en-US" altLang="ko-KR">
+                <a:solidFill>
+                  <a:prstClr val="black"/>
+                </a:solidFill>
+              </a:rPr>
+              <a:t>- 2 -</a:t>
+            </a:r>
+          </a:p>
+        </p:txBody>
+      </p:sp>
+      <p:sp>
+        <p:nvSpPr>
+          <p:cNvPr id="5" name="텍스트 개체 틀 4">
+            <a:extLst>
+              <a:ext uri="{FF2B5EF4-FFF2-40B4-BE49-F238E27FC236}">
+                <a16:creationId xmlns:a16="http://schemas.microsoft.com/office/drawing/2014/main" id="{D66274C8-E16F-5AEB-614B-D8D32DA3E8C6}"/>
+              </a:ext>
+            </a:extLst>
+          </p:cNvPr>
+          <p:cNvSpPr>
+            <a:spLocks noGrp="1"/>
+          </p:cNvSpPr>
+          <p:nvPr>
+            <p:ph type="body" sz="quarter" idx="11"/>
+          </p:nvPr>
+        </p:nvSpPr>
+        <p:spPr/>
+        <p:txBody>
+          <a:bodyPr/>
+          <a:lstStyle/>
+          <a:p>
+            <a:r>
+              <a:rPr kumimoji="1" lang="en-US" altLang="ko-KR" sz="1400" dirty="0" err="1"/>
+              <a:t>08. 실행 제약과 가드레일의 역할</a:t>
+            </a:r>
+          </a:p>
+        </p:txBody>
+      </p:sp>
+      <p:sp>
+        <p:nvSpPr>
+          <p:cNvPr id="6" name="텍스트 개체 틀 5">
+            <a:extLst>
+              <a:ext uri="{FF2B5EF4-FFF2-40B4-BE49-F238E27FC236}">
+                <a16:creationId xmlns:a16="http://schemas.microsoft.com/office/drawing/2014/main" id="{A24E58E1-194B-A320-AEEE-24D08685BB67}"/>
+              </a:ext>
+            </a:extLst>
+          </p:cNvPr>
+          <p:cNvSpPr>
+            <a:spLocks noGrp="1"/>
+          </p:cNvSpPr>
+          <p:nvPr>
+            <p:ph type="body" sz="quarter" idx="12"/>
+          </p:nvPr>
+        </p:nvSpPr>
+        <p:spPr/>
+        <p:txBody>
+          <a:bodyPr/>
+          <a:lstStyle/>
+          <a:p>
+            <a:endParaRPr kumimoji="1" lang="ko-KR" altLang="en-US" dirty="0"/>
+          </a:p>
+        </p:txBody>
+      </p:sp>
+      <p:sp>
+        <p:nvSpPr>
+          <p:cNvPr id="7" name="텍스트 개체 틀 6">
+            <a:extLst>
+              <a:ext uri="{FF2B5EF4-FFF2-40B4-BE49-F238E27FC236}">
+                <a16:creationId xmlns:a16="http://schemas.microsoft.com/office/drawing/2014/main" id="{A219F420-613B-6234-45F6-0955A9A4505F}"/>
+              </a:ext>
+            </a:extLst>
+          </p:cNvPr>
+          <p:cNvSpPr>
+            <a:spLocks noGrp="1"/>
+          </p:cNvSpPr>
+          <p:nvPr>
+            <p:ph type="body" sz="quarter" idx="13"/>
+          </p:nvPr>
+        </p:nvSpPr>
+        <p:spPr/>
+        <p:txBody>
+          <a:bodyPr/>
+          <a:lstStyle/>
+          <a:p>
+            <a:endParaRPr kumimoji="1" lang="en-US" altLang="ko-KR" dirty="0"/>
+          </a:p>
+        </p:txBody>
+      </p:sp>
+      <p:sp>
+        <p:nvSpPr>
+          <p:cNvPr id="8" name="내용 개체 틀 7">
+            <a:extLst>
+              <a:ext uri="{FF2B5EF4-FFF2-40B4-BE49-F238E27FC236}">
+                <a16:creationId xmlns:a16="http://schemas.microsoft.com/office/drawing/2014/main" id="{BEBA2C4A-B0BF-F2E4-EA6E-614C99CBA184}"/>
+              </a:ext>
+            </a:extLst>
+          </p:cNvPr>
+          <p:cNvSpPr>
+            <a:spLocks noGrp="1"/>
+          </p:cNvSpPr>
+          <p:nvPr>
+            <p:ph idx="1"/>
+          </p:nvPr>
+        </p:nvSpPr>
+        <p:spPr/>
+        <p:txBody>
+          <a:bodyPr>
+            <a:normAutofit/>
+          </a:bodyPr>
+          <a:lstStyle/>
+          <a:p>
+            <a:pPr marL="0" indent="0">
+              <a:spcBef>
+                <a:spcPts val="600"/>
+              </a:spcBef>
+              <a:spcAft>
+                <a:spcPts val="600"/>
+              </a:spcAft>
+              <a:buNone/>
+            </a:pPr>
+            <a:r>
+              <a:rPr sz="1800" b="0">
+                <a:solidFill>
+                  <a:srgbClr val="000000"/>
+                </a:solidFill>
+                <a:latin typeface="맑은 고딕"/>
+                <a:ea typeface="맑은 고딕"/>
+              </a:rPr>
+              <a:t>프롬프트에 "하지 마"라고 적어도 에이전트는 막히면 그 길로 간다. 가드레일은 </a:t>
+            </a:r>
+            <a:r>
+              <a:rPr sz="1800" b="1">
+                <a:solidFill>
+                  <a:srgbClr val="000000"/>
+                </a:solidFill>
+                <a:latin typeface="맑은 고딕"/>
+                <a:ea typeface="맑은 고딕"/>
+              </a:rPr>
+              <a:t>환경과 도구가 그 행동을 거절하게</a:t>
+            </a:r>
+            <a:r>
+              <a:rPr sz="1800" b="0">
+                <a:solidFill>
+                  <a:srgbClr val="000000"/>
+                </a:solidFill>
+                <a:latin typeface="맑은 고딕"/>
+                <a:ea typeface="맑은 고딕"/>
+              </a:rPr>
+              <a:t> 만드는 제약이다.</a:t>
+            </a:r>
+          </a:p>
+          <a:p>
+            <a:pPr lvl="2" marL="723900" indent="-368300">
+              <a:spcBef>
+                <a:spcPts val="600"/>
+              </a:spcBef>
+              <a:spcAft>
+                <a:spcPts val="600"/>
+              </a:spcAft>
+              <a:buSzPct val="90000"/>
+              <a:buFont typeface="Wingdings" pitchFamily="2" charset="2"/>
+              <a:buChar char=""/>
+            </a:pPr>
+            <a:r>
+              <a:rPr sz="1800" b="0">
+                <a:solidFill>
+                  <a:srgbClr val="000000"/>
+                </a:solidFill>
+                <a:latin typeface="맑은 고딕"/>
+                <a:ea typeface="맑은 고딕"/>
+              </a:rPr>
+              <a:t>어긋난 실행을 막는 네 수단, </a:t>
+            </a:r>
+            <a:r>
+              <a:rPr sz="1800" b="1">
+                <a:solidFill>
+                  <a:srgbClr val="000000"/>
+                </a:solidFill>
+                <a:latin typeface="맑은 고딕"/>
+                <a:ea typeface="맑은 고딕"/>
+              </a:rPr>
+              <a:t>멈출 조건·확인 지점·가드레일·센서</a:t>
+            </a:r>
+            <a:r>
+              <a:rPr sz="1800" b="0">
+                <a:solidFill>
+                  <a:srgbClr val="000000"/>
+                </a:solidFill>
+                <a:latin typeface="맑은 고딕"/>
+                <a:ea typeface="맑은 고딕"/>
+              </a:rPr>
+              <a:t>를 구분한다.</a:t>
+            </a:r>
+          </a:p>
+          <a:p>
+            <a:pPr lvl="2" marL="723900" indent="-368300">
+              <a:spcBef>
+                <a:spcPts val="600"/>
+              </a:spcBef>
+              <a:spcAft>
+                <a:spcPts val="600"/>
+              </a:spcAft>
+              <a:buSzPct val="90000"/>
+              <a:buFont typeface="Wingdings" pitchFamily="2" charset="2"/>
+              <a:buChar char=""/>
+            </a:pPr>
+            <a:r>
+              <a:rPr sz="1800" b="0">
+                <a:solidFill>
+                  <a:srgbClr val="000000"/>
+                </a:solidFill>
+                <a:latin typeface="맑은 고딕"/>
+                <a:ea typeface="맑은 고딕"/>
+              </a:rPr>
+              <a:t>위험을 </a:t>
+            </a:r>
+            <a:r>
+              <a:rPr sz="1800" b="1">
+                <a:solidFill>
+                  <a:srgbClr val="000000"/>
+                </a:solidFill>
+                <a:latin typeface="맑은 고딕"/>
+                <a:ea typeface="맑은 고딕"/>
+              </a:rPr>
+              <a:t>확률과 크기</a:t>
+            </a:r>
+            <a:r>
+              <a:rPr sz="1800" b="0">
+                <a:solidFill>
+                  <a:srgbClr val="000000"/>
+                </a:solidFill>
+                <a:latin typeface="맑은 고딕"/>
+                <a:ea typeface="맑은 고딕"/>
+              </a:rPr>
+              <a:t>로 적고, 어디까지 감당할지로 막을 것을 고른다.</a:t>
+            </a:r>
+          </a:p>
+          <a:p>
+            <a:pPr lvl="2" marL="723900" indent="-368300">
+              <a:spcBef>
+                <a:spcPts val="600"/>
+              </a:spcBef>
+              <a:spcAft>
+                <a:spcPts val="600"/>
+              </a:spcAft>
+              <a:buSzPct val="90000"/>
+              <a:buFont typeface="Wingdings" pitchFamily="2" charset="2"/>
+              <a:buChar char=""/>
+            </a:pPr>
+            <a:r>
+              <a:rPr sz="1800" b="0">
+                <a:solidFill>
+                  <a:srgbClr val="000000"/>
+                </a:solidFill>
+                <a:latin typeface="맑은 고딕"/>
+                <a:ea typeface="맑은 고딕"/>
+              </a:rPr>
+              <a:t>에이전트의 위험 10가지</a:t>
+            </a:r>
+            <a:r>
+              <a:rPr sz="1400" b="0">
+                <a:solidFill>
+                  <a:srgbClr val="000000"/>
+                </a:solidFill>
+                <a:latin typeface="맑은 고딕"/>
+                <a:ea typeface="맑은 고딕"/>
+              </a:rPr>
+              <a:t>(OWASP)</a:t>
+            </a:r>
+            <a:r>
+              <a:rPr sz="1800" b="0">
+                <a:solidFill>
+                  <a:srgbClr val="000000"/>
+                </a:solidFill>
+                <a:latin typeface="맑은 고딕"/>
+                <a:ea typeface="맑은 고딕"/>
+              </a:rPr>
+              <a:t>를 알고, 과제에 해당하는 것을 </a:t>
+            </a:r>
+            <a:r>
+              <a:rPr sz="1800" b="1">
+                <a:solidFill>
+                  <a:srgbClr val="000000"/>
+                </a:solidFill>
+                <a:latin typeface="맑은 고딕"/>
+                <a:ea typeface="맑은 고딕"/>
+              </a:rPr>
+              <a:t>과제의 말로</a:t>
+            </a:r>
+            <a:r>
+              <a:rPr sz="1800" b="0">
+                <a:solidFill>
+                  <a:srgbClr val="000000"/>
+                </a:solidFill>
+                <a:latin typeface="맑은 고딕"/>
+                <a:ea typeface="맑은 고딕"/>
+              </a:rPr>
+              <a:t> 적는다.</a:t>
+            </a:r>
+          </a:p>
+          <a:p>
+            <a:pPr lvl="2" marL="723900" indent="-368300">
+              <a:spcBef>
+                <a:spcPts val="600"/>
+              </a:spcBef>
+              <a:spcAft>
+                <a:spcPts val="600"/>
+              </a:spcAft>
+              <a:buSzPct val="90000"/>
+              <a:buFont typeface="Wingdings" pitchFamily="2" charset="2"/>
+              <a:buChar char=""/>
+            </a:pPr>
+            <a:r>
+              <a:rPr sz="1800" b="1">
+                <a:solidFill>
+                  <a:srgbClr val="000000"/>
+                </a:solidFill>
+                <a:latin typeface="맑은 고딕"/>
+                <a:ea typeface="맑은 고딕"/>
+              </a:rPr>
+              <a:t>치명적 삼박자</a:t>
+            </a:r>
+            <a:r>
+              <a:rPr sz="1800" b="0">
+                <a:solidFill>
+                  <a:srgbClr val="000000"/>
+                </a:solidFill>
+                <a:latin typeface="맑은 고딕"/>
+                <a:ea typeface="맑은 고딕"/>
+              </a:rPr>
+              <a:t> —</a:t>
+            </a:r>
+            <a:r>
+              <a:rPr sz="1600" b="0">
+                <a:solidFill>
+                  <a:srgbClr val="000000"/>
+                </a:solidFill>
+                <a:latin typeface="맑은 고딕"/>
+                <a:ea typeface="맑은 고딕"/>
+              </a:rPr>
+              <a:t> 비공개 데이터·신뢰할 수 없는 내용·외부 전송이 모이면 주입을 막을 수 없다. 고리 하나를 끊는다.</a:t>
+            </a:r>
+          </a:p>
+          <a:p>
+            <a:pPr lvl="2" marL="723900" indent="-368300">
+              <a:spcBef>
+                <a:spcPts val="600"/>
+              </a:spcBef>
+              <a:spcAft>
+                <a:spcPts val="600"/>
+              </a:spcAft>
+              <a:buSzPct val="90000"/>
+              <a:buFont typeface="Wingdings" pitchFamily="2" charset="2"/>
+              <a:buChar char=""/>
+            </a:pPr>
+            <a:r>
+              <a:rPr sz="1800" b="0">
+                <a:solidFill>
+                  <a:srgbClr val="000000"/>
+                </a:solidFill>
+                <a:latin typeface="맑은 고딕"/>
+                <a:ea typeface="맑은 고딕"/>
+              </a:rPr>
+              <a:t>가드레일을 </a:t>
+            </a:r>
+            <a:r>
+              <a:rPr sz="1800" b="1">
+                <a:solidFill>
+                  <a:srgbClr val="000000"/>
+                </a:solidFill>
+                <a:latin typeface="맑은 고딕"/>
+                <a:ea typeface="맑은 고딕"/>
+              </a:rPr>
+              <a:t>입력·도구 호출·출력·환경</a:t>
+            </a:r>
+            <a:r>
+              <a:rPr sz="1800" b="0">
+                <a:solidFill>
+                  <a:srgbClr val="000000"/>
+                </a:solidFill>
+                <a:latin typeface="맑은 고딕"/>
+                <a:ea typeface="맑은 고딕"/>
+              </a:rPr>
+              <a:t> 네 자리에 겹으로 쌓는다.</a:t>
+            </a:r>
+          </a:p>
+          <a:p>
+            <a:pPr lvl="2" marL="723900" indent="-368300">
+              <a:spcBef>
+                <a:spcPts val="600"/>
+              </a:spcBef>
+              <a:spcAft>
+                <a:spcPts val="600"/>
+              </a:spcAft>
+              <a:buSzPct val="90000"/>
+              <a:buFont typeface="Wingdings" pitchFamily="2" charset="2"/>
+              <a:buChar char=""/>
+            </a:pPr>
+            <a:r>
+              <a:rPr sz="1800" b="0">
+                <a:solidFill>
+                  <a:srgbClr val="000000"/>
+                </a:solidFill>
+                <a:latin typeface="맑은 고딕"/>
+                <a:ea typeface="맑은 고딕"/>
+              </a:rPr>
+              <a:t>기계가 판정할 수 있는 규칙은 </a:t>
+            </a:r>
+            <a:r>
+              <a:rPr sz="1800" b="1">
+                <a:solidFill>
+                  <a:srgbClr val="000000"/>
+                </a:solidFill>
+                <a:latin typeface="맑은 고딕"/>
+                <a:ea typeface="맑은 고딕"/>
+              </a:rPr>
+              <a:t>강제</a:t>
+            </a:r>
+            <a:r>
+              <a:rPr sz="1800" b="0">
+                <a:solidFill>
+                  <a:srgbClr val="000000"/>
+                </a:solidFill>
+                <a:latin typeface="맑은 고딕"/>
+                <a:ea typeface="맑은 고딕"/>
+              </a:rPr>
+              <a:t>로 옮기고, 판정할 수 없는 것만 글로 남긴다.</a:t>
+            </a:r>
+          </a:p>
+          <a:p>
+            <a:pPr lvl="2" marL="723900" indent="-368300">
+              <a:spcBef>
+                <a:spcPts val="600"/>
+              </a:spcBef>
+              <a:spcAft>
+                <a:spcPts val="600"/>
+              </a:spcAft>
+              <a:buSzPct val="90000"/>
+              <a:buFont typeface="Wingdings" pitchFamily="2" charset="2"/>
+              <a:buChar char=""/>
+            </a:pPr>
+            <a:r>
+              <a:rPr sz="1800" b="1">
+                <a:solidFill>
+                  <a:srgbClr val="000000"/>
+                </a:solidFill>
+                <a:latin typeface="맑은 고딕"/>
+                <a:ea typeface="맑은 고딕"/>
+              </a:rPr>
+              <a:t>샌드박스</a:t>
+            </a:r>
+            <a:r>
+              <a:rPr sz="1800" b="0">
+                <a:solidFill>
+                  <a:srgbClr val="000000"/>
+                </a:solidFill>
+                <a:latin typeface="맑은 고딕"/>
+                <a:ea typeface="맑은 고딕"/>
+              </a:rPr>
+              <a:t>의 기본값을 정해 어긋난 행동이 번지는 범위를 끊는다.</a:t>
+            </a:r>
+          </a:p>
+        </p:txBody>
+      </p:sp>
+    </p:spTree>
+    <p:extLst>
+      <p:ext uri="{BB962C8B-B14F-4D97-AF65-F5344CB8AC3E}">
+        <p14:creationId xmlns:p14="http://schemas.microsoft.com/office/powerpoint/2010/main" val="3555436673"/>
+      </p:ext>
+    </p:extLst>
+  </p:cSld>
+  <p:clrMapOvr>
+    <a:masterClrMapping/>
+  </p:clrMapOvr>
+</p:sld>
+</file>
+
+<file path=ppt/slides/slide20.xml><?xml version="1.0" encoding="utf-8"?>
 <p:sld xmlns:a="http://schemas.openxmlformats.org/drawingml/2006/main" xmlns:r="http://schemas.openxmlformats.org/officeDocument/2006/relationships" xmlns:p="http://schemas.openxmlformats.org/presentationml/2006/main">
   <p:cSld>
     <p:spTree>
@@ -14348,7 +15574,7 @@
                 <a:ea typeface="맑은 고딕" panose="020B0503020000020004" pitchFamily="34" charset="-127"/>
                 <a:cs typeface="+mn-cs"/>
               </a:rPr>
-              <a:t>- 19 -</a:t>
+              <a:t>- 20 -</a:t>
             </a:r>
           </a:p>
         </p:txBody>
@@ -14530,7 +15756,7 @@
 </p:sld>
 </file>
 
-<file path=ppt/slides/slide2.xml><?xml version="1.0" encoding="utf-8"?>
+<file path=ppt/slides/slide21.xml><?xml version="1.0" encoding="utf-8"?>
 <p:sld xmlns:a="http://schemas.openxmlformats.org/drawingml/2006/main" xmlns:r="http://schemas.openxmlformats.org/officeDocument/2006/relationships" xmlns:p="http://schemas.openxmlformats.org/presentationml/2006/main">
   <p:cSld>
     <p:spTree>
@@ -14582,7 +15808,29 @@
                 <a:latin typeface="맑은 고딕"/>
                 <a:ea typeface="맑은 고딕"/>
               </a:rPr>
-              <a:t>01. 세션 목표</a:t>
+              <a:t>보완 </a:t>
+            </a:r>
+            <a:r>
+              <a:rPr sz="1800" b="1">
+                <a:solidFill>
+                  <a:srgbClr val="000000"/>
+                </a:solidFill>
+                <a:latin typeface="맑은 고딕"/>
+                <a:ea typeface="맑은 고딕"/>
+              </a:rPr>
+              <a:t>(안)</a:t>
+            </a:r>
+          </a:p>
+          <a:p>
+            <a:r>
+              <a:rPr sz="1100" b="1">
+                <a:solidFill>
+                  <a:srgbClr val="000000"/>
+                </a:solidFill>
+                <a:latin typeface="맑은 고딕"/>
+                <a:ea typeface="맑은 고딕"/>
+              </a:rPr>
+              <a:t>별첨. 실습 답</a:t>
             </a:r>
           </a:p>
         </p:txBody>
@@ -14617,588 +15865,7 @@
                   <a:prstClr val="black"/>
                 </a:solidFill>
               </a:rPr>
-              <a:t>- 2 -</a:t>
-            </a:r>
-          </a:p>
-        </p:txBody>
-      </p:sp>
-      <p:sp>
-        <p:nvSpPr>
-          <p:cNvPr id="5" name="텍스트 개체 틀 4">
-            <a:extLst>
-              <a:ext uri="{FF2B5EF4-FFF2-40B4-BE49-F238E27FC236}">
-                <a16:creationId xmlns:a16="http://schemas.microsoft.com/office/drawing/2014/main" id="{D66274C8-E16F-5AEB-614B-D8D32DA3E8C6}"/>
-              </a:ext>
-            </a:extLst>
-          </p:cNvPr>
-          <p:cNvSpPr>
-            <a:spLocks noGrp="1"/>
-          </p:cNvSpPr>
-          <p:nvPr>
-            <p:ph type="body" sz="quarter" idx="11"/>
-          </p:nvPr>
-        </p:nvSpPr>
-        <p:spPr/>
-        <p:txBody>
-          <a:bodyPr/>
-          <a:lstStyle/>
-          <a:p>
-            <a:r>
-              <a:rPr kumimoji="1" lang="en-US" altLang="ko-KR" sz="1400" dirty="0" err="1"/>
-              <a:t>08. 실행 제약과 가드레일의 역할</a:t>
-            </a:r>
-          </a:p>
-        </p:txBody>
-      </p:sp>
-      <p:sp>
-        <p:nvSpPr>
-          <p:cNvPr id="6" name="텍스트 개체 틀 5">
-            <a:extLst>
-              <a:ext uri="{FF2B5EF4-FFF2-40B4-BE49-F238E27FC236}">
-                <a16:creationId xmlns:a16="http://schemas.microsoft.com/office/drawing/2014/main" id="{A24E58E1-194B-A320-AEEE-24D08685BB67}"/>
-              </a:ext>
-            </a:extLst>
-          </p:cNvPr>
-          <p:cNvSpPr>
-            <a:spLocks noGrp="1"/>
-          </p:cNvSpPr>
-          <p:nvPr>
-            <p:ph type="body" sz="quarter" idx="12"/>
-          </p:nvPr>
-        </p:nvSpPr>
-        <p:spPr/>
-        <p:txBody>
-          <a:bodyPr/>
-          <a:lstStyle/>
-          <a:p>
-            <a:endParaRPr kumimoji="1" lang="ko-KR" altLang="en-US" dirty="0"/>
-          </a:p>
-        </p:txBody>
-      </p:sp>
-      <p:sp>
-        <p:nvSpPr>
-          <p:cNvPr id="7" name="텍스트 개체 틀 6">
-            <a:extLst>
-              <a:ext uri="{FF2B5EF4-FFF2-40B4-BE49-F238E27FC236}">
-                <a16:creationId xmlns:a16="http://schemas.microsoft.com/office/drawing/2014/main" id="{A219F420-613B-6234-45F6-0955A9A4505F}"/>
-              </a:ext>
-            </a:extLst>
-          </p:cNvPr>
-          <p:cNvSpPr>
-            <a:spLocks noGrp="1"/>
-          </p:cNvSpPr>
-          <p:nvPr>
-            <p:ph type="body" sz="quarter" idx="13"/>
-          </p:nvPr>
-        </p:nvSpPr>
-        <p:spPr/>
-        <p:txBody>
-          <a:bodyPr/>
-          <a:lstStyle/>
-          <a:p>
-            <a:endParaRPr kumimoji="1" lang="en-US" altLang="ko-KR" dirty="0"/>
-          </a:p>
-        </p:txBody>
-      </p:sp>
-      <p:sp>
-        <p:nvSpPr>
-          <p:cNvPr id="8" name="내용 개체 틀 7">
-            <a:extLst>
-              <a:ext uri="{FF2B5EF4-FFF2-40B4-BE49-F238E27FC236}">
-                <a16:creationId xmlns:a16="http://schemas.microsoft.com/office/drawing/2014/main" id="{BEBA2C4A-B0BF-F2E4-EA6E-614C99CBA184}"/>
-              </a:ext>
-            </a:extLst>
-          </p:cNvPr>
-          <p:cNvSpPr>
-            <a:spLocks noGrp="1"/>
-          </p:cNvSpPr>
-          <p:nvPr>
-            <p:ph idx="1"/>
-          </p:nvPr>
-        </p:nvSpPr>
-        <p:spPr/>
-        <p:txBody>
-          <a:bodyPr>
-            <a:normAutofit/>
-          </a:bodyPr>
-          <a:lstStyle/>
-          <a:p>
-            <a:pPr marL="0" indent="0">
-              <a:spcBef>
-                <a:spcPts val="600"/>
-              </a:spcBef>
-              <a:spcAft>
-                <a:spcPts val="600"/>
-              </a:spcAft>
-              <a:buNone/>
-            </a:pPr>
-            <a:r>
-              <a:rPr sz="1800" b="0">
-                <a:solidFill>
-                  <a:srgbClr val="000000"/>
-                </a:solidFill>
-                <a:latin typeface="맑은 고딕"/>
-                <a:ea typeface="맑은 고딕"/>
-              </a:rPr>
-              <a:t>프롬프트에 "하지 마"라고 적어도 에이전트는 막히면 그 길로 간다. 가드레일은 </a:t>
-            </a:r>
-            <a:r>
-              <a:rPr sz="1800" b="1">
-                <a:solidFill>
-                  <a:srgbClr val="000000"/>
-                </a:solidFill>
-                <a:latin typeface="맑은 고딕"/>
-                <a:ea typeface="맑은 고딕"/>
-              </a:rPr>
-              <a:t>환경과 도구가 그 행동을 거절하게</a:t>
-            </a:r>
-            <a:r>
-              <a:rPr sz="1800" b="0">
-                <a:solidFill>
-                  <a:srgbClr val="000000"/>
-                </a:solidFill>
-                <a:latin typeface="맑은 고딕"/>
-                <a:ea typeface="맑은 고딕"/>
-              </a:rPr>
-              <a:t> 만드는 제약이다.</a:t>
-            </a:r>
-          </a:p>
-          <a:p>
-            <a:pPr lvl="2" marL="723900" indent="-368300">
-              <a:spcBef>
-                <a:spcPts val="600"/>
-              </a:spcBef>
-              <a:spcAft>
-                <a:spcPts val="600"/>
-              </a:spcAft>
-              <a:buSzPct val="90000"/>
-              <a:buFont typeface="Wingdings" pitchFamily="2" charset="2"/>
-              <a:buChar char=""/>
-            </a:pPr>
-            <a:r>
-              <a:rPr sz="1800" b="0">
-                <a:solidFill>
-                  <a:srgbClr val="000000"/>
-                </a:solidFill>
-                <a:latin typeface="맑은 고딕"/>
-                <a:ea typeface="맑은 고딕"/>
-              </a:rPr>
-              <a:t>어긋난 실행을 막는 네 수단, </a:t>
-            </a:r>
-            <a:r>
-              <a:rPr sz="1800" b="1">
-                <a:solidFill>
-                  <a:srgbClr val="000000"/>
-                </a:solidFill>
-                <a:latin typeface="맑은 고딕"/>
-                <a:ea typeface="맑은 고딕"/>
-              </a:rPr>
-              <a:t>멈출 조건·확인 지점·가드레일·센서</a:t>
-            </a:r>
-            <a:r>
-              <a:rPr sz="1800" b="0">
-                <a:solidFill>
-                  <a:srgbClr val="000000"/>
-                </a:solidFill>
-                <a:latin typeface="맑은 고딕"/>
-                <a:ea typeface="맑은 고딕"/>
-              </a:rPr>
-              <a:t>를 구분한다.</a:t>
-            </a:r>
-          </a:p>
-          <a:p>
-            <a:pPr lvl="2" marL="723900" indent="-368300">
-              <a:spcBef>
-                <a:spcPts val="600"/>
-              </a:spcBef>
-              <a:spcAft>
-                <a:spcPts val="600"/>
-              </a:spcAft>
-              <a:buSzPct val="90000"/>
-              <a:buFont typeface="Wingdings" pitchFamily="2" charset="2"/>
-              <a:buChar char=""/>
-            </a:pPr>
-            <a:r>
-              <a:rPr sz="1800" b="0">
-                <a:solidFill>
-                  <a:srgbClr val="000000"/>
-                </a:solidFill>
-                <a:latin typeface="맑은 고딕"/>
-                <a:ea typeface="맑은 고딕"/>
-              </a:rPr>
-              <a:t>위험을 </a:t>
-            </a:r>
-            <a:r>
-              <a:rPr sz="1800" b="1">
-                <a:solidFill>
-                  <a:srgbClr val="000000"/>
-                </a:solidFill>
-                <a:latin typeface="맑은 고딕"/>
-                <a:ea typeface="맑은 고딕"/>
-              </a:rPr>
-              <a:t>확률과 크기</a:t>
-            </a:r>
-            <a:r>
-              <a:rPr sz="1800" b="0">
-                <a:solidFill>
-                  <a:srgbClr val="000000"/>
-                </a:solidFill>
-                <a:latin typeface="맑은 고딕"/>
-                <a:ea typeface="맑은 고딕"/>
-              </a:rPr>
-              <a:t>로 적고, 어디까지 감당할지로 막을 것을 고른다.</a:t>
-            </a:r>
-          </a:p>
-          <a:p>
-            <a:pPr lvl="2" marL="723900" indent="-368300">
-              <a:spcBef>
-                <a:spcPts val="600"/>
-              </a:spcBef>
-              <a:spcAft>
-                <a:spcPts val="600"/>
-              </a:spcAft>
-              <a:buSzPct val="90000"/>
-              <a:buFont typeface="Wingdings" pitchFamily="2" charset="2"/>
-              <a:buChar char=""/>
-            </a:pPr>
-            <a:r>
-              <a:rPr sz="1800" b="0">
-                <a:solidFill>
-                  <a:srgbClr val="000000"/>
-                </a:solidFill>
-                <a:latin typeface="맑은 고딕"/>
-                <a:ea typeface="맑은 고딕"/>
-              </a:rPr>
-              <a:t>에이전트의 위험 10가지</a:t>
-            </a:r>
-            <a:r>
-              <a:rPr sz="1400" b="0">
-                <a:solidFill>
-                  <a:srgbClr val="000000"/>
-                </a:solidFill>
-                <a:latin typeface="맑은 고딕"/>
-                <a:ea typeface="맑은 고딕"/>
-              </a:rPr>
-              <a:t>(OWASP)</a:t>
-            </a:r>
-            <a:r>
-              <a:rPr sz="1800" b="0">
-                <a:solidFill>
-                  <a:srgbClr val="000000"/>
-                </a:solidFill>
-                <a:latin typeface="맑은 고딕"/>
-                <a:ea typeface="맑은 고딕"/>
-              </a:rPr>
-              <a:t>를 알고, 과제에 해당하는 것을 </a:t>
-            </a:r>
-            <a:r>
-              <a:rPr sz="1800" b="1">
-                <a:solidFill>
-                  <a:srgbClr val="000000"/>
-                </a:solidFill>
-                <a:latin typeface="맑은 고딕"/>
-                <a:ea typeface="맑은 고딕"/>
-              </a:rPr>
-              <a:t>과제의 말로</a:t>
-            </a:r>
-            <a:r>
-              <a:rPr sz="1800" b="0">
-                <a:solidFill>
-                  <a:srgbClr val="000000"/>
-                </a:solidFill>
-                <a:latin typeface="맑은 고딕"/>
-                <a:ea typeface="맑은 고딕"/>
-              </a:rPr>
-              <a:t> 적는다.</a:t>
-            </a:r>
-          </a:p>
-          <a:p>
-            <a:pPr lvl="2" marL="723900" indent="-368300">
-              <a:spcBef>
-                <a:spcPts val="600"/>
-              </a:spcBef>
-              <a:spcAft>
-                <a:spcPts val="600"/>
-              </a:spcAft>
-              <a:buSzPct val="90000"/>
-              <a:buFont typeface="Wingdings" pitchFamily="2" charset="2"/>
-              <a:buChar char=""/>
-            </a:pPr>
-            <a:r>
-              <a:rPr sz="1800" b="1">
-                <a:solidFill>
-                  <a:srgbClr val="000000"/>
-                </a:solidFill>
-                <a:latin typeface="맑은 고딕"/>
-                <a:ea typeface="맑은 고딕"/>
-              </a:rPr>
-              <a:t>치명적 삼박자</a:t>
-            </a:r>
-            <a:r>
-              <a:rPr sz="1800" b="0">
-                <a:solidFill>
-                  <a:srgbClr val="000000"/>
-                </a:solidFill>
-                <a:latin typeface="맑은 고딕"/>
-                <a:ea typeface="맑은 고딕"/>
-              </a:rPr>
-              <a:t> —</a:t>
-            </a:r>
-            <a:r>
-              <a:rPr sz="1600" b="0">
-                <a:solidFill>
-                  <a:srgbClr val="000000"/>
-                </a:solidFill>
-                <a:latin typeface="맑은 고딕"/>
-                <a:ea typeface="맑은 고딕"/>
-              </a:rPr>
-              <a:t> 비공개 데이터·신뢰할 수 없는 내용·외부 전송이 모이면 주입을 막을 수 없다. 고리 하나를 끊는다.</a:t>
-            </a:r>
-          </a:p>
-          <a:p>
-            <a:pPr lvl="2" marL="723900" indent="-368300">
-              <a:spcBef>
-                <a:spcPts val="600"/>
-              </a:spcBef>
-              <a:spcAft>
-                <a:spcPts val="600"/>
-              </a:spcAft>
-              <a:buSzPct val="90000"/>
-              <a:buFont typeface="Wingdings" pitchFamily="2" charset="2"/>
-              <a:buChar char=""/>
-            </a:pPr>
-            <a:r>
-              <a:rPr sz="1800" b="0">
-                <a:solidFill>
-                  <a:srgbClr val="000000"/>
-                </a:solidFill>
-                <a:latin typeface="맑은 고딕"/>
-                <a:ea typeface="맑은 고딕"/>
-              </a:rPr>
-              <a:t>가드레일을 </a:t>
-            </a:r>
-            <a:r>
-              <a:rPr sz="1800" b="1">
-                <a:solidFill>
-                  <a:srgbClr val="000000"/>
-                </a:solidFill>
-                <a:latin typeface="맑은 고딕"/>
-                <a:ea typeface="맑은 고딕"/>
-              </a:rPr>
-              <a:t>입력·도구 호출·출력·환경</a:t>
-            </a:r>
-            <a:r>
-              <a:rPr sz="1800" b="0">
-                <a:solidFill>
-                  <a:srgbClr val="000000"/>
-                </a:solidFill>
-                <a:latin typeface="맑은 고딕"/>
-                <a:ea typeface="맑은 고딕"/>
-              </a:rPr>
-              <a:t> 네 자리에 겹으로 쌓는다.</a:t>
-            </a:r>
-          </a:p>
-          <a:p>
-            <a:pPr lvl="2" marL="723900" indent="-368300">
-              <a:spcBef>
-                <a:spcPts val="600"/>
-              </a:spcBef>
-              <a:spcAft>
-                <a:spcPts val="600"/>
-              </a:spcAft>
-              <a:buSzPct val="90000"/>
-              <a:buFont typeface="Wingdings" pitchFamily="2" charset="2"/>
-              <a:buChar char=""/>
-            </a:pPr>
-            <a:r>
-              <a:rPr sz="1800" b="0">
-                <a:solidFill>
-                  <a:srgbClr val="000000"/>
-                </a:solidFill>
-                <a:latin typeface="맑은 고딕"/>
-                <a:ea typeface="맑은 고딕"/>
-              </a:rPr>
-              <a:t>기계가 판정할 수 있는 규칙은 </a:t>
-            </a:r>
-            <a:r>
-              <a:rPr sz="1800" b="1">
-                <a:solidFill>
-                  <a:srgbClr val="000000"/>
-                </a:solidFill>
-                <a:latin typeface="맑은 고딕"/>
-                <a:ea typeface="맑은 고딕"/>
-              </a:rPr>
-              <a:t>강제</a:t>
-            </a:r>
-            <a:r>
-              <a:rPr sz="1800" b="0">
-                <a:solidFill>
-                  <a:srgbClr val="000000"/>
-                </a:solidFill>
-                <a:latin typeface="맑은 고딕"/>
-                <a:ea typeface="맑은 고딕"/>
-              </a:rPr>
-              <a:t>로 옮기고, 판정할 수 없는 것만 글로 남긴다.</a:t>
-            </a:r>
-          </a:p>
-          <a:p>
-            <a:pPr lvl="2" marL="723900" indent="-368300">
-              <a:spcBef>
-                <a:spcPts val="600"/>
-              </a:spcBef>
-              <a:spcAft>
-                <a:spcPts val="600"/>
-              </a:spcAft>
-              <a:buSzPct val="90000"/>
-              <a:buFont typeface="Wingdings" pitchFamily="2" charset="2"/>
-              <a:buChar char=""/>
-            </a:pPr>
-            <a:r>
-              <a:rPr sz="1800" b="1">
-                <a:solidFill>
-                  <a:srgbClr val="000000"/>
-                </a:solidFill>
-                <a:latin typeface="맑은 고딕"/>
-                <a:ea typeface="맑은 고딕"/>
-              </a:rPr>
-              <a:t>샌드박스</a:t>
-            </a:r>
-            <a:r>
-              <a:rPr sz="1800" b="0">
-                <a:solidFill>
-                  <a:srgbClr val="000000"/>
-                </a:solidFill>
-                <a:latin typeface="맑은 고딕"/>
-                <a:ea typeface="맑은 고딕"/>
-              </a:rPr>
-              <a:t>의 기본값을 정해 어긋난 행동이 번지는 범위를 끊는다.</a:t>
-            </a:r>
-          </a:p>
-        </p:txBody>
-      </p:sp>
-    </p:spTree>
-    <p:extLst>
-      <p:ext uri="{BB962C8B-B14F-4D97-AF65-F5344CB8AC3E}">
-        <p14:creationId xmlns:p14="http://schemas.microsoft.com/office/powerpoint/2010/main" val="3555436673"/>
-      </p:ext>
-    </p:extLst>
-  </p:cSld>
-  <p:clrMapOvr>
-    <a:masterClrMapping/>
-  </p:clrMapOvr>
-</p:sld>
-</file>
-
-<file path=ppt/slides/slide20.xml><?xml version="1.0" encoding="utf-8"?>
-<p:sld xmlns:a="http://schemas.openxmlformats.org/drawingml/2006/main" xmlns:r="http://schemas.openxmlformats.org/officeDocument/2006/relationships" xmlns:p="http://schemas.openxmlformats.org/presentationml/2006/main">
-  <p:cSld>
-    <p:spTree>
-      <p:nvGrpSpPr>
-        <p:cNvPr id="1" name="">
-          <a:extLst>
-            <a:ext uri="{FF2B5EF4-FFF2-40B4-BE49-F238E27FC236}">
-              <a16:creationId xmlns:a16="http://schemas.microsoft.com/office/drawing/2014/main" id="{8E4F1F13-426B-086B-7D8C-9A58A0F879DB}"/>
-            </a:ext>
-          </a:extLst>
-        </p:cNvPr>
-        <p:cNvGrpSpPr/>
-        <p:nvPr/>
-      </p:nvGrpSpPr>
-      <p:grpSpPr>
-        <a:xfrm>
-          <a:off x="0" y="0"/>
-          <a:ext cx="0" cy="0"/>
-          <a:chOff x="0" y="0"/>
-          <a:chExt cx="0" cy="0"/>
-        </a:xfrm>
-      </p:grpSpPr>
-      <p:sp>
-        <p:nvSpPr>
-          <p:cNvPr id="2" name="제목 1">
-            <a:extLst>
-              <a:ext uri="{FF2B5EF4-FFF2-40B4-BE49-F238E27FC236}">
-                <a16:creationId xmlns:a16="http://schemas.microsoft.com/office/drawing/2014/main" id="{AA26A92D-924E-0575-9551-F8FD7BFD3FAD}"/>
-              </a:ext>
-            </a:extLst>
-          </p:cNvPr>
-          <p:cNvSpPr>
-            <a:spLocks noGrp="1"/>
-          </p:cNvSpPr>
-          <p:nvPr>
-            <p:ph type="title"/>
-          </p:nvPr>
-        </p:nvSpPr>
-        <p:spPr/>
-        <p:txBody>
-          <a:bodyPr/>
-          <a:lstStyle/>
-          <a:p>
-            <a:r>
-              <a:rPr sz="2400" b="1">
-                <a:solidFill>
-                  <a:srgbClr val="000000"/>
-                </a:solidFill>
-                <a:latin typeface="맑은 고딕"/>
-                <a:ea typeface="맑은 고딕"/>
-              </a:rPr>
-              <a:t>보완 </a:t>
-            </a:r>
-            <a:r>
-              <a:rPr sz="1800" b="1">
-                <a:solidFill>
-                  <a:srgbClr val="000000"/>
-                </a:solidFill>
-                <a:latin typeface="맑은 고딕"/>
-                <a:ea typeface="맑은 고딕"/>
-              </a:rPr>
-              <a:t>(안)</a:t>
-            </a:r>
-          </a:p>
-          <a:p>
-            <a:r>
-              <a:rPr sz="1100" b="1">
-                <a:solidFill>
-                  <a:srgbClr val="000000"/>
-                </a:solidFill>
-                <a:latin typeface="맑은 고딕"/>
-                <a:ea typeface="맑은 고딕"/>
-              </a:rPr>
-              <a:t>별첨. 실습 답</a:t>
-            </a:r>
-          </a:p>
-        </p:txBody>
-      </p:sp>
-      <p:sp>
-        <p:nvSpPr>
-          <p:cNvPr id="3" name="슬라이드 번호 개체 틀 2">
-            <a:extLst>
-              <a:ext uri="{FF2B5EF4-FFF2-40B4-BE49-F238E27FC236}">
-                <a16:creationId xmlns:a16="http://schemas.microsoft.com/office/drawing/2014/main" id="{12CF30EE-4DFD-8063-56B8-B8689E76DFCA}"/>
-              </a:ext>
-            </a:extLst>
-          </p:cNvPr>
-          <p:cNvSpPr>
-            <a:spLocks noGrp="1"/>
-          </p:cNvSpPr>
-          <p:nvPr>
-            <p:ph type="sldNum" sz="quarter" idx="10"/>
-          </p:nvPr>
-        </p:nvSpPr>
-        <p:spPr/>
-        <p:txBody>
-          <a:bodyPr/>
-          <a:lstStyle/>
-          <a:p>
-            <a:pPr>
-              <a:defRPr/>
-            </a:pPr>
-            <a:r>
-              <a:rPr lang="en-US" altLang="ko-KR">
-                <a:solidFill>
-                  <a:prstClr val="black"/>
-                </a:solidFill>
-              </a:rPr>
-              <a:t>- 20 -</a:t>
+              <a:t>- 21 -</a:t>
             </a:r>
           </a:p>
         </p:txBody>
@@ -15897,7 +16564,17 @@
                 <a:latin typeface="맑은 고딕"/>
                 <a:ea typeface="맑은 고딕"/>
               </a:rPr>
-              <a:t>02. 가드레일이란?</a:t>
+              <a:t>02. 가드레일이란? </a:t>
+            </a:r>
+            <a:r>
+              <a:rPr sz="2000" b="1">
+                <a:solidFill>
+                  <a:srgbClr val="000000"/>
+                </a:solidFill>
+                <a:latin typeface="맑은 고딕"/>
+                <a:ea typeface="맑은 고딕"/>
+              </a:rPr>
+              <a:t>(1/2)</a:t>
             </a:r>
           </a:p>
         </p:txBody>
@@ -16001,7 +16678,7 @@
           </p:nvPr>
         </p:nvGraphicFramePr>
         <p:xfrm>
-          <a:off x="1565466" y="2898948"/>
+          <a:off x="1565466" y="3173268"/>
           <a:ext cx="5999480" cy="3873500"/>
         </p:xfrm>
         <a:graphic>
@@ -16908,7 +17585,7 @@
         <p:spPr>
           <a:xfrm>
             <a:off x="365760" y="960120"/>
-            <a:ext cx="8412480" cy="1587442"/>
+            <a:ext cx="8412480" cy="1844479"/>
           </a:xfrm>
           <a:prstGeom prst="rect">
             <a:avLst/>
@@ -16938,7 +17615,7 @@
                 <a:latin typeface="맑은 고딕"/>
                 <a:ea typeface="맑은 고딕"/>
               </a:rPr>
-              <a:t>사람에게 "실제 결제 시스템은 부르지 마"는 지키면 되는 규칙이지만, 에이전트에게는 </a:t>
+              <a:t>"실제 결제 시스템은 부르지 마"라는 말은 사람에게는 지키면 되는 규칙이지만, 에이전트에게는 </a:t>
             </a:r>
             <a:r>
               <a:rPr sz="1800" b="1">
@@ -16948,7 +17625,7 @@
                 <a:latin typeface="맑은 고딕"/>
                 <a:ea typeface="맑은 고딕"/>
               </a:rPr>
-              <a:t>지켜질 확률</a:t>
+              <a:t>지켜질 수도 있고 아닐 수도 있는 지시</a:t>
             </a:r>
             <a:r>
               <a:rPr sz="1800" b="0">
@@ -16958,7 +17635,7 @@
                 <a:latin typeface="맑은 고딕"/>
                 <a:ea typeface="맑은 고딕"/>
               </a:rPr>
-              <a:t>이다. 가드레일은 그 지시가 어긋나도 결과가 달라지지 않게 하는 제약이다.</a:t>
+              <a:t>다. 가드레일은 그 지시를 어기더라도 호출 자체가 실행되지 않게 만드는 제약이다.</a:t>
             </a:r>
           </a:p>
           <a:p>
@@ -17021,7 +17698,27 @@
                 <a:latin typeface="맑은 고딕"/>
                 <a:ea typeface="맑은 고딕"/>
               </a:rPr>
-              <a:t>"Computational guides increase the probability of good results with deterministic tooling", [Böckeler 2026a]</a:t>
+              <a:t>"Computational guides increase the probability of good results with deterministic tooling"</a:t>
+            </a:r>
+            <a:r>
+              <a:rPr sz="1000" b="0">
+                <a:solidFill>
+                  <a:srgbClr val="000000"/>
+                </a:solidFill>
+                <a:latin typeface="맑은 고딕"/>
+                <a:ea typeface="맑은 고딕"/>
+              </a:rPr>
+              <a:t>, </a:t>
+            </a:r>
+            <a:r>
+              <a:rPr sz="1000" b="0">
+                <a:solidFill>
+                  <a:srgbClr val="000000"/>
+                </a:solidFill>
+                <a:latin typeface="맑은 고딕"/>
+                <a:ea typeface="맑은 고딕"/>
+              </a:rPr>
+              <a:t>[Böckeler 2026a]</a:t>
             </a:r>
           </a:p>
         </p:txBody>
@@ -17105,7 +17802,7 @@
         </p:nvSpPr>
         <p:spPr>
           <a:xfrm>
-            <a:off x="365760" y="2600498"/>
+            <a:off x="365760" y="2874818"/>
             <a:ext cx="8412480" cy="222250"/>
           </a:xfrm>
           <a:prstGeom prst="rect">
@@ -17136,181 +17833,6 @@
                 <a:ea typeface="맑은 고딕"/>
               </a:rPr>
               <a:t>어긋난 실행을 막는 네 수단</a:t>
-            </a:r>
-          </a:p>
-        </p:txBody>
-      </p:sp>
-      <p:sp>
-        <p:nvSpPr>
-          <p:cNvPr id="15" name="TextBox 12">
-            <a:extLst>
-              <a:ext uri="{FF2B5EF4-FFF2-40B4-BE49-F238E27FC236}">
-                <a16:creationId xmlns:a16="http://schemas.microsoft.com/office/drawing/2014/main" id="{654EDDB4-901F-3D48-A715-17D163E8A7AC}"/>
-              </a:ext>
-            </a:extLst>
-          </p:cNvPr>
-          <p:cNvSpPr txBox="1"/>
-          <p:nvPr/>
-        </p:nvSpPr>
-        <p:spPr>
-          <a:xfrm>
-            <a:off x="365760" y="4567548"/>
-            <a:ext cx="8412480" cy="1692593"/>
-          </a:xfrm>
-          <a:prstGeom prst="rect">
-            <a:avLst/>
-          </a:prstGeom>
-          <a:noFill/>
-        </p:spPr>
-        <p:txBody>
-          <a:bodyPr wrap="square">
-            <a:spAutoFit/>
-          </a:bodyPr>
-          <a:lstStyle/>
-          <a:p>
-            <a:pPr lvl="2" marL="723900" indent="-368300">
-              <a:spcBef>
-                <a:spcPts val="600"/>
-              </a:spcBef>
-              <a:spcAft>
-                <a:spcPts val="600"/>
-              </a:spcAft>
-              <a:buSzPct val="90000"/>
-              <a:buFont typeface="Wingdings" pitchFamily="2" charset="2"/>
-              <a:buChar char=""/>
-            </a:pPr>
-            <a:r>
-              <a:rPr sz="1800" b="0">
-                <a:solidFill>
-                  <a:srgbClr val="000000"/>
-                </a:solidFill>
-                <a:latin typeface="맑은 고딕"/>
-                <a:ea typeface="맑은 고딕"/>
-              </a:rPr>
-              <a:t>지시는 세 가지로 깨진다. 맥락이 길어지면 </a:t>
-            </a:r>
-            <a:r>
-              <a:rPr sz="1800" b="1">
-                <a:solidFill>
-                  <a:srgbClr val="000000"/>
-                </a:solidFill>
-                <a:latin typeface="맑은 고딕"/>
-                <a:ea typeface="맑은 고딕"/>
-              </a:rPr>
-              <a:t>앞의 금지가 묻히고</a:t>
-            </a:r>
-            <a:r>
-              <a:rPr sz="1800" b="0">
-                <a:solidFill>
-                  <a:srgbClr val="000000"/>
-                </a:solidFill>
-                <a:latin typeface="맑은 고딕"/>
-                <a:ea typeface="맑은 고딕"/>
-              </a:rPr>
-              <a:t>, 읽는 문서에 숨은 지시가 섞이면 </a:t>
-            </a:r>
-            <a:r>
-              <a:rPr sz="1800" b="1">
-                <a:solidFill>
-                  <a:srgbClr val="000000"/>
-                </a:solidFill>
-                <a:latin typeface="맑은 고딕"/>
-                <a:ea typeface="맑은 고딕"/>
-              </a:rPr>
-              <a:t>목표가 바뀌며</a:t>
-            </a:r>
-            <a:r>
-              <a:rPr sz="1800" b="0">
-                <a:solidFill>
-                  <a:srgbClr val="000000"/>
-                </a:solidFill>
-                <a:latin typeface="맑은 고딕"/>
-                <a:ea typeface="맑은 고딕"/>
-              </a:rPr>
-              <a:t>, 막히면 </a:t>
-            </a:r>
-            <a:r>
-              <a:rPr sz="1800" b="1">
-                <a:solidFill>
-                  <a:srgbClr val="000000"/>
-                </a:solidFill>
-                <a:latin typeface="맑은 고딕"/>
-                <a:ea typeface="맑은 고딕"/>
-              </a:rPr>
-              <a:t>다른 길을 찾는다</a:t>
-            </a:r>
-            <a:r>
-              <a:rPr sz="1800" b="0">
-                <a:solidFill>
-                  <a:srgbClr val="000000"/>
-                </a:solidFill>
-                <a:latin typeface="맑은 고딕"/>
-                <a:ea typeface="맑은 고딕"/>
-              </a:rPr>
-              <a:t>.</a:t>
-            </a:r>
-          </a:p>
-          <a:p>
-            <a:pPr lvl="2" marL="723900" indent="-368300">
-              <a:spcBef>
-                <a:spcPts val="600"/>
-              </a:spcBef>
-              <a:spcAft>
-                <a:spcPts val="600"/>
-              </a:spcAft>
-              <a:buSzPct val="90000"/>
-              <a:buFont typeface="Wingdings" pitchFamily="2" charset="2"/>
-              <a:buChar char=""/>
-            </a:pPr>
-            <a:r>
-              <a:rPr sz="1800" b="0">
-                <a:solidFill>
-                  <a:srgbClr val="000000"/>
-                </a:solidFill>
-                <a:latin typeface="맑은 고딕"/>
-                <a:ea typeface="맑은 고딕"/>
-              </a:rPr>
-              <a:t>넷 중 가드레일만 </a:t>
-            </a:r>
-            <a:r>
-              <a:rPr sz="1800" b="1">
-                <a:solidFill>
-                  <a:srgbClr val="000000"/>
-                </a:solidFill>
-                <a:latin typeface="맑은 고딕"/>
-                <a:ea typeface="맑은 고딕"/>
-              </a:rPr>
-              <a:t>모델의 협조에 기대지 않는다</a:t>
-            </a:r>
-            <a:r>
-              <a:rPr sz="1800" b="0">
-                <a:solidFill>
-                  <a:srgbClr val="000000"/>
-                </a:solidFill>
-                <a:latin typeface="맑은 고딕"/>
-                <a:ea typeface="맑은 고딕"/>
-              </a:rPr>
-              <a:t>. 결제 연동 설정과 자격을 에이전트의 환경에 주지 않으면, 호출하는 코드를 써도 </a:t>
-            </a:r>
-            <a:r>
-              <a:rPr sz="1800" b="1">
-                <a:solidFill>
-                  <a:srgbClr val="000000"/>
-                </a:solidFill>
-                <a:latin typeface="맑은 고딕"/>
-                <a:ea typeface="맑은 고딕"/>
-              </a:rPr>
-              <a:t>실행되지 않는다</a:t>
-            </a:r>
-            <a:r>
-              <a:rPr sz="1800" b="0">
-                <a:solidFill>
-                  <a:srgbClr val="000000"/>
-                </a:solidFill>
-                <a:latin typeface="맑은 고딕"/>
-                <a:ea typeface="맑은 고딕"/>
-              </a:rPr>
-              <a:t>.</a:t>
             </a:r>
           </a:p>
         </p:txBody>
@@ -17380,19 +17902,17 @@
                 <a:latin typeface="맑은 고딕"/>
                 <a:ea typeface="맑은 고딕"/>
               </a:rPr>
-              <a:t>위험의 어휘</a:t>
-            </a:r>
-          </a:p>
-          <a:p>
-            <a:r>
-              <a:rPr sz="1100" b="1">
-                <a:solidFill>
-                  <a:srgbClr val="000000"/>
-                </a:solidFill>
-                <a:latin typeface="맑은 고딕"/>
-                <a:ea typeface="맑은 고딕"/>
-              </a:rPr>
-              <a:t>03. 위험의 식별</a:t>
+              <a:t>02. 가드레일이란? </a:t>
+            </a:r>
+            <a:r>
+              <a:rPr sz="2000" b="1">
+                <a:solidFill>
+                  <a:srgbClr val="000000"/>
+                </a:solidFill>
+                <a:latin typeface="맑은 고딕"/>
+                <a:ea typeface="맑은 고딕"/>
+              </a:rPr>
+              <a:t>(2/2)</a:t>
             </a:r>
           </a:p>
         </p:txBody>
@@ -17533,47 +18053,6 @@
           </a:bodyPr>
           <a:lstStyle/>
           <a:p>
-            <a:pPr marL="0" indent="0">
-              <a:spcBef>
-                <a:spcPts val="600"/>
-              </a:spcBef>
-              <a:spcAft>
-                <a:spcPts val="600"/>
-              </a:spcAft>
-              <a:buNone/>
-            </a:pPr>
-            <a:r>
-              <a:rPr sz="1800" b="0">
-                <a:solidFill>
-                  <a:srgbClr val="000000"/>
-                </a:solidFill>
-                <a:latin typeface="맑은 고딕"/>
-                <a:ea typeface="맑은 고딕"/>
-              </a:rPr>
-              <a:t>무엇을 막고 무엇을 두고 볼지 고르려면 위험을 </a:t>
-            </a:r>
-            <a:r>
-              <a:rPr sz="1800" b="1">
-                <a:solidFill>
-                  <a:srgbClr val="000000"/>
-                </a:solidFill>
-                <a:latin typeface="맑은 고딕"/>
-                <a:ea typeface="맑은 고딕"/>
-              </a:rPr>
-              <a:t>비교할 수 있는 말</a:t>
-            </a:r>
-            <a:r>
-              <a:rPr sz="1800" b="0">
-                <a:solidFill>
-                  <a:srgbClr val="000000"/>
-                </a:solidFill>
-                <a:latin typeface="맑은 고딕"/>
-                <a:ea typeface="맑은 고딕"/>
-              </a:rPr>
-              <a:t>로 적어야 한다. NIST는 그 말을 위험과 위험 허용 수준으로 정의한다.</a:t>
-            </a:r>
-          </a:p>
-          <a:p>
             <a:pPr lvl="2" marL="723900" indent="-368300">
               <a:spcBef>
                 <a:spcPts val="600"/>
@@ -17593,7 +18072,7 @@
                 <a:latin typeface="맑은 고딕"/>
                 <a:ea typeface="맑은 고딕"/>
               </a:rPr>
-              <a:t>위험은 사건이 </a:t>
+              <a:t>지시는 세 가지로 깨진다. 맥락이 길어지면 </a:t>
             </a:r>
             <a:r>
               <a:rPr sz="1800" b="1">
@@ -17603,7 +18082,7 @@
                 <a:latin typeface="맑은 고딕"/>
                 <a:ea typeface="맑은 고딕"/>
               </a:rPr>
-              <a:t>일어날 확률</a:t>
+              <a:t>앞의 금지가 묻히고</a:t>
             </a:r>
             <a:r>
               <a:rPr sz="1800" b="0">
@@ -17613,7 +18092,7 @@
                 <a:latin typeface="맑은 고딕"/>
                 <a:ea typeface="맑은 고딕"/>
               </a:rPr>
-              <a:t>과 그 결과의 </a:t>
+              <a:t>, 읽는 문서에 숨은 지시가 섞이면 </a:t>
             </a:r>
             <a:r>
               <a:rPr sz="1800" b="1">
@@ -17623,7 +18102,7 @@
                 <a:latin typeface="맑은 고딕"/>
                 <a:ea typeface="맑은 고딕"/>
               </a:rPr>
-              <a:t>크기나 정도</a:t>
+              <a:t>목표가 바뀌며</a:t>
             </a:r>
             <a:r>
               <a:rPr sz="1800" b="0">
@@ -17633,213 +18112,27 @@
                 <a:latin typeface="맑은 고딕"/>
                 <a:ea typeface="맑은 고딕"/>
               </a:rPr>
-              <a:t>를 합친 척도를 뜻한다</a:t>
-            </a:r>
-            <a:r>
-              <a:rPr sz="1000" b="0">
-                <a:solidFill>
-                  <a:srgbClr val="000000"/>
-                </a:solidFill>
-                <a:latin typeface="맑은 고딕"/>
-                <a:ea typeface="맑은 고딕"/>
-              </a:rPr>
-              <a:t>, </a:t>
-            </a:r>
-            <a:r>
-              <a:rPr sz="1000" b="0">
-                <a:solidFill>
-                  <a:srgbClr val="000000"/>
-                </a:solidFill>
-                <a:latin typeface="맑은 고딕"/>
-                <a:ea typeface="맑은 고딕"/>
-              </a:rPr>
-              <a:t>"Risk refers to the composite measure of an event's probability of occurring and the magnitude or degree of the consequences of the corresponding event", [NIST 2023]</a:t>
-            </a:r>
-          </a:p>
-          <a:p>
-            <a:pPr lvl="3" marL="1077913" indent="-354013">
-              <a:spcBef>
-                <a:spcPts val="600"/>
-              </a:spcBef>
-              <a:spcAft>
-                <a:spcPts val="600"/>
-              </a:spcAft>
-              <a:buSzPct val="90000"/>
-              <a:buFont typeface="Wingdings" pitchFamily="2" charset="2"/>
-              <a:buChar char=""/>
-            </a:pPr>
-            <a:r>
-              <a:rPr sz="1600" b="0">
-                <a:solidFill>
-                  <a:srgbClr val="000000"/>
-                </a:solidFill>
-                <a:latin typeface="맑은 고딕"/>
-                <a:ea typeface="맑은 고딕"/>
-              </a:rPr>
-              <a:t>위험 허용 수준은 조직이나 AI 관계자가 목표를 이루기 위해 </a:t>
-            </a:r>
-            <a:r>
-              <a:rPr sz="1600" b="1">
-                <a:solidFill>
-                  <a:srgbClr val="000000"/>
-                </a:solidFill>
-                <a:latin typeface="맑은 고딕"/>
-                <a:ea typeface="맑은 고딕"/>
-              </a:rPr>
-              <a:t>위험을 감당할 준비가 된 정도</a:t>
-            </a:r>
-            <a:r>
-              <a:rPr sz="1600" b="0">
-                <a:solidFill>
-                  <a:srgbClr val="000000"/>
-                </a:solidFill>
-                <a:latin typeface="맑은 고딕"/>
-                <a:ea typeface="맑은 고딕"/>
-              </a:rPr>
-              <a:t>를 뜻한다</a:t>
-            </a:r>
-            <a:r>
-              <a:rPr sz="1000" b="0">
-                <a:solidFill>
-                  <a:srgbClr val="000000"/>
-                </a:solidFill>
-                <a:latin typeface="맑은 고딕"/>
-                <a:ea typeface="맑은 고딕"/>
-              </a:rPr>
-              <a:t>, </a:t>
-            </a:r>
-            <a:r>
-              <a:rPr sz="1000" b="0">
-                <a:solidFill>
-                  <a:srgbClr val="000000"/>
-                </a:solidFill>
-                <a:latin typeface="맑은 고딕"/>
-                <a:ea typeface="맑은 고딕"/>
-              </a:rPr>
-              <a:t>"Risk tolerance refers to the organization's or AI actor's … readiness to bear the risk in order to achieve its objectives"</a:t>
-            </a:r>
-            <a:r>
-              <a:rPr sz="1000" b="0">
-                <a:solidFill>
-                  <a:srgbClr val="000000"/>
-                </a:solidFill>
-                <a:latin typeface="맑은 고딕"/>
-                <a:ea typeface="맑은 고딕"/>
-              </a:rPr>
-              <a:t>, </a:t>
-            </a:r>
-            <a:r>
-              <a:rPr sz="1000" b="0">
-                <a:solidFill>
-                  <a:srgbClr val="000000"/>
-                </a:solidFill>
-                <a:latin typeface="맑은 고딕"/>
-                <a:ea typeface="맑은 고딕"/>
-              </a:rPr>
-              <a:t>[NIST 2023]</a:t>
-            </a:r>
-          </a:p>
-          <a:p>
-            <a:pPr lvl="3" marL="1077913" indent="-354013">
-              <a:spcBef>
-                <a:spcPts val="600"/>
-              </a:spcBef>
-              <a:spcAft>
-                <a:spcPts val="600"/>
-              </a:spcAft>
-              <a:buSzPct val="90000"/>
-              <a:buFont typeface="Wingdings" pitchFamily="2" charset="2"/>
-              <a:buChar char=""/>
-            </a:pPr>
-            <a:r>
-              <a:rPr sz="1600" b="0">
-                <a:solidFill>
-                  <a:srgbClr val="000000"/>
-                </a:solidFill>
-                <a:latin typeface="맑은 고딕"/>
-                <a:ea typeface="맑은 고딕"/>
-              </a:rPr>
-              <a:t>부정적 위험을 </a:t>
-            </a:r>
-            <a:r>
-              <a:rPr sz="1600" b="1">
-                <a:solidFill>
-                  <a:srgbClr val="000000"/>
-                </a:solidFill>
-                <a:latin typeface="맑은 고딕"/>
-                <a:ea typeface="맑은 고딕"/>
-              </a:rPr>
-              <a:t>완전히 없애려는 시도</a:t>
-            </a:r>
-            <a:r>
-              <a:rPr sz="1600" b="0">
-                <a:solidFill>
-                  <a:srgbClr val="000000"/>
-                </a:solidFill>
-                <a:latin typeface="맑은 고딕"/>
-                <a:ea typeface="맑은 고딕"/>
-              </a:rPr>
-              <a:t>는 실제로는 </a:t>
-            </a:r>
-            <a:r>
-              <a:rPr sz="1600" b="1">
-                <a:solidFill>
-                  <a:srgbClr val="000000"/>
-                </a:solidFill>
-                <a:latin typeface="맑은 고딕"/>
-                <a:ea typeface="맑은 고딕"/>
-              </a:rPr>
-              <a:t>역효과</a:t>
-            </a:r>
-            <a:r>
-              <a:rPr sz="1600" b="0">
-                <a:solidFill>
-                  <a:srgbClr val="000000"/>
-                </a:solidFill>
-                <a:latin typeface="맑은 고딕"/>
-                <a:ea typeface="맑은 고딕"/>
-              </a:rPr>
-              <a:t>를 낼 수 있다</a:t>
-            </a:r>
-            <a:r>
-              <a:rPr sz="1000" b="0">
-                <a:solidFill>
-                  <a:srgbClr val="000000"/>
-                </a:solidFill>
-                <a:latin typeface="맑은 고딕"/>
-                <a:ea typeface="맑은 고딕"/>
-              </a:rPr>
-              <a:t>, </a:t>
-            </a:r>
-            <a:r>
-              <a:rPr sz="1000" b="0">
-                <a:solidFill>
-                  <a:srgbClr val="000000"/>
-                </a:solidFill>
-                <a:latin typeface="맑은 고딕"/>
-                <a:ea typeface="맑은 고딕"/>
-              </a:rPr>
-              <a:t>"Attempting to eliminate negative risk entirely can be counterproductive in practice"</a:t>
-            </a:r>
-            <a:r>
-              <a:rPr sz="1000" b="0">
-                <a:solidFill>
-                  <a:srgbClr val="000000"/>
-                </a:solidFill>
-                <a:latin typeface="맑은 고딕"/>
-                <a:ea typeface="맑은 고딕"/>
-              </a:rPr>
-              <a:t>, </a:t>
-            </a:r>
-            <a:r>
-              <a:rPr sz="1000" b="0">
-                <a:solidFill>
-                  <a:srgbClr val="000000"/>
-                </a:solidFill>
-                <a:latin typeface="맑은 고딕"/>
-                <a:ea typeface="맑은 고딕"/>
-              </a:rPr>
-              <a:t>[NIST 2023]</a:t>
+              <a:t>, 막히면 </a:t>
+            </a:r>
+            <a:r>
+              <a:rPr sz="1800" b="1">
+                <a:solidFill>
+                  <a:srgbClr val="000000"/>
+                </a:solidFill>
+                <a:latin typeface="맑은 고딕"/>
+                <a:ea typeface="맑은 고딕"/>
+              </a:rPr>
+              <a:t>다른 길을 찾는다</a:t>
+            </a:r>
+            <a:r>
+              <a:rPr sz="1800" b="0">
+                <a:solidFill>
+                  <a:srgbClr val="000000"/>
+                </a:solidFill>
+                <a:latin typeface="맑은 고딕"/>
+                <a:ea typeface="맑은 고딕"/>
+              </a:rPr>
+              <a:t>.</a:t>
             </a:r>
           </a:p>
           <a:p>
@@ -17862,7 +18155,7 @@
                 <a:latin typeface="맑은 고딕"/>
                 <a:ea typeface="맑은 고딕"/>
               </a:rPr>
-              <a:t>비밀 키 유출은 거의 일어나지 않지만 한 번 새면 </a:t>
+              <a:t>네 수단 가운데 가드레일만 </a:t>
             </a:r>
             <a:r>
               <a:rPr sz="1800" b="1">
@@ -17872,7 +18165,7 @@
                 <a:latin typeface="맑은 고딕"/>
                 <a:ea typeface="맑은 고딕"/>
               </a:rPr>
-              <a:t>되돌릴 수 없다</a:t>
+              <a:t>모델이 지시를 따르는지와 무관하게</a:t>
             </a:r>
             <a:r>
               <a:rPr sz="1800" b="0">
@@ -17882,21 +18175,18 @@
                 <a:latin typeface="맑은 고딕"/>
                 <a:ea typeface="맑은 고딕"/>
               </a:rPr>
-              <a:t>. 확률만 보면 뒤로 밀리고, 크기를 함께 적어야 앞으로 나온다.</a:t>
-            </a:r>
-          </a:p>
-          <a:p>
-            <a:pPr lvl="2" marL="723900" indent="-368300">
-              <a:spcBef>
-                <a:spcPts val="600"/>
-              </a:spcBef>
-              <a:spcAft>
-                <a:spcPts val="600"/>
-              </a:spcAft>
-              <a:buSzPct val="90000"/>
-              <a:buFont typeface="Wingdings" pitchFamily="2" charset="2"/>
-              <a:buChar char=""/>
-            </a:pPr>
+              <a:t> 작동한다. 결제 연동 설정과 자격을 에이전트의 환경에 주지 않으면, 호출하는 코드를 쓰더라도 </a:t>
+            </a:r>
+            <a:r>
+              <a:rPr sz="1800" b="1">
+                <a:solidFill>
+                  <a:srgbClr val="000000"/>
+                </a:solidFill>
+                <a:latin typeface="맑은 고딕"/>
+                <a:ea typeface="맑은 고딕"/>
+              </a:rPr>
+              <a:t>실행되지 않는다</a:t>
+            </a:r>
             <a:r>
               <a:rPr sz="1800" b="0">
                 <a:solidFill>
@@ -17905,27 +18195,7 @@
                 <a:latin typeface="맑은 고딕"/>
                 <a:ea typeface="맑은 고딕"/>
               </a:rPr>
-              <a:t>모든 위험을 다 막으면 에이전트가 할 수 있는 일이 남지 않는다. </a:t>
-            </a:r>
-            <a:r>
-              <a:rPr sz="1800" b="1">
-                <a:solidFill>
-                  <a:srgbClr val="000000"/>
-                </a:solidFill>
-                <a:latin typeface="맑은 고딕"/>
-                <a:ea typeface="맑은 고딕"/>
-              </a:rPr>
-              <a:t>어디까지 감당할지</a:t>
-            </a:r>
-            <a:r>
-              <a:rPr sz="1800" b="0">
-                <a:solidFill>
-                  <a:srgbClr val="000000"/>
-                </a:solidFill>
-                <a:latin typeface="맑은 고딕"/>
-                <a:ea typeface="맑은 고딕"/>
-              </a:rPr>
-              <a:t>를 먼저 정하고 그 선을 넘는 것만 막는다.</a:t>
+              <a:t>.</a:t>
             </a:r>
           </a:p>
         </p:txBody>
@@ -17944,6 +18214,641 @@
 </file>
 
 <file path=ppt/slides/slide5.xml><?xml version="1.0" encoding="utf-8"?>
+<p:sld xmlns:a="http://schemas.openxmlformats.org/drawingml/2006/main" xmlns:r="http://schemas.openxmlformats.org/officeDocument/2006/relationships" xmlns:p="http://schemas.openxmlformats.org/presentationml/2006/main">
+  <p:cSld>
+    <p:spTree>
+      <p:nvGrpSpPr>
+        <p:cNvPr id="1" name="">
+          <a:extLst>
+            <a:ext uri="{FF2B5EF4-FFF2-40B4-BE49-F238E27FC236}">
+              <a16:creationId xmlns:a16="http://schemas.microsoft.com/office/drawing/2014/main" id="{8E4F1F13-426B-086B-7D8C-9A58A0F879DB}"/>
+            </a:ext>
+          </a:extLst>
+        </p:cNvPr>
+        <p:cNvGrpSpPr/>
+        <p:nvPr/>
+      </p:nvGrpSpPr>
+      <p:grpSpPr>
+        <a:xfrm>
+          <a:off x="0" y="0"/>
+          <a:ext cx="0" cy="0"/>
+          <a:chOff x="0" y="0"/>
+          <a:chExt cx="0" cy="0"/>
+        </a:xfrm>
+      </p:grpSpPr>
+      <p:sp>
+        <p:nvSpPr>
+          <p:cNvPr id="2" name="제목 1">
+            <a:extLst>
+              <a:ext uri="{FF2B5EF4-FFF2-40B4-BE49-F238E27FC236}">
+                <a16:creationId xmlns:a16="http://schemas.microsoft.com/office/drawing/2014/main" id="{AA26A92D-924E-0575-9551-F8FD7BFD3FAD}"/>
+              </a:ext>
+            </a:extLst>
+          </p:cNvPr>
+          <p:cNvSpPr>
+            <a:spLocks noGrp="1"/>
+          </p:cNvSpPr>
+          <p:nvPr>
+            <p:ph type="title"/>
+          </p:nvPr>
+        </p:nvSpPr>
+        <p:spPr/>
+        <p:txBody>
+          <a:bodyPr/>
+          <a:lstStyle/>
+          <a:p>
+            <a:r>
+              <a:rPr sz="2400" b="1">
+                <a:solidFill>
+                  <a:srgbClr val="000000"/>
+                </a:solidFill>
+                <a:latin typeface="맑은 고딕"/>
+                <a:ea typeface="맑은 고딕"/>
+              </a:rPr>
+              <a:t>위험의 어휘</a:t>
+            </a:r>
+          </a:p>
+          <a:p>
+            <a:r>
+              <a:rPr sz="1100" b="1">
+                <a:solidFill>
+                  <a:srgbClr val="000000"/>
+                </a:solidFill>
+                <a:latin typeface="맑은 고딕"/>
+                <a:ea typeface="맑은 고딕"/>
+              </a:rPr>
+              <a:t>03. 위험의 식별</a:t>
+            </a:r>
+          </a:p>
+        </p:txBody>
+      </p:sp>
+      <p:sp>
+        <p:nvSpPr>
+          <p:cNvPr id="3" name="슬라이드 번호 개체 틀 2">
+            <a:extLst>
+              <a:ext uri="{FF2B5EF4-FFF2-40B4-BE49-F238E27FC236}">
+                <a16:creationId xmlns:a16="http://schemas.microsoft.com/office/drawing/2014/main" id="{12CF30EE-4DFD-8063-56B8-B8689E76DFCA}"/>
+              </a:ext>
+            </a:extLst>
+          </p:cNvPr>
+          <p:cNvSpPr>
+            <a:spLocks noGrp="1"/>
+          </p:cNvSpPr>
+          <p:nvPr>
+            <p:ph type="sldNum" sz="quarter" idx="10"/>
+          </p:nvPr>
+        </p:nvSpPr>
+        <p:spPr/>
+        <p:txBody>
+          <a:bodyPr/>
+          <a:lstStyle/>
+          <a:p>
+            <a:pPr>
+              <a:defRPr/>
+            </a:pPr>
+            <a:r>
+              <a:rPr lang="en-US" altLang="ko-KR">
+                <a:solidFill>
+                  <a:prstClr val="black"/>
+                </a:solidFill>
+              </a:rPr>
+              <a:t>- 5 -</a:t>
+            </a:r>
+          </a:p>
+        </p:txBody>
+      </p:sp>
+      <p:sp>
+        <p:nvSpPr>
+          <p:cNvPr id="5" name="텍스트 개체 틀 4">
+            <a:extLst>
+              <a:ext uri="{FF2B5EF4-FFF2-40B4-BE49-F238E27FC236}">
+                <a16:creationId xmlns:a16="http://schemas.microsoft.com/office/drawing/2014/main" id="{D66274C8-E16F-5AEB-614B-D8D32DA3E8C6}"/>
+              </a:ext>
+            </a:extLst>
+          </p:cNvPr>
+          <p:cNvSpPr>
+            <a:spLocks noGrp="1"/>
+          </p:cNvSpPr>
+          <p:nvPr>
+            <p:ph type="body" sz="quarter" idx="11"/>
+          </p:nvPr>
+        </p:nvSpPr>
+        <p:spPr/>
+        <p:txBody>
+          <a:bodyPr/>
+          <a:lstStyle/>
+          <a:p>
+            <a:r>
+              <a:rPr kumimoji="1" lang="en-US" altLang="ko-KR" sz="1400" dirty="0" err="1"/>
+              <a:t>08. 실행 제약과 가드레일의 역할</a:t>
+            </a:r>
+          </a:p>
+        </p:txBody>
+      </p:sp>
+      <p:sp>
+        <p:nvSpPr>
+          <p:cNvPr id="6" name="텍스트 개체 틀 5">
+            <a:extLst>
+              <a:ext uri="{FF2B5EF4-FFF2-40B4-BE49-F238E27FC236}">
+                <a16:creationId xmlns:a16="http://schemas.microsoft.com/office/drawing/2014/main" id="{A24E58E1-194B-A320-AEEE-24D08685BB67}"/>
+              </a:ext>
+            </a:extLst>
+          </p:cNvPr>
+          <p:cNvSpPr>
+            <a:spLocks noGrp="1"/>
+          </p:cNvSpPr>
+          <p:nvPr>
+            <p:ph type="body" sz="quarter" idx="12"/>
+          </p:nvPr>
+        </p:nvSpPr>
+        <p:spPr/>
+        <p:txBody>
+          <a:bodyPr/>
+          <a:lstStyle/>
+          <a:p>
+            <a:endParaRPr kumimoji="1" lang="ko-KR" altLang="en-US" dirty="0"/>
+          </a:p>
+        </p:txBody>
+      </p:sp>
+      <p:sp>
+        <p:nvSpPr>
+          <p:cNvPr id="7" name="텍스트 개체 틀 6">
+            <a:extLst>
+              <a:ext uri="{FF2B5EF4-FFF2-40B4-BE49-F238E27FC236}">
+                <a16:creationId xmlns:a16="http://schemas.microsoft.com/office/drawing/2014/main" id="{A219F420-613B-6234-45F6-0955A9A4505F}"/>
+              </a:ext>
+            </a:extLst>
+          </p:cNvPr>
+          <p:cNvSpPr>
+            <a:spLocks noGrp="1"/>
+          </p:cNvSpPr>
+          <p:nvPr>
+            <p:ph type="body" sz="quarter" idx="13"/>
+          </p:nvPr>
+        </p:nvSpPr>
+        <p:spPr/>
+        <p:txBody>
+          <a:bodyPr/>
+          <a:lstStyle/>
+          <a:p>
+            <a:endParaRPr kumimoji="1" lang="en-US" altLang="ko-KR" dirty="0"/>
+          </a:p>
+        </p:txBody>
+      </p:sp>
+      <p:sp>
+        <p:nvSpPr>
+          <p:cNvPr id="8" name="내용 개체 틀 7">
+            <a:extLst>
+              <a:ext uri="{FF2B5EF4-FFF2-40B4-BE49-F238E27FC236}">
+                <a16:creationId xmlns:a16="http://schemas.microsoft.com/office/drawing/2014/main" id="{BEBA2C4A-B0BF-F2E4-EA6E-614C99CBA184}"/>
+              </a:ext>
+            </a:extLst>
+          </p:cNvPr>
+          <p:cNvSpPr>
+            <a:spLocks noGrp="1"/>
+          </p:cNvSpPr>
+          <p:nvPr>
+            <p:ph idx="1"/>
+          </p:nvPr>
+        </p:nvSpPr>
+        <p:spPr/>
+        <p:txBody>
+          <a:bodyPr>
+            <a:normAutofit/>
+          </a:bodyPr>
+          <a:lstStyle/>
+          <a:p>
+            <a:pPr marL="0" indent="0">
+              <a:spcBef>
+                <a:spcPts val="600"/>
+              </a:spcBef>
+              <a:spcAft>
+                <a:spcPts val="600"/>
+              </a:spcAft>
+              <a:buNone/>
+            </a:pPr>
+            <a:r>
+              <a:rPr sz="1800" b="0">
+                <a:solidFill>
+                  <a:srgbClr val="000000"/>
+                </a:solidFill>
+                <a:latin typeface="맑은 고딕"/>
+                <a:ea typeface="맑은 고딕"/>
+              </a:rPr>
+              <a:t>무엇을 막고 무엇을 지켜볼지 고르려면 위험을 </a:t>
+            </a:r>
+            <a:r>
+              <a:rPr sz="1800" b="1">
+                <a:solidFill>
+                  <a:srgbClr val="000000"/>
+                </a:solidFill>
+                <a:latin typeface="맑은 고딕"/>
+                <a:ea typeface="맑은 고딕"/>
+              </a:rPr>
+              <a:t>서로 비교할 수 있는 말</a:t>
+            </a:r>
+            <a:r>
+              <a:rPr sz="1800" b="0">
+                <a:solidFill>
+                  <a:srgbClr val="000000"/>
+                </a:solidFill>
+                <a:latin typeface="맑은 고딕"/>
+                <a:ea typeface="맑은 고딕"/>
+              </a:rPr>
+              <a:t>로 적어야 한다. NIST는 그 말을 위험과 위험 허용 수준으로 정의한다.</a:t>
+            </a:r>
+          </a:p>
+          <a:p>
+            <a:pPr lvl="2" marL="723900" indent="-368300">
+              <a:spcBef>
+                <a:spcPts val="600"/>
+              </a:spcBef>
+              <a:spcAft>
+                <a:spcPts val="600"/>
+              </a:spcAft>
+              <a:buSzPct val="90000"/>
+              <a:buFont typeface="Wingdings" pitchFamily="2" charset="2"/>
+              <a:buChar char=""/>
+            </a:pPr>
+            <a:r>
+              <a:rPr sz="1800" b="0">
+                <a:solidFill>
+                  <a:srgbClr val="000000"/>
+                </a:solidFill>
+                <a:latin typeface="맑은 고딕"/>
+                <a:ea typeface="맑은 고딕"/>
+              </a:rPr>
+              <a:t>위험은 사건이 </a:t>
+            </a:r>
+            <a:r>
+              <a:rPr sz="1800" b="1">
+                <a:solidFill>
+                  <a:srgbClr val="000000"/>
+                </a:solidFill>
+                <a:latin typeface="맑은 고딕"/>
+                <a:ea typeface="맑은 고딕"/>
+              </a:rPr>
+              <a:t>일어날 확률</a:t>
+            </a:r>
+            <a:r>
+              <a:rPr sz="1800" b="0">
+                <a:solidFill>
+                  <a:srgbClr val="000000"/>
+                </a:solidFill>
+                <a:latin typeface="맑은 고딕"/>
+                <a:ea typeface="맑은 고딕"/>
+              </a:rPr>
+              <a:t>과 그 결과의 </a:t>
+            </a:r>
+            <a:r>
+              <a:rPr sz="1800" b="1">
+                <a:solidFill>
+                  <a:srgbClr val="000000"/>
+                </a:solidFill>
+                <a:latin typeface="맑은 고딕"/>
+                <a:ea typeface="맑은 고딕"/>
+              </a:rPr>
+              <a:t>크기나 정도</a:t>
+            </a:r>
+            <a:r>
+              <a:rPr sz="1800" b="0">
+                <a:solidFill>
+                  <a:srgbClr val="000000"/>
+                </a:solidFill>
+                <a:latin typeface="맑은 고딕"/>
+                <a:ea typeface="맑은 고딕"/>
+              </a:rPr>
+              <a:t>를 합친 척도를 뜻한다</a:t>
+            </a:r>
+            <a:r>
+              <a:rPr sz="1000" b="0">
+                <a:solidFill>
+                  <a:srgbClr val="000000"/>
+                </a:solidFill>
+                <a:latin typeface="맑은 고딕"/>
+                <a:ea typeface="맑은 고딕"/>
+              </a:rPr>
+              <a:t>, </a:t>
+            </a:r>
+            <a:r>
+              <a:rPr sz="1000" b="0">
+                <a:solidFill>
+                  <a:srgbClr val="000000"/>
+                </a:solidFill>
+                <a:latin typeface="맑은 고딕"/>
+                <a:ea typeface="맑은 고딕"/>
+              </a:rPr>
+              <a:t>"Risk refers to the composite measure of an event's probability of occurring and the magnitude or degree of the consequences of the corresponding event"</a:t>
+            </a:r>
+            <a:r>
+              <a:rPr sz="1000" b="0">
+                <a:solidFill>
+                  <a:srgbClr val="000000"/>
+                </a:solidFill>
+                <a:latin typeface="맑은 고딕"/>
+                <a:ea typeface="맑은 고딕"/>
+              </a:rPr>
+              <a:t>, </a:t>
+            </a:r>
+            <a:r>
+              <a:rPr sz="1000" b="0">
+                <a:solidFill>
+                  <a:srgbClr val="000000"/>
+                </a:solidFill>
+                <a:latin typeface="맑은 고딕"/>
+                <a:ea typeface="맑은 고딕"/>
+              </a:rPr>
+              <a:t>[NIST 2023]</a:t>
+            </a:r>
+          </a:p>
+          <a:p>
+            <a:pPr lvl="3" marL="1077913" indent="-354013">
+              <a:spcBef>
+                <a:spcPts val="600"/>
+              </a:spcBef>
+              <a:spcAft>
+                <a:spcPts val="600"/>
+              </a:spcAft>
+              <a:buSzPct val="90000"/>
+              <a:buFont typeface="Wingdings" pitchFamily="2" charset="2"/>
+              <a:buChar char=""/>
+            </a:pPr>
+            <a:r>
+              <a:rPr sz="1600" b="0">
+                <a:solidFill>
+                  <a:srgbClr val="000000"/>
+                </a:solidFill>
+                <a:latin typeface="맑은 고딕"/>
+                <a:ea typeface="맑은 고딕"/>
+              </a:rPr>
+              <a:t>위험 허용 수준은 조직이나 AI 관계자가 목표를 이루기 위해 </a:t>
+            </a:r>
+            <a:r>
+              <a:rPr sz="1600" b="1">
+                <a:solidFill>
+                  <a:srgbClr val="000000"/>
+                </a:solidFill>
+                <a:latin typeface="맑은 고딕"/>
+                <a:ea typeface="맑은 고딕"/>
+              </a:rPr>
+              <a:t>위험을 감당할 준비가 된 정도</a:t>
+            </a:r>
+            <a:r>
+              <a:rPr sz="1600" b="0">
+                <a:solidFill>
+                  <a:srgbClr val="000000"/>
+                </a:solidFill>
+                <a:latin typeface="맑은 고딕"/>
+                <a:ea typeface="맑은 고딕"/>
+              </a:rPr>
+              <a:t>를 뜻한다</a:t>
+            </a:r>
+            <a:r>
+              <a:rPr sz="1000" b="0">
+                <a:solidFill>
+                  <a:srgbClr val="000000"/>
+                </a:solidFill>
+                <a:latin typeface="맑은 고딕"/>
+                <a:ea typeface="맑은 고딕"/>
+              </a:rPr>
+              <a:t>, </a:t>
+            </a:r>
+            <a:r>
+              <a:rPr sz="1000" b="0">
+                <a:solidFill>
+                  <a:srgbClr val="000000"/>
+                </a:solidFill>
+                <a:latin typeface="맑은 고딕"/>
+                <a:ea typeface="맑은 고딕"/>
+              </a:rPr>
+              <a:t>"Risk tolerance refers to the organization's or AI actor's … readiness to bear the risk in order to achieve its objectives"</a:t>
+            </a:r>
+            <a:r>
+              <a:rPr sz="1000" b="0">
+                <a:solidFill>
+                  <a:srgbClr val="000000"/>
+                </a:solidFill>
+                <a:latin typeface="맑은 고딕"/>
+                <a:ea typeface="맑은 고딕"/>
+              </a:rPr>
+              <a:t>, </a:t>
+            </a:r>
+            <a:r>
+              <a:rPr sz="1000" b="0">
+                <a:solidFill>
+                  <a:srgbClr val="000000"/>
+                </a:solidFill>
+                <a:latin typeface="맑은 고딕"/>
+                <a:ea typeface="맑은 고딕"/>
+              </a:rPr>
+              <a:t>[NIST 2023]</a:t>
+            </a:r>
+          </a:p>
+          <a:p>
+            <a:pPr lvl="3" marL="1077913" indent="-354013">
+              <a:spcBef>
+                <a:spcPts val="600"/>
+              </a:spcBef>
+              <a:spcAft>
+                <a:spcPts val="600"/>
+              </a:spcAft>
+              <a:buSzPct val="90000"/>
+              <a:buFont typeface="Wingdings" pitchFamily="2" charset="2"/>
+              <a:buChar char=""/>
+            </a:pPr>
+            <a:r>
+              <a:rPr sz="1600" b="0">
+                <a:solidFill>
+                  <a:srgbClr val="000000"/>
+                </a:solidFill>
+                <a:latin typeface="맑은 고딕"/>
+                <a:ea typeface="맑은 고딕"/>
+              </a:rPr>
+              <a:t>부정적 위험을 </a:t>
+            </a:r>
+            <a:r>
+              <a:rPr sz="1600" b="1">
+                <a:solidFill>
+                  <a:srgbClr val="000000"/>
+                </a:solidFill>
+                <a:latin typeface="맑은 고딕"/>
+                <a:ea typeface="맑은 고딕"/>
+              </a:rPr>
+              <a:t>완전히 없애려는 시도</a:t>
+            </a:r>
+            <a:r>
+              <a:rPr sz="1600" b="0">
+                <a:solidFill>
+                  <a:srgbClr val="000000"/>
+                </a:solidFill>
+                <a:latin typeface="맑은 고딕"/>
+                <a:ea typeface="맑은 고딕"/>
+              </a:rPr>
+              <a:t>는 실제로는 </a:t>
+            </a:r>
+            <a:r>
+              <a:rPr sz="1600" b="1">
+                <a:solidFill>
+                  <a:srgbClr val="000000"/>
+                </a:solidFill>
+                <a:latin typeface="맑은 고딕"/>
+                <a:ea typeface="맑은 고딕"/>
+              </a:rPr>
+              <a:t>역효과</a:t>
+            </a:r>
+            <a:r>
+              <a:rPr sz="1600" b="0">
+                <a:solidFill>
+                  <a:srgbClr val="000000"/>
+                </a:solidFill>
+                <a:latin typeface="맑은 고딕"/>
+                <a:ea typeface="맑은 고딕"/>
+              </a:rPr>
+              <a:t>를 낼 수 있다</a:t>
+            </a:r>
+            <a:r>
+              <a:rPr sz="1000" b="0">
+                <a:solidFill>
+                  <a:srgbClr val="000000"/>
+                </a:solidFill>
+                <a:latin typeface="맑은 고딕"/>
+                <a:ea typeface="맑은 고딕"/>
+              </a:rPr>
+              <a:t>, </a:t>
+            </a:r>
+            <a:r>
+              <a:rPr sz="1000" b="0">
+                <a:solidFill>
+                  <a:srgbClr val="000000"/>
+                </a:solidFill>
+                <a:latin typeface="맑은 고딕"/>
+                <a:ea typeface="맑은 고딕"/>
+              </a:rPr>
+              <a:t>"Attempting to eliminate negative risk entirely can be counterproductive in practice"</a:t>
+            </a:r>
+            <a:r>
+              <a:rPr sz="1000" b="0">
+                <a:solidFill>
+                  <a:srgbClr val="000000"/>
+                </a:solidFill>
+                <a:latin typeface="맑은 고딕"/>
+                <a:ea typeface="맑은 고딕"/>
+              </a:rPr>
+              <a:t>, </a:t>
+            </a:r>
+            <a:r>
+              <a:rPr sz="1000" b="0">
+                <a:solidFill>
+                  <a:srgbClr val="000000"/>
+                </a:solidFill>
+                <a:latin typeface="맑은 고딕"/>
+                <a:ea typeface="맑은 고딕"/>
+              </a:rPr>
+              <a:t>[NIST 2023]</a:t>
+            </a:r>
+          </a:p>
+          <a:p>
+            <a:pPr lvl="2" marL="723900" indent="-368300">
+              <a:spcBef>
+                <a:spcPts val="600"/>
+              </a:spcBef>
+              <a:spcAft>
+                <a:spcPts val="600"/>
+              </a:spcAft>
+              <a:buSzPct val="90000"/>
+              <a:buFont typeface="Wingdings" pitchFamily="2" charset="2"/>
+              <a:buChar char=""/>
+            </a:pPr>
+            <a:r>
+              <a:rPr sz="1800" b="0">
+                <a:solidFill>
+                  <a:srgbClr val="000000"/>
+                </a:solidFill>
+                <a:latin typeface="맑은 고딕"/>
+                <a:ea typeface="맑은 고딕"/>
+              </a:rPr>
+              <a:t>비밀 키 유출은 거의 일어나지 않지만 한 번 새면 </a:t>
+            </a:r>
+            <a:r>
+              <a:rPr sz="1800" b="1">
+                <a:solidFill>
+                  <a:srgbClr val="000000"/>
+                </a:solidFill>
+                <a:latin typeface="맑은 고딕"/>
+                <a:ea typeface="맑은 고딕"/>
+              </a:rPr>
+              <a:t>되돌릴 수 없다</a:t>
+            </a:r>
+            <a:r>
+              <a:rPr sz="1800" b="0">
+                <a:solidFill>
+                  <a:srgbClr val="000000"/>
+                </a:solidFill>
+                <a:latin typeface="맑은 고딕"/>
+                <a:ea typeface="맑은 고딕"/>
+              </a:rPr>
+              <a:t>. 확률만 보면 뒤로 밀리고, 크기를 함께 적어야 앞으로 나온다.</a:t>
+            </a:r>
+          </a:p>
+          <a:p>
+            <a:pPr lvl="2" marL="723900" indent="-368300">
+              <a:spcBef>
+                <a:spcPts val="600"/>
+              </a:spcBef>
+              <a:spcAft>
+                <a:spcPts val="600"/>
+              </a:spcAft>
+              <a:buSzPct val="90000"/>
+              <a:buFont typeface="Wingdings" pitchFamily="2" charset="2"/>
+              <a:buChar char=""/>
+            </a:pPr>
+            <a:r>
+              <a:rPr sz="1800" b="0">
+                <a:solidFill>
+                  <a:srgbClr val="000000"/>
+                </a:solidFill>
+                <a:latin typeface="맑은 고딕"/>
+                <a:ea typeface="맑은 고딕"/>
+              </a:rPr>
+              <a:t>모든 위험을 다 막으면 에이전트가 할 수 있는 일이 남지 않는다. </a:t>
+            </a:r>
+            <a:r>
+              <a:rPr sz="1800" b="1">
+                <a:solidFill>
+                  <a:srgbClr val="000000"/>
+                </a:solidFill>
+                <a:latin typeface="맑은 고딕"/>
+                <a:ea typeface="맑은 고딕"/>
+              </a:rPr>
+              <a:t>어디까지 감당할지</a:t>
+            </a:r>
+            <a:r>
+              <a:rPr sz="1800" b="0">
+                <a:solidFill>
+                  <a:srgbClr val="000000"/>
+                </a:solidFill>
+                <a:latin typeface="맑은 고딕"/>
+                <a:ea typeface="맑은 고딕"/>
+              </a:rPr>
+              <a:t>를 먼저 정하고 그 선을 넘는 것만 막는다.</a:t>
+            </a:r>
+          </a:p>
+        </p:txBody>
+      </p:sp>
+    </p:spTree>
+    <p:extLst>
+      <p:ext uri="{BB962C8B-B14F-4D97-AF65-F5344CB8AC3E}">
+        <p14:creationId xmlns:p14="http://schemas.microsoft.com/office/powerpoint/2010/main" val="3555436673"/>
+      </p:ext>
+    </p:extLst>
+  </p:cSld>
+  <p:clrMapOvr>
+    <a:masterClrMapping/>
+  </p:clrMapOvr>
+</p:sld>
+</file>
+
+<file path=ppt/slides/slide6.xml><?xml version="1.0" encoding="utf-8"?>
 <p:sld xmlns:a="http://schemas.openxmlformats.org/drawingml/2006/main" xmlns:r="http://schemas.openxmlformats.org/officeDocument/2006/relationships" xmlns:p="http://schemas.openxmlformats.org/presentationml/2006/main">
   <p:cSld>
     <p:spTree>
@@ -19530,7 +20435,7 @@
                 <a:ea typeface="맑은 고딕" panose="020B0503020000020004" pitchFamily="34" charset="-127"/>
                 <a:cs typeface="+mn-cs"/>
               </a:rPr>
-              <a:t>- 5 -</a:t>
+              <a:t>- 6 -</a:t>
             </a:r>
           </a:p>
         </p:txBody>
@@ -19597,7 +20502,7 @@
 </p:sld>
 </file>
 
-<file path=ppt/slides/slide6.xml><?xml version="1.0" encoding="utf-8"?>
+<file path=ppt/slides/slide7.xml><?xml version="1.0" encoding="utf-8"?>
 <p:sld xmlns:a="http://schemas.openxmlformats.org/drawingml/2006/main" xmlns:r="http://schemas.openxmlformats.org/officeDocument/2006/relationships" xmlns:p="http://schemas.openxmlformats.org/presentationml/2006/main">
   <p:cSld>
     <p:spTree>
@@ -21844,7 +22749,7 @@
                 <a:latin typeface="맑은 고딕"/>
                 <a:ea typeface="맑은 고딕"/>
               </a:rPr>
-              <a:t>그 넷이 "주문한다"에서 하는 일은 </a:t>
+              <a:t>앞의 네 항목을 "주문한다"의 상황으로 옮기면 </a:t>
             </a:r>
             <a:r>
               <a:rPr sz="1800" b="1">
@@ -21864,7 +22769,7 @@
                 <a:latin typeface="맑은 고딕"/>
                 <a:ea typeface="맑은 고딕"/>
               </a:rPr>
-              <a:t>이다. 등급은 확률이 아니라 </a:t>
+              <a:t>이 된다. 등급은 일어날 확률이 아니라 </a:t>
             </a:r>
             <a:r>
               <a:rPr sz="1800" b="1">
@@ -21874,7 +22779,7 @@
                 <a:latin typeface="맑은 고딕"/>
                 <a:ea typeface="맑은 고딕"/>
               </a:rPr>
-              <a:t>되돌릴 수 있는가</a:t>
+              <a:t>일어난 뒤 되돌릴 수 있는가</a:t>
             </a:r>
             <a:r>
               <a:rPr sz="1800" b="0">
@@ -21884,7 +22789,7 @@
                 <a:latin typeface="맑은 고딕"/>
                 <a:ea typeface="맑은 고딕"/>
               </a:rPr>
-              <a:t>가 가른다.</a:t>
+              <a:t>로 가른다.</a:t>
             </a:r>
           </a:p>
         </p:txBody>
@@ -21949,7 +22854,7 @@
                 <a:ea typeface="맑은 고딕" panose="020B0503020000020004" pitchFamily="34" charset="-127"/>
                 <a:cs typeface="+mn-cs"/>
               </a:rPr>
-              <a:t>- 6 -</a:t>
+              <a:t>- 7 -</a:t>
             </a:r>
           </a:p>
         </p:txBody>
@@ -22050,7 +22955,7 @@
                 <a:latin typeface="맑은 고딕"/>
                 <a:ea typeface="맑은 고딕"/>
               </a:rPr>
-              <a:t>가장 자주 일어나는 테스트 삭제와 거의 일어나지 않는 비밀 키 유출이 </a:t>
+              <a:t>자주 일어나는 테스트 삭제와 거의 일어나지 않는 비밀 키 유출이 </a:t>
             </a:r>
             <a:r>
               <a:rPr sz="1800" b="1">
@@ -22060,7 +22965,7 @@
                 <a:latin typeface="맑은 고딕"/>
                 <a:ea typeface="맑은 고딕"/>
               </a:rPr>
-              <a:t>같은 높음</a:t>
+              <a:t>같은 등급</a:t>
             </a:r>
             <a:r>
               <a:rPr sz="1800" b="0">
@@ -22070,7 +22975,7 @@
                 <a:latin typeface="맑은 고딕"/>
                 <a:ea typeface="맑은 고딕"/>
               </a:rPr>
-              <a:t>이다. 확률이 아니라 되돌릴 수 있는지가 둘을 같은 자리에 놓았다.</a:t>
+              <a:t>이다. 확률이 아니라 되돌릴 수 있는지가 둘을 같은 등급으로 만들었다.</a:t>
             </a:r>
           </a:p>
           <a:p>
@@ -22093,7 +22998,7 @@
                 <a:latin typeface="맑은 고딕"/>
                 <a:ea typeface="맑은 고딕"/>
               </a:rPr>
-              <a:t>높음 넷은 환경과 도구가 </a:t>
+              <a:t>높음으로 본 넷은 환경과 도구가 아예 </a:t>
             </a:r>
             <a:r>
               <a:rPr sz="1800" b="1">
@@ -22113,7 +23018,7 @@
                 <a:latin typeface="맑은 고딕"/>
                 <a:ea typeface="맑은 고딕"/>
               </a:rPr>
-              <a:t>하게 만들고, 중간 둘은 쓰기 범위를 좁히고 자격을 주지 않는 것으로 다룬다.</a:t>
+              <a:t>하게 만들고, 중간인 둘은 쓰기 범위를 좁히고 자격을 주지 않는 것으로 다룬다.</a:t>
             </a:r>
           </a:p>
         </p:txBody>
@@ -22131,7 +23036,7 @@
 </p:sld>
 </file>
 
-<file path=ppt/slides/slide7.xml><?xml version="1.0" encoding="utf-8"?>
+<file path=ppt/slides/slide8.xml><?xml version="1.0" encoding="utf-8"?>
 <p:sld xmlns:a="http://schemas.openxmlformats.org/drawingml/2006/main" xmlns:r="http://schemas.openxmlformats.org/officeDocument/2006/relationships" xmlns:p="http://schemas.openxmlformats.org/presentationml/2006/main">
   <p:cSld>
     <p:spTree>
@@ -22230,7 +23135,7 @@
                   <a:prstClr val="black"/>
                 </a:solidFill>
               </a:rPr>
-              <a:t>- 7 -</a:t>
+              <a:t>- 8 -</a:t>
             </a:r>
           </a:p>
         </p:txBody>
@@ -22456,7 +23361,27 @@
                 <a:latin typeface="맑은 고딕"/>
                 <a:ea typeface="맑은 고딕"/>
               </a:rPr>
-              <a:t>"If your agent combines these three features, an attacker can easily trick it into accessing your private data and sending it to that attacker", [Willison 2025a]</a:t>
+              <a:t>"If your agent combines these three features, an attacker can easily trick it into accessing your private data and sending it to that attacker"</a:t>
+            </a:r>
+            <a:r>
+              <a:rPr sz="1000" b="0">
+                <a:solidFill>
+                  <a:srgbClr val="000000"/>
+                </a:solidFill>
+                <a:latin typeface="맑은 고딕"/>
+                <a:ea typeface="맑은 고딕"/>
+              </a:rPr>
+              <a:t>, </a:t>
+            </a:r>
+            <a:r>
+              <a:rPr sz="1000" b="0">
+                <a:solidFill>
+                  <a:srgbClr val="000000"/>
+                </a:solidFill>
+                <a:latin typeface="맑은 고딕"/>
+                <a:ea typeface="맑은 고딕"/>
+              </a:rPr>
+              <a:t>[Willison 2025a]</a:t>
             </a:r>
           </a:p>
           <a:p>
@@ -22846,7 +23771,7 @@
 </p:sld>
 </file>
 
-<file path=ppt/slides/slide8.xml><?xml version="1.0" encoding="utf-8"?>
+<file path=ppt/slides/slide9.xml><?xml version="1.0" encoding="utf-8"?>
 <p:sld xmlns:a="http://schemas.openxmlformats.org/drawingml/2006/main" xmlns:r="http://schemas.openxmlformats.org/officeDocument/2006/relationships" xmlns:p="http://schemas.openxmlformats.org/presentationml/2006/main">
   <p:cSld>
     <p:spTree>
@@ -23886,7 +24811,27 @@
                 <a:latin typeface="맑은 고딕"/>
                 <a:ea typeface="맑은 고딕"/>
               </a:rPr>
-              <a:t>"we still don't know how to 100% reliably prevent this from happening", [Willison 2025a]</a:t>
+              <a:t>"we still don't know how to 100% reliably prevent this from happening"</a:t>
+            </a:r>
+            <a:r>
+              <a:rPr sz="1000" b="0">
+                <a:solidFill>
+                  <a:srgbClr val="000000"/>
+                </a:solidFill>
+                <a:latin typeface="맑은 고딕"/>
+                <a:ea typeface="맑은 고딕"/>
+              </a:rPr>
+              <a:t>, </a:t>
+            </a:r>
+            <a:r>
+              <a:rPr sz="1000" b="0">
+                <a:solidFill>
+                  <a:srgbClr val="000000"/>
+                </a:solidFill>
+                <a:latin typeface="맑은 고딕"/>
+                <a:ea typeface="맑은 고딕"/>
+              </a:rPr>
+              <a:t>[Willison 2025a]</a:t>
             </a:r>
           </a:p>
           <a:p>
@@ -24034,7 +24979,7 @@
                 <a:ea typeface="맑은 고딕" panose="020B0503020000020004" pitchFamily="34" charset="-127"/>
                 <a:cs typeface="+mn-cs"/>
               </a:rPr>
-              <a:t>- 8 -</a:t>
+              <a:t>- 9 -</a:t>
             </a:r>
           </a:p>
         </p:txBody>
@@ -24194,592 +25139,6 @@
     <p:extLst>
       <p:ext uri="{BB962C8B-B14F-4D97-AF65-F5344CB8AC3E}">
         <p14:creationId xmlns:p14="http://schemas.microsoft.com/office/powerpoint/2010/main" val="2789569477"/>
-      </p:ext>
-    </p:extLst>
-  </p:cSld>
-  <p:clrMapOvr>
-    <a:masterClrMapping/>
-  </p:clrMapOvr>
-</p:sld>
-</file>
-
-<file path=ppt/slides/slide9.xml><?xml version="1.0" encoding="utf-8"?>
-<p:sld xmlns:a="http://schemas.openxmlformats.org/drawingml/2006/main" xmlns:r="http://schemas.openxmlformats.org/officeDocument/2006/relationships" xmlns:p="http://schemas.openxmlformats.org/presentationml/2006/main">
-  <p:cSld>
-    <p:spTree>
-      <p:nvGrpSpPr>
-        <p:cNvPr id="1" name="">
-          <a:extLst>
-            <a:ext uri="{FF2B5EF4-FFF2-40B4-BE49-F238E27FC236}">
-              <a16:creationId xmlns:a16="http://schemas.microsoft.com/office/drawing/2014/main" id="{8E4F1F13-426B-086B-7D8C-9A58A0F879DB}"/>
-            </a:ext>
-          </a:extLst>
-        </p:cNvPr>
-        <p:cNvGrpSpPr/>
-        <p:nvPr/>
-      </p:nvGrpSpPr>
-      <p:grpSpPr>
-        <a:xfrm>
-          <a:off x="0" y="0"/>
-          <a:ext cx="0" cy="0"/>
-          <a:chOff x="0" y="0"/>
-          <a:chExt cx="0" cy="0"/>
-        </a:xfrm>
-      </p:grpSpPr>
-      <p:sp>
-        <p:nvSpPr>
-          <p:cNvPr id="2" name="제목 1">
-            <a:extLst>
-              <a:ext uri="{FF2B5EF4-FFF2-40B4-BE49-F238E27FC236}">
-                <a16:creationId xmlns:a16="http://schemas.microsoft.com/office/drawing/2014/main" id="{AA26A92D-924E-0575-9551-F8FD7BFD3FAD}"/>
-              </a:ext>
-            </a:extLst>
-          </p:cNvPr>
-          <p:cNvSpPr>
-            <a:spLocks noGrp="1"/>
-          </p:cNvSpPr>
-          <p:nvPr>
-            <p:ph type="title"/>
-          </p:nvPr>
-        </p:nvSpPr>
-        <p:spPr/>
-        <p:txBody>
-          <a:bodyPr/>
-          <a:lstStyle/>
-          <a:p>
-            <a:r>
-              <a:rPr sz="2400" b="1">
-                <a:solidFill>
-                  <a:srgbClr val="000000"/>
-                </a:solidFill>
-                <a:latin typeface="맑은 고딕"/>
-                <a:ea typeface="맑은 고딕"/>
-              </a:rPr>
-              <a:t>겹으로 쌓는다</a:t>
-            </a:r>
-          </a:p>
-          <a:p>
-            <a:r>
-              <a:rPr sz="1100" b="1">
-                <a:solidFill>
-                  <a:srgbClr val="000000"/>
-                </a:solidFill>
-                <a:latin typeface="맑은 고딕"/>
-                <a:ea typeface="맑은 고딕"/>
-              </a:rPr>
-              <a:t>05. 가드레일의 자리</a:t>
-            </a:r>
-          </a:p>
-        </p:txBody>
-      </p:sp>
-      <p:sp>
-        <p:nvSpPr>
-          <p:cNvPr id="3" name="슬라이드 번호 개체 틀 2">
-            <a:extLst>
-              <a:ext uri="{FF2B5EF4-FFF2-40B4-BE49-F238E27FC236}">
-                <a16:creationId xmlns:a16="http://schemas.microsoft.com/office/drawing/2014/main" id="{12CF30EE-4DFD-8063-56B8-B8689E76DFCA}"/>
-              </a:ext>
-            </a:extLst>
-          </p:cNvPr>
-          <p:cNvSpPr>
-            <a:spLocks noGrp="1"/>
-          </p:cNvSpPr>
-          <p:nvPr>
-            <p:ph type="sldNum" sz="quarter" idx="10"/>
-          </p:nvPr>
-        </p:nvSpPr>
-        <p:spPr/>
-        <p:txBody>
-          <a:bodyPr/>
-          <a:lstStyle/>
-          <a:p>
-            <a:pPr>
-              <a:defRPr/>
-            </a:pPr>
-            <a:r>
-              <a:rPr lang="en-US" altLang="ko-KR">
-                <a:solidFill>
-                  <a:prstClr val="black"/>
-                </a:solidFill>
-              </a:rPr>
-              <a:t>- 9 -</a:t>
-            </a:r>
-          </a:p>
-        </p:txBody>
-      </p:sp>
-      <p:sp>
-        <p:nvSpPr>
-          <p:cNvPr id="5" name="텍스트 개체 틀 4">
-            <a:extLst>
-              <a:ext uri="{FF2B5EF4-FFF2-40B4-BE49-F238E27FC236}">
-                <a16:creationId xmlns:a16="http://schemas.microsoft.com/office/drawing/2014/main" id="{D66274C8-E16F-5AEB-614B-D8D32DA3E8C6}"/>
-              </a:ext>
-            </a:extLst>
-          </p:cNvPr>
-          <p:cNvSpPr>
-            <a:spLocks noGrp="1"/>
-          </p:cNvSpPr>
-          <p:nvPr>
-            <p:ph type="body" sz="quarter" idx="11"/>
-          </p:nvPr>
-        </p:nvSpPr>
-        <p:spPr/>
-        <p:txBody>
-          <a:bodyPr/>
-          <a:lstStyle/>
-          <a:p>
-            <a:r>
-              <a:rPr kumimoji="1" lang="en-US" altLang="ko-KR" sz="1400" dirty="0" err="1"/>
-              <a:t>08. 실행 제약과 가드레일의 역할</a:t>
-            </a:r>
-          </a:p>
-        </p:txBody>
-      </p:sp>
-      <p:sp>
-        <p:nvSpPr>
-          <p:cNvPr id="6" name="텍스트 개체 틀 5">
-            <a:extLst>
-              <a:ext uri="{FF2B5EF4-FFF2-40B4-BE49-F238E27FC236}">
-                <a16:creationId xmlns:a16="http://schemas.microsoft.com/office/drawing/2014/main" id="{A24E58E1-194B-A320-AEEE-24D08685BB67}"/>
-              </a:ext>
-            </a:extLst>
-          </p:cNvPr>
-          <p:cNvSpPr>
-            <a:spLocks noGrp="1"/>
-          </p:cNvSpPr>
-          <p:nvPr>
-            <p:ph type="body" sz="quarter" idx="12"/>
-          </p:nvPr>
-        </p:nvSpPr>
-        <p:spPr/>
-        <p:txBody>
-          <a:bodyPr/>
-          <a:lstStyle/>
-          <a:p>
-            <a:endParaRPr kumimoji="1" lang="ko-KR" altLang="en-US" dirty="0"/>
-          </a:p>
-        </p:txBody>
-      </p:sp>
-      <p:sp>
-        <p:nvSpPr>
-          <p:cNvPr id="7" name="텍스트 개체 틀 6">
-            <a:extLst>
-              <a:ext uri="{FF2B5EF4-FFF2-40B4-BE49-F238E27FC236}">
-                <a16:creationId xmlns:a16="http://schemas.microsoft.com/office/drawing/2014/main" id="{A219F420-613B-6234-45F6-0955A9A4505F}"/>
-              </a:ext>
-            </a:extLst>
-          </p:cNvPr>
-          <p:cNvSpPr>
-            <a:spLocks noGrp="1"/>
-          </p:cNvSpPr>
-          <p:nvPr>
-            <p:ph type="body" sz="quarter" idx="13"/>
-          </p:nvPr>
-        </p:nvSpPr>
-        <p:spPr/>
-        <p:txBody>
-          <a:bodyPr/>
-          <a:lstStyle/>
-          <a:p>
-            <a:endParaRPr kumimoji="1" lang="en-US" altLang="ko-KR" dirty="0"/>
-          </a:p>
-        </p:txBody>
-      </p:sp>
-      <p:sp>
-        <p:nvSpPr>
-          <p:cNvPr id="8" name="내용 개체 틀 7">
-            <a:extLst>
-              <a:ext uri="{FF2B5EF4-FFF2-40B4-BE49-F238E27FC236}">
-                <a16:creationId xmlns:a16="http://schemas.microsoft.com/office/drawing/2014/main" id="{BEBA2C4A-B0BF-F2E4-EA6E-614C99CBA184}"/>
-              </a:ext>
-            </a:extLst>
-          </p:cNvPr>
-          <p:cNvSpPr>
-            <a:spLocks noGrp="1"/>
-          </p:cNvSpPr>
-          <p:nvPr>
-            <p:ph idx="1"/>
-          </p:nvPr>
-        </p:nvSpPr>
-        <p:spPr>
-          <a:xfrm>
-            <a:off x="365760" y="960120"/>
-            <a:ext cx="8412480" cy="2788920"/>
-          </a:xfrm>
-        </p:spPr>
-        <p:txBody>
-          <a:bodyPr>
-            <a:normAutofit/>
-          </a:bodyPr>
-          <a:lstStyle/>
-          <a:p>
-            <a:pPr marL="0" indent="0">
-              <a:spcBef>
-                <a:spcPts val="600"/>
-              </a:spcBef>
-              <a:spcAft>
-                <a:spcPts val="600"/>
-              </a:spcAft>
-              <a:buNone/>
-            </a:pPr>
-            <a:r>
-              <a:rPr sz="1800" b="0">
-                <a:solidFill>
-                  <a:srgbClr val="000000"/>
-                </a:solidFill>
-                <a:latin typeface="맑은 고딕"/>
-                <a:ea typeface="맑은 고딕"/>
-              </a:rPr>
-              <a:t>가드레일은 한 자리에서 다 막지 못한다. 과제가 들어와 커밋으로 나가는 </a:t>
-            </a:r>
-            <a:r>
-              <a:rPr sz="1800" b="1">
-                <a:solidFill>
-                  <a:srgbClr val="000000"/>
-                </a:solidFill>
-                <a:latin typeface="맑은 고딕"/>
-                <a:ea typeface="맑은 고딕"/>
-              </a:rPr>
-              <a:t>경로 위 네 지점</a:t>
-            </a:r>
-            <a:r>
-              <a:rPr sz="1800" b="0">
-                <a:solidFill>
-                  <a:srgbClr val="000000"/>
-                </a:solidFill>
-                <a:latin typeface="맑은 고딕"/>
-                <a:ea typeface="맑은 고딕"/>
-              </a:rPr>
-              <a:t>에 나누어 두고 겹치게 한다.</a:t>
-            </a:r>
-          </a:p>
-          <a:p>
-            <a:pPr lvl="2" marL="723900" indent="-368300">
-              <a:spcBef>
-                <a:spcPts val="600"/>
-              </a:spcBef>
-              <a:spcAft>
-                <a:spcPts val="600"/>
-              </a:spcAft>
-              <a:buSzPct val="90000"/>
-              <a:buFont typeface="Wingdings" pitchFamily="2" charset="2"/>
-              <a:buChar char=""/>
-            </a:pPr>
-            <a:r>
-              <a:rPr sz="1800" b="0">
-                <a:solidFill>
-                  <a:srgbClr val="000000"/>
-                </a:solidFill>
-                <a:latin typeface="맑은 고딕"/>
-                <a:ea typeface="맑은 고딕"/>
-              </a:rPr>
-              <a:t>가드레일 </a:t>
-            </a:r>
-            <a:r>
-              <a:rPr sz="1800" b="1">
-                <a:solidFill>
-                  <a:srgbClr val="000000"/>
-                </a:solidFill>
-                <a:latin typeface="맑은 고딕"/>
-                <a:ea typeface="맑은 고딕"/>
-              </a:rPr>
-              <a:t>하나로는 충분한 보호가 되기 어려우므로</a:t>
-            </a:r>
-            <a:r>
-              <a:rPr sz="1800" b="0">
-                <a:solidFill>
-                  <a:srgbClr val="000000"/>
-                </a:solidFill>
-                <a:latin typeface="맑은 고딕"/>
-                <a:ea typeface="맑은 고딕"/>
-              </a:rPr>
-              <a:t> 여러 전문화된 가드레일을 </a:t>
-            </a:r>
-            <a:r>
-              <a:rPr sz="1800" b="1">
-                <a:solidFill>
-                  <a:srgbClr val="000000"/>
-                </a:solidFill>
-                <a:latin typeface="맑은 고딕"/>
-                <a:ea typeface="맑은 고딕"/>
-              </a:rPr>
-              <a:t>겹으로 쌓아</a:t>
-            </a:r>
-            <a:r>
-              <a:rPr sz="1800" b="0">
-                <a:solidFill>
-                  <a:srgbClr val="000000"/>
-                </a:solidFill>
-                <a:latin typeface="맑은 고딕"/>
-                <a:ea typeface="맑은 고딕"/>
-              </a:rPr>
-              <a:t> 더 견고한 에이전트를 만든다</a:t>
-            </a:r>
-            <a:r>
-              <a:rPr sz="1000" b="0">
-                <a:solidFill>
-                  <a:srgbClr val="000000"/>
-                </a:solidFill>
-                <a:latin typeface="맑은 고딕"/>
-                <a:ea typeface="맑은 고딕"/>
-              </a:rPr>
-              <a:t>, </a:t>
-            </a:r>
-            <a:r>
-              <a:rPr sz="1000" b="0">
-                <a:solidFill>
-                  <a:srgbClr val="000000"/>
-                </a:solidFill>
-                <a:latin typeface="맑은 고딕"/>
-                <a:ea typeface="맑은 고딕"/>
-              </a:rPr>
-              <a:t>"Think of guardrails as a layered defense mechanism. While a single one is unlikely to provide sufficient protection, using multiple, specialized guardrails together creates more resilient agents.", [OpenAI 2025]</a:t>
-            </a:r>
-          </a:p>
-          <a:p>
-            <a:pPr lvl="2" marL="723900" indent="-368300">
-              <a:spcBef>
-                <a:spcPts val="600"/>
-              </a:spcBef>
-              <a:spcAft>
-                <a:spcPts val="600"/>
-              </a:spcAft>
-              <a:buSzPct val="90000"/>
-              <a:buFont typeface="Wingdings" pitchFamily="2" charset="2"/>
-              <a:buChar char=""/>
-            </a:pPr>
-            <a:r>
-              <a:rPr sz="1800" b="1">
-                <a:solidFill>
-                  <a:srgbClr val="000000"/>
-                </a:solidFill>
-                <a:latin typeface="맑은 고딕"/>
-                <a:ea typeface="맑은 고딕"/>
-              </a:rPr>
-              <a:t>입력</a:t>
-            </a:r>
-            <a:r>
-              <a:rPr sz="1800" b="0">
-                <a:solidFill>
-                  <a:srgbClr val="000000"/>
-                </a:solidFill>
-                <a:latin typeface="맑은 고딕"/>
-                <a:ea typeface="맑은 고딕"/>
-              </a:rPr>
-              <a:t> —</a:t>
-            </a:r>
-            <a:r>
-              <a:rPr sz="1600" b="0">
-                <a:solidFill>
-                  <a:srgbClr val="000000"/>
-                </a:solidFill>
-                <a:latin typeface="맑은 고딕"/>
-                <a:ea typeface="맑은 고딕"/>
-              </a:rPr>
-              <a:t> 함께 읽는 문서에서 지시처럼 보이는 문장을 걸러낸다.</a:t>
-            </a:r>
-          </a:p>
-          <a:p>
-            <a:pPr lvl="2" marL="723900" indent="-368300">
-              <a:spcBef>
-                <a:spcPts val="600"/>
-              </a:spcBef>
-              <a:spcAft>
-                <a:spcPts val="600"/>
-              </a:spcAft>
-              <a:buSzPct val="90000"/>
-              <a:buFont typeface="Wingdings" pitchFamily="2" charset="2"/>
-              <a:buChar char=""/>
-            </a:pPr>
-            <a:r>
-              <a:rPr sz="1800" b="1">
-                <a:solidFill>
-                  <a:srgbClr val="000000"/>
-                </a:solidFill>
-                <a:latin typeface="맑은 고딕"/>
-                <a:ea typeface="맑은 고딕"/>
-              </a:rPr>
-              <a:t>도구 호출</a:t>
-            </a:r>
-            <a:r>
-              <a:rPr sz="1800" b="0">
-                <a:solidFill>
-                  <a:srgbClr val="000000"/>
-                </a:solidFill>
-                <a:latin typeface="맑은 고딕"/>
-                <a:ea typeface="맑은 고딕"/>
-              </a:rPr>
-              <a:t> —</a:t>
-            </a:r>
-            <a:r>
-              <a:rPr sz="1600" b="0">
-                <a:solidFill>
-                  <a:srgbClr val="000000"/>
-                </a:solidFill>
-                <a:latin typeface="맑은 고딕"/>
-                <a:ea typeface="맑은 고딕"/>
-              </a:rPr>
-              <a:t> 위험 등급으로 가른다. 읽기는 통과, 쓰기는 범위 안, 외부 호출은 거절이다.</a:t>
-            </a:r>
-          </a:p>
-          <a:p>
-            <a:pPr lvl="2" marL="723900" indent="-368300">
-              <a:spcBef>
-                <a:spcPts val="600"/>
-              </a:spcBef>
-              <a:spcAft>
-                <a:spcPts val="600"/>
-              </a:spcAft>
-              <a:buSzPct val="90000"/>
-              <a:buFont typeface="Wingdings" pitchFamily="2" charset="2"/>
-              <a:buChar char=""/>
-            </a:pPr>
-            <a:r>
-              <a:rPr sz="1800" b="1">
-                <a:solidFill>
-                  <a:srgbClr val="000000"/>
-                </a:solidFill>
-                <a:latin typeface="맑은 고딕"/>
-                <a:ea typeface="맑은 고딕"/>
-              </a:rPr>
-              <a:t>출력</a:t>
-            </a:r>
-            <a:r>
-              <a:rPr sz="1800" b="0">
-                <a:solidFill>
-                  <a:srgbClr val="000000"/>
-                </a:solidFill>
-                <a:latin typeface="맑은 고딕"/>
-                <a:ea typeface="맑은 고딕"/>
-              </a:rPr>
-              <a:t> —</a:t>
-            </a:r>
-            <a:r>
-              <a:rPr sz="1600" b="0">
-                <a:solidFill>
-                  <a:srgbClr val="000000"/>
-                </a:solidFill>
-                <a:latin typeface="맑은 고딕"/>
-                <a:ea typeface="맑은 고딕"/>
-              </a:rPr>
-              <a:t> 커밋 전에 비밀 키나 기대값 변경이 섞였는지 본다.</a:t>
-            </a:r>
-          </a:p>
-          <a:p>
-            <a:pPr lvl="2" marL="723900" indent="-368300">
-              <a:spcBef>
-                <a:spcPts val="600"/>
-              </a:spcBef>
-              <a:spcAft>
-                <a:spcPts val="600"/>
-              </a:spcAft>
-              <a:buSzPct val="90000"/>
-              <a:buFont typeface="Wingdings" pitchFamily="2" charset="2"/>
-              <a:buChar char=""/>
-            </a:pPr>
-            <a:r>
-              <a:rPr sz="1800" b="1">
-                <a:solidFill>
-                  <a:srgbClr val="000000"/>
-                </a:solidFill>
-                <a:latin typeface="맑은 고딕"/>
-                <a:ea typeface="맑은 고딕"/>
-              </a:rPr>
-              <a:t>환경</a:t>
-            </a:r>
-            <a:r>
-              <a:rPr sz="1800" b="0">
-                <a:solidFill>
-                  <a:srgbClr val="000000"/>
-                </a:solidFill>
-                <a:latin typeface="맑은 고딕"/>
-                <a:ea typeface="맑은 고딕"/>
-              </a:rPr>
-              <a:t> —</a:t>
-            </a:r>
-            <a:r>
-              <a:rPr sz="1600" b="0">
-                <a:solidFill>
-                  <a:srgbClr val="000000"/>
-                </a:solidFill>
-                <a:latin typeface="맑은 고딕"/>
-                <a:ea typeface="맑은 고딕"/>
-              </a:rPr>
-              <a:t> 검사 셋을 감싼다. 검사를 빠져나간 행동도 여기서 막힌다.</a:t>
-            </a:r>
-          </a:p>
-        </p:txBody>
-      </p:sp>
-      <p:sp>
-        <p:nvSpPr>
-          <p:cNvPr id="9" name="TextBox 12">
-            <a:extLst>
-              <a:ext uri="{FF2B5EF4-FFF2-40B4-BE49-F238E27FC236}">
-                <a16:creationId xmlns:a16="http://schemas.microsoft.com/office/drawing/2014/main" id="{654EDDB4-901F-3D48-A715-17D163E8A7AC}"/>
-              </a:ext>
-            </a:extLst>
-          </p:cNvPr>
-          <p:cNvSpPr txBox="1"/>
-          <p:nvPr/>
-        </p:nvSpPr>
-        <p:spPr>
-          <a:xfrm>
-            <a:off x="365760" y="4512148"/>
-            <a:ext cx="8412480" cy="201168"/>
-          </a:xfrm>
-          <a:prstGeom prst="rect">
-            <a:avLst/>
-          </a:prstGeom>
-          <a:noFill/>
-        </p:spPr>
-        <p:txBody>
-          <a:bodyPr wrap="square">
-            <a:spAutoFit/>
-          </a:bodyPr>
-          <a:lstStyle/>
-          <a:p>
-            <a:pPr algn="ctr"/>
-            <a:r>
-              <a:rPr sz="1400" b="1">
-                <a:solidFill>
-                  <a:srgbClr val="000000"/>
-                </a:solidFill>
-                <a:latin typeface="맑은 고딕"/>
-                <a:ea typeface="맑은 고딕"/>
-              </a:rPr>
-              <a:t>가드레일의 네 자리</a:t>
-            </a:r>
-          </a:p>
-        </p:txBody>
-      </p:sp>
-      <p:pic>
-        <p:nvPicPr>
-          <p:cNvPr id="10" name="mermaid Diagram 1"/>
-          <p:cNvPicPr>
-            <a:picLocks noChangeAspect="1"/>
-          </p:cNvPicPr>
-          <p:nvPr/>
-        </p:nvPicPr>
-        <p:blipFill>
-          <a:blip r:embed="mermaidImage1"/>
-          <a:stretch>
-            <a:fillRect/>
-          </a:stretch>
-        </p:blipFill>
-        <p:spPr>
-          <a:xfrm>
-            <a:off x="1428750" y="4749892"/>
-            <a:ext cx="6286500" cy="1611717"/>
-          </a:xfrm>
-          <a:prstGeom prst="rect">
-            <a:avLst/>
-          </a:prstGeom>
-        </p:spPr>
-      </p:pic>
-    </p:spTree>
-    <p:extLst>
-      <p:ext uri="{BB962C8B-B14F-4D97-AF65-F5344CB8AC3E}">
-        <p14:creationId xmlns:p14="http://schemas.microsoft.com/office/powerpoint/2010/main" val="3555436673"/>
       </p:ext>
     </p:extLst>
   </p:cSld>

--- a/courses/ai-native/sessions/s08.pptx
+++ b/courses/ai-native/sessions/s08.pptx
@@ -1254,7 +1254,7 @@
             <a:pPr lvl="0"/>
             <a:r>
               <a:rPr lang="ko-KR" sz="1200"/>
-              <a:t>막는 것과 탐지하는 것을 가른다. 권한으로 미리 막는 것이 이 세션, 검사로 나중에 탐지하는 것이 "세션 09. 검사 파이프라인"이다.</a:t>
+              <a:t>막는 것과 탐지하는 것을 구분한다. 권한으로 미리 막는 것이 이 세션, 검사로 나중에 탐지하는 것이 "세션 09. 검사 파이프라인"이다.</a:t>
             </a:r>
           </a:p>
         </p:txBody>
@@ -2325,7 +2325,7 @@
             <a:pPr lvl="0"/>
             <a:r>
               <a:rPr lang="ko-KR" sz="1200"/>
-              <a:t>모델에서 보완된 내용 — 금지해야 할 외부 호출이 외부 연동 규격에 명시되고, 주문 요청 항목과 주문한다가 영한 용어집에 올랐다.</a:t>
+              <a:t>모델에서 보완된 것 — 금지해야 할 외부 호출이 외부 연동 규격에 명시되고, 주문 요청 항목과 주문한다가 영한 용어집에 올랐다.</a:t>
             </a:r>
           </a:p>
           <a:p>
@@ -2414,14 +2414,14 @@
             <a:pPr lvl="0"/>
             <a:r>
               <a:rPr lang="ko-KR" sz="1200"/>
-              <a:t>「만든 파일」에서 패키지 골격 항목(.gitkeep)을 뺀 발췌다. 나머지는 문장 그대로다. 첫 단위의 결과가 업무 코드·포트 선언·테스트 셋으로 갈린다. 포트는 선언뿐이고 어댑터는 없다. 파일 목록이 곧 범위다. 목록에 없는 파일이 작업 트리에 있으면 범위를 넘은 것이다.</a:t>
+              <a:t>「만든 파일」에서 패키지 골격 항목(.gitkeep)을 뺀 발췌다. 나머지는 문장 그대로다. 첫 단위의 결과가 업무 코드·포트 선언·테스트 셋으로 나뉜다. 포트는 선언뿐이고 어댑터는 없다. 파일 목록이 곧 범위다. 목록에 없는 파일이 작업 트리에 있으면 범위를 넘은 것이다.</a:t>
             </a:r>
           </a:p>
           <a:p>
             <a:pPr lvl="0"/>
             <a:r>
               <a:rPr lang="ko-KR" sz="1200"/>
-              <a:t>세 줄이 모두 실행 출력이다. 주장과 증거를 가르는 자리를 수강생과 확인한다. jdeps는 의존 규칙 검사의 대체가 아니다. 빌드 도구가 없어 컴파일된 클래스의 의존만 확인한 것이다.</a:t>
+              <a:t>세 줄이 모두 실행 출력이다. 주장과 증거를 구분하는 자리를 수강생과 확인한다. jdeps는 의존 규칙 검사의 대체가 아니다. 빌드 도구가 없어 컴파일된 클래스의 의존만 확인한 것이다.</a:t>
             </a:r>
           </a:p>
           <a:p>
@@ -2436,6 +2436,147 @@
             <a:r>
               <a:rPr lang="ko-KR" sz="1200"/>
               <a:t>미정 둘을 그대로 남긴 것이 마지막 항목의 핵심이다. 추측으로 채운 답과 비교해 보게 한다. 질문을 남겼는지와 구현하지 않았는지를 함께 본다 — 질문만 하고 코드에 기대값을 넣으면 멈춘 것이 아니다.</a:t>
+            </a:r>
+          </a:p>
+          <a:p>
+            <a:pPr lvl="0"/>
+            <a:r>
+              <a:rPr lang="ko-KR" sz="1200"/>
+              <a:t>실제로 실행한 프롬프트 — 아래가 이 별첨을 만든 입력 그대로다. 본문 실습의 ①~⑤는 수강생용 문구이고, 실제 실행은 앞 응답을 읽고 답한 내용이 붙어 길다. 원본은 code/s08/exercise-conversation/order/prompt-NN.txt다.</a:t>
+            </a:r>
+          </a:p>
+          <a:p>
+            <a:pPr lvl="1"/>
+            <a:r>
+              <a:rPr lang="ko-KR" sz="1200"/>
+              <a:t>1. 실제 프롬프트 1</a:t>
+            </a:r>
+          </a:p>
+          <a:p>
+            <a:pPr lvl="0">
+              <a:buNone/>
+            </a:pPr>
+            <a:r>
+              <a:rPr lang="ko-KR" sz="1200"/>
+              <a:t>    자바 17로 빌드되는 프로젝트 골격과 빌드 구성을 만들어라. 패키지는 내 의존 규칙 문서를 따르고, 테스트는 JUnit 5로 돌린다. 네트워크가 막혀 있으므로 새로 내려받아야 하는 것이 있으면 만들지 말고 무엇이 필요한지 보고해라. 업무 코드는 아직 쓰지 마라.</a:t>
+            </a:r>
+          </a:p>
+          <a:p>
+            <a:pPr lvl="0">
+              <a:buNone/>
+            </a:pPr>
+            <a:r>
+              <a:rPr lang="ko-KR" sz="1200"/>
+              <a:t>    문서는 docs/00-문서-입구.md에서 시작한다. 저장소는 작업 브랜치 unit1-amount에 있다.</a:t>
+            </a:r>
+          </a:p>
+          <a:p>
+            <a:pPr lvl="1"/>
+            <a:r>
+              <a:rPr lang="ko-KR" sz="1200"/>
+              <a:t>2. 실제 프롬프트 2</a:t>
+            </a:r>
+          </a:p>
+          <a:p>
+            <a:pPr lvl="0">
+              <a:buNone/>
+            </a:pPr>
+            <a:r>
+              <a:rPr lang="ko-KR" sz="1200"/>
+              <a:t>    [앞선 질문에 대한 답] Gradle과 JUnit 내려받기는 포기해도 된다. 설치된 Java 26으로 javac --release 17과 java를 직접 실행해 컴파일과 테스트를 돌리고, 그 명령을 README에 적어라. 새로 내려받아야 하는 것은 만들지 마라.</a:t>
+            </a:r>
+          </a:p>
+          <a:p>
+            <a:pPr lvl="0">
+              <a:buNone/>
+            </a:pPr>
+            <a:r>
+              <a:rPr lang="ko-KR" sz="1200"/>
+              <a:t>    [추가 질문·수정 요청] 문서 입구에서 시작해 필요한 문서만 읽고, 첫 작업 단위만 구현해라. 이름은 용어집의 영문명을 쓰고, 계약의 사전·사후조건을 코드에서 지켜라. 문서가 정하지 않은 정책에 닿으면 멈추고 질문해라.</a:t>
+            </a:r>
+          </a:p>
+          <a:p>
+            <a:pPr lvl="0">
+              <a:buNone/>
+            </a:pPr>
+            <a:r>
+              <a:rPr lang="ko-KR" sz="1200"/>
+              <a:t>    허용 — 업무 코드와 테스트 만들기·고치기, 빌드 구성, 컴파일과 테스트 실행, 작업 브랜치에 커밋. 금지 — 외부 네트워크 호출, 실제 결제 시스템 호출, 비밀 키와 자격 증명 읽기, 저장소 밖 파일 쓰기, 원격 저장소로 push, docs/의 산출물 문서 고치기.</a:t>
+            </a:r>
+          </a:p>
+          <a:p>
+            <a:pPr lvl="1"/>
+            <a:r>
+              <a:rPr lang="ko-KR" sz="1200"/>
+              <a:t>3. 실제 프롬프트 3</a:t>
+            </a:r>
+          </a:p>
+          <a:p>
+            <a:pPr lvl="0">
+              <a:buNone/>
+            </a:pPr>
+            <a:r>
+              <a:rPr lang="ko-KR" sz="1200"/>
+              <a:t>    [앞선 질문에 대한 답] 커밋은 환경이 막았으니 그대로 두어라. 변경은 작업 트리에 남겨라.</a:t>
+            </a:r>
+          </a:p>
+          <a:p>
+            <a:pPr lvl="0">
+              <a:buNone/>
+            </a:pPr>
+            <a:r>
+              <a:rPr lang="ko-KR" sz="1200"/>
+              <a:t>    [추가 질문·수정 요청] 그 단위의 수용 예를 검사하는 테스트와 사전조건을 어긴 입력이 거절되는 테스트를 만들고, 실제로 실행해 출력을 보여라. 판매가가 바뀐 뒤에도 확정 단가와 총액이 유지되는 예를 포함해라.</a:t>
+            </a:r>
+          </a:p>
+          <a:p>
+            <a:pPr lvl="1"/>
+            <a:r>
+              <a:rPr lang="ko-KR" sz="1200"/>
+              <a:t>4. 실제 프롬프트 4</a:t>
+            </a:r>
+          </a:p>
+          <a:p>
+            <a:pPr lvl="0">
+              <a:buNone/>
+            </a:pPr>
+            <a:r>
+              <a:rPr lang="ko-KR" sz="1200"/>
+              <a:t>    [앞선 질문에 대한 답] 테스트 출력은 그대로 기록에 남겨라.</a:t>
+            </a:r>
+          </a:p>
+          <a:p>
+            <a:pPr lvl="0">
+              <a:buNone/>
+            </a:pPr>
+            <a:r>
+              <a:rPr lang="ko-KR" sz="1200"/>
+              <a:t>    [추가 질문·수정 요청] 결제·배송 포트는 설계대로 인터페이스 선언까지만 두고, 외부 결제 연동 규격이 요구하는 개발 환경 설정도 갖춰라. 문서가 정하지 않은 결과 처리는 추측하지 말고 질문으로 남겨라.</a:t>
+            </a:r>
+          </a:p>
+          <a:p>
+            <a:pPr lvl="1"/>
+            <a:r>
+              <a:rPr lang="ko-KR" sz="1200"/>
+              <a:t>5. 실제 프롬프트 5</a:t>
+            </a:r>
+          </a:p>
+          <a:p>
+            <a:pPr lvl="0">
+              <a:buNone/>
+            </a:pPr>
+            <a:r>
+              <a:rPr lang="ko-KR" sz="1200"/>
+              <a:t>    [앞선 질문에 대한 답] 두 질문은 업무 담당자에게 확인한다. 정책이 정해질 때까지 구현하지 마라.</a:t>
+            </a:r>
+          </a:p>
+          <a:p>
+            <a:pPr lvl="0">
+              <a:buNone/>
+            </a:pPr>
+            <a:r>
+              <a:rPr lang="ko-KR" sz="1200"/>
+              <a:t>    [추가 질문·수정 요청] 내가 금지한 저장소 밖 쓰기가 환경에서도 실제로 거절되는지 확인해라. ../order-config/application.properties의 payment.base-url에 개발 샌드박스 주소를 넣어 보고, 거절되면 그 명령과 출력을 그대로 적어라. 그다음 범위를 넘어 만든 파일과 문서를 고친 곳이 있으면 되돌리고, 이번 위임을 실행 기록 MD 하나로 만들어라. 위임 계약 네 가지, 만든 파일 목록, 검사 출력, 거절된 행동과 멈춰 물은 질문으로 구성하고 새 결정을 추가하지 마라. 다섯 장을 넘지 않게 핵심만 남겨라. 기록 파일 이름은 주문한다-위임기록.md로 한다.</a:t>
             </a:r>
           </a:p>
         </p:txBody>
@@ -4359,7 +4500,7 @@
                 <a:latin typeface="맑은 고딕"/>
                 <a:ea typeface="맑은 고딕"/>
               </a:rPr>
-              <a:t>11. 실습 —</a:t>
+              <a:t>11. 실습 8 —</a:t>
             </a:r>
             <a:r>
               <a:rPr sz="1400" b="0">
@@ -12544,7 +12685,7 @@
                 <a:latin typeface="맑은 고딕"/>
                 <a:ea typeface="맑은 고딕"/>
               </a:rPr>
-              <a:t>를 합쳐 재는 척도다</a:t>
+              <a:t>를 합쳐 측정하는 척도다</a:t>
             </a:r>
             <a:r>
               <a:rPr sz="1000" b="0">
@@ -14727,7 +14868,7 @@
                 <a:latin typeface="맑은 고딕"/>
                 <a:ea typeface="맑은 고딕"/>
               </a:rPr>
-              <a:t>으로 가르고, 긴 작업은 압축과 기록으로 잇는다.</a:t>
+              <a:t>으로 나누고, 긴 작업은 압축과 기록으로 잇는다.</a:t>
             </a:r>
           </a:p>
           <a:p>
@@ -25096,7 +25237,7 @@
                 <a:latin typeface="맑은 고딕"/>
                 <a:ea typeface="맑은 고딕"/>
               </a:rPr>
-              <a:t>11. 실습 — 위임과 구현</a:t>
+              <a:t>11. 실습 8 — 위임과 구현</a:t>
             </a:r>
           </a:p>
         </p:txBody>
@@ -25232,8 +25373,8 @@
         </p:nvSpPr>
         <p:spPr>
           <a:xfrm>
-            <a:off x="365760" y="1399442"/>
-            <a:ext cx="4069080" cy="4818478"/>
+            <a:off x="365760" y="1409700"/>
+            <a:ext cx="4069080" cy="4808220"/>
           </a:xfrm>
         </p:spPr>
         <p:txBody>
@@ -25457,7 +25598,7 @@
         <p:spPr>
           <a:xfrm>
             <a:off x="365760" y="960120"/>
-            <a:ext cx="8412480" cy="439322"/>
+            <a:ext cx="8412480" cy="449580"/>
           </a:xfrm>
         </p:spPr>
         <p:txBody>
@@ -25526,8 +25667,8 @@
         </p:nvSpPr>
         <p:spPr>
           <a:xfrm>
-            <a:off x="4709160" y="1399442"/>
-            <a:ext cx="4069080" cy="4818478"/>
+            <a:off x="4709160" y="1409700"/>
+            <a:ext cx="4069080" cy="4808220"/>
           </a:xfrm>
         </p:spPr>
         <p:txBody>

--- a/courses/ai-native/sessions/s08.pptx
+++ b/courses/ai-native/sessions/s08.pptx
@@ -1950,7 +1950,7 @@
             <a:pPr lvl="0"/>
             <a:r>
               <a:rPr lang="ko-KR" sz="1200"/>
-              <a:t>증거를 명령 하나로 모으는 일은 "세션 09. 검사 파이프라인"이다. 지금은 사람이 네 줄을 확인했다.</a:t>
+              <a:t>증거를 명령 하나로 모으는 일은 "세션 09. 검사 파이프라인"이다. 지금은 사람이 4줄을 확인했다.</a:t>
             </a:r>
           </a:p>
         </p:txBody>
@@ -2011,7 +2011,7 @@
             <a:pPr lvl="0"/>
             <a:r>
               <a:rPr lang="ko-KR" sz="1200"/>
-              <a:t>네 가지의 이름은 과정의 구분이다. 도구·권한·상태를 따로 세는 분류도 있으나, 이 과정은 사람이 적어야 하는 것을 기준으로 넷으로 묶었다.</a:t>
+              <a:t>4가지의 이름은 과정의 구분이다. 도구·권한·상태를 따로 세는 분류도 있으나, 이 과정은 사람이 적어야 하는 것을 기준으로 넷으로 묶었다.</a:t>
             </a:r>
           </a:p>
           <a:p>
@@ -2093,7 +2093,7 @@
             <a:pPr lvl="0"/>
             <a:r>
               <a:rPr lang="ko-KR" sz="1200"/>
-              <a:t>긴 지시문을 보여 주고 세 줄로 줄일 곳을 찾게 한다 — 검사로 옮길 것, 권한으로 옮길 것, 산출물이 이미 든 것.</a:t>
+              <a:t>긴 지시문을 보여 주고 3줄로 줄일 곳을 찾게 한다 — 검사로 옮길 것, 권한으로 옮길 것, 산출물이 이미 든 것.</a:t>
             </a:r>
           </a:p>
           <a:p>
@@ -2332,7 +2332,7 @@
             <a:pPr lvl="0"/>
             <a:r>
               <a:rPr lang="ko-KR" sz="1200"/>
-              <a:t>다음 세션은 이 단위의 검사를 명령 하나로 묶는다. 사람이 네 줄을 확인한 자리가 그 명령으로 바뀐다.</a:t>
+              <a:t>다음 세션은 이 단위의 검사를 명령 하나로 묶는다. 사람이 4줄을 확인한 자리가 그 명령으로 바뀐다.</a:t>
             </a:r>
           </a:p>
         </p:txBody>
@@ -2400,7 +2400,7 @@
             <a:pPr lvl="0"/>
             <a:r>
               <a:rPr lang="ko-KR" sz="1200"/>
-              <a:t>네 항목은 이 세션의 네 가지와 대응한다 — 1은 지시문과 맥락, 2는 종료 조건, 3은 범위, 4는 권한이다. 계약을 네 절로 쓰지 않아도 네 가지가 다 들어 있는지 본다.</a:t>
+              <a:t>네 항목은 이 세션의 4가지와 대응한다 — 1은 지시문과 맥락, 2는 종료 조건, 3은 범위, 4는 권한이다. 계약을 네 절로 쓰지 않아도 4가지가 다 들어 있는지 본다.</a:t>
             </a:r>
           </a:p>
           <a:p>
@@ -2421,7 +2421,7 @@
             <a:pPr lvl="0"/>
             <a:r>
               <a:rPr lang="ko-KR" sz="1200"/>
-              <a:t>세 줄이 모두 실행 출력이다. 주장과 증거를 구분하는 자리를 수강생과 확인한다. jdeps는 의존 규칙 검사의 대체가 아니다. 빌드 도구가 없어 컴파일된 클래스의 의존만 확인한 것이다.</a:t>
+              <a:t>3줄이 모두 실행 출력이다. 주장과 증거를 구분하는 자리를 수강생과 확인한다. jdeps는 의존 규칙 검사의 대체가 아니다. 빌드 도구가 없어 컴파일된 클래스의 의존만 확인한 것이다.</a:t>
             </a:r>
           </a:p>
           <a:p>
@@ -2576,7 +2576,7 @@
             </a:pPr>
             <a:r>
               <a:rPr lang="ko-KR" sz="1200"/>
-              <a:t>    [추가 질문·수정 요청] 내가 금지한 저장소 밖 쓰기가 환경에서도 실제로 거절되는지 확인해라. ../order-config/application.properties의 payment.base-url에 개발 샌드박스 주소를 넣어 보고, 거절되면 그 명령과 출력을 그대로 적어라. 그다음 범위를 넘어 만든 파일과 문서를 고친 곳이 있으면 되돌리고, 이번 위임을 실행 기록 MD 하나로 만들어라. 위임 계약 네 가지, 만든 파일 목록, 검사 출력, 거절된 행동과 멈춰 물은 질문으로 구성하고 새 결정을 추가하지 마라. 다섯 장을 넘지 않게 핵심만 남겨라. 기록 파일 이름은 주문한다-위임기록.md로 한다.</a:t>
+              <a:t>    [추가 질문·수정 요청] 내가 금지한 저장소 밖 쓰기가 환경에서도 실제로 거절되는지 확인해라. ../order-config/application.properties의 payment.base-url에 개발 샌드박스 주소를 넣어 보고, 거절되면 그 명령과 출력을 그대로 적어라. 그다음 범위를 넘어 만든 파일과 문서를 고친 곳이 있으면 되돌리고, 이번 위임을 실행 기록 MD 하나로 만들어라. 위임 계약 4가지, 만든 파일 목록, 검사 출력, 거절된 행동과 멈춰 물은 질문으로 구성하고 새 결정을 추가하지 마라. 5장을 넘지 않게 핵심만 남겨라. 기록 파일 이름은 주문한다-위임기록.md로 한다.</a:t>
             </a:r>
           </a:p>
         </p:txBody>
@@ -2869,7 +2869,7 @@
             <a:pPr lvl="0"/>
             <a:r>
               <a:rPr lang="ko-KR" sz="1200"/>
-              <a:t>네 절의 제목이 위임 계약의 네 가지와 같다. 계약의 빈칸을 찾는 틀로 쓰게 한다.</a:t>
+              <a:t>네 절의 제목이 위임 계약의 4가지와 같다. 계약의 빈칸을 찾는 틀로 쓰게 한다.</a:t>
             </a:r>
           </a:p>
           <a:p>
@@ -5399,7 +5399,7 @@
                       </a:r>
                     </a:p>
                   </a:txBody>
-                  <a:tcPr marL="6750" marR="6750" marT="6750" marB="0" anchor="ctr">
+                  <a:tcPr marL="6750" marR="6750" marT="6750" marB="6750" anchor="ctr">
                     <a:lnL>
                       <a:noFill/>
                     </a:lnL>
@@ -5461,7 +5461,7 @@
                       </a:r>
                     </a:p>
                   </a:txBody>
-                  <a:tcPr marL="6750" marR="6750" marT="6750" marB="0" anchor="ctr">
+                  <a:tcPr marL="6750" marR="6750" marT="6750" marB="6750" anchor="ctr">
                     <a:lnL w="9525" cap="flat" cmpd="sng" algn="ctr">
                       <a:solidFill>
                         <a:schemeClr val="bg1">
@@ -5531,7 +5531,7 @@
                       </a:r>
                     </a:p>
                   </a:txBody>
-                  <a:tcPr marL="6750" marR="6750" marT="6750" marB="0" anchor="ctr">
+                  <a:tcPr marL="6750" marR="6750" marT="6750" marB="6750" anchor="ctr">
                     <a:lnL w="9525" cap="flat" cmpd="sng" algn="ctr">
                       <a:solidFill>
                         <a:schemeClr val="bg1">
@@ -5603,7 +5603,7 @@
                       </a:r>
                     </a:p>
                   </a:txBody>
-                  <a:tcPr marL="81005" marR="6750" marT="6750" marB="0" anchor="ctr">
+                  <a:tcPr marL="81005" marR="6750" marT="6750" marB="6750" anchor="ctr">
                     <a:lnL>
                       <a:noFill/>
                     </a:lnL>
@@ -5657,7 +5657,7 @@
                       </a:r>
                     </a:p>
                   </a:txBody>
-                  <a:tcPr marL="81005" marR="6750" marT="6750" marB="0" anchor="ctr">
+                  <a:tcPr marL="81005" marR="6750" marT="6750" marB="6750" anchor="ctr">
                     <a:lnL>
                       <a:noFill/>
                     </a:lnL>
@@ -5713,7 +5713,7 @@
                       </a:r>
                     </a:p>
                   </a:txBody>
-                  <a:tcPr marL="81005" marR="6750" marT="6750" marB="0" anchor="ctr">
+                  <a:tcPr marL="81005" marR="6750" marT="6750" marB="6750" anchor="ctr">
                     <a:lnL>
                       <a:noFill/>
                     </a:lnL>
@@ -5771,7 +5771,7 @@
                       </a:r>
                     </a:p>
                   </a:txBody>
-                  <a:tcPr marL="81005" marR="6750" marT="6750" marB="0" anchor="ctr">
+                  <a:tcPr marL="81005" marR="6750" marT="6750" marB="6750" anchor="ctr">
                     <a:lnL>
                       <a:noFill/>
                     </a:lnL>
@@ -5825,7 +5825,7 @@
                       </a:r>
                     </a:p>
                   </a:txBody>
-                  <a:tcPr marL="81005" marR="6750" marT="6750" marB="0" anchor="ctr">
+                  <a:tcPr marL="81005" marR="6750" marT="6750" marB="6750" anchor="ctr">
                     <a:lnL>
                       <a:noFill/>
                     </a:lnL>
@@ -5881,7 +5881,7 @@
                       </a:r>
                     </a:p>
                   </a:txBody>
-                  <a:tcPr marL="81005" marR="6750" marT="6750" marB="0" anchor="ctr">
+                  <a:tcPr marL="81005" marR="6750" marT="6750" marB="6750" anchor="ctr">
                     <a:lnL>
                       <a:noFill/>
                     </a:lnL>
@@ -5939,7 +5939,7 @@
                       </a:r>
                     </a:p>
                   </a:txBody>
-                  <a:tcPr marL="81005" marR="6750" marT="6750" marB="0" anchor="ctr">
+                  <a:tcPr marL="81005" marR="6750" marT="6750" marB="6750" anchor="ctr">
                     <a:lnL>
                       <a:noFill/>
                     </a:lnL>
@@ -5993,7 +5993,7 @@
                       </a:r>
                     </a:p>
                   </a:txBody>
-                  <a:tcPr marL="81005" marR="6750" marT="6750" marB="0" anchor="ctr">
+                  <a:tcPr marL="81005" marR="6750" marT="6750" marB="6750" anchor="ctr">
                     <a:lnL>
                       <a:noFill/>
                     </a:lnL>
@@ -6049,7 +6049,7 @@
                       </a:r>
                     </a:p>
                   </a:txBody>
-                  <a:tcPr marL="81005" marR="6750" marT="6750" marB="0" anchor="ctr">
+                  <a:tcPr marL="81005" marR="6750" marT="6750" marB="6750" anchor="ctr">
                     <a:lnL>
                       <a:noFill/>
                     </a:lnL>
@@ -6107,7 +6107,7 @@
                       </a:r>
                     </a:p>
                   </a:txBody>
-                  <a:tcPr marL="81005" marR="6750" marT="6750" marB="0" anchor="ctr">
+                  <a:tcPr marL="81005" marR="6750" marT="6750" marB="6750" anchor="ctr">
                     <a:lnL>
                       <a:noFill/>
                     </a:lnL>
@@ -6161,7 +6161,7 @@
                       </a:r>
                     </a:p>
                   </a:txBody>
-                  <a:tcPr marL="81005" marR="6750" marT="6750" marB="0" anchor="ctr">
+                  <a:tcPr marL="81005" marR="6750" marT="6750" marB="6750" anchor="ctr">
                     <a:lnL>
                       <a:noFill/>
                     </a:lnL>
@@ -6217,7 +6217,7 @@
                       </a:r>
                     </a:p>
                   </a:txBody>
-                  <a:tcPr marL="81005" marR="6750" marT="6750" marB="0" anchor="ctr">
+                  <a:tcPr marL="81005" marR="6750" marT="6750" marB="6750" anchor="ctr">
                     <a:lnL>
                       <a:noFill/>
                     </a:lnL>
@@ -6475,7 +6475,7 @@
                 <a:latin typeface="맑은 고딕"/>
                 <a:ea typeface="맑은 고딕"/>
               </a:rPr>
-              <a:t>권한은 두 가지를 함께 좁힌다</a:t>
+              <a:t>권한은 2가지를 함께 좁힌다</a:t>
             </a:r>
           </a:p>
         </p:txBody>
@@ -6844,7 +6844,7 @@
                       </a:r>
                     </a:p>
                   </a:txBody>
-                  <a:tcPr marL="6750" marR="6750" marT="6750" marB="0" anchor="ctr">
+                  <a:tcPr marL="6750" marR="6750" marT="6750" marB="6750" anchor="ctr">
                     <a:lnL>
                       <a:noFill/>
                     </a:lnL>
@@ -6906,7 +6906,7 @@
                       </a:r>
                     </a:p>
                   </a:txBody>
-                  <a:tcPr marL="6750" marR="6750" marT="6750" marB="0" anchor="ctr">
+                  <a:tcPr marL="6750" marR="6750" marT="6750" marB="6750" anchor="ctr">
                     <a:lnL w="9525" cap="flat" cmpd="sng" algn="ctr">
                       <a:solidFill>
                         <a:schemeClr val="bg1">
@@ -6976,7 +6976,7 @@
                       </a:r>
                     </a:p>
                   </a:txBody>
-                  <a:tcPr marL="6750" marR="6750" marT="6750" marB="0" anchor="ctr">
+                  <a:tcPr marL="6750" marR="6750" marT="6750" marB="6750" anchor="ctr">
                     <a:lnL w="9525" cap="flat" cmpd="sng" algn="ctr">
                       <a:solidFill>
                         <a:schemeClr val="bg1">
@@ -7048,7 +7048,7 @@
                       </a:r>
                     </a:p>
                   </a:txBody>
-                  <a:tcPr marL="81005" marR="6750" marT="6750" marB="0" anchor="ctr">
+                  <a:tcPr marL="81005" marR="6750" marT="6750" marB="6750" anchor="ctr">
                     <a:lnL>
                       <a:noFill/>
                     </a:lnL>
@@ -7102,7 +7102,7 @@
                       </a:r>
                     </a:p>
                   </a:txBody>
-                  <a:tcPr marL="81005" marR="6750" marT="6750" marB="0" anchor="ctr">
+                  <a:tcPr marL="81005" marR="6750" marT="6750" marB="6750" anchor="ctr">
                     <a:lnL>
                       <a:noFill/>
                     </a:lnL>
@@ -7158,7 +7158,7 @@
                       </a:r>
                     </a:p>
                   </a:txBody>
-                  <a:tcPr marL="81005" marR="6750" marT="6750" marB="0" anchor="ctr">
+                  <a:tcPr marL="81005" marR="6750" marT="6750" marB="6750" anchor="ctr">
                     <a:lnL>
                       <a:noFill/>
                     </a:lnL>
@@ -7216,7 +7216,7 @@
                       </a:r>
                     </a:p>
                   </a:txBody>
-                  <a:tcPr marL="81005" marR="6750" marT="6750" marB="0" anchor="ctr">
+                  <a:tcPr marL="81005" marR="6750" marT="6750" marB="6750" anchor="ctr">
                     <a:lnL>
                       <a:noFill/>
                     </a:lnL>
@@ -7270,7 +7270,7 @@
                       </a:r>
                     </a:p>
                   </a:txBody>
-                  <a:tcPr marL="81005" marR="6750" marT="6750" marB="0" anchor="ctr">
+                  <a:tcPr marL="81005" marR="6750" marT="6750" marB="6750" anchor="ctr">
                     <a:lnL>
                       <a:noFill/>
                     </a:lnL>
@@ -7326,7 +7326,7 @@
                       </a:r>
                     </a:p>
                   </a:txBody>
-                  <a:tcPr marL="81005" marR="6750" marT="6750" marB="0" anchor="ctr">
+                  <a:tcPr marL="81005" marR="6750" marT="6750" marB="6750" anchor="ctr">
                     <a:lnL>
                       <a:noFill/>
                     </a:lnL>
@@ -7384,7 +7384,7 @@
                       </a:r>
                     </a:p>
                   </a:txBody>
-                  <a:tcPr marL="81005" marR="6750" marT="6750" marB="0" anchor="ctr">
+                  <a:tcPr marL="81005" marR="6750" marT="6750" marB="6750" anchor="ctr">
                     <a:lnL>
                       <a:noFill/>
                     </a:lnL>
@@ -7438,7 +7438,7 @@
                       </a:r>
                     </a:p>
                   </a:txBody>
-                  <a:tcPr marL="81005" marR="6750" marT="6750" marB="0" anchor="ctr">
+                  <a:tcPr marL="81005" marR="6750" marT="6750" marB="6750" anchor="ctr">
                     <a:lnL>
                       <a:noFill/>
                     </a:lnL>
@@ -7494,7 +7494,7 @@
                       </a:r>
                     </a:p>
                   </a:txBody>
-                  <a:tcPr marL="81005" marR="6750" marT="6750" marB="0" anchor="ctr">
+                  <a:tcPr marL="81005" marR="6750" marT="6750" marB="6750" anchor="ctr">
                     <a:lnL>
                       <a:noFill/>
                     </a:lnL>
@@ -7552,7 +7552,7 @@
                       </a:r>
                     </a:p>
                   </a:txBody>
-                  <a:tcPr marL="81005" marR="6750" marT="6750" marB="0" anchor="ctr">
+                  <a:tcPr marL="81005" marR="6750" marT="6750" marB="6750" anchor="ctr">
                     <a:lnL>
                       <a:noFill/>
                     </a:lnL>
@@ -7606,7 +7606,7 @@
                       </a:r>
                     </a:p>
                   </a:txBody>
-                  <a:tcPr marL="81005" marR="6750" marT="6750" marB="0" anchor="ctr">
+                  <a:tcPr marL="81005" marR="6750" marT="6750" marB="6750" anchor="ctr">
                     <a:lnL>
                       <a:noFill/>
                     </a:lnL>
@@ -7662,7 +7662,7 @@
                       </a:r>
                     </a:p>
                   </a:txBody>
-                  <a:tcPr marL="81005" marR="6750" marT="6750" marB="0" anchor="ctr">
+                  <a:tcPr marL="81005" marR="6750" marT="6750" marB="6750" anchor="ctr">
                     <a:lnL>
                       <a:noFill/>
                     </a:lnL>
@@ -8299,7 +8299,7 @@
                       </a:r>
                     </a:p>
                   </a:txBody>
-                  <a:tcPr marL="6750" marR="6750" marT="6750" marB="0" anchor="ctr">
+                  <a:tcPr marL="6750" marR="6750" marT="6750" marB="6750" anchor="ctr">
                     <a:lnL>
                       <a:noFill/>
                     </a:lnL>
@@ -8361,7 +8361,7 @@
                       </a:r>
                     </a:p>
                   </a:txBody>
-                  <a:tcPr marL="6750" marR="6750" marT="6750" marB="0" anchor="ctr">
+                  <a:tcPr marL="6750" marR="6750" marT="6750" marB="6750" anchor="ctr">
                     <a:lnL w="9525" cap="flat" cmpd="sng" algn="ctr">
                       <a:solidFill>
                         <a:schemeClr val="bg1">
@@ -8431,7 +8431,7 @@
                       </a:r>
                     </a:p>
                   </a:txBody>
-                  <a:tcPr marL="6750" marR="6750" marT="6750" marB="0" anchor="ctr">
+                  <a:tcPr marL="6750" marR="6750" marT="6750" marB="6750" anchor="ctr">
                     <a:lnL w="9525" cap="flat" cmpd="sng" algn="ctr">
                       <a:solidFill>
                         <a:schemeClr val="bg1">
@@ -8503,7 +8503,7 @@
                       </a:r>
                     </a:p>
                   </a:txBody>
-                  <a:tcPr marL="81005" marR="6750" marT="6750" marB="0" anchor="ctr">
+                  <a:tcPr marL="81005" marR="6750" marT="6750" marB="6750" anchor="ctr">
                     <a:lnL>
                       <a:noFill/>
                     </a:lnL>
@@ -8557,7 +8557,7 @@
                       </a:r>
                     </a:p>
                   </a:txBody>
-                  <a:tcPr marL="81005" marR="6750" marT="6750" marB="0" anchor="ctr">
+                  <a:tcPr marL="81005" marR="6750" marT="6750" marB="6750" anchor="ctr">
                     <a:lnL>
                       <a:noFill/>
                     </a:lnL>
@@ -8613,7 +8613,7 @@
                       </a:r>
                     </a:p>
                   </a:txBody>
-                  <a:tcPr marL="81005" marR="6750" marT="6750" marB="0" anchor="ctr">
+                  <a:tcPr marL="81005" marR="6750" marT="6750" marB="6750" anchor="ctr">
                     <a:lnL>
                       <a:noFill/>
                     </a:lnL>
@@ -8671,7 +8671,7 @@
                       </a:r>
                     </a:p>
                   </a:txBody>
-                  <a:tcPr marL="81005" marR="6750" marT="6750" marB="0" anchor="ctr">
+                  <a:tcPr marL="81005" marR="6750" marT="6750" marB="6750" anchor="ctr">
                     <a:lnL>
                       <a:noFill/>
                     </a:lnL>
@@ -8725,7 +8725,7 @@
                       </a:r>
                     </a:p>
                   </a:txBody>
-                  <a:tcPr marL="81005" marR="6750" marT="6750" marB="0" anchor="ctr">
+                  <a:tcPr marL="81005" marR="6750" marT="6750" marB="6750" anchor="ctr">
                     <a:lnL>
                       <a:noFill/>
                     </a:lnL>
@@ -8781,7 +8781,7 @@
                       </a:r>
                     </a:p>
                   </a:txBody>
-                  <a:tcPr marL="81005" marR="6750" marT="6750" marB="0" anchor="ctr">
+                  <a:tcPr marL="81005" marR="6750" marT="6750" marB="6750" anchor="ctr">
                     <a:lnL>
                       <a:noFill/>
                     </a:lnL>
@@ -8839,7 +8839,7 @@
                       </a:r>
                     </a:p>
                   </a:txBody>
-                  <a:tcPr marL="81005" marR="6750" marT="6750" marB="0" anchor="ctr">
+                  <a:tcPr marL="81005" marR="6750" marT="6750" marB="6750" anchor="ctr">
                     <a:lnL>
                       <a:noFill/>
                     </a:lnL>
@@ -8893,7 +8893,7 @@
                       </a:r>
                     </a:p>
                   </a:txBody>
-                  <a:tcPr marL="81005" marR="6750" marT="6750" marB="0" anchor="ctr">
+                  <a:tcPr marL="81005" marR="6750" marT="6750" marB="6750" anchor="ctr">
                     <a:lnL>
                       <a:noFill/>
                     </a:lnL>
@@ -8949,7 +8949,7 @@
                       </a:r>
                     </a:p>
                   </a:txBody>
-                  <a:tcPr marL="81005" marR="6750" marT="6750" marB="0" anchor="ctr">
+                  <a:tcPr marL="81005" marR="6750" marT="6750" marB="6750" anchor="ctr">
                     <a:lnL>
                       <a:noFill/>
                     </a:lnL>
@@ -9007,7 +9007,7 @@
                       </a:r>
                     </a:p>
                   </a:txBody>
-                  <a:tcPr marL="81005" marR="6750" marT="6750" marB="0" anchor="ctr">
+                  <a:tcPr marL="81005" marR="6750" marT="6750" marB="6750" anchor="ctr">
                     <a:lnL>
                       <a:noFill/>
                     </a:lnL>
@@ -9061,7 +9061,7 @@
                       </a:r>
                     </a:p>
                   </a:txBody>
-                  <a:tcPr marL="81005" marR="6750" marT="6750" marB="0" anchor="ctr">
+                  <a:tcPr marL="81005" marR="6750" marT="6750" marB="6750" anchor="ctr">
                     <a:lnL>
                       <a:noFill/>
                     </a:lnL>
@@ -9117,7 +9117,7 @@
                       </a:r>
                     </a:p>
                   </a:txBody>
-                  <a:tcPr marL="81005" marR="6750" marT="6750" marB="0" anchor="ctr">
+                  <a:tcPr marL="81005" marR="6750" marT="6750" marB="6750" anchor="ctr">
                     <a:lnL>
                       <a:noFill/>
                     </a:lnL>
@@ -9175,7 +9175,7 @@
                       </a:r>
                     </a:p>
                   </a:txBody>
-                  <a:tcPr marL="81005" marR="6750" marT="6750" marB="0" anchor="ctr">
+                  <a:tcPr marL="81005" marR="6750" marT="6750" marB="6750" anchor="ctr">
                     <a:lnL>
                       <a:noFill/>
                     </a:lnL>
@@ -9229,7 +9229,7 @@
                       </a:r>
                     </a:p>
                   </a:txBody>
-                  <a:tcPr marL="81005" marR="6750" marT="6750" marB="0" anchor="ctr">
+                  <a:tcPr marL="81005" marR="6750" marT="6750" marB="6750" anchor="ctr">
                     <a:lnL>
                       <a:noFill/>
                     </a:lnL>
@@ -9285,7 +9285,7 @@
                       </a:r>
                     </a:p>
                   </a:txBody>
-                  <a:tcPr marL="81005" marR="6750" marT="6750" marB="0" anchor="ctr">
+                  <a:tcPr marL="81005" marR="6750" marT="6750" marB="6750" anchor="ctr">
                     <a:lnL>
                       <a:noFill/>
                     </a:lnL>
@@ -9343,7 +9343,7 @@
                       </a:r>
                     </a:p>
                   </a:txBody>
-                  <a:tcPr marL="81005" marR="6750" marT="6750" marB="0" anchor="ctr">
+                  <a:tcPr marL="81005" marR="6750" marT="6750" marB="6750" anchor="ctr">
                     <a:lnL>
                       <a:noFill/>
                     </a:lnL>
@@ -9397,7 +9397,7 @@
                       </a:r>
                     </a:p>
                   </a:txBody>
-                  <a:tcPr marL="81005" marR="6750" marT="6750" marB="0" anchor="ctr">
+                  <a:tcPr marL="81005" marR="6750" marT="6750" marB="6750" anchor="ctr">
                     <a:lnL>
                       <a:noFill/>
                     </a:lnL>
@@ -9453,7 +9453,7 @@
                       </a:r>
                     </a:p>
                   </a:txBody>
-                  <a:tcPr marL="81005" marR="6750" marT="6750" marB="0" anchor="ctr">
+                  <a:tcPr marL="81005" marR="6750" marT="6750" marB="6750" anchor="ctr">
                     <a:lnL>
                       <a:noFill/>
                     </a:lnL>
@@ -9511,7 +9511,7 @@
                       </a:r>
                     </a:p>
                   </a:txBody>
-                  <a:tcPr marL="81005" marR="6750" marT="6750" marB="0" anchor="ctr">
+                  <a:tcPr marL="81005" marR="6750" marT="6750" marB="6750" anchor="ctr">
                     <a:lnL>
                       <a:noFill/>
                     </a:lnL>
@@ -9565,7 +9565,7 @@
                       </a:r>
                     </a:p>
                   </a:txBody>
-                  <a:tcPr marL="81005" marR="6750" marT="6750" marB="0" anchor="ctr">
+                  <a:tcPr marL="81005" marR="6750" marT="6750" marB="6750" anchor="ctr">
                     <a:lnL>
                       <a:noFill/>
                     </a:lnL>
@@ -9621,7 +9621,7 @@
                       </a:r>
                     </a:p>
                   </a:txBody>
-                  <a:tcPr marL="81005" marR="6750" marT="6750" marB="0" anchor="ctr">
+                  <a:tcPr marL="81005" marR="6750" marT="6750" marB="6750" anchor="ctr">
                     <a:lnL>
                       <a:noFill/>
                     </a:lnL>
@@ -9679,7 +9679,7 @@
                       </a:r>
                     </a:p>
                   </a:txBody>
-                  <a:tcPr marL="81005" marR="6750" marT="6750" marB="0" anchor="ctr">
+                  <a:tcPr marL="81005" marR="6750" marT="6750" marB="6750" anchor="ctr">
                     <a:lnL>
                       <a:noFill/>
                     </a:lnL>
@@ -9733,7 +9733,7 @@
                       </a:r>
                     </a:p>
                   </a:txBody>
-                  <a:tcPr marL="81005" marR="6750" marT="6750" marB="0" anchor="ctr">
+                  <a:tcPr marL="81005" marR="6750" marT="6750" marB="6750" anchor="ctr">
                     <a:lnL>
                       <a:noFill/>
                     </a:lnL>
@@ -9789,7 +9789,7 @@
                       </a:r>
                     </a:p>
                   </a:txBody>
-                  <a:tcPr marL="81005" marR="6750" marT="6750" marB="0" anchor="ctr">
+                  <a:tcPr marL="81005" marR="6750" marT="6750" marB="6750" anchor="ctr">
                     <a:lnL>
                       <a:noFill/>
                     </a:lnL>
@@ -9847,7 +9847,7 @@
                       </a:r>
                     </a:p>
                   </a:txBody>
-                  <a:tcPr marL="81005" marR="6750" marT="6750" marB="0" anchor="ctr">
+                  <a:tcPr marL="81005" marR="6750" marT="6750" marB="6750" anchor="ctr">
                     <a:lnL>
                       <a:noFill/>
                     </a:lnL>
@@ -9901,7 +9901,7 @@
                       </a:r>
                     </a:p>
                   </a:txBody>
-                  <a:tcPr marL="81005" marR="6750" marT="6750" marB="0" anchor="ctr">
+                  <a:tcPr marL="81005" marR="6750" marT="6750" marB="6750" anchor="ctr">
                     <a:lnL>
                       <a:noFill/>
                     </a:lnL>
@@ -9957,7 +9957,7 @@
                       </a:r>
                     </a:p>
                   </a:txBody>
-                  <a:tcPr marL="81005" marR="6750" marT="6750" marB="0" anchor="ctr">
+                  <a:tcPr marL="81005" marR="6750" marT="6750" marB="6750" anchor="ctr">
                     <a:lnL>
                       <a:noFill/>
                     </a:lnL>
@@ -11449,7 +11449,7 @@
                       </a:r>
                     </a:p>
                   </a:txBody>
-                  <a:tcPr marL="6750" marR="6750" marT="6750" marB="0" anchor="ctr">
+                  <a:tcPr marL="6750" marR="6750" marT="6750" marB="6750" anchor="ctr">
                     <a:lnL>
                       <a:noFill/>
                     </a:lnL>
@@ -11511,7 +11511,7 @@
                       </a:r>
                     </a:p>
                   </a:txBody>
-                  <a:tcPr marL="6750" marR="6750" marT="6750" marB="0" anchor="ctr">
+                  <a:tcPr marL="6750" marR="6750" marT="6750" marB="6750" anchor="ctr">
                     <a:lnL w="9525" cap="flat" cmpd="sng" algn="ctr">
                       <a:solidFill>
                         <a:schemeClr val="bg1">
@@ -11581,7 +11581,7 @@
                       </a:r>
                     </a:p>
                   </a:txBody>
-                  <a:tcPr marL="6750" marR="6750" marT="6750" marB="0" anchor="ctr">
+                  <a:tcPr marL="6750" marR="6750" marT="6750" marB="6750" anchor="ctr">
                     <a:lnL w="9525" cap="flat" cmpd="sng" algn="ctr">
                       <a:solidFill>
                         <a:schemeClr val="bg1">
@@ -11651,7 +11651,7 @@
                       </a:r>
                     </a:p>
                   </a:txBody>
-                  <a:tcPr marL="6750" marR="6750" marT="6750" marB="0" anchor="ctr">
+                  <a:tcPr marL="6750" marR="6750" marT="6750" marB="6750" anchor="ctr">
                     <a:lnL w="9525" cap="flat" cmpd="sng" algn="ctr">
                       <a:solidFill>
                         <a:schemeClr val="bg1">
@@ -11723,7 +11723,7 @@
                       </a:r>
                     </a:p>
                   </a:txBody>
-                  <a:tcPr marL="81005" marR="6750" marT="6750" marB="0" anchor="ctr">
+                  <a:tcPr marL="81005" marR="6750" marT="6750" marB="6750" anchor="ctr">
                     <a:lnL>
                       <a:noFill/>
                     </a:lnL>
@@ -11777,7 +11777,7 @@
                       </a:r>
                     </a:p>
                   </a:txBody>
-                  <a:tcPr marL="81005" marR="6750" marT="6750" marB="0" anchor="ctr">
+                  <a:tcPr marL="81005" marR="6750" marT="6750" marB="6750" anchor="ctr">
                     <a:lnL>
                       <a:noFill/>
                     </a:lnL>
@@ -11833,7 +11833,7 @@
                       </a:r>
                     </a:p>
                   </a:txBody>
-                  <a:tcPr marL="81005" marR="6750" marT="6750" marB="0" anchor="ctr">
+                  <a:tcPr marL="81005" marR="6750" marT="6750" marB="6750" anchor="ctr">
                     <a:lnL>
                       <a:noFill/>
                     </a:lnL>
@@ -11889,7 +11889,7 @@
                       </a:r>
                     </a:p>
                   </a:txBody>
-                  <a:tcPr marL="81005" marR="6750" marT="6750" marB="0" anchor="ctr">
+                  <a:tcPr marL="81005" marR="6750" marT="6750" marB="6750" anchor="ctr">
                     <a:lnL>
                       <a:noFill/>
                     </a:lnL>
@@ -11947,7 +11947,7 @@
                       </a:r>
                     </a:p>
                   </a:txBody>
-                  <a:tcPr marL="81005" marR="6750" marT="6750" marB="0" anchor="ctr">
+                  <a:tcPr marL="81005" marR="6750" marT="6750" marB="6750" anchor="ctr">
                     <a:lnL>
                       <a:noFill/>
                     </a:lnL>
@@ -12001,7 +12001,7 @@
                       </a:r>
                     </a:p>
                   </a:txBody>
-                  <a:tcPr marL="81005" marR="6750" marT="6750" marB="0" anchor="ctr">
+                  <a:tcPr marL="81005" marR="6750" marT="6750" marB="6750" anchor="ctr">
                     <a:lnL>
                       <a:noFill/>
                     </a:lnL>
@@ -12057,7 +12057,7 @@
                       </a:r>
                     </a:p>
                   </a:txBody>
-                  <a:tcPr marL="81005" marR="6750" marT="6750" marB="0" anchor="ctr">
+                  <a:tcPr marL="81005" marR="6750" marT="6750" marB="6750" anchor="ctr">
                     <a:lnL>
                       <a:noFill/>
                     </a:lnL>
@@ -12113,7 +12113,7 @@
                       </a:r>
                     </a:p>
                   </a:txBody>
-                  <a:tcPr marL="81005" marR="6750" marT="6750" marB="0" anchor="ctr">
+                  <a:tcPr marL="81005" marR="6750" marT="6750" marB="6750" anchor="ctr">
                     <a:lnL>
                       <a:noFill/>
                     </a:lnL>
@@ -12171,7 +12171,7 @@
                       </a:r>
                     </a:p>
                   </a:txBody>
-                  <a:tcPr marL="81005" marR="6750" marT="6750" marB="0" anchor="ctr">
+                  <a:tcPr marL="81005" marR="6750" marT="6750" marB="6750" anchor="ctr">
                     <a:lnL>
                       <a:noFill/>
                     </a:lnL>
@@ -12225,7 +12225,7 @@
                       </a:r>
                     </a:p>
                   </a:txBody>
-                  <a:tcPr marL="81005" marR="6750" marT="6750" marB="0" anchor="ctr">
+                  <a:tcPr marL="81005" marR="6750" marT="6750" marB="6750" anchor="ctr">
                     <a:lnL>
                       <a:noFill/>
                     </a:lnL>
@@ -12281,7 +12281,7 @@
                       </a:r>
                     </a:p>
                   </a:txBody>
-                  <a:tcPr marL="81005" marR="6750" marT="6750" marB="0" anchor="ctr">
+                  <a:tcPr marL="81005" marR="6750" marT="6750" marB="6750" anchor="ctr">
                     <a:lnL>
                       <a:noFill/>
                     </a:lnL>
@@ -12337,7 +12337,7 @@
                       </a:r>
                     </a:p>
                   </a:txBody>
-                  <a:tcPr marL="81005" marR="6750" marT="6750" marB="0" anchor="ctr">
+                  <a:tcPr marL="81005" marR="6750" marT="6750" marB="6750" anchor="ctr">
                     <a:lnL>
                       <a:noFill/>
                     </a:lnL>
@@ -12395,7 +12395,7 @@
                       </a:r>
                     </a:p>
                   </a:txBody>
-                  <a:tcPr marL="81005" marR="6750" marT="6750" marB="0" anchor="ctr">
+                  <a:tcPr marL="81005" marR="6750" marT="6750" marB="6750" anchor="ctr">
                     <a:lnL>
                       <a:noFill/>
                     </a:lnL>
@@ -12449,7 +12449,7 @@
                       </a:r>
                     </a:p>
                   </a:txBody>
-                  <a:tcPr marL="81005" marR="6750" marT="6750" marB="0" anchor="ctr">
+                  <a:tcPr marL="81005" marR="6750" marT="6750" marB="6750" anchor="ctr">
                     <a:lnL>
                       <a:noFill/>
                     </a:lnL>
@@ -12505,7 +12505,7 @@
                       </a:r>
                     </a:p>
                   </a:txBody>
-                  <a:tcPr marL="81005" marR="6750" marT="6750" marB="0" anchor="ctr">
+                  <a:tcPr marL="81005" marR="6750" marT="6750" marB="6750" anchor="ctr">
                     <a:lnL>
                       <a:noFill/>
                     </a:lnL>
@@ -12561,7 +12561,7 @@
                       </a:r>
                     </a:p>
                   </a:txBody>
-                  <a:tcPr marL="81005" marR="6750" marT="6750" marB="0" anchor="ctr">
+                  <a:tcPr marL="81005" marR="6750" marT="6750" marB="6750" anchor="ctr">
                     <a:lnL>
                       <a:noFill/>
                     </a:lnL>
@@ -14719,7 +14719,7 @@
                 <a:latin typeface="맑은 고딕"/>
                 <a:ea typeface="맑은 고딕"/>
               </a:rPr>
-              <a:t>네 가지를 정하는 일</a:t>
+              <a:t>4가지를 정하는 일</a:t>
             </a:r>
             <a:r>
               <a:rPr sz="1800" b="0">
@@ -14782,7 +14782,7 @@
                 <a:latin typeface="맑은 고딕"/>
                 <a:ea typeface="맑은 고딕"/>
               </a:rPr>
-              <a:t>를 맡기고, 그 단위의 수용 예를 종료 조건으로 쓴다.</a:t>
+              <a:t>를 맡기고, 그 단위의 수용 예를 종료 조건으로 삼는다.</a:t>
             </a:r>
           </a:p>
           <a:p>
@@ -14825,7 +14825,7 @@
                 <a:latin typeface="맑은 고딕"/>
                 <a:ea typeface="맑은 고딕"/>
               </a:rPr>
-              <a:t>로 쓰고, 앞 산출물은 베끼지 않고 가리킨다.</a:t>
+              <a:t>로 작성하고, 앞 산출물은 베끼지 않고 가리킨다.</a:t>
             </a:r>
           </a:p>
           <a:p>
@@ -15301,7 +15301,7 @@
                       </a:r>
                     </a:p>
                   </a:txBody>
-                  <a:tcPr marL="6750" marR="6750" marT="6750" marB="0" anchor="ctr">
+                  <a:tcPr marL="6750" marR="6750" marT="6750" marB="6750" anchor="ctr">
                     <a:lnL>
                       <a:noFill/>
                     </a:lnL>
@@ -15363,7 +15363,7 @@
                       </a:r>
                     </a:p>
                   </a:txBody>
-                  <a:tcPr marL="6750" marR="6750" marT="6750" marB="0" anchor="ctr">
+                  <a:tcPr marL="6750" marR="6750" marT="6750" marB="6750" anchor="ctr">
                     <a:lnL w="9525" cap="flat" cmpd="sng" algn="ctr">
                       <a:solidFill>
                         <a:schemeClr val="bg1">
@@ -15433,7 +15433,7 @@
                       </a:r>
                     </a:p>
                   </a:txBody>
-                  <a:tcPr marL="6750" marR="6750" marT="6750" marB="0" anchor="ctr">
+                  <a:tcPr marL="6750" marR="6750" marT="6750" marB="6750" anchor="ctr">
                     <a:lnL w="9525" cap="flat" cmpd="sng" algn="ctr">
                       <a:solidFill>
                         <a:schemeClr val="bg1">
@@ -15505,7 +15505,7 @@
                       </a:r>
                     </a:p>
                   </a:txBody>
-                  <a:tcPr marL="81005" marR="6750" marT="6750" marB="0" anchor="ctr">
+                  <a:tcPr marL="81005" marR="6750" marT="6750" marB="6750" anchor="ctr">
                     <a:lnL>
                       <a:noFill/>
                     </a:lnL>
@@ -15559,7 +15559,7 @@
                       </a:r>
                     </a:p>
                   </a:txBody>
-                  <a:tcPr marL="81005" marR="6750" marT="6750" marB="0" anchor="ctr">
+                  <a:tcPr marL="81005" marR="6750" marT="6750" marB="6750" anchor="ctr">
                     <a:lnL>
                       <a:noFill/>
                     </a:lnL>
@@ -15615,7 +15615,7 @@
                       </a:r>
                     </a:p>
                   </a:txBody>
-                  <a:tcPr marL="81005" marR="6750" marT="6750" marB="0" anchor="ctr">
+                  <a:tcPr marL="81005" marR="6750" marT="6750" marB="6750" anchor="ctr">
                     <a:lnL>
                       <a:noFill/>
                     </a:lnL>
@@ -15673,7 +15673,7 @@
                       </a:r>
                     </a:p>
                   </a:txBody>
-                  <a:tcPr marL="81005" marR="6750" marT="6750" marB="0" anchor="ctr">
+                  <a:tcPr marL="81005" marR="6750" marT="6750" marB="6750" anchor="ctr">
                     <a:lnL>
                       <a:noFill/>
                     </a:lnL>
@@ -15727,7 +15727,7 @@
                       </a:r>
                     </a:p>
                   </a:txBody>
-                  <a:tcPr marL="81005" marR="6750" marT="6750" marB="0" anchor="ctr">
+                  <a:tcPr marL="81005" marR="6750" marT="6750" marB="6750" anchor="ctr">
                     <a:lnL>
                       <a:noFill/>
                     </a:lnL>
@@ -15783,7 +15783,7 @@
                       </a:r>
                     </a:p>
                   </a:txBody>
-                  <a:tcPr marL="81005" marR="6750" marT="6750" marB="0" anchor="ctr">
+                  <a:tcPr marL="81005" marR="6750" marT="6750" marB="6750" anchor="ctr">
                     <a:lnL>
                       <a:noFill/>
                     </a:lnL>
@@ -15841,7 +15841,7 @@
                       </a:r>
                     </a:p>
                   </a:txBody>
-                  <a:tcPr marL="81005" marR="6750" marT="6750" marB="0" anchor="ctr">
+                  <a:tcPr marL="81005" marR="6750" marT="6750" marB="6750" anchor="ctr">
                     <a:lnL>
                       <a:noFill/>
                     </a:lnL>
@@ -15895,7 +15895,7 @@
                       </a:r>
                     </a:p>
                   </a:txBody>
-                  <a:tcPr marL="81005" marR="6750" marT="6750" marB="0" anchor="ctr">
+                  <a:tcPr marL="81005" marR="6750" marT="6750" marB="6750" anchor="ctr">
                     <a:lnL>
                       <a:noFill/>
                     </a:lnL>
@@ -15951,7 +15951,7 @@
                       </a:r>
                     </a:p>
                   </a:txBody>
-                  <a:tcPr marL="81005" marR="6750" marT="6750" marB="0" anchor="ctr">
+                  <a:tcPr marL="81005" marR="6750" marT="6750" marB="6750" anchor="ctr">
                     <a:lnL>
                       <a:noFill/>
                     </a:lnL>
@@ -16009,7 +16009,7 @@
                       </a:r>
                     </a:p>
                   </a:txBody>
-                  <a:tcPr marL="81005" marR="6750" marT="6750" marB="0" anchor="ctr">
+                  <a:tcPr marL="81005" marR="6750" marT="6750" marB="6750" anchor="ctr">
                     <a:lnL>
                       <a:noFill/>
                     </a:lnL>
@@ -16063,7 +16063,7 @@
                       </a:r>
                     </a:p>
                   </a:txBody>
-                  <a:tcPr marL="81005" marR="6750" marT="6750" marB="0" anchor="ctr">
+                  <a:tcPr marL="81005" marR="6750" marT="6750" marB="6750" anchor="ctr">
                     <a:lnL>
                       <a:noFill/>
                     </a:lnL>
@@ -16119,7 +16119,7 @@
                       </a:r>
                     </a:p>
                   </a:txBody>
-                  <a:tcPr marL="81005" marR="6750" marT="6750" marB="0" anchor="ctr">
+                  <a:tcPr marL="81005" marR="6750" marT="6750" marB="6750" anchor="ctr">
                     <a:lnL>
                       <a:noFill/>
                     </a:lnL>
@@ -16177,7 +16177,7 @@
                       </a:r>
                     </a:p>
                   </a:txBody>
-                  <a:tcPr marL="81005" marR="6750" marT="6750" marB="0" anchor="ctr">
+                  <a:tcPr marL="81005" marR="6750" marT="6750" marB="6750" anchor="ctr">
                     <a:lnL>
                       <a:noFill/>
                     </a:lnL>
@@ -16231,7 +16231,7 @@
                       </a:r>
                     </a:p>
                   </a:txBody>
-                  <a:tcPr marL="81005" marR="6750" marT="6750" marB="0" anchor="ctr">
+                  <a:tcPr marL="81005" marR="6750" marT="6750" marB="6750" anchor="ctr">
                     <a:lnL>
                       <a:noFill/>
                     </a:lnL>
@@ -16287,7 +16287,7 @@
                       </a:r>
                     </a:p>
                   </a:txBody>
-                  <a:tcPr marL="81005" marR="6750" marT="6750" marB="0" anchor="ctr">
+                  <a:tcPr marL="81005" marR="6750" marT="6750" marB="6750" anchor="ctr">
                     <a:lnL>
                       <a:noFill/>
                     </a:lnL>
@@ -16525,7 +16525,7 @@
                 <a:latin typeface="맑은 고딕"/>
                 <a:ea typeface="맑은 고딕"/>
               </a:rPr>
-              <a:t>두 가지 멈춤</a:t>
+              <a:t>2가지 멈춤</a:t>
             </a:r>
           </a:p>
         </p:txBody>
@@ -17288,7 +17288,7 @@
                 <a:latin typeface="맑은 고딕"/>
                 <a:ea typeface="맑은 고딕"/>
               </a:rPr>
-              <a:t> 둔다. 매번 묻는 것은 사람의 주의를 쓰는 것이다.</a:t>
+              <a:t> 둔다. 매번 묻는 것은 사람의 주의를 소모한다.</a:t>
             </a:r>
           </a:p>
         </p:txBody>
@@ -18393,7 +18393,7 @@
                 <a:latin typeface="맑은 고딕"/>
                 <a:ea typeface="맑은 고딕"/>
               </a:rPr>
-              <a:t> 아래 지시문을 그대로 쓴다.</a:t>
+              <a:t> 아래 지시문을 그대로 사용한다.</a:t>
             </a:r>
           </a:p>
           <a:p>
@@ -21400,7 +21400,7 @@
                 <a:latin typeface="맑은 고딕"/>
                 <a:ea typeface="맑은 고딕"/>
               </a:rPr>
-              <a:t> 썼다 —</a:t>
+              <a:t> 사용했다 —</a:t>
             </a:r>
             <a:r>
               <a:rPr sz="1600" b="0">
@@ -21774,7 +21774,7 @@
                       </a:r>
                     </a:p>
                   </a:txBody>
-                  <a:tcPr marL="6750" marR="6750" marT="6750" marB="0" anchor="ctr">
+                  <a:tcPr marL="6750" marR="6750" marT="6750" marB="6750" anchor="ctr">
                     <a:lnL>
                       <a:noFill/>
                     </a:lnL>
@@ -21836,7 +21836,7 @@
                       </a:r>
                     </a:p>
                   </a:txBody>
-                  <a:tcPr marL="6750" marR="6750" marT="6750" marB="0" anchor="ctr">
+                  <a:tcPr marL="6750" marR="6750" marT="6750" marB="6750" anchor="ctr">
                     <a:lnL w="9525" cap="flat" cmpd="sng" algn="ctr">
                       <a:solidFill>
                         <a:schemeClr val="bg1">
@@ -21906,7 +21906,7 @@
                       </a:r>
                     </a:p>
                   </a:txBody>
-                  <a:tcPr marL="6750" marR="6750" marT="6750" marB="0" anchor="ctr">
+                  <a:tcPr marL="6750" marR="6750" marT="6750" marB="6750" anchor="ctr">
                     <a:lnL w="9525" cap="flat" cmpd="sng" algn="ctr">
                       <a:solidFill>
                         <a:schemeClr val="bg1">
@@ -21978,7 +21978,7 @@
                       </a:r>
                     </a:p>
                   </a:txBody>
-                  <a:tcPr marL="81005" marR="6750" marT="6750" marB="0" anchor="ctr">
+                  <a:tcPr marL="81005" marR="6750" marT="6750" marB="6750" anchor="ctr">
                     <a:lnL>
                       <a:noFill/>
                     </a:lnL>
@@ -22032,7 +22032,7 @@
                       </a:r>
                     </a:p>
                   </a:txBody>
-                  <a:tcPr marL="81005" marR="6750" marT="6750" marB="0" anchor="ctr">
+                  <a:tcPr marL="81005" marR="6750" marT="6750" marB="6750" anchor="ctr">
                     <a:lnL>
                       <a:noFill/>
                     </a:lnL>
@@ -22088,7 +22088,7 @@
                       </a:r>
                     </a:p>
                   </a:txBody>
-                  <a:tcPr marL="81005" marR="6750" marT="6750" marB="0" anchor="ctr">
+                  <a:tcPr marL="81005" marR="6750" marT="6750" marB="6750" anchor="ctr">
                     <a:lnL>
                       <a:noFill/>
                     </a:lnL>
@@ -22146,7 +22146,7 @@
                       </a:r>
                     </a:p>
                   </a:txBody>
-                  <a:tcPr marL="81005" marR="6750" marT="6750" marB="0" anchor="ctr">
+                  <a:tcPr marL="81005" marR="6750" marT="6750" marB="6750" anchor="ctr">
                     <a:lnL>
                       <a:noFill/>
                     </a:lnL>
@@ -22200,7 +22200,7 @@
                       </a:r>
                     </a:p>
                   </a:txBody>
-                  <a:tcPr marL="81005" marR="6750" marT="6750" marB="0" anchor="ctr">
+                  <a:tcPr marL="81005" marR="6750" marT="6750" marB="6750" anchor="ctr">
                     <a:lnL>
                       <a:noFill/>
                     </a:lnL>
@@ -22256,7 +22256,7 @@
                       </a:r>
                     </a:p>
                   </a:txBody>
-                  <a:tcPr marL="81005" marR="6750" marT="6750" marB="0" anchor="ctr">
+                  <a:tcPr marL="81005" marR="6750" marT="6750" marB="6750" anchor="ctr">
                     <a:lnL>
                       <a:noFill/>
                     </a:lnL>
@@ -22314,7 +22314,7 @@
                       </a:r>
                     </a:p>
                   </a:txBody>
-                  <a:tcPr marL="81005" marR="6750" marT="6750" marB="0" anchor="ctr">
+                  <a:tcPr marL="81005" marR="6750" marT="6750" marB="6750" anchor="ctr">
                     <a:lnL>
                       <a:noFill/>
                     </a:lnL>
@@ -22368,7 +22368,7 @@
                       </a:r>
                     </a:p>
                   </a:txBody>
-                  <a:tcPr marL="81005" marR="6750" marT="6750" marB="0" anchor="ctr">
+                  <a:tcPr marL="81005" marR="6750" marT="6750" marB="6750" anchor="ctr">
                     <a:lnL>
                       <a:noFill/>
                     </a:lnL>
@@ -22424,7 +22424,7 @@
                       </a:r>
                     </a:p>
                   </a:txBody>
-                  <a:tcPr marL="81005" marR="6750" marT="6750" marB="0" anchor="ctr">
+                  <a:tcPr marL="81005" marR="6750" marT="6750" marB="6750" anchor="ctr">
                     <a:lnL>
                       <a:noFill/>
                     </a:lnL>
@@ -22482,7 +22482,7 @@
                       </a:r>
                     </a:p>
                   </a:txBody>
-                  <a:tcPr marL="81005" marR="6750" marT="6750" marB="0" anchor="ctr">
+                  <a:tcPr marL="81005" marR="6750" marT="6750" marB="6750" anchor="ctr">
                     <a:lnL>
                       <a:noFill/>
                     </a:lnL>
@@ -22536,7 +22536,7 @@
                       </a:r>
                     </a:p>
                   </a:txBody>
-                  <a:tcPr marL="81005" marR="6750" marT="6750" marB="0" anchor="ctr">
+                  <a:tcPr marL="81005" marR="6750" marT="6750" marB="6750" anchor="ctr">
                     <a:lnL>
                       <a:noFill/>
                     </a:lnL>
@@ -22592,7 +22592,7 @@
                       </a:r>
                     </a:p>
                   </a:txBody>
-                  <a:tcPr marL="81005" marR="6750" marT="6750" marB="0" anchor="ctr">
+                  <a:tcPr marL="81005" marR="6750" marT="6750" marB="6750" anchor="ctr">
                     <a:lnL>
                       <a:noFill/>
                     </a:lnL>
@@ -23011,7 +23011,7 @@
                 <a:latin typeface="맑은 고딕"/>
                 <a:ea typeface="맑은 고딕"/>
               </a:rPr>
-              <a:t>네 줄</a:t>
+              <a:t>4줄</a:t>
             </a:r>
             <a:r>
               <a:rPr sz="1800" b="0">
@@ -23091,7 +23091,7 @@
                 <a:latin typeface="맑은 고딕"/>
                 <a:ea typeface="맑은 고딕"/>
               </a:rPr>
-              <a:t>네 가지를 정한다</a:t>
+              <a:t>4가지를 정한다</a:t>
             </a:r>
           </a:p>
           <a:p>
@@ -23309,7 +23309,7 @@
                 <a:latin typeface="맑은 고딕"/>
                 <a:ea typeface="맑은 고딕"/>
               </a:rPr>
-              <a:t>네 가지 중 </a:t>
+              <a:t>4가지 중 </a:t>
             </a:r>
             <a:r>
               <a:rPr sz="1800" b="1">
@@ -23415,7 +23415,7 @@
                 <a:latin typeface="맑은 고딕"/>
                 <a:ea typeface="맑은 고딕"/>
               </a:rPr>
-              <a:t>계약은 과제마다 새로 쓰는 것이 아니다. </a:t>
+              <a:t>계약은 과제마다 새로 작성하는 것이 아니다. </a:t>
             </a:r>
             <a:r>
               <a:rPr sz="1800" b="1">
@@ -23477,7 +23477,7 @@
                 <a:latin typeface="맑은 고딕"/>
                 <a:ea typeface="맑은 고딕"/>
               </a:rPr>
-              <a:t>위임 계약의 네 가지</a:t>
+              <a:t>위임 계약의 4가지</a:t>
             </a:r>
           </a:p>
         </p:txBody>
@@ -24151,7 +24151,7 @@
                       </a:r>
                     </a:p>
                   </a:txBody>
-                  <a:tcPr marL="6750" marR="6750" marT="6750" marB="0" anchor="ctr">
+                  <a:tcPr marL="6750" marR="6750" marT="6750" marB="6750" anchor="ctr">
                     <a:lnL>
                       <a:noFill/>
                     </a:lnL>
@@ -24213,7 +24213,7 @@
                       </a:r>
                     </a:p>
                   </a:txBody>
-                  <a:tcPr marL="6750" marR="6750" marT="6750" marB="0" anchor="ctr">
+                  <a:tcPr marL="6750" marR="6750" marT="6750" marB="6750" anchor="ctr">
                     <a:lnL w="9525" cap="flat" cmpd="sng" algn="ctr">
                       <a:solidFill>
                         <a:schemeClr val="bg1">
@@ -24283,7 +24283,7 @@
                       </a:r>
                     </a:p>
                   </a:txBody>
-                  <a:tcPr marL="6750" marR="6750" marT="6750" marB="0" anchor="ctr">
+                  <a:tcPr marL="6750" marR="6750" marT="6750" marB="6750" anchor="ctr">
                     <a:lnL w="9525" cap="flat" cmpd="sng" algn="ctr">
                       <a:solidFill>
                         <a:schemeClr val="bg1">
@@ -24355,7 +24355,7 @@
                       </a:r>
                     </a:p>
                   </a:txBody>
-                  <a:tcPr marL="81005" marR="6750" marT="6750" marB="0" anchor="ctr">
+                  <a:tcPr marL="81005" marR="6750" marT="6750" marB="6750" anchor="ctr">
                     <a:lnL>
                       <a:noFill/>
                     </a:lnL>
@@ -24409,7 +24409,7 @@
                       </a:r>
                     </a:p>
                   </a:txBody>
-                  <a:tcPr marL="81005" marR="6750" marT="6750" marB="0" anchor="ctr">
+                  <a:tcPr marL="81005" marR="6750" marT="6750" marB="6750" anchor="ctr">
                     <a:lnL>
                       <a:noFill/>
                     </a:lnL>
@@ -24465,7 +24465,7 @@
                       </a:r>
                     </a:p>
                   </a:txBody>
-                  <a:tcPr marL="81005" marR="6750" marT="6750" marB="0" anchor="ctr">
+                  <a:tcPr marL="81005" marR="6750" marT="6750" marB="6750" anchor="ctr">
                     <a:lnL>
                       <a:noFill/>
                     </a:lnL>
@@ -24523,7 +24523,7 @@
                       </a:r>
                     </a:p>
                   </a:txBody>
-                  <a:tcPr marL="81005" marR="6750" marT="6750" marB="0" anchor="ctr">
+                  <a:tcPr marL="81005" marR="6750" marT="6750" marB="6750" anchor="ctr">
                     <a:lnL>
                       <a:noFill/>
                     </a:lnL>
@@ -24577,7 +24577,7 @@
                       </a:r>
                     </a:p>
                   </a:txBody>
-                  <a:tcPr marL="81005" marR="6750" marT="6750" marB="0" anchor="ctr">
+                  <a:tcPr marL="81005" marR="6750" marT="6750" marB="6750" anchor="ctr">
                     <a:lnL>
                       <a:noFill/>
                     </a:lnL>
@@ -24633,7 +24633,7 @@
                       </a:r>
                     </a:p>
                   </a:txBody>
-                  <a:tcPr marL="81005" marR="6750" marT="6750" marB="0" anchor="ctr">
+                  <a:tcPr marL="81005" marR="6750" marT="6750" marB="6750" anchor="ctr">
                     <a:lnL>
                       <a:noFill/>
                     </a:lnL>
@@ -24691,7 +24691,7 @@
                       </a:r>
                     </a:p>
                   </a:txBody>
-                  <a:tcPr marL="81005" marR="6750" marT="6750" marB="0" anchor="ctr">
+                  <a:tcPr marL="81005" marR="6750" marT="6750" marB="6750" anchor="ctr">
                     <a:lnL>
                       <a:noFill/>
                     </a:lnL>
@@ -24745,7 +24745,7 @@
                       </a:r>
                     </a:p>
                   </a:txBody>
-                  <a:tcPr marL="81005" marR="6750" marT="6750" marB="0" anchor="ctr">
+                  <a:tcPr marL="81005" marR="6750" marT="6750" marB="6750" anchor="ctr">
                     <a:lnL>
                       <a:noFill/>
                     </a:lnL>
@@ -24801,7 +24801,7 @@
                       </a:r>
                     </a:p>
                   </a:txBody>
-                  <a:tcPr marL="81005" marR="6750" marT="6750" marB="0" anchor="ctr">
+                  <a:tcPr marL="81005" marR="6750" marT="6750" marB="6750" anchor="ctr">
                     <a:lnL>
                       <a:noFill/>
                     </a:lnL>
@@ -25019,7 +25019,7 @@
                 <a:latin typeface="맑은 고딕"/>
                 <a:ea typeface="맑은 고딕"/>
               </a:rPr>
-              <a:t>권한을 잃는 세 가지 방식</a:t>
+              <a:t>권한을 잃는 3가지 방식</a:t>
             </a:r>
           </a:p>
         </p:txBody>
@@ -25124,7 +25124,7 @@
                 <a:latin typeface="맑은 고딕"/>
                 <a:ea typeface="맑은 고딕"/>
               </a:rPr>
-              <a:t> 자주 쓰는 행동을 설정으로 허용하라는 뜻이다.</a:t>
+              <a:t> 자주 사용하는 행동을 설정으로 허용하라는 뜻이다.</a:t>
             </a:r>
           </a:p>
           <a:p>
@@ -25695,7 +25695,7 @@
                 <a:latin typeface="맑은 고딕"/>
                 <a:ea typeface="맑은 고딕"/>
               </a:rPr>
-              <a:t>[앞선 질문에 대한 답] [추가 질문·수정 요청] 내가 금지한 저장소 밖 쓰기가 환경에서 실제로 거절되는지 시도해 확인해라. 그다음 범위를 넘어 만든 파일과 문서를 고친 곳이 있으면 되돌리고, 이번 위임을 실행 기록 MD 하나로 만들어라. 위임 계약 네 가지, 만든 파일 목록, 검사 출력, 거절된 행동과 멈춰 물은 질문으로 구성하고 새 결정을 추가하지 마라. 다섯 장을 넘지 않게 핵심만 남겨라.</a:t>
+              <a:t>[앞선 질문에 대한 답] [추가 질문·수정 요청] 내가 금지한 저장소 밖 쓰기가 환경에서 실제로 거절되는지 시도해 확인해라. 그다음 범위를 넘어 만든 파일과 문서를 고친 곳이 있으면 되돌리고, 이번 위임을 실행 기록 MD 하나로 만들어라. 위임 계약 4가지, 만든 파일 목록, 검사 출력, 거절된 행동과 멈춰 물은 질문으로 구성하고 새 결정을 추가하지 마라. 5장을 넘지 않게 핵심만 남겨라.</a:t>
             </a:r>
           </a:p>
           <a:p>
@@ -26373,7 +26373,7 @@
                 <a:latin typeface="맑은 고딕"/>
                 <a:ea typeface="맑은 고딕"/>
               </a:rPr>
-              <a:t> 네 가지를 적는 일이며, 하나가 비면 나머지가 무력해진다.</a:t>
+              <a:t> 4가지를 적는 일이며, 하나가 비면 나머지가 무력해진다.</a:t>
             </a:r>
           </a:p>
           <a:p>
@@ -28238,7 +28238,7 @@
                       </a:r>
                     </a:p>
                   </a:txBody>
-                  <a:tcPr marL="6750" marR="6750" marT="6750" marB="0" anchor="ctr">
+                  <a:tcPr marL="6750" marR="6750" marT="6750" marB="6750" anchor="ctr">
                     <a:lnL>
                       <a:noFill/>
                     </a:lnL>
@@ -28300,7 +28300,7 @@
                       </a:r>
                     </a:p>
                   </a:txBody>
-                  <a:tcPr marL="6750" marR="6750" marT="6750" marB="0" anchor="ctr">
+                  <a:tcPr marL="6750" marR="6750" marT="6750" marB="6750" anchor="ctr">
                     <a:lnL w="9525" cap="flat" cmpd="sng" algn="ctr">
                       <a:solidFill>
                         <a:schemeClr val="bg1">
@@ -28370,7 +28370,7 @@
                       </a:r>
                     </a:p>
                   </a:txBody>
-                  <a:tcPr marL="6750" marR="6750" marT="6750" marB="0" anchor="ctr">
+                  <a:tcPr marL="6750" marR="6750" marT="6750" marB="6750" anchor="ctr">
                     <a:lnL w="9525" cap="flat" cmpd="sng" algn="ctr">
                       <a:solidFill>
                         <a:schemeClr val="bg1">
@@ -28442,7 +28442,7 @@
                       </a:r>
                     </a:p>
                   </a:txBody>
-                  <a:tcPr marL="81005" marR="6750" marT="6750" marB="0" anchor="ctr">
+                  <a:tcPr marL="81005" marR="6750" marT="6750" marB="6750" anchor="ctr">
                     <a:lnL>
                       <a:noFill/>
                     </a:lnL>
@@ -28496,7 +28496,7 @@
                       </a:r>
                     </a:p>
                   </a:txBody>
-                  <a:tcPr marL="81005" marR="6750" marT="6750" marB="0" anchor="ctr">
+                  <a:tcPr marL="81005" marR="6750" marT="6750" marB="6750" anchor="ctr">
                     <a:lnL>
                       <a:noFill/>
                     </a:lnL>
@@ -28552,7 +28552,7 @@
                       </a:r>
                     </a:p>
                   </a:txBody>
-                  <a:tcPr marL="81005" marR="6750" marT="6750" marB="0" anchor="ctr">
+                  <a:tcPr marL="81005" marR="6750" marT="6750" marB="6750" anchor="ctr">
                     <a:lnL>
                       <a:noFill/>
                     </a:lnL>
@@ -28610,7 +28610,7 @@
                       </a:r>
                     </a:p>
                   </a:txBody>
-                  <a:tcPr marL="81005" marR="6750" marT="6750" marB="0" anchor="ctr">
+                  <a:tcPr marL="81005" marR="6750" marT="6750" marB="6750" anchor="ctr">
                     <a:lnL>
                       <a:noFill/>
                     </a:lnL>
@@ -28664,7 +28664,7 @@
                       </a:r>
                     </a:p>
                   </a:txBody>
-                  <a:tcPr marL="81005" marR="6750" marT="6750" marB="0" anchor="ctr">
+                  <a:tcPr marL="81005" marR="6750" marT="6750" marB="6750" anchor="ctr">
                     <a:lnL>
                       <a:noFill/>
                     </a:lnL>
@@ -28720,7 +28720,7 @@
                       </a:r>
                     </a:p>
                   </a:txBody>
-                  <a:tcPr marL="81005" marR="6750" marT="6750" marB="0" anchor="ctr">
+                  <a:tcPr marL="81005" marR="6750" marT="6750" marB="6750" anchor="ctr">
                     <a:lnL>
                       <a:noFill/>
                     </a:lnL>
@@ -28778,7 +28778,7 @@
                       </a:r>
                     </a:p>
                   </a:txBody>
-                  <a:tcPr marL="81005" marR="6750" marT="6750" marB="0" anchor="ctr">
+                  <a:tcPr marL="81005" marR="6750" marT="6750" marB="6750" anchor="ctr">
                     <a:lnL>
                       <a:noFill/>
                     </a:lnL>
@@ -28832,7 +28832,7 @@
                       </a:r>
                     </a:p>
                   </a:txBody>
-                  <a:tcPr marL="81005" marR="6750" marT="6750" marB="0" anchor="ctr">
+                  <a:tcPr marL="81005" marR="6750" marT="6750" marB="6750" anchor="ctr">
                     <a:lnL>
                       <a:noFill/>
                     </a:lnL>
@@ -28888,7 +28888,7 @@
                       </a:r>
                     </a:p>
                   </a:txBody>
-                  <a:tcPr marL="81005" marR="6750" marT="6750" marB="0" anchor="ctr">
+                  <a:tcPr marL="81005" marR="6750" marT="6750" marB="6750" anchor="ctr">
                     <a:lnL>
                       <a:noFill/>
                     </a:lnL>
@@ -28946,7 +28946,7 @@
                       </a:r>
                     </a:p>
                   </a:txBody>
-                  <a:tcPr marL="81005" marR="6750" marT="6750" marB="0" anchor="ctr">
+                  <a:tcPr marL="81005" marR="6750" marT="6750" marB="6750" anchor="ctr">
                     <a:lnL>
                       <a:noFill/>
                     </a:lnL>
@@ -29000,7 +29000,7 @@
                       </a:r>
                     </a:p>
                   </a:txBody>
-                  <a:tcPr marL="81005" marR="6750" marT="6750" marB="0" anchor="ctr">
+                  <a:tcPr marL="81005" marR="6750" marT="6750" marB="6750" anchor="ctr">
                     <a:lnL>
                       <a:noFill/>
                     </a:lnL>
@@ -29056,7 +29056,7 @@
                       </a:r>
                     </a:p>
                   </a:txBody>
-                  <a:tcPr marL="81005" marR="6750" marT="6750" marB="0" anchor="ctr">
+                  <a:tcPr marL="81005" marR="6750" marT="6750" marB="6750" anchor="ctr">
                     <a:lnL>
                       <a:noFill/>
                     </a:lnL>
@@ -29274,7 +29274,7 @@
                 <a:latin typeface="맑은 고딕"/>
                 <a:ea typeface="맑은 고딕"/>
               </a:rPr>
-              <a:t>첫 단위를 맡기는 데 쓰는 것</a:t>
+              <a:t>첫 단위를 맡기는 데 사용하는 것</a:t>
             </a:r>
           </a:p>
         </p:txBody>
@@ -29369,7 +29369,7 @@
                 <a:latin typeface="맑은 고딕"/>
                 <a:ea typeface="맑은 고딕"/>
               </a:rPr>
-              <a:t>네 줄이 모두 </a:t>
+              <a:t>4줄이 모두 </a:t>
             </a:r>
             <a:r>
               <a:rPr sz="1800" b="1">
@@ -30145,7 +30145,7 @@
                       </a:r>
                     </a:p>
                   </a:txBody>
-                  <a:tcPr marL="6750" marR="6750" marT="6750" marB="0" anchor="ctr">
+                  <a:tcPr marL="6750" marR="6750" marT="6750" marB="6750" anchor="ctr">
                     <a:lnL>
                       <a:noFill/>
                     </a:lnL>
@@ -30207,7 +30207,7 @@
                       </a:r>
                     </a:p>
                   </a:txBody>
-                  <a:tcPr marL="6750" marR="6750" marT="6750" marB="0" anchor="ctr">
+                  <a:tcPr marL="6750" marR="6750" marT="6750" marB="6750" anchor="ctr">
                     <a:lnL w="9525" cap="flat" cmpd="sng" algn="ctr">
                       <a:solidFill>
                         <a:schemeClr val="bg1">
@@ -30277,7 +30277,7 @@
                       </a:r>
                     </a:p>
                   </a:txBody>
-                  <a:tcPr marL="6750" marR="6750" marT="6750" marB="0" anchor="ctr">
+                  <a:tcPr marL="6750" marR="6750" marT="6750" marB="6750" anchor="ctr">
                     <a:lnL w="9525" cap="flat" cmpd="sng" algn="ctr">
                       <a:solidFill>
                         <a:schemeClr val="bg1">
@@ -30349,7 +30349,7 @@
                       </a:r>
                     </a:p>
                   </a:txBody>
-                  <a:tcPr marL="81005" marR="6750" marT="6750" marB="0" anchor="ctr">
+                  <a:tcPr marL="81005" marR="6750" marT="6750" marB="6750" anchor="ctr">
                     <a:lnL>
                       <a:noFill/>
                     </a:lnL>
@@ -30403,7 +30403,7 @@
                       </a:r>
                     </a:p>
                   </a:txBody>
-                  <a:tcPr marL="81005" marR="6750" marT="6750" marB="0" anchor="ctr">
+                  <a:tcPr marL="81005" marR="6750" marT="6750" marB="6750" anchor="ctr">
                     <a:lnL>
                       <a:noFill/>
                     </a:lnL>
@@ -30459,7 +30459,7 @@
                       </a:r>
                     </a:p>
                   </a:txBody>
-                  <a:tcPr marL="81005" marR="6750" marT="6750" marB="0" anchor="ctr">
+                  <a:tcPr marL="81005" marR="6750" marT="6750" marB="6750" anchor="ctr">
                     <a:lnL>
                       <a:noFill/>
                     </a:lnL>
@@ -30517,7 +30517,7 @@
                       </a:r>
                     </a:p>
                   </a:txBody>
-                  <a:tcPr marL="81005" marR="6750" marT="6750" marB="0" anchor="ctr">
+                  <a:tcPr marL="81005" marR="6750" marT="6750" marB="6750" anchor="ctr">
                     <a:lnL>
                       <a:noFill/>
                     </a:lnL>
@@ -30571,7 +30571,7 @@
                       </a:r>
                     </a:p>
                   </a:txBody>
-                  <a:tcPr marL="81005" marR="6750" marT="6750" marB="0" anchor="ctr">
+                  <a:tcPr marL="81005" marR="6750" marT="6750" marB="6750" anchor="ctr">
                     <a:lnL>
                       <a:noFill/>
                     </a:lnL>
@@ -30627,7 +30627,7 @@
                       </a:r>
                     </a:p>
                   </a:txBody>
-                  <a:tcPr marL="81005" marR="6750" marT="6750" marB="0" anchor="ctr">
+                  <a:tcPr marL="81005" marR="6750" marT="6750" marB="6750" anchor="ctr">
                     <a:lnL>
                       <a:noFill/>
                     </a:lnL>
@@ -30685,7 +30685,7 @@
                       </a:r>
                     </a:p>
                   </a:txBody>
-                  <a:tcPr marL="81005" marR="6750" marT="6750" marB="0" anchor="ctr">
+                  <a:tcPr marL="81005" marR="6750" marT="6750" marB="6750" anchor="ctr">
                     <a:lnL>
                       <a:noFill/>
                     </a:lnL>
@@ -30739,7 +30739,7 @@
                       </a:r>
                     </a:p>
                   </a:txBody>
-                  <a:tcPr marL="81005" marR="6750" marT="6750" marB="0" anchor="ctr">
+                  <a:tcPr marL="81005" marR="6750" marT="6750" marB="6750" anchor="ctr">
                     <a:lnL>
                       <a:noFill/>
                     </a:lnL>
@@ -30795,7 +30795,7 @@
                       </a:r>
                     </a:p>
                   </a:txBody>
-                  <a:tcPr marL="81005" marR="6750" marT="6750" marB="0" anchor="ctr">
+                  <a:tcPr marL="81005" marR="6750" marT="6750" marB="6750" anchor="ctr">
                     <a:lnL>
                       <a:noFill/>
                     </a:lnL>
@@ -30853,7 +30853,7 @@
                       </a:r>
                     </a:p>
                   </a:txBody>
-                  <a:tcPr marL="81005" marR="6750" marT="6750" marB="0" anchor="ctr">
+                  <a:tcPr marL="81005" marR="6750" marT="6750" marB="6750" anchor="ctr">
                     <a:lnL>
                       <a:noFill/>
                     </a:lnL>
@@ -30907,7 +30907,7 @@
                       </a:r>
                     </a:p>
                   </a:txBody>
-                  <a:tcPr marL="81005" marR="6750" marT="6750" marB="0" anchor="ctr">
+                  <a:tcPr marL="81005" marR="6750" marT="6750" marB="6750" anchor="ctr">
                     <a:lnL>
                       <a:noFill/>
                     </a:lnL>
@@ -30963,7 +30963,7 @@
                       </a:r>
                     </a:p>
                   </a:txBody>
-                  <a:tcPr marL="81005" marR="6750" marT="6750" marB="0" anchor="ctr">
+                  <a:tcPr marL="81005" marR="6750" marT="6750" marB="6750" anchor="ctr">
                     <a:lnL>
                       <a:noFill/>
                     </a:lnL>
@@ -31067,7 +31067,7 @@
                 <a:latin typeface="맑은 고딕"/>
                 <a:ea typeface="맑은 고딕"/>
               </a:rPr>
-              <a:t> 지시문에 옮겨 적으면 두 곳이 어긋나고, 어느 쪽이 사실인지 알 수 없게 된다.</a:t>
+              <a:t> 지시문에 옮겨 적으면 2곳이 어긋나고, 어느 쪽이 사실인지 알 수 없게 된다.</a:t>
             </a:r>
           </a:p>
         </p:txBody>
@@ -31917,7 +31917,7 @@
                 <a:latin typeface="맑은 고딕"/>
                 <a:ea typeface="맑은 고딕"/>
               </a:rPr>
-              <a:t>과 명명 규칙을 그대로 쓴다. 용어집에 없는 업무 용어를 만들지 마라.</a:t>
+              <a:t>과 명명 규칙을 그대로 사용한다. 용어집에 없는 업무 용어를 만들지 마라.</a:t>
             </a:r>
           </a:p>
           <a:p>
@@ -32564,7 +32564,7 @@
                       </a:r>
                     </a:p>
                   </a:txBody>
-                  <a:tcPr marL="6750" marR="6750" marT="6750" marB="0" anchor="ctr">
+                  <a:tcPr marL="6750" marR="6750" marT="6750" marB="6750" anchor="ctr">
                     <a:lnL>
                       <a:noFill/>
                     </a:lnL>
@@ -32626,7 +32626,7 @@
                       </a:r>
                     </a:p>
                   </a:txBody>
-                  <a:tcPr marL="6750" marR="6750" marT="6750" marB="0" anchor="ctr">
+                  <a:tcPr marL="6750" marR="6750" marT="6750" marB="6750" anchor="ctr">
                     <a:lnL w="9525" cap="flat" cmpd="sng" algn="ctr">
                       <a:solidFill>
                         <a:schemeClr val="bg1">
@@ -32696,7 +32696,7 @@
                       </a:r>
                     </a:p>
                   </a:txBody>
-                  <a:tcPr marL="6750" marR="6750" marT="6750" marB="0" anchor="ctr">
+                  <a:tcPr marL="6750" marR="6750" marT="6750" marB="6750" anchor="ctr">
                     <a:lnL w="9525" cap="flat" cmpd="sng" algn="ctr">
                       <a:solidFill>
                         <a:schemeClr val="bg1">
@@ -32768,7 +32768,7 @@
                       </a:r>
                     </a:p>
                   </a:txBody>
-                  <a:tcPr marL="81005" marR="6750" marT="6750" marB="0" anchor="ctr">
+                  <a:tcPr marL="81005" marR="6750" marT="6750" marB="6750" anchor="ctr">
                     <a:lnL>
                       <a:noFill/>
                     </a:lnL>
@@ -32822,7 +32822,7 @@
                       </a:r>
                     </a:p>
                   </a:txBody>
-                  <a:tcPr marL="81005" marR="6750" marT="6750" marB="0" anchor="ctr">
+                  <a:tcPr marL="81005" marR="6750" marT="6750" marB="6750" anchor="ctr">
                     <a:lnL>
                       <a:noFill/>
                     </a:lnL>
@@ -32878,7 +32878,7 @@
                       </a:r>
                     </a:p>
                   </a:txBody>
-                  <a:tcPr marL="81005" marR="6750" marT="6750" marB="0" anchor="ctr">
+                  <a:tcPr marL="81005" marR="6750" marT="6750" marB="6750" anchor="ctr">
                     <a:lnL>
                       <a:noFill/>
                     </a:lnL>
@@ -32936,7 +32936,7 @@
                       </a:r>
                     </a:p>
                   </a:txBody>
-                  <a:tcPr marL="81005" marR="6750" marT="6750" marB="0" anchor="ctr">
+                  <a:tcPr marL="81005" marR="6750" marT="6750" marB="6750" anchor="ctr">
                     <a:lnL>
                       <a:noFill/>
                     </a:lnL>
@@ -32990,7 +32990,7 @@
                       </a:r>
                     </a:p>
                   </a:txBody>
-                  <a:tcPr marL="81005" marR="6750" marT="6750" marB="0" anchor="ctr">
+                  <a:tcPr marL="81005" marR="6750" marT="6750" marB="6750" anchor="ctr">
                     <a:lnL>
                       <a:noFill/>
                     </a:lnL>
@@ -33046,7 +33046,7 @@
                       </a:r>
                     </a:p>
                   </a:txBody>
-                  <a:tcPr marL="81005" marR="6750" marT="6750" marB="0" anchor="ctr">
+                  <a:tcPr marL="81005" marR="6750" marT="6750" marB="6750" anchor="ctr">
                     <a:lnL>
                       <a:noFill/>
                     </a:lnL>
@@ -33104,7 +33104,7 @@
                       </a:r>
                     </a:p>
                   </a:txBody>
-                  <a:tcPr marL="81005" marR="6750" marT="6750" marB="0" anchor="ctr">
+                  <a:tcPr marL="81005" marR="6750" marT="6750" marB="6750" anchor="ctr">
                     <a:lnL>
                       <a:noFill/>
                     </a:lnL>
@@ -33158,7 +33158,7 @@
                       </a:r>
                     </a:p>
                   </a:txBody>
-                  <a:tcPr marL="81005" marR="6750" marT="6750" marB="0" anchor="ctr">
+                  <a:tcPr marL="81005" marR="6750" marT="6750" marB="6750" anchor="ctr">
                     <a:lnL>
                       <a:noFill/>
                     </a:lnL>
@@ -33214,7 +33214,7 @@
                       </a:r>
                     </a:p>
                   </a:txBody>
-                  <a:tcPr marL="81005" marR="6750" marT="6750" marB="0" anchor="ctr">
+                  <a:tcPr marL="81005" marR="6750" marT="6750" marB="6750" anchor="ctr">
                     <a:lnL>
                       <a:noFill/>
                     </a:lnL>
@@ -33272,7 +33272,7 @@
                       </a:r>
                     </a:p>
                   </a:txBody>
-                  <a:tcPr marL="81005" marR="6750" marT="6750" marB="0" anchor="ctr">
+                  <a:tcPr marL="81005" marR="6750" marT="6750" marB="6750" anchor="ctr">
                     <a:lnL>
                       <a:noFill/>
                     </a:lnL>
@@ -33326,7 +33326,7 @@
                       </a:r>
                     </a:p>
                   </a:txBody>
-                  <a:tcPr marL="81005" marR="6750" marT="6750" marB="0" anchor="ctr">
+                  <a:tcPr marL="81005" marR="6750" marT="6750" marB="6750" anchor="ctr">
                     <a:lnL>
                       <a:noFill/>
                     </a:lnL>
@@ -33382,7 +33382,7 @@
                       </a:r>
                     </a:p>
                   </a:txBody>
-                  <a:tcPr marL="81005" marR="6750" marT="6750" marB="0" anchor="ctr">
+                  <a:tcPr marL="81005" marR="6750" marT="6750" marB="6750" anchor="ctr">
                     <a:lnL>
                       <a:noFill/>
                     </a:lnL>
@@ -33440,7 +33440,7 @@
                       </a:r>
                     </a:p>
                   </a:txBody>
-                  <a:tcPr marL="81005" marR="6750" marT="6750" marB="0" anchor="ctr">
+                  <a:tcPr marL="81005" marR="6750" marT="6750" marB="6750" anchor="ctr">
                     <a:lnL>
                       <a:noFill/>
                     </a:lnL>
@@ -33494,7 +33494,7 @@
                       </a:r>
                     </a:p>
                   </a:txBody>
-                  <a:tcPr marL="81005" marR="6750" marT="6750" marB="0" anchor="ctr">
+                  <a:tcPr marL="81005" marR="6750" marT="6750" marB="6750" anchor="ctr">
                     <a:lnL>
                       <a:noFill/>
                     </a:lnL>
@@ -33550,7 +33550,7 @@
                       </a:r>
                     </a:p>
                   </a:txBody>
-                  <a:tcPr marL="81005" marR="6750" marT="6750" marB="0" anchor="ctr">
+                  <a:tcPr marL="81005" marR="6750" marT="6750" marB="6750" anchor="ctr">
                     <a:lnL>
                       <a:noFill/>
                     </a:lnL>

--- a/courses/ai-native/sessions/s08.pptx
+++ b/courses/ai-native/sessions/s08.pptx
@@ -2025,7 +2025,7 @@
             <a:pPr lvl="0"/>
             <a:r>
               <a:rPr lang="ko-KR" sz="1200"/>
-              <a:t>자율성을 올릴 조건은 "세션 02. LLM이라는 재료"의 「06. 자율성」의 「자율성의 계단」이 정했다. 여기서는 그 계단을 계약으로 적는다.</a:t>
+              <a:t>자율성을 올릴 조건은 "세션 02. LLM이라는 도구"의 「06. 자율성」의 「자율성의 계단」이 정했다. 여기서는 그 계단을 계약으로 적는다.</a:t>
             </a:r>
           </a:p>
         </p:txBody>
@@ -2944,14 +2944,14 @@
             <a:pPr lvl="0"/>
             <a:r>
               <a:rPr lang="ko-KR" sz="1200"/>
-              <a:t>맥락 창의 한계와 주의 예산은 "세션 02. LLM이라는 재료"의 「02. LLM의 성질」의 「맥락 창의 한계」가 다뤘다. 여기서는 그 한계 안에서 무엇을 고르는지를 정한다.</a:t>
+              <a:t>맥락 창의 한계와 주의 예산은 "세션 02. LLM이라는 도구"의 「02. LLM의 성질」의 「맥락 창의 한계」가 다뤘다. 여기서는 그 한계 안에서 무엇을 고르는지를 정한다.</a:t>
             </a:r>
           </a:p>
           <a:p>
             <a:pPr lvl="0"/>
             <a:r>
               <a:rPr lang="ko-KR" sz="1200"/>
-              <a:t>호출마다 맥락이 다시 들어가는 비용은 "세션 02. LLM이라는 재료"의 「03. 비용의 구조」의 「맥락은 호출마다 다시 들어간다」에 있다.</a:t>
+              <a:t>호출마다 맥락이 다시 들어가는 비용은 "세션 02. LLM이라는 도구"의 「03. 비용의 구조」의 「맥락은 호출마다 다시 들어간다」에 있다.</a:t>
             </a:r>
           </a:p>
         </p:txBody>

--- a/courses/ai-native/sessions/s08.pptx
+++ b/courses/ai-native/sessions/s08.pptx
@@ -5365,7 +5365,7 @@
         </p:nvGraphicFramePr>
         <p:xfrm>
           <a:off x="2530666" y="2274108"/>
-          <a:ext cx="4069080" cy="3873500"/>
+          <a:ext cx="4069080" cy="1440000"/>
         </p:xfrm>
         <a:graphic>
           <a:graphicData uri="http://schemas.openxmlformats.org/drawingml/2006/table">
@@ -6810,7 +6810,7 @@
         </p:nvGraphicFramePr>
         <p:xfrm>
           <a:off x="1761046" y="2112010"/>
-          <a:ext cx="5608320" cy="3873500"/>
+          <a:ext cx="5608320" cy="1440000"/>
         </p:xfrm>
         <a:graphic>
           <a:graphicData uri="http://schemas.openxmlformats.org/drawingml/2006/table">
@@ -8265,7 +8265,7 @@
         </p:nvGraphicFramePr>
         <p:xfrm>
           <a:off x="1734376" y="2112010"/>
-          <a:ext cx="5661660" cy="3873500"/>
+          <a:ext cx="5661660" cy="2880000"/>
         </p:xfrm>
         <a:graphic>
           <a:graphicData uri="http://schemas.openxmlformats.org/drawingml/2006/table">
@@ -10176,6 +10176,141 @@
                 <a:ea typeface="맑은 고딕"/>
               </a:rPr>
               <a:t>첫 단위의 허용과 금지</a:t>
+            </a:r>
+          </a:p>
+        </p:txBody>
+      </p:sp>
+      <p:sp>
+        <p:nvSpPr>
+          <p:cNvPr id="15" name="TextBox 12">
+            <a:extLst>
+              <a:ext uri="{FF2B5EF4-FFF2-40B4-BE49-F238E27FC236}">
+                <a16:creationId xmlns:a16="http://schemas.microsoft.com/office/drawing/2014/main" id="{654EDDB4-901F-3D48-A715-17D163E8A7AC}"/>
+              </a:ext>
+            </a:extLst>
+          </p:cNvPr>
+          <p:cNvSpPr txBox="1"/>
+          <p:nvPr/>
+        </p:nvSpPr>
+        <p:spPr>
+          <a:xfrm>
+            <a:off x="365760" y="5220610"/>
+            <a:ext cx="8412480" cy="1051560"/>
+          </a:xfrm>
+          <a:prstGeom prst="rect">
+            <a:avLst/>
+          </a:prstGeom>
+          <a:noFill/>
+        </p:spPr>
+        <p:txBody>
+          <a:bodyPr wrap="square">
+            <a:spAutoFit/>
+          </a:bodyPr>
+          <a:lstStyle/>
+          <a:p>
+            <a:pPr lvl="2" marL="723900" indent="-368300">
+              <a:spcBef>
+                <a:spcPts val="600"/>
+              </a:spcBef>
+              <a:spcAft>
+                <a:spcPts val="600"/>
+              </a:spcAft>
+              <a:buSzPct val="90000"/>
+              <a:buFont typeface="Wingdings" pitchFamily="2" charset="2"/>
+              <a:buChar char=""/>
+            </a:pPr>
+            <a:r>
+              <a:rPr sz="1800" b="0">
+                <a:solidFill>
+                  <a:srgbClr val="000000"/>
+                </a:solidFill>
+                <a:latin typeface="맑은 고딕"/>
+                <a:ea typeface="맑은 고딕"/>
+              </a:rPr>
+              <a:t>금지의 기준은 </a:t>
+            </a:r>
+            <a:r>
+              <a:rPr sz="1800" b="1">
+                <a:solidFill>
+                  <a:srgbClr val="000000"/>
+                </a:solidFill>
+                <a:latin typeface="맑은 고딕"/>
+                <a:ea typeface="맑은 고딕"/>
+              </a:rPr>
+              <a:t>되돌릴 수 있는가</a:t>
+            </a:r>
+            <a:r>
+              <a:rPr sz="1800" b="0">
+                <a:solidFill>
+                  <a:srgbClr val="000000"/>
+                </a:solidFill>
+                <a:latin typeface="맑은 고딕"/>
+                <a:ea typeface="맑은 고딕"/>
+              </a:rPr>
+              <a:t>와 </a:t>
+            </a:r>
+            <a:r>
+              <a:rPr sz="1800" b="1">
+                <a:solidFill>
+                  <a:srgbClr val="000000"/>
+                </a:solidFill>
+                <a:latin typeface="맑은 고딕"/>
+                <a:ea typeface="맑은 고딕"/>
+              </a:rPr>
+              <a:t>범위가 저장소를 넘는가</a:t>
+            </a:r>
+            <a:r>
+              <a:rPr sz="1800" b="0">
+                <a:solidFill>
+                  <a:srgbClr val="000000"/>
+                </a:solidFill>
+                <a:latin typeface="맑은 고딕"/>
+                <a:ea typeface="맑은 고딕"/>
+              </a:rPr>
+              <a:t>다.</a:t>
+            </a:r>
+          </a:p>
+          <a:p>
+            <a:pPr lvl="2" marL="723900" indent="-368300">
+              <a:spcBef>
+                <a:spcPts val="600"/>
+              </a:spcBef>
+              <a:spcAft>
+                <a:spcPts val="600"/>
+              </a:spcAft>
+              <a:buSzPct val="90000"/>
+              <a:buFont typeface="Wingdings" pitchFamily="2" charset="2"/>
+              <a:buChar char=""/>
+            </a:pPr>
+            <a:r>
+              <a:rPr sz="1800" b="0">
+                <a:solidFill>
+                  <a:srgbClr val="000000"/>
+                </a:solidFill>
+                <a:latin typeface="맑은 고딕"/>
+                <a:ea typeface="맑은 고딕"/>
+              </a:rPr>
+              <a:t>커밋은 허용하고 push는 막는다. </a:t>
+            </a:r>
+            <a:r>
+              <a:rPr sz="1800" b="1">
+                <a:solidFill>
+                  <a:srgbClr val="000000"/>
+                </a:solidFill>
+                <a:latin typeface="맑은 고딕"/>
+                <a:ea typeface="맑은 고딕"/>
+              </a:rPr>
+              <a:t>되돌릴 단위는 주고 공유는 사람이</a:t>
+            </a:r>
+            <a:r>
+              <a:rPr sz="1800" b="0">
+                <a:solidFill>
+                  <a:srgbClr val="000000"/>
+                </a:solidFill>
+                <a:latin typeface="맑은 고딕"/>
+                <a:ea typeface="맑은 고딕"/>
+              </a:rPr>
+              <a:t> 한다.</a:t>
             </a:r>
           </a:p>
         </p:txBody>
@@ -10407,112 +10542,6 @@
             <a:normAutofit/>
           </a:bodyPr>
           <a:lstStyle/>
-          <a:p>
-            <a:pPr lvl="2" marL="723900" indent="-368300">
-              <a:spcBef>
-                <a:spcPts val="600"/>
-              </a:spcBef>
-              <a:spcAft>
-                <a:spcPts val="600"/>
-              </a:spcAft>
-              <a:buSzPct val="90000"/>
-              <a:buFont typeface="Wingdings" pitchFamily="2" charset="2"/>
-              <a:buChar char=""/>
-            </a:pPr>
-            <a:r>
-              <a:rPr sz="1800" b="0">
-                <a:solidFill>
-                  <a:srgbClr val="000000"/>
-                </a:solidFill>
-                <a:latin typeface="맑은 고딕"/>
-                <a:ea typeface="맑은 고딕"/>
-              </a:rPr>
-              <a:t>금지의 기준은 </a:t>
-            </a:r>
-            <a:r>
-              <a:rPr sz="1800" b="1">
-                <a:solidFill>
-                  <a:srgbClr val="000000"/>
-                </a:solidFill>
-                <a:latin typeface="맑은 고딕"/>
-                <a:ea typeface="맑은 고딕"/>
-              </a:rPr>
-              <a:t>되돌릴 수 있는가</a:t>
-            </a:r>
-            <a:r>
-              <a:rPr sz="1800" b="0">
-                <a:solidFill>
-                  <a:srgbClr val="000000"/>
-                </a:solidFill>
-                <a:latin typeface="맑은 고딕"/>
-                <a:ea typeface="맑은 고딕"/>
-              </a:rPr>
-              <a:t>와 </a:t>
-            </a:r>
-            <a:r>
-              <a:rPr sz="1800" b="1">
-                <a:solidFill>
-                  <a:srgbClr val="000000"/>
-                </a:solidFill>
-                <a:latin typeface="맑은 고딕"/>
-                <a:ea typeface="맑은 고딕"/>
-              </a:rPr>
-              <a:t>범위가 저장소를 넘는가</a:t>
-            </a:r>
-            <a:r>
-              <a:rPr sz="1800" b="0">
-                <a:solidFill>
-                  <a:srgbClr val="000000"/>
-                </a:solidFill>
-                <a:latin typeface="맑은 고딕"/>
-                <a:ea typeface="맑은 고딕"/>
-              </a:rPr>
-              <a:t>다.</a:t>
-            </a:r>
-          </a:p>
-          <a:p>
-            <a:pPr lvl="2" marL="723900" indent="-368300">
-              <a:spcBef>
-                <a:spcPts val="600"/>
-              </a:spcBef>
-              <a:spcAft>
-                <a:spcPts val="600"/>
-              </a:spcAft>
-              <a:buSzPct val="90000"/>
-              <a:buFont typeface="Wingdings" pitchFamily="2" charset="2"/>
-              <a:buChar char=""/>
-            </a:pPr>
-            <a:r>
-              <a:rPr sz="1800" b="0">
-                <a:solidFill>
-                  <a:srgbClr val="000000"/>
-                </a:solidFill>
-                <a:latin typeface="맑은 고딕"/>
-                <a:ea typeface="맑은 고딕"/>
-              </a:rPr>
-              <a:t>커밋은 허용하고 push는 막는다. </a:t>
-            </a:r>
-            <a:r>
-              <a:rPr sz="1800" b="1">
-                <a:solidFill>
-                  <a:srgbClr val="000000"/>
-                </a:solidFill>
-                <a:latin typeface="맑은 고딕"/>
-                <a:ea typeface="맑은 고딕"/>
-              </a:rPr>
-              <a:t>되돌릴 단위는 주고 공유는 사람이</a:t>
-            </a:r>
-            <a:r>
-              <a:rPr sz="1800" b="0">
-                <a:solidFill>
-                  <a:srgbClr val="000000"/>
-                </a:solidFill>
-                <a:latin typeface="맑은 고딕"/>
-                <a:ea typeface="맑은 고딕"/>
-              </a:rPr>
-              <a:t> 한다.</a:t>
-            </a:r>
-          </a:p>
           <a:p>
             <a:pPr lvl="2" marL="723900" indent="-368300">
               <a:spcBef>
@@ -11414,7 +11443,7 @@
         </p:nvGraphicFramePr>
         <p:xfrm>
           <a:off x="1581976" y="2274108"/>
-          <a:ext cx="5966460" cy="3873500"/>
+          <a:ext cx="5966460" cy="1440000"/>
         </p:xfrm>
         <a:graphic>
           <a:graphicData uri="http://schemas.openxmlformats.org/drawingml/2006/table">
@@ -15267,7 +15296,7 @@
         </p:nvGraphicFramePr>
         <p:xfrm>
           <a:off x="1677226" y="2112010"/>
-          <a:ext cx="5775960" cy="3873500"/>
+          <a:ext cx="5775960" cy="1728000"/>
         </p:xfrm>
         <a:graphic>
           <a:graphicData uri="http://schemas.openxmlformats.org/drawingml/2006/table">
@@ -21740,7 +21769,7 @@
         </p:nvGraphicFramePr>
         <p:xfrm>
           <a:off x="1998536" y="1999788"/>
-          <a:ext cx="5133340" cy="3873500"/>
+          <a:ext cx="5133340" cy="1440000"/>
         </p:xfrm>
         <a:graphic>
           <a:graphicData uri="http://schemas.openxmlformats.org/drawingml/2006/table">
@@ -24117,7 +24146,7 @@
         </p:nvGraphicFramePr>
         <p:xfrm>
           <a:off x="1607376" y="2112010"/>
-          <a:ext cx="5915660" cy="3873500"/>
+          <a:ext cx="5915660" cy="1152000"/>
         </p:xfrm>
         <a:graphic>
           <a:graphicData uri="http://schemas.openxmlformats.org/drawingml/2006/table">
@@ -28204,7 +28233,7 @@
         </p:nvGraphicFramePr>
         <p:xfrm>
           <a:off x="866966" y="2112010"/>
-          <a:ext cx="7396480" cy="3873500"/>
+          <a:ext cx="7396480" cy="1440000"/>
         </p:xfrm>
         <a:graphic>
           <a:graphicData uri="http://schemas.openxmlformats.org/drawingml/2006/table">
@@ -30111,7 +30140,7 @@
         </p:nvGraphicFramePr>
         <p:xfrm>
           <a:off x="852996" y="2112010"/>
-          <a:ext cx="7424420" cy="3873500"/>
+          <a:ext cx="7424420" cy="1440000"/>
         </p:xfrm>
         <a:graphic>
           <a:graphicData uri="http://schemas.openxmlformats.org/drawingml/2006/table">
@@ -32530,7 +32559,7 @@
         </p:nvGraphicFramePr>
         <p:xfrm>
           <a:off x="1579436" y="2436206"/>
-          <a:ext cx="5971540" cy="3873500"/>
+          <a:ext cx="5971540" cy="1728000"/>
         </p:xfrm>
         <a:graphic>
           <a:graphicData uri="http://schemas.openxmlformats.org/drawingml/2006/table">
